--- a/Plataforma Libro de Clases Digital.pptx
+++ b/Plataforma Libro de Clases Digital.pptx
@@ -1,35 +1,35 @@
 
 <file path=ppt/presentation.xml><?xml version="1.0" encoding="utf-8"?>
-<p:presentation xmlns:a="http://schemas.openxmlformats.org/drawingml/2006/main" xmlns:r="http://schemas.openxmlformats.org/officeDocument/2006/relationships" xmlns:mc="http://schemas.openxmlformats.org/markup-compatibility/2006" xmlns:mv="urn:schemas-microsoft-com:mac:vml" xmlns:p="http://schemas.openxmlformats.org/presentationml/2006/main" xmlns:c="http://schemas.openxmlformats.org/drawingml/2006/chart" xmlns:dgm="http://schemas.openxmlformats.org/drawingml/2006/diagram" xmlns:o="urn:schemas-microsoft-com:office:office" xmlns:v="urn:schemas-microsoft-com:vml" xmlns:pvml="urn:schemas-microsoft-com:office:powerpoint" xmlns:com="http://schemas.openxmlformats.org/drawingml/2006/compatibility" xmlns:p14="http://schemas.microsoft.com/office/powerpoint/2010/main" xmlns:p15="http://schemas.microsoft.com/office/powerpoint/2012/main" xmlns:ahyp="http://schemas.microsoft.com/office/drawing/2018/hyperlinkcolor" autoCompressPictures="0" embedTrueTypeFonts="1" strictFirstAndLastChars="0" saveSubsetFonts="1">
+<p:presentation xmlns:a="http://schemas.openxmlformats.org/drawingml/2006/main" xmlns:r="http://schemas.openxmlformats.org/officeDocument/2006/relationships" xmlns:p="http://schemas.openxmlformats.org/presentationml/2006/main" strictFirstAndLastChars="0" embedTrueTypeFonts="1" saveSubsetFonts="1" autoCompressPictures="0">
   <p:sldMasterIdLst>
-    <p:sldMasterId id="2147483659" r:id="rId4"/>
+    <p:sldMasterId id="2147483659" r:id="rId1"/>
   </p:sldMasterIdLst>
   <p:notesMasterIdLst>
-    <p:notesMasterId r:id="rId5"/>
+    <p:notesMasterId r:id="rId10"/>
   </p:notesMasterIdLst>
   <p:sldIdLst>
-    <p:sldId id="256" r:id="rId6"/>
-    <p:sldId id="257" r:id="rId7"/>
-    <p:sldId id="258" r:id="rId8"/>
-    <p:sldId id="259" r:id="rId9"/>
-    <p:sldId id="260" r:id="rId10"/>
-    <p:sldId id="261" r:id="rId11"/>
-    <p:sldId id="262" r:id="rId12"/>
-    <p:sldId id="263" r:id="rId13"/>
+    <p:sldId id="256" r:id="rId2"/>
+    <p:sldId id="257" r:id="rId3"/>
+    <p:sldId id="258" r:id="rId4"/>
+    <p:sldId id="259" r:id="rId5"/>
+    <p:sldId id="260" r:id="rId6"/>
+    <p:sldId id="261" r:id="rId7"/>
+    <p:sldId id="262" r:id="rId8"/>
+    <p:sldId id="263" r:id="rId9"/>
   </p:sldIdLst>
-  <p:sldSz cy="6858000" cx="12192000"/>
+  <p:sldSz cx="12192000" cy="6858000"/>
   <p:notesSz cx="6858000" cy="9144000"/>
   <p:embeddedFontLst>
     <p:embeddedFont>
-      <p:font typeface="Urbanist"/>
-      <p:regular r:id="rId14"/>
-      <p:bold r:id="rId15"/>
-      <p:italic r:id="rId16"/>
-      <p:boldItalic r:id="rId17"/>
+      <p:font typeface="Urbanist" panose="020B0604020202020204" charset="0"/>
+      <p:regular r:id="rId11"/>
+      <p:bold r:id="rId12"/>
+      <p:italic r:id="rId13"/>
+      <p:boldItalic r:id="rId14"/>
     </p:embeddedFont>
   </p:embeddedFontLst>
   <p:defaultTextStyle>
-    <a:defPPr lvl="0" marR="0" rtl="0" algn="l">
+    <a:defPPr marR="0" lvl="0" algn="l" rtl="0">
       <a:lnSpc>
         <a:spcPct val="100000"/>
       </a:lnSpc>
@@ -40,7 +40,7 @@
         <a:spcPts val="0"/>
       </a:spcAft>
     </a:defPPr>
-    <a:lvl1pPr lvl="0" marR="0" rtl="0" algn="l">
+    <a:lvl1pPr marR="0" lvl="0" algn="l" rtl="0">
       <a:lnSpc>
         <a:spcPct val="100000"/>
       </a:lnSpc>
@@ -54,7 +54,7 @@
         <a:srgbClr val="000000"/>
       </a:buClr>
       <a:buFont typeface="Arial"/>
-      <a:defRPr b="0" i="0" sz="1400" u="none" cap="none" strike="noStrike">
+      <a:defRPr sz="1400" b="0" i="0" u="none" strike="noStrike" cap="none">
         <a:solidFill>
           <a:srgbClr val="000000"/>
         </a:solidFill>
@@ -64,7 +64,7 @@
         <a:sym typeface="Arial"/>
       </a:defRPr>
     </a:lvl1pPr>
-    <a:lvl2pPr lvl="1" marR="0" rtl="0" algn="l">
+    <a:lvl2pPr marR="0" lvl="1" algn="l" rtl="0">
       <a:lnSpc>
         <a:spcPct val="100000"/>
       </a:lnSpc>
@@ -78,7 +78,7 @@
         <a:srgbClr val="000000"/>
       </a:buClr>
       <a:buFont typeface="Arial"/>
-      <a:defRPr b="0" i="0" sz="1400" u="none" cap="none" strike="noStrike">
+      <a:defRPr sz="1400" b="0" i="0" u="none" strike="noStrike" cap="none">
         <a:solidFill>
           <a:srgbClr val="000000"/>
         </a:solidFill>
@@ -88,7 +88,7 @@
         <a:sym typeface="Arial"/>
       </a:defRPr>
     </a:lvl2pPr>
-    <a:lvl3pPr lvl="2" marR="0" rtl="0" algn="l">
+    <a:lvl3pPr marR="0" lvl="2" algn="l" rtl="0">
       <a:lnSpc>
         <a:spcPct val="100000"/>
       </a:lnSpc>
@@ -102,7 +102,7 @@
         <a:srgbClr val="000000"/>
       </a:buClr>
       <a:buFont typeface="Arial"/>
-      <a:defRPr b="0" i="0" sz="1400" u="none" cap="none" strike="noStrike">
+      <a:defRPr sz="1400" b="0" i="0" u="none" strike="noStrike" cap="none">
         <a:solidFill>
           <a:srgbClr val="000000"/>
         </a:solidFill>
@@ -112,7 +112,7 @@
         <a:sym typeface="Arial"/>
       </a:defRPr>
     </a:lvl3pPr>
-    <a:lvl4pPr lvl="3" marR="0" rtl="0" algn="l">
+    <a:lvl4pPr marR="0" lvl="3" algn="l" rtl="0">
       <a:lnSpc>
         <a:spcPct val="100000"/>
       </a:lnSpc>
@@ -126,7 +126,7 @@
         <a:srgbClr val="000000"/>
       </a:buClr>
       <a:buFont typeface="Arial"/>
-      <a:defRPr b="0" i="0" sz="1400" u="none" cap="none" strike="noStrike">
+      <a:defRPr sz="1400" b="0" i="0" u="none" strike="noStrike" cap="none">
         <a:solidFill>
           <a:srgbClr val="000000"/>
         </a:solidFill>
@@ -136,7 +136,7 @@
         <a:sym typeface="Arial"/>
       </a:defRPr>
     </a:lvl4pPr>
-    <a:lvl5pPr lvl="4" marR="0" rtl="0" algn="l">
+    <a:lvl5pPr marR="0" lvl="4" algn="l" rtl="0">
       <a:lnSpc>
         <a:spcPct val="100000"/>
       </a:lnSpc>
@@ -150,7 +150,7 @@
         <a:srgbClr val="000000"/>
       </a:buClr>
       <a:buFont typeface="Arial"/>
-      <a:defRPr b="0" i="0" sz="1400" u="none" cap="none" strike="noStrike">
+      <a:defRPr sz="1400" b="0" i="0" u="none" strike="noStrike" cap="none">
         <a:solidFill>
           <a:srgbClr val="000000"/>
         </a:solidFill>
@@ -160,7 +160,7 @@
         <a:sym typeface="Arial"/>
       </a:defRPr>
     </a:lvl5pPr>
-    <a:lvl6pPr lvl="5" marR="0" rtl="0" algn="l">
+    <a:lvl6pPr marR="0" lvl="5" algn="l" rtl="0">
       <a:lnSpc>
         <a:spcPct val="100000"/>
       </a:lnSpc>
@@ -174,7 +174,7 @@
         <a:srgbClr val="000000"/>
       </a:buClr>
       <a:buFont typeface="Arial"/>
-      <a:defRPr b="0" i="0" sz="1400" u="none" cap="none" strike="noStrike">
+      <a:defRPr sz="1400" b="0" i="0" u="none" strike="noStrike" cap="none">
         <a:solidFill>
           <a:srgbClr val="000000"/>
         </a:solidFill>
@@ -184,7 +184,7 @@
         <a:sym typeface="Arial"/>
       </a:defRPr>
     </a:lvl6pPr>
-    <a:lvl7pPr lvl="6" marR="0" rtl="0" algn="l">
+    <a:lvl7pPr marR="0" lvl="6" algn="l" rtl="0">
       <a:lnSpc>
         <a:spcPct val="100000"/>
       </a:lnSpc>
@@ -198,7 +198,7 @@
         <a:srgbClr val="000000"/>
       </a:buClr>
       <a:buFont typeface="Arial"/>
-      <a:defRPr b="0" i="0" sz="1400" u="none" cap="none" strike="noStrike">
+      <a:defRPr sz="1400" b="0" i="0" u="none" strike="noStrike" cap="none">
         <a:solidFill>
           <a:srgbClr val="000000"/>
         </a:solidFill>
@@ -208,7 +208,7 @@
         <a:sym typeface="Arial"/>
       </a:defRPr>
     </a:lvl7pPr>
-    <a:lvl8pPr lvl="7" marR="0" rtl="0" algn="l">
+    <a:lvl8pPr marR="0" lvl="7" algn="l" rtl="0">
       <a:lnSpc>
         <a:spcPct val="100000"/>
       </a:lnSpc>
@@ -222,7 +222,7 @@
         <a:srgbClr val="000000"/>
       </a:buClr>
       <a:buFont typeface="Arial"/>
-      <a:defRPr b="0" i="0" sz="1400" u="none" cap="none" strike="noStrike">
+      <a:defRPr sz="1400" b="0" i="0" u="none" strike="noStrike" cap="none">
         <a:solidFill>
           <a:srgbClr val="000000"/>
         </a:solidFill>
@@ -232,7 +232,7 @@
         <a:sym typeface="Arial"/>
       </a:defRPr>
     </a:lvl8pPr>
-    <a:lvl9pPr lvl="8" marR="0" rtl="0" algn="l">
+    <a:lvl9pPr marR="0" lvl="8" algn="l" rtl="0">
       <a:lnSpc>
         <a:spcPct val="100000"/>
       </a:lnSpc>
@@ -246,7 +246,7 @@
         <a:srgbClr val="000000"/>
       </a:buClr>
       <a:buFont typeface="Arial"/>
-      <a:defRPr b="0" i="0" sz="1400" u="none" cap="none" strike="noStrike">
+      <a:defRPr sz="1400" b="0" i="0" u="none" strike="noStrike" cap="none">
         <a:solidFill>
           <a:srgbClr val="000000"/>
         </a:solidFill>
@@ -259,7 +259,7 @@
   </p:defaultTextStyle>
   <p:extLst>
     <p:ext uri="{EFAFB233-063F-42B5-8137-9DF3F51BA10A}">
-      <p15:sldGuideLst>
+      <p15:sldGuideLst xmlns:p15="http://schemas.microsoft.com/office/powerpoint/2012/main">
         <p15:guide id="1" orient="horz" pos="2160">
           <p15:clr>
             <a:srgbClr val="000000"/>
@@ -277,11 +277,16 @@
 </file>
 
 <file path=ppt/notesMasters/notesMaster1.xml><?xml version="1.0" encoding="utf-8"?>
-<p:notesMaster xmlns:a="http://schemas.openxmlformats.org/drawingml/2006/main" xmlns:r="http://schemas.openxmlformats.org/officeDocument/2006/relationships" xmlns:mc="http://schemas.openxmlformats.org/markup-compatibility/2006" xmlns:mv="urn:schemas-microsoft-com:mac:vml" xmlns:p="http://schemas.openxmlformats.org/presentationml/2006/main" xmlns:c="http://schemas.openxmlformats.org/drawingml/2006/chart" xmlns:dgm="http://schemas.openxmlformats.org/drawingml/2006/diagram" xmlns:o="urn:schemas-microsoft-com:office:office" xmlns:v="urn:schemas-microsoft-com:vml" xmlns:pvml="urn:schemas-microsoft-com:office:powerpoint" xmlns:com="http://schemas.openxmlformats.org/drawingml/2006/compatibility" xmlns:p14="http://schemas.microsoft.com/office/powerpoint/2010/main" xmlns:p15="http://schemas.microsoft.com/office/powerpoint/2012/main" xmlns:ahyp="http://schemas.microsoft.com/office/drawing/2018/hyperlinkcolor">
+<p:notesMaster xmlns:a="http://schemas.openxmlformats.org/drawingml/2006/main" xmlns:r="http://schemas.openxmlformats.org/officeDocument/2006/relationships" xmlns:p="http://schemas.openxmlformats.org/presentationml/2006/main">
   <p:cSld>
+    <p:bg>
+      <p:bgRef idx="1001">
+        <a:schemeClr val="bg1"/>
+      </p:bgRef>
+    </p:bg>
     <p:spTree>
       <p:nvGrpSpPr>
-        <p:cNvPr id="2" name="Shape 2"/>
+        <p:cNvPr id="1" name="Shape 2"/>
         <p:cNvGrpSpPr/>
         <p:nvPr/>
       </p:nvGrpSpPr>
@@ -296,9 +301,11 @@
       <p:sp>
         <p:nvSpPr>
           <p:cNvPr id="3" name="Google Shape;3;n"/>
-          <p:cNvSpPr/>
+          <p:cNvSpPr>
+            <a:spLocks noGrp="1" noRot="1" noChangeAspect="1"/>
+          </p:cNvSpPr>
           <p:nvPr>
-            <p:ph idx="2" type="sldImg"/>
+            <p:ph type="sldImg" idx="2"/>
           </p:nvPr>
         </p:nvSpPr>
         <p:spPr>
@@ -307,9 +314,13 @@
             <a:ext cx="4572225" cy="3429000"/>
           </a:xfrm>
           <a:custGeom>
-            <a:rect b="b" l="l" r="r" t="t"/>
+            <a:avLst/>
+            <a:gdLst/>
+            <a:ahLst/>
+            <a:cxnLst/>
+            <a:rect l="l" t="t" r="r" b="b"/>
             <a:pathLst>
-              <a:path extrusionOk="0" h="120000" w="120000">
+              <a:path w="120000" h="120000" extrusionOk="0">
                 <a:moveTo>
                   <a:pt x="0" y="0"/>
                 </a:moveTo>
@@ -327,23 +338,25 @@
             </a:pathLst>
           </a:custGeom>
           <a:noFill/>
-          <a:ln cap="flat" cmpd="sng" w="9525">
+          <a:ln w="9525" cap="flat" cmpd="sng">
             <a:solidFill>
               <a:srgbClr val="000000"/>
             </a:solidFill>
             <a:prstDash val="solid"/>
             <a:round/>
-            <a:headEnd len="sm" w="sm" type="none"/>
-            <a:tailEnd len="sm" w="sm" type="none"/>
+            <a:headEnd type="none" w="sm" len="sm"/>
+            <a:tailEnd type="none" w="sm" len="sm"/>
           </a:ln>
         </p:spPr>
       </p:sp>
       <p:sp>
         <p:nvSpPr>
           <p:cNvPr id="4" name="Google Shape;4;n"/>
-          <p:cNvSpPr txBox="1"/>
+          <p:cNvSpPr txBox="1">
+            <a:spLocks noGrp="1"/>
+          </p:cNvSpPr>
           <p:nvPr>
-            <p:ph idx="1" type="body"/>
+            <p:ph type="body" idx="1"/>
           </p:nvPr>
         </p:nvSpPr>
         <p:spPr>
@@ -360,11 +373,11 @@
           </a:ln>
         </p:spPr>
         <p:txBody>
-          <a:bodyPr anchorCtr="0" anchor="t" bIns="91425" lIns="91425" spcFirstLastPara="1" rIns="91425" wrap="square" tIns="91425">
+          <a:bodyPr spcFirstLastPara="1" wrap="square" lIns="91425" tIns="91425" rIns="91425" bIns="91425" anchor="t" anchorCtr="0">
             <a:noAutofit/>
           </a:bodyPr>
           <a:lstStyle>
-            <a:lvl1pPr indent="-298450" lvl="0" marL="457200">
+            <a:lvl1pPr marL="457200" lvl="0" indent="-298450">
               <a:spcBef>
                 <a:spcPts val="0"/>
               </a:spcBef>
@@ -375,7 +388,7 @@
               <a:buChar char="●"/>
               <a:defRPr sz="1100"/>
             </a:lvl1pPr>
-            <a:lvl2pPr indent="-298450" lvl="1" marL="914400">
+            <a:lvl2pPr marL="914400" lvl="1" indent="-298450">
               <a:spcBef>
                 <a:spcPts val="0"/>
               </a:spcBef>
@@ -386,7 +399,7 @@
               <a:buChar char="○"/>
               <a:defRPr sz="1100"/>
             </a:lvl2pPr>
-            <a:lvl3pPr indent="-298450" lvl="2" marL="1371600">
+            <a:lvl3pPr marL="1371600" lvl="2" indent="-298450">
               <a:spcBef>
                 <a:spcPts val="0"/>
               </a:spcBef>
@@ -397,7 +410,7 @@
               <a:buChar char="■"/>
               <a:defRPr sz="1100"/>
             </a:lvl3pPr>
-            <a:lvl4pPr indent="-298450" lvl="3" marL="1828800">
+            <a:lvl4pPr marL="1828800" lvl="3" indent="-298450">
               <a:spcBef>
                 <a:spcPts val="0"/>
               </a:spcBef>
@@ -408,7 +421,7 @@
               <a:buChar char="●"/>
               <a:defRPr sz="1100"/>
             </a:lvl4pPr>
-            <a:lvl5pPr indent="-298450" lvl="4" marL="2286000">
+            <a:lvl5pPr marL="2286000" lvl="4" indent="-298450">
               <a:spcBef>
                 <a:spcPts val="0"/>
               </a:spcBef>
@@ -419,7 +432,7 @@
               <a:buChar char="○"/>
               <a:defRPr sz="1100"/>
             </a:lvl5pPr>
-            <a:lvl6pPr indent="-298450" lvl="5" marL="2743200">
+            <a:lvl6pPr marL="2743200" lvl="5" indent="-298450">
               <a:spcBef>
                 <a:spcPts val="0"/>
               </a:spcBef>
@@ -430,7 +443,7 @@
               <a:buChar char="■"/>
               <a:defRPr sz="1100"/>
             </a:lvl6pPr>
-            <a:lvl7pPr indent="-298450" lvl="6" marL="3200400">
+            <a:lvl7pPr marL="3200400" lvl="6" indent="-298450">
               <a:spcBef>
                 <a:spcPts val="0"/>
               </a:spcBef>
@@ -441,7 +454,7 @@
               <a:buChar char="●"/>
               <a:defRPr sz="1100"/>
             </a:lvl7pPr>
-            <a:lvl8pPr indent="-298450" lvl="7" marL="3657600">
+            <a:lvl8pPr marL="3657600" lvl="7" indent="-298450">
               <a:spcBef>
                 <a:spcPts val="0"/>
               </a:spcBef>
@@ -452,7 +465,7 @@
               <a:buChar char="○"/>
               <a:defRPr sz="1100"/>
             </a:lvl8pPr>
-            <a:lvl9pPr indent="-298450" lvl="8" marL="4114800">
+            <a:lvl9pPr marL="4114800" lvl="8" indent="-298450">
               <a:spcBef>
                 <a:spcPts val="0"/>
               </a:spcBef>
@@ -464,14 +477,16 @@
               <a:defRPr sz="1100"/>
             </a:lvl9pPr>
           </a:lstStyle>
-          <a:p/>
+          <a:p>
+            <a:endParaRPr/>
+          </a:p>
         </p:txBody>
       </p:sp>
     </p:spTree>
   </p:cSld>
-  <p:clrMap accent1="accent1" accent2="accent2" accent3="accent3" accent4="accent4" accent5="accent5" accent6="accent6" bg1="lt1" bg2="dk2" tx1="dk1" tx2="lt2" folHlink="folHlink" hlink="hlink"/>
+  <p:clrMap bg1="lt1" tx1="dk1" bg2="dk2" tx2="lt2" accent1="accent1" accent2="accent2" accent3="accent3" accent4="accent4" accent5="accent5" accent6="accent6" hlink="hlink" folHlink="folHlink"/>
   <p:notesStyle>
-    <a:defPPr lvl="0" marR="0" rtl="0" algn="l">
+    <a:defPPr marR="0" lvl="0" algn="l" rtl="0">
       <a:lnSpc>
         <a:spcPct val="100000"/>
       </a:lnSpc>
@@ -482,7 +497,7 @@
         <a:spcPts val="0"/>
       </a:spcAft>
     </a:defPPr>
-    <a:lvl1pPr lvl="0" marR="0" rtl="0" algn="l">
+    <a:lvl1pPr marR="0" lvl="0" algn="l" rtl="0">
       <a:lnSpc>
         <a:spcPct val="100000"/>
       </a:lnSpc>
@@ -496,7 +511,7 @@
         <a:srgbClr val="000000"/>
       </a:buClr>
       <a:buFont typeface="Arial"/>
-      <a:defRPr b="0" i="0" sz="1400" u="none" cap="none" strike="noStrike">
+      <a:defRPr sz="1400" b="0" i="0" u="none" strike="noStrike" cap="none">
         <a:solidFill>
           <a:srgbClr val="000000"/>
         </a:solidFill>
@@ -506,7 +521,7 @@
         <a:sym typeface="Arial"/>
       </a:defRPr>
     </a:lvl1pPr>
-    <a:lvl2pPr lvl="1" marR="0" rtl="0" algn="l">
+    <a:lvl2pPr marR="0" lvl="1" algn="l" rtl="0">
       <a:lnSpc>
         <a:spcPct val="100000"/>
       </a:lnSpc>
@@ -520,7 +535,7 @@
         <a:srgbClr val="000000"/>
       </a:buClr>
       <a:buFont typeface="Arial"/>
-      <a:defRPr b="0" i="0" sz="1400" u="none" cap="none" strike="noStrike">
+      <a:defRPr sz="1400" b="0" i="0" u="none" strike="noStrike" cap="none">
         <a:solidFill>
           <a:srgbClr val="000000"/>
         </a:solidFill>
@@ -530,7 +545,7 @@
         <a:sym typeface="Arial"/>
       </a:defRPr>
     </a:lvl2pPr>
-    <a:lvl3pPr lvl="2" marR="0" rtl="0" algn="l">
+    <a:lvl3pPr marR="0" lvl="2" algn="l" rtl="0">
       <a:lnSpc>
         <a:spcPct val="100000"/>
       </a:lnSpc>
@@ -544,7 +559,7 @@
         <a:srgbClr val="000000"/>
       </a:buClr>
       <a:buFont typeface="Arial"/>
-      <a:defRPr b="0" i="0" sz="1400" u="none" cap="none" strike="noStrike">
+      <a:defRPr sz="1400" b="0" i="0" u="none" strike="noStrike" cap="none">
         <a:solidFill>
           <a:srgbClr val="000000"/>
         </a:solidFill>
@@ -554,7 +569,7 @@
         <a:sym typeface="Arial"/>
       </a:defRPr>
     </a:lvl3pPr>
-    <a:lvl4pPr lvl="3" marR="0" rtl="0" algn="l">
+    <a:lvl4pPr marR="0" lvl="3" algn="l" rtl="0">
       <a:lnSpc>
         <a:spcPct val="100000"/>
       </a:lnSpc>
@@ -568,7 +583,7 @@
         <a:srgbClr val="000000"/>
       </a:buClr>
       <a:buFont typeface="Arial"/>
-      <a:defRPr b="0" i="0" sz="1400" u="none" cap="none" strike="noStrike">
+      <a:defRPr sz="1400" b="0" i="0" u="none" strike="noStrike" cap="none">
         <a:solidFill>
           <a:srgbClr val="000000"/>
         </a:solidFill>
@@ -578,7 +593,7 @@
         <a:sym typeface="Arial"/>
       </a:defRPr>
     </a:lvl4pPr>
-    <a:lvl5pPr lvl="4" marR="0" rtl="0" algn="l">
+    <a:lvl5pPr marR="0" lvl="4" algn="l" rtl="0">
       <a:lnSpc>
         <a:spcPct val="100000"/>
       </a:lnSpc>
@@ -592,7 +607,7 @@
         <a:srgbClr val="000000"/>
       </a:buClr>
       <a:buFont typeface="Arial"/>
-      <a:defRPr b="0" i="0" sz="1400" u="none" cap="none" strike="noStrike">
+      <a:defRPr sz="1400" b="0" i="0" u="none" strike="noStrike" cap="none">
         <a:solidFill>
           <a:srgbClr val="000000"/>
         </a:solidFill>
@@ -602,7 +617,7 @@
         <a:sym typeface="Arial"/>
       </a:defRPr>
     </a:lvl5pPr>
-    <a:lvl6pPr lvl="5" marR="0" rtl="0" algn="l">
+    <a:lvl6pPr marR="0" lvl="5" algn="l" rtl="0">
       <a:lnSpc>
         <a:spcPct val="100000"/>
       </a:lnSpc>
@@ -616,7 +631,7 @@
         <a:srgbClr val="000000"/>
       </a:buClr>
       <a:buFont typeface="Arial"/>
-      <a:defRPr b="0" i="0" sz="1400" u="none" cap="none" strike="noStrike">
+      <a:defRPr sz="1400" b="0" i="0" u="none" strike="noStrike" cap="none">
         <a:solidFill>
           <a:srgbClr val="000000"/>
         </a:solidFill>
@@ -626,7 +641,7 @@
         <a:sym typeface="Arial"/>
       </a:defRPr>
     </a:lvl6pPr>
-    <a:lvl7pPr lvl="6" marR="0" rtl="0" algn="l">
+    <a:lvl7pPr marR="0" lvl="6" algn="l" rtl="0">
       <a:lnSpc>
         <a:spcPct val="100000"/>
       </a:lnSpc>
@@ -640,7 +655,7 @@
         <a:srgbClr val="000000"/>
       </a:buClr>
       <a:buFont typeface="Arial"/>
-      <a:defRPr b="0" i="0" sz="1400" u="none" cap="none" strike="noStrike">
+      <a:defRPr sz="1400" b="0" i="0" u="none" strike="noStrike" cap="none">
         <a:solidFill>
           <a:srgbClr val="000000"/>
         </a:solidFill>
@@ -650,7 +665,7 @@
         <a:sym typeface="Arial"/>
       </a:defRPr>
     </a:lvl7pPr>
-    <a:lvl8pPr lvl="7" marR="0" rtl="0" algn="l">
+    <a:lvl8pPr marR="0" lvl="7" algn="l" rtl="0">
       <a:lnSpc>
         <a:spcPct val="100000"/>
       </a:lnSpc>
@@ -664,7 +679,7 @@
         <a:srgbClr val="000000"/>
       </a:buClr>
       <a:buFont typeface="Arial"/>
-      <a:defRPr b="0" i="0" sz="1400" u="none" cap="none" strike="noStrike">
+      <a:defRPr sz="1400" b="0" i="0" u="none" strike="noStrike" cap="none">
         <a:solidFill>
           <a:srgbClr val="000000"/>
         </a:solidFill>
@@ -674,7 +689,7 @@
         <a:sym typeface="Arial"/>
       </a:defRPr>
     </a:lvl8pPr>
-    <a:lvl9pPr lvl="8" marR="0" rtl="0" algn="l">
+    <a:lvl9pPr marR="0" lvl="8" algn="l" rtl="0">
       <a:lnSpc>
         <a:spcPct val="100000"/>
       </a:lnSpc>
@@ -688,7 +703,7 @@
         <a:srgbClr val="000000"/>
       </a:buClr>
       <a:buFont typeface="Arial"/>
-      <a:defRPr b="0" i="0" sz="1400" u="none" cap="none" strike="noStrike">
+      <a:defRPr sz="1400" b="0" i="0" u="none" strike="noStrike" cap="none">
         <a:solidFill>
           <a:srgbClr val="000000"/>
         </a:solidFill>
@@ -703,11 +718,11 @@
 </file>
 
 <file path=ppt/notesSlides/notesSlide1.xml><?xml version="1.0" encoding="utf-8"?>
-<p:notes xmlns:a="http://schemas.openxmlformats.org/drawingml/2006/main" xmlns:r="http://schemas.openxmlformats.org/officeDocument/2006/relationships" xmlns:mc="http://schemas.openxmlformats.org/markup-compatibility/2006" xmlns:mv="urn:schemas-microsoft-com:mac:vml" xmlns:p="http://schemas.openxmlformats.org/presentationml/2006/main" xmlns:c="http://schemas.openxmlformats.org/drawingml/2006/chart" xmlns:dgm="http://schemas.openxmlformats.org/drawingml/2006/diagram" xmlns:o="urn:schemas-microsoft-com:office:office" xmlns:v="urn:schemas-microsoft-com:vml" xmlns:pvml="urn:schemas-microsoft-com:office:powerpoint" xmlns:com="http://schemas.openxmlformats.org/drawingml/2006/compatibility" xmlns:p14="http://schemas.microsoft.com/office/powerpoint/2010/main" xmlns:p15="http://schemas.microsoft.com/office/powerpoint/2012/main" xmlns:ahyp="http://schemas.microsoft.com/office/drawing/2018/hyperlinkcolor" showMasterPhAnim="0" showMasterSp="0">
+<p:notes xmlns:a="http://schemas.openxmlformats.org/drawingml/2006/main" xmlns:r="http://schemas.openxmlformats.org/officeDocument/2006/relationships" xmlns:p="http://schemas.openxmlformats.org/presentationml/2006/main" showMasterSp="0" showMasterPhAnim="0">
   <p:cSld>
     <p:spTree>
       <p:nvGrpSpPr>
-        <p:cNvPr id="80" name="Shape 80"/>
+        <p:cNvPr id="1" name="Shape 80"/>
         <p:cNvGrpSpPr/>
         <p:nvPr/>
       </p:nvGrpSpPr>
@@ -722,9 +737,11 @@
       <p:sp>
         <p:nvSpPr>
           <p:cNvPr id="81" name="Google Shape;81;p1:notes"/>
-          <p:cNvSpPr txBox="1"/>
+          <p:cNvSpPr txBox="1">
+            <a:spLocks noGrp="1"/>
+          </p:cNvSpPr>
           <p:nvPr>
-            <p:ph idx="1" type="body"/>
+            <p:ph type="body" idx="1"/>
           </p:nvPr>
         </p:nvSpPr>
         <p:spPr>
@@ -737,12 +754,12 @@
           </a:prstGeom>
         </p:spPr>
         <p:txBody>
-          <a:bodyPr anchorCtr="0" anchor="t" bIns="91425" lIns="91425" spcFirstLastPara="1" rIns="91425" wrap="square" tIns="91425">
+          <a:bodyPr spcFirstLastPara="1" wrap="square" lIns="91425" tIns="91425" rIns="91425" bIns="91425" anchor="t" anchorCtr="0">
             <a:noAutofit/>
           </a:bodyPr>
           <a:lstStyle/>
           <a:p>
-            <a:pPr indent="0" lvl="0" marL="0" rtl="0" algn="l">
+            <a:pPr marL="0" lvl="0" indent="0" algn="l" rtl="0">
               <a:spcBef>
                 <a:spcPts val="0"/>
               </a:spcBef>
@@ -751,9 +768,6 @@
               </a:spcAft>
               <a:buNone/>
             </a:pPr>
-            <a:r>
-              <a:t/>
-            </a:r>
             <a:endParaRPr/>
           </a:p>
         </p:txBody>
@@ -761,9 +775,11 @@
       <p:sp>
         <p:nvSpPr>
           <p:cNvPr id="82" name="Google Shape;82;p1:notes"/>
-          <p:cNvSpPr/>
+          <p:cNvSpPr>
+            <a:spLocks noGrp="1" noRot="1" noChangeAspect="1"/>
+          </p:cNvSpPr>
           <p:nvPr>
-            <p:ph idx="2" type="sldImg"/>
+            <p:ph type="sldImg" idx="2"/>
           </p:nvPr>
         </p:nvSpPr>
         <p:spPr>
@@ -772,9 +788,13 @@
             <a:ext cx="4572225" cy="3429000"/>
           </a:xfrm>
           <a:custGeom>
-            <a:rect b="b" l="l" r="r" t="t"/>
+            <a:avLst/>
+            <a:gdLst/>
+            <a:ahLst/>
+            <a:cxnLst/>
+            <a:rect l="l" t="t" r="r" b="b"/>
             <a:pathLst>
-              <a:path extrusionOk="0" h="120000" w="120000">
+              <a:path w="120000" h="120000" extrusionOk="0">
                 <a:moveTo>
                   <a:pt x="0" y="0"/>
                 </a:moveTo>
@@ -802,11 +822,11 @@
 </file>
 
 <file path=ppt/notesSlides/notesSlide2.xml><?xml version="1.0" encoding="utf-8"?>
-<p:notes xmlns:a="http://schemas.openxmlformats.org/drawingml/2006/main" xmlns:r="http://schemas.openxmlformats.org/officeDocument/2006/relationships" xmlns:mc="http://schemas.openxmlformats.org/markup-compatibility/2006" xmlns:mv="urn:schemas-microsoft-com:mac:vml" xmlns:p="http://schemas.openxmlformats.org/presentationml/2006/main" xmlns:c="http://schemas.openxmlformats.org/drawingml/2006/chart" xmlns:dgm="http://schemas.openxmlformats.org/drawingml/2006/diagram" xmlns:o="urn:schemas-microsoft-com:office:office" xmlns:v="urn:schemas-microsoft-com:vml" xmlns:pvml="urn:schemas-microsoft-com:office:powerpoint" xmlns:com="http://schemas.openxmlformats.org/drawingml/2006/compatibility" xmlns:p14="http://schemas.microsoft.com/office/powerpoint/2010/main" xmlns:p15="http://schemas.microsoft.com/office/powerpoint/2012/main" xmlns:ahyp="http://schemas.microsoft.com/office/drawing/2018/hyperlinkcolor" showMasterPhAnim="0" showMasterSp="0">
+<p:notes xmlns:a="http://schemas.openxmlformats.org/drawingml/2006/main" xmlns:r="http://schemas.openxmlformats.org/officeDocument/2006/relationships" xmlns:p="http://schemas.openxmlformats.org/presentationml/2006/main" showMasterSp="0" showMasterPhAnim="0">
   <p:cSld>
     <p:spTree>
       <p:nvGrpSpPr>
-        <p:cNvPr id="90" name="Shape 90"/>
+        <p:cNvPr id="1" name="Shape 90"/>
         <p:cNvGrpSpPr/>
         <p:nvPr/>
       </p:nvGrpSpPr>
@@ -821,9 +841,11 @@
       <p:sp>
         <p:nvSpPr>
           <p:cNvPr id="91" name="Google Shape;91;p2:notes"/>
-          <p:cNvSpPr txBox="1"/>
+          <p:cNvSpPr txBox="1">
+            <a:spLocks noGrp="1"/>
+          </p:cNvSpPr>
           <p:nvPr>
-            <p:ph idx="1" type="body"/>
+            <p:ph type="body" idx="1"/>
           </p:nvPr>
         </p:nvSpPr>
         <p:spPr>
@@ -836,12 +858,12 @@
           </a:prstGeom>
         </p:spPr>
         <p:txBody>
-          <a:bodyPr anchorCtr="0" anchor="t" bIns="91425" lIns="91425" spcFirstLastPara="1" rIns="91425" wrap="square" tIns="91425">
+          <a:bodyPr spcFirstLastPara="1" wrap="square" lIns="91425" tIns="91425" rIns="91425" bIns="91425" anchor="t" anchorCtr="0">
             <a:noAutofit/>
           </a:bodyPr>
           <a:lstStyle/>
           <a:p>
-            <a:pPr indent="0" lvl="0" marL="0" rtl="0" algn="l">
+            <a:pPr marL="0" lvl="0" indent="0" algn="l" rtl="0">
               <a:spcBef>
                 <a:spcPts val="0"/>
               </a:spcBef>
@@ -850,9 +872,6 @@
               </a:spcAft>
               <a:buNone/>
             </a:pPr>
-            <a:r>
-              <a:t/>
-            </a:r>
             <a:endParaRPr/>
           </a:p>
         </p:txBody>
@@ -860,9 +879,11 @@
       <p:sp>
         <p:nvSpPr>
           <p:cNvPr id="92" name="Google Shape;92;p2:notes"/>
-          <p:cNvSpPr/>
+          <p:cNvSpPr>
+            <a:spLocks noGrp="1" noRot="1" noChangeAspect="1"/>
+          </p:cNvSpPr>
           <p:nvPr>
-            <p:ph idx="2" type="sldImg"/>
+            <p:ph type="sldImg" idx="2"/>
           </p:nvPr>
         </p:nvSpPr>
         <p:spPr>
@@ -871,9 +892,13 @@
             <a:ext cx="4572300" cy="3429000"/>
           </a:xfrm>
           <a:custGeom>
-            <a:rect b="b" l="l" r="r" t="t"/>
+            <a:avLst/>
+            <a:gdLst/>
+            <a:ahLst/>
+            <a:cxnLst/>
+            <a:rect l="l" t="t" r="r" b="b"/>
             <a:pathLst>
-              <a:path extrusionOk="0" h="120000" w="120000">
+              <a:path w="120000" h="120000" extrusionOk="0">
                 <a:moveTo>
                   <a:pt x="0" y="0"/>
                 </a:moveTo>
@@ -901,11 +926,11 @@
 </file>
 
 <file path=ppt/notesSlides/notesSlide3.xml><?xml version="1.0" encoding="utf-8"?>
-<p:notes xmlns:a="http://schemas.openxmlformats.org/drawingml/2006/main" xmlns:r="http://schemas.openxmlformats.org/officeDocument/2006/relationships" xmlns:mc="http://schemas.openxmlformats.org/markup-compatibility/2006" xmlns:mv="urn:schemas-microsoft-com:mac:vml" xmlns:p="http://schemas.openxmlformats.org/presentationml/2006/main" xmlns:c="http://schemas.openxmlformats.org/drawingml/2006/chart" xmlns:dgm="http://schemas.openxmlformats.org/drawingml/2006/diagram" xmlns:o="urn:schemas-microsoft-com:office:office" xmlns:v="urn:schemas-microsoft-com:vml" xmlns:pvml="urn:schemas-microsoft-com:office:powerpoint" xmlns:com="http://schemas.openxmlformats.org/drawingml/2006/compatibility" xmlns:p14="http://schemas.microsoft.com/office/powerpoint/2010/main" xmlns:p15="http://schemas.microsoft.com/office/powerpoint/2012/main" xmlns:ahyp="http://schemas.microsoft.com/office/drawing/2018/hyperlinkcolor" showMasterPhAnim="0" showMasterSp="0">
+<p:notes xmlns:a="http://schemas.openxmlformats.org/drawingml/2006/main" xmlns:r="http://schemas.openxmlformats.org/officeDocument/2006/relationships" xmlns:p="http://schemas.openxmlformats.org/presentationml/2006/main" showMasterSp="0" showMasterPhAnim="0">
   <p:cSld>
     <p:spTree>
       <p:nvGrpSpPr>
-        <p:cNvPr id="103" name="Shape 103"/>
+        <p:cNvPr id="1" name="Shape 103"/>
         <p:cNvGrpSpPr/>
         <p:nvPr/>
       </p:nvGrpSpPr>
@@ -920,9 +945,11 @@
       <p:sp>
         <p:nvSpPr>
           <p:cNvPr id="104" name="Google Shape;104;p3:notes"/>
-          <p:cNvSpPr txBox="1"/>
+          <p:cNvSpPr txBox="1">
+            <a:spLocks noGrp="1"/>
+          </p:cNvSpPr>
           <p:nvPr>
-            <p:ph idx="1" type="body"/>
+            <p:ph type="body" idx="1"/>
           </p:nvPr>
         </p:nvSpPr>
         <p:spPr>
@@ -935,12 +962,12 @@
           </a:prstGeom>
         </p:spPr>
         <p:txBody>
-          <a:bodyPr anchorCtr="0" anchor="t" bIns="91425" lIns="91425" spcFirstLastPara="1" rIns="91425" wrap="square" tIns="91425">
+          <a:bodyPr spcFirstLastPara="1" wrap="square" lIns="91425" tIns="91425" rIns="91425" bIns="91425" anchor="t" anchorCtr="0">
             <a:noAutofit/>
           </a:bodyPr>
           <a:lstStyle/>
           <a:p>
-            <a:pPr indent="0" lvl="0" marL="0" rtl="0" algn="l">
+            <a:pPr marL="0" lvl="0" indent="0" algn="l" rtl="0">
               <a:spcBef>
                 <a:spcPts val="0"/>
               </a:spcBef>
@@ -949,9 +976,6 @@
               </a:spcAft>
               <a:buNone/>
             </a:pPr>
-            <a:r>
-              <a:t/>
-            </a:r>
             <a:endParaRPr/>
           </a:p>
         </p:txBody>
@@ -959,9 +983,11 @@
       <p:sp>
         <p:nvSpPr>
           <p:cNvPr id="105" name="Google Shape;105;p3:notes"/>
-          <p:cNvSpPr/>
+          <p:cNvSpPr>
+            <a:spLocks noGrp="1" noRot="1" noChangeAspect="1"/>
+          </p:cNvSpPr>
           <p:nvPr>
-            <p:ph idx="2" type="sldImg"/>
+            <p:ph type="sldImg" idx="2"/>
           </p:nvPr>
         </p:nvSpPr>
         <p:spPr>
@@ -970,9 +996,13 @@
             <a:ext cx="4572225" cy="3429000"/>
           </a:xfrm>
           <a:custGeom>
-            <a:rect b="b" l="l" r="r" t="t"/>
+            <a:avLst/>
+            <a:gdLst/>
+            <a:ahLst/>
+            <a:cxnLst/>
+            <a:rect l="l" t="t" r="r" b="b"/>
             <a:pathLst>
-              <a:path extrusionOk="0" h="120000" w="120000">
+              <a:path w="120000" h="120000" extrusionOk="0">
                 <a:moveTo>
                   <a:pt x="0" y="0"/>
                 </a:moveTo>
@@ -1000,11 +1030,11 @@
 </file>
 
 <file path=ppt/notesSlides/notesSlide4.xml><?xml version="1.0" encoding="utf-8"?>
-<p:notes xmlns:a="http://schemas.openxmlformats.org/drawingml/2006/main" xmlns:r="http://schemas.openxmlformats.org/officeDocument/2006/relationships" xmlns:mc="http://schemas.openxmlformats.org/markup-compatibility/2006" xmlns:mv="urn:schemas-microsoft-com:mac:vml" xmlns:p="http://schemas.openxmlformats.org/presentationml/2006/main" xmlns:c="http://schemas.openxmlformats.org/drawingml/2006/chart" xmlns:dgm="http://schemas.openxmlformats.org/drawingml/2006/diagram" xmlns:o="urn:schemas-microsoft-com:office:office" xmlns:v="urn:schemas-microsoft-com:vml" xmlns:pvml="urn:schemas-microsoft-com:office:powerpoint" xmlns:com="http://schemas.openxmlformats.org/drawingml/2006/compatibility" xmlns:p14="http://schemas.microsoft.com/office/powerpoint/2010/main" xmlns:p15="http://schemas.microsoft.com/office/powerpoint/2012/main" xmlns:ahyp="http://schemas.microsoft.com/office/drawing/2018/hyperlinkcolor" showMasterPhAnim="0" showMasterSp="0">
+<p:notes xmlns:a="http://schemas.openxmlformats.org/drawingml/2006/main" xmlns:r="http://schemas.openxmlformats.org/officeDocument/2006/relationships" xmlns:p="http://schemas.openxmlformats.org/presentationml/2006/main" showMasterSp="0" showMasterPhAnim="0">
   <p:cSld>
     <p:spTree>
       <p:nvGrpSpPr>
-        <p:cNvPr id="124" name="Shape 124"/>
+        <p:cNvPr id="1" name="Shape 124"/>
         <p:cNvGrpSpPr/>
         <p:nvPr/>
       </p:nvGrpSpPr>
@@ -1019,9 +1049,11 @@
       <p:sp>
         <p:nvSpPr>
           <p:cNvPr id="125" name="Google Shape;125;p4:notes"/>
-          <p:cNvSpPr txBox="1"/>
+          <p:cNvSpPr txBox="1">
+            <a:spLocks noGrp="1"/>
+          </p:cNvSpPr>
           <p:nvPr>
-            <p:ph idx="1" type="body"/>
+            <p:ph type="body" idx="1"/>
           </p:nvPr>
         </p:nvSpPr>
         <p:spPr>
@@ -1034,12 +1066,12 @@
           </a:prstGeom>
         </p:spPr>
         <p:txBody>
-          <a:bodyPr anchorCtr="0" anchor="t" bIns="91425" lIns="91425" spcFirstLastPara="1" rIns="91425" wrap="square" tIns="91425">
+          <a:bodyPr spcFirstLastPara="1" wrap="square" lIns="91425" tIns="91425" rIns="91425" bIns="91425" anchor="t" anchorCtr="0">
             <a:noAutofit/>
           </a:bodyPr>
           <a:lstStyle/>
           <a:p>
-            <a:pPr indent="0" lvl="0" marL="0" rtl="0" algn="l">
+            <a:pPr marL="0" lvl="0" indent="0" algn="l" rtl="0">
               <a:spcBef>
                 <a:spcPts val="0"/>
               </a:spcBef>
@@ -1048,9 +1080,6 @@
               </a:spcAft>
               <a:buNone/>
             </a:pPr>
-            <a:r>
-              <a:t/>
-            </a:r>
             <a:endParaRPr/>
           </a:p>
         </p:txBody>
@@ -1058,9 +1087,11 @@
       <p:sp>
         <p:nvSpPr>
           <p:cNvPr id="126" name="Google Shape;126;p4:notes"/>
-          <p:cNvSpPr/>
+          <p:cNvSpPr>
+            <a:spLocks noGrp="1" noRot="1" noChangeAspect="1"/>
+          </p:cNvSpPr>
           <p:nvPr>
-            <p:ph idx="2" type="sldImg"/>
+            <p:ph type="sldImg" idx="2"/>
           </p:nvPr>
         </p:nvSpPr>
         <p:spPr>
@@ -1069,9 +1100,13 @@
             <a:ext cx="4572225" cy="3429000"/>
           </a:xfrm>
           <a:custGeom>
-            <a:rect b="b" l="l" r="r" t="t"/>
+            <a:avLst/>
+            <a:gdLst/>
+            <a:ahLst/>
+            <a:cxnLst/>
+            <a:rect l="l" t="t" r="r" b="b"/>
             <a:pathLst>
-              <a:path extrusionOk="0" h="120000" w="120000">
+              <a:path w="120000" h="120000" extrusionOk="0">
                 <a:moveTo>
                   <a:pt x="0" y="0"/>
                 </a:moveTo>
@@ -1099,11 +1134,11 @@
 </file>
 
 <file path=ppt/notesSlides/notesSlide5.xml><?xml version="1.0" encoding="utf-8"?>
-<p:notes xmlns:a="http://schemas.openxmlformats.org/drawingml/2006/main" xmlns:r="http://schemas.openxmlformats.org/officeDocument/2006/relationships" xmlns:mc="http://schemas.openxmlformats.org/markup-compatibility/2006" xmlns:mv="urn:schemas-microsoft-com:mac:vml" xmlns:p="http://schemas.openxmlformats.org/presentationml/2006/main" xmlns:c="http://schemas.openxmlformats.org/drawingml/2006/chart" xmlns:dgm="http://schemas.openxmlformats.org/drawingml/2006/diagram" xmlns:o="urn:schemas-microsoft-com:office:office" xmlns:v="urn:schemas-microsoft-com:vml" xmlns:pvml="urn:schemas-microsoft-com:office:powerpoint" xmlns:com="http://schemas.openxmlformats.org/drawingml/2006/compatibility" xmlns:p14="http://schemas.microsoft.com/office/powerpoint/2010/main" xmlns:p15="http://schemas.microsoft.com/office/powerpoint/2012/main" xmlns:ahyp="http://schemas.microsoft.com/office/drawing/2018/hyperlinkcolor" showMasterPhAnim="0" showMasterSp="0">
+<p:notes xmlns:a="http://schemas.openxmlformats.org/drawingml/2006/main" xmlns:r="http://schemas.openxmlformats.org/officeDocument/2006/relationships" xmlns:p="http://schemas.openxmlformats.org/presentationml/2006/main" showMasterSp="0" showMasterPhAnim="0">
   <p:cSld>
     <p:spTree>
       <p:nvGrpSpPr>
-        <p:cNvPr id="137" name="Shape 137"/>
+        <p:cNvPr id="1" name="Shape 137"/>
         <p:cNvGrpSpPr/>
         <p:nvPr/>
       </p:nvGrpSpPr>
@@ -1118,9 +1153,11 @@
       <p:sp>
         <p:nvSpPr>
           <p:cNvPr id="138" name="Google Shape;138;p5:notes"/>
-          <p:cNvSpPr txBox="1"/>
+          <p:cNvSpPr txBox="1">
+            <a:spLocks noGrp="1"/>
+          </p:cNvSpPr>
           <p:nvPr>
-            <p:ph idx="1" type="body"/>
+            <p:ph type="body" idx="1"/>
           </p:nvPr>
         </p:nvSpPr>
         <p:spPr>
@@ -1133,12 +1170,12 @@
           </a:prstGeom>
         </p:spPr>
         <p:txBody>
-          <a:bodyPr anchorCtr="0" anchor="t" bIns="91425" lIns="91425" spcFirstLastPara="1" rIns="91425" wrap="square" tIns="91425">
+          <a:bodyPr spcFirstLastPara="1" wrap="square" lIns="91425" tIns="91425" rIns="91425" bIns="91425" anchor="t" anchorCtr="0">
             <a:noAutofit/>
           </a:bodyPr>
           <a:lstStyle/>
           <a:p>
-            <a:pPr indent="0" lvl="0" marL="0" rtl="0" algn="l">
+            <a:pPr marL="0" lvl="0" indent="0" algn="l" rtl="0">
               <a:spcBef>
                 <a:spcPts val="0"/>
               </a:spcBef>
@@ -1147,9 +1184,6 @@
               </a:spcAft>
               <a:buNone/>
             </a:pPr>
-            <a:r>
-              <a:t/>
-            </a:r>
             <a:endParaRPr/>
           </a:p>
         </p:txBody>
@@ -1157,9 +1191,11 @@
       <p:sp>
         <p:nvSpPr>
           <p:cNvPr id="139" name="Google Shape;139;p5:notes"/>
-          <p:cNvSpPr/>
+          <p:cNvSpPr>
+            <a:spLocks noGrp="1" noRot="1" noChangeAspect="1"/>
+          </p:cNvSpPr>
           <p:nvPr>
-            <p:ph idx="2" type="sldImg"/>
+            <p:ph type="sldImg" idx="2"/>
           </p:nvPr>
         </p:nvSpPr>
         <p:spPr>
@@ -1168,9 +1204,13 @@
             <a:ext cx="4572225" cy="3429000"/>
           </a:xfrm>
           <a:custGeom>
-            <a:rect b="b" l="l" r="r" t="t"/>
+            <a:avLst/>
+            <a:gdLst/>
+            <a:ahLst/>
+            <a:cxnLst/>
+            <a:rect l="l" t="t" r="r" b="b"/>
             <a:pathLst>
-              <a:path extrusionOk="0" h="120000" w="120000">
+              <a:path w="120000" h="120000" extrusionOk="0">
                 <a:moveTo>
                   <a:pt x="0" y="0"/>
                 </a:moveTo>
@@ -1198,11 +1238,11 @@
 </file>
 
 <file path=ppt/notesSlides/notesSlide6.xml><?xml version="1.0" encoding="utf-8"?>
-<p:notes xmlns:a="http://schemas.openxmlformats.org/drawingml/2006/main" xmlns:r="http://schemas.openxmlformats.org/officeDocument/2006/relationships" xmlns:mc="http://schemas.openxmlformats.org/markup-compatibility/2006" xmlns:mv="urn:schemas-microsoft-com:mac:vml" xmlns:p="http://schemas.openxmlformats.org/presentationml/2006/main" xmlns:c="http://schemas.openxmlformats.org/drawingml/2006/chart" xmlns:dgm="http://schemas.openxmlformats.org/drawingml/2006/diagram" xmlns:o="urn:schemas-microsoft-com:office:office" xmlns:v="urn:schemas-microsoft-com:vml" xmlns:pvml="urn:schemas-microsoft-com:office:powerpoint" xmlns:com="http://schemas.openxmlformats.org/drawingml/2006/compatibility" xmlns:p14="http://schemas.microsoft.com/office/powerpoint/2010/main" xmlns:p15="http://schemas.microsoft.com/office/powerpoint/2012/main" xmlns:ahyp="http://schemas.microsoft.com/office/drawing/2018/hyperlinkcolor" showMasterPhAnim="0" showMasterSp="0">
+<p:notes xmlns:a="http://schemas.openxmlformats.org/drawingml/2006/main" xmlns:r="http://schemas.openxmlformats.org/officeDocument/2006/relationships" xmlns:p="http://schemas.openxmlformats.org/presentationml/2006/main" showMasterSp="0" showMasterPhAnim="0">
   <p:cSld>
     <p:spTree>
       <p:nvGrpSpPr>
-        <p:cNvPr id="164" name="Shape 164"/>
+        <p:cNvPr id="1" name="Shape 164"/>
         <p:cNvGrpSpPr/>
         <p:nvPr/>
       </p:nvGrpSpPr>
@@ -1217,9 +1257,11 @@
       <p:sp>
         <p:nvSpPr>
           <p:cNvPr id="165" name="Google Shape;165;p6:notes"/>
-          <p:cNvSpPr txBox="1"/>
+          <p:cNvSpPr txBox="1">
+            <a:spLocks noGrp="1"/>
+          </p:cNvSpPr>
           <p:nvPr>
-            <p:ph idx="1" type="body"/>
+            <p:ph type="body" idx="1"/>
           </p:nvPr>
         </p:nvSpPr>
         <p:spPr>
@@ -1232,12 +1274,12 @@
           </a:prstGeom>
         </p:spPr>
         <p:txBody>
-          <a:bodyPr anchorCtr="0" anchor="t" bIns="91425" lIns="91425" spcFirstLastPara="1" rIns="91425" wrap="square" tIns="91425">
+          <a:bodyPr spcFirstLastPara="1" wrap="square" lIns="91425" tIns="91425" rIns="91425" bIns="91425" anchor="t" anchorCtr="0">
             <a:noAutofit/>
           </a:bodyPr>
           <a:lstStyle/>
           <a:p>
-            <a:pPr indent="0" lvl="0" marL="0" rtl="0" algn="l">
+            <a:pPr marL="0" lvl="0" indent="0" algn="l" rtl="0">
               <a:spcBef>
                 <a:spcPts val="0"/>
               </a:spcBef>
@@ -1246,9 +1288,6 @@
               </a:spcAft>
               <a:buNone/>
             </a:pPr>
-            <a:r>
-              <a:t/>
-            </a:r>
             <a:endParaRPr/>
           </a:p>
         </p:txBody>
@@ -1256,20 +1295,26 @@
       <p:sp>
         <p:nvSpPr>
           <p:cNvPr id="166" name="Google Shape;166;p6:notes"/>
-          <p:cNvSpPr/>
+          <p:cNvSpPr>
+            <a:spLocks noGrp="1" noRot="1" noChangeAspect="1"/>
+          </p:cNvSpPr>
           <p:nvPr>
-            <p:ph idx="2" type="sldImg"/>
+            <p:ph type="sldImg" idx="2"/>
           </p:nvPr>
         </p:nvSpPr>
         <p:spPr>
           <a:xfrm>
-            <a:off x="1143225" y="685800"/>
-            <a:ext cx="4572225" cy="3429000"/>
+            <a:off x="381000" y="685800"/>
+            <a:ext cx="6096000" cy="3429000"/>
           </a:xfrm>
           <a:custGeom>
-            <a:rect b="b" l="l" r="r" t="t"/>
+            <a:avLst/>
+            <a:gdLst/>
+            <a:ahLst/>
+            <a:cxnLst/>
+            <a:rect l="l" t="t" r="r" b="b"/>
             <a:pathLst>
-              <a:path extrusionOk="0" h="120000" w="120000">
+              <a:path w="120000" h="120000" extrusionOk="0">
                 <a:moveTo>
                   <a:pt x="0" y="0"/>
                 </a:moveTo>
@@ -1297,11 +1342,11 @@
 </file>
 
 <file path=ppt/notesSlides/notesSlide7.xml><?xml version="1.0" encoding="utf-8"?>
-<p:notes xmlns:a="http://schemas.openxmlformats.org/drawingml/2006/main" xmlns:r="http://schemas.openxmlformats.org/officeDocument/2006/relationships" xmlns:mc="http://schemas.openxmlformats.org/markup-compatibility/2006" xmlns:mv="urn:schemas-microsoft-com:mac:vml" xmlns:p="http://schemas.openxmlformats.org/presentationml/2006/main" xmlns:c="http://schemas.openxmlformats.org/drawingml/2006/chart" xmlns:dgm="http://schemas.openxmlformats.org/drawingml/2006/diagram" xmlns:o="urn:schemas-microsoft-com:office:office" xmlns:v="urn:schemas-microsoft-com:vml" xmlns:pvml="urn:schemas-microsoft-com:office:powerpoint" xmlns:com="http://schemas.openxmlformats.org/drawingml/2006/compatibility" xmlns:p14="http://schemas.microsoft.com/office/powerpoint/2010/main" xmlns:p15="http://schemas.microsoft.com/office/powerpoint/2012/main" xmlns:ahyp="http://schemas.microsoft.com/office/drawing/2018/hyperlinkcolor" showMasterPhAnim="0" showMasterSp="0">
+<p:notes xmlns:a="http://schemas.openxmlformats.org/drawingml/2006/main" xmlns:r="http://schemas.openxmlformats.org/officeDocument/2006/relationships" xmlns:p="http://schemas.openxmlformats.org/presentationml/2006/main" showMasterSp="0" showMasterPhAnim="0">
   <p:cSld>
     <p:spTree>
       <p:nvGrpSpPr>
-        <p:cNvPr id="177" name="Shape 177"/>
+        <p:cNvPr id="1" name="Shape 177"/>
         <p:cNvGrpSpPr/>
         <p:nvPr/>
       </p:nvGrpSpPr>
@@ -1316,9 +1361,11 @@
       <p:sp>
         <p:nvSpPr>
           <p:cNvPr id="178" name="Google Shape;178;p7:notes"/>
-          <p:cNvSpPr txBox="1"/>
+          <p:cNvSpPr txBox="1">
+            <a:spLocks noGrp="1"/>
+          </p:cNvSpPr>
           <p:nvPr>
-            <p:ph idx="1" type="body"/>
+            <p:ph type="body" idx="1"/>
           </p:nvPr>
         </p:nvSpPr>
         <p:spPr>
@@ -1331,12 +1378,12 @@
           </a:prstGeom>
         </p:spPr>
         <p:txBody>
-          <a:bodyPr anchorCtr="0" anchor="t" bIns="91425" lIns="91425" spcFirstLastPara="1" rIns="91425" wrap="square" tIns="91425">
+          <a:bodyPr spcFirstLastPara="1" wrap="square" lIns="91425" tIns="91425" rIns="91425" bIns="91425" anchor="t" anchorCtr="0">
             <a:noAutofit/>
           </a:bodyPr>
           <a:lstStyle/>
           <a:p>
-            <a:pPr indent="0" lvl="0" marL="0" rtl="0" algn="l">
+            <a:pPr marL="0" lvl="0" indent="0" algn="l" rtl="0">
               <a:spcBef>
                 <a:spcPts val="0"/>
               </a:spcBef>
@@ -1345,9 +1392,6 @@
               </a:spcAft>
               <a:buNone/>
             </a:pPr>
-            <a:r>
-              <a:t/>
-            </a:r>
             <a:endParaRPr/>
           </a:p>
         </p:txBody>
@@ -1355,9 +1399,11 @@
       <p:sp>
         <p:nvSpPr>
           <p:cNvPr id="179" name="Google Shape;179;p7:notes"/>
-          <p:cNvSpPr/>
+          <p:cNvSpPr>
+            <a:spLocks noGrp="1" noRot="1" noChangeAspect="1"/>
+          </p:cNvSpPr>
           <p:nvPr>
-            <p:ph idx="2" type="sldImg"/>
+            <p:ph type="sldImg" idx="2"/>
           </p:nvPr>
         </p:nvSpPr>
         <p:spPr>
@@ -1366,9 +1412,13 @@
             <a:ext cx="4572225" cy="3429000"/>
           </a:xfrm>
           <a:custGeom>
-            <a:rect b="b" l="l" r="r" t="t"/>
+            <a:avLst/>
+            <a:gdLst/>
+            <a:ahLst/>
+            <a:cxnLst/>
+            <a:rect l="l" t="t" r="r" b="b"/>
             <a:pathLst>
-              <a:path extrusionOk="0" h="120000" w="120000">
+              <a:path w="120000" h="120000" extrusionOk="0">
                 <a:moveTo>
                   <a:pt x="0" y="0"/>
                 </a:moveTo>
@@ -1396,11 +1446,11 @@
 </file>
 
 <file path=ppt/notesSlides/notesSlide8.xml><?xml version="1.0" encoding="utf-8"?>
-<p:notes xmlns:a="http://schemas.openxmlformats.org/drawingml/2006/main" xmlns:r="http://schemas.openxmlformats.org/officeDocument/2006/relationships" xmlns:mc="http://schemas.openxmlformats.org/markup-compatibility/2006" xmlns:mv="urn:schemas-microsoft-com:mac:vml" xmlns:p="http://schemas.openxmlformats.org/presentationml/2006/main" xmlns:c="http://schemas.openxmlformats.org/drawingml/2006/chart" xmlns:dgm="http://schemas.openxmlformats.org/drawingml/2006/diagram" xmlns:o="urn:schemas-microsoft-com:office:office" xmlns:v="urn:schemas-microsoft-com:vml" xmlns:pvml="urn:schemas-microsoft-com:office:powerpoint" xmlns:com="http://schemas.openxmlformats.org/drawingml/2006/compatibility" xmlns:p14="http://schemas.microsoft.com/office/powerpoint/2010/main" xmlns:p15="http://schemas.microsoft.com/office/powerpoint/2012/main" xmlns:ahyp="http://schemas.microsoft.com/office/drawing/2018/hyperlinkcolor" showMasterPhAnim="0" showMasterSp="0">
+<p:notes xmlns:a="http://schemas.openxmlformats.org/drawingml/2006/main" xmlns:r="http://schemas.openxmlformats.org/officeDocument/2006/relationships" xmlns:p="http://schemas.openxmlformats.org/presentationml/2006/main" showMasterSp="0" showMasterPhAnim="0">
   <p:cSld>
     <p:spTree>
       <p:nvGrpSpPr>
-        <p:cNvPr id="195" name="Shape 195"/>
+        <p:cNvPr id="1" name="Shape 195"/>
         <p:cNvGrpSpPr/>
         <p:nvPr/>
       </p:nvGrpSpPr>
@@ -1415,9 +1465,11 @@
       <p:sp>
         <p:nvSpPr>
           <p:cNvPr id="196" name="Google Shape;196;p8:notes"/>
-          <p:cNvSpPr txBox="1"/>
+          <p:cNvSpPr txBox="1">
+            <a:spLocks noGrp="1"/>
+          </p:cNvSpPr>
           <p:nvPr>
-            <p:ph idx="1" type="body"/>
+            <p:ph type="body" idx="1"/>
           </p:nvPr>
         </p:nvSpPr>
         <p:spPr>
@@ -1430,12 +1482,12 @@
           </a:prstGeom>
         </p:spPr>
         <p:txBody>
-          <a:bodyPr anchorCtr="0" anchor="t" bIns="91425" lIns="91425" spcFirstLastPara="1" rIns="91425" wrap="square" tIns="91425">
+          <a:bodyPr spcFirstLastPara="1" wrap="square" lIns="91425" tIns="91425" rIns="91425" bIns="91425" anchor="t" anchorCtr="0">
             <a:noAutofit/>
           </a:bodyPr>
           <a:lstStyle/>
           <a:p>
-            <a:pPr indent="0" lvl="0" marL="0" rtl="0" algn="l">
+            <a:pPr marL="0" lvl="0" indent="0" algn="l" rtl="0">
               <a:spcBef>
                 <a:spcPts val="0"/>
               </a:spcBef>
@@ -1444,9 +1496,6 @@
               </a:spcAft>
               <a:buNone/>
             </a:pPr>
-            <a:r>
-              <a:t/>
-            </a:r>
             <a:endParaRPr/>
           </a:p>
         </p:txBody>
@@ -1454,9 +1503,11 @@
       <p:sp>
         <p:nvSpPr>
           <p:cNvPr id="197" name="Google Shape;197;p8:notes"/>
-          <p:cNvSpPr/>
+          <p:cNvSpPr>
+            <a:spLocks noGrp="1" noRot="1" noChangeAspect="1"/>
+          </p:cNvSpPr>
           <p:nvPr>
-            <p:ph idx="2" type="sldImg"/>
+            <p:ph type="sldImg" idx="2"/>
           </p:nvPr>
         </p:nvSpPr>
         <p:spPr>
@@ -1465,9 +1516,13 @@
             <a:ext cx="4572225" cy="3429000"/>
           </a:xfrm>
           <a:custGeom>
-            <a:rect b="b" l="l" r="r" t="t"/>
+            <a:avLst/>
+            <a:gdLst/>
+            <a:ahLst/>
+            <a:cxnLst/>
+            <a:rect l="l" t="t" r="r" b="b"/>
             <a:pathLst>
-              <a:path extrusionOk="0" h="120000" w="120000">
+              <a:path w="120000" h="120000" extrusionOk="0">
                 <a:moveTo>
                   <a:pt x="0" y="0"/>
                 </a:moveTo>
@@ -1495,11 +1550,11 @@
 </file>
 
 <file path=ppt/slideLayouts/slideLayout1.xml><?xml version="1.0" encoding="utf-8"?>
-<p:sldLayout xmlns:a="http://schemas.openxmlformats.org/drawingml/2006/main" xmlns:r="http://schemas.openxmlformats.org/officeDocument/2006/relationships" xmlns:mc="http://schemas.openxmlformats.org/markup-compatibility/2006" xmlns:mv="urn:schemas-microsoft-com:mac:vml" xmlns:p="http://schemas.openxmlformats.org/presentationml/2006/main" xmlns:c="http://schemas.openxmlformats.org/drawingml/2006/chart" xmlns:dgm="http://schemas.openxmlformats.org/drawingml/2006/diagram" xmlns:o="urn:schemas-microsoft-com:office:office" xmlns:v="urn:schemas-microsoft-com:vml" xmlns:pvml="urn:schemas-microsoft-com:office:powerpoint" xmlns:com="http://schemas.openxmlformats.org/drawingml/2006/compatibility" xmlns:p14="http://schemas.microsoft.com/office/powerpoint/2010/main" xmlns:p15="http://schemas.microsoft.com/office/powerpoint/2012/main" xmlns:ahyp="http://schemas.microsoft.com/office/drawing/2018/hyperlinkcolor" matchingName="Blank" type="blank">
+<p:sldLayout xmlns:a="http://schemas.openxmlformats.org/drawingml/2006/main" xmlns:r="http://schemas.openxmlformats.org/officeDocument/2006/relationships" xmlns:p="http://schemas.openxmlformats.org/presentationml/2006/main" matchingName="Blank" type="blank">
   <p:cSld name="BLANK">
     <p:spTree>
       <p:nvGrpSpPr>
-        <p:cNvPr id="11" name="Shape 11"/>
+        <p:cNvPr id="1" name="Shape 11"/>
         <p:cNvGrpSpPr/>
         <p:nvPr/>
       </p:nvGrpSpPr>
@@ -1514,9 +1569,11 @@
       <p:sp>
         <p:nvSpPr>
           <p:cNvPr id="12" name="Google Shape;12;p2"/>
-          <p:cNvSpPr txBox="1"/>
+          <p:cNvSpPr txBox="1">
+            <a:spLocks noGrp="1"/>
+          </p:cNvSpPr>
           <p:nvPr>
-            <p:ph idx="10" type="dt"/>
+            <p:ph type="dt" idx="10"/>
           </p:nvPr>
         </p:nvSpPr>
         <p:spPr>
@@ -1533,7 +1590,7 @@
           </a:ln>
         </p:spPr>
         <p:txBody>
-          <a:bodyPr anchorCtr="0" anchor="ctr" bIns="45700" lIns="91425" spcFirstLastPara="1" rIns="91425" wrap="square" tIns="45700">
+          <a:bodyPr spcFirstLastPara="1" wrap="square" lIns="91425" tIns="45700" rIns="91425" bIns="45700" anchor="ctr" anchorCtr="0">
             <a:noAutofit/>
           </a:bodyPr>
           <a:lstStyle>
@@ -1637,15 +1694,19 @@
               <a:defRPr/>
             </a:lvl9pPr>
           </a:lstStyle>
-          <a:p/>
+          <a:p>
+            <a:endParaRPr/>
+          </a:p>
         </p:txBody>
       </p:sp>
       <p:sp>
         <p:nvSpPr>
           <p:cNvPr id="13" name="Google Shape;13;p2"/>
-          <p:cNvSpPr txBox="1"/>
+          <p:cNvSpPr txBox="1">
+            <a:spLocks noGrp="1"/>
+          </p:cNvSpPr>
           <p:nvPr>
-            <p:ph idx="11" type="ftr"/>
+            <p:ph type="ftr" idx="11"/>
           </p:nvPr>
         </p:nvSpPr>
         <p:spPr>
@@ -1662,7 +1723,7 @@
           </a:ln>
         </p:spPr>
         <p:txBody>
-          <a:bodyPr anchorCtr="0" anchor="ctr" bIns="45700" lIns="91425" spcFirstLastPara="1" rIns="91425" wrap="square" tIns="45700">
+          <a:bodyPr spcFirstLastPara="1" wrap="square" lIns="91425" tIns="45700" rIns="91425" bIns="45700" anchor="ctr" anchorCtr="0">
             <a:noAutofit/>
           </a:bodyPr>
           <a:lstStyle>
@@ -1766,15 +1827,19 @@
               <a:defRPr/>
             </a:lvl9pPr>
           </a:lstStyle>
-          <a:p/>
+          <a:p>
+            <a:endParaRPr/>
+          </a:p>
         </p:txBody>
       </p:sp>
       <p:sp>
         <p:nvSpPr>
           <p:cNvPr id="14" name="Google Shape;14;p2"/>
-          <p:cNvSpPr txBox="1"/>
+          <p:cNvSpPr txBox="1">
+            <a:spLocks noGrp="1"/>
+          </p:cNvSpPr>
           <p:nvPr>
-            <p:ph idx="12" type="sldNum"/>
+            <p:ph type="sldNum" idx="12"/>
           </p:nvPr>
         </p:nvSpPr>
         <p:spPr>
@@ -1791,67 +1856,67 @@
           </a:ln>
         </p:spPr>
         <p:txBody>
-          <a:bodyPr anchorCtr="0" anchor="ctr" bIns="45700" lIns="91425" spcFirstLastPara="1" rIns="91425" wrap="square" tIns="45700">
+          <a:bodyPr spcFirstLastPara="1" wrap="square" lIns="91425" tIns="45700" rIns="91425" bIns="45700" anchor="ctr" anchorCtr="0">
             <a:noAutofit/>
           </a:bodyPr>
           <a:lstStyle>
-            <a:lvl1pPr indent="0" lvl="0" marL="0" algn="r">
+            <a:lvl1pPr marL="0" lvl="0" indent="0" algn="r">
               <a:spcBef>
                 <a:spcPts val="0"/>
               </a:spcBef>
               <a:buNone/>
               <a:defRPr/>
             </a:lvl1pPr>
-            <a:lvl2pPr indent="0" lvl="1" marL="0" algn="r">
+            <a:lvl2pPr marL="0" lvl="1" indent="0" algn="r">
               <a:spcBef>
                 <a:spcPts val="0"/>
               </a:spcBef>
               <a:buNone/>
               <a:defRPr/>
             </a:lvl2pPr>
-            <a:lvl3pPr indent="0" lvl="2" marL="0" algn="r">
+            <a:lvl3pPr marL="0" lvl="2" indent="0" algn="r">
               <a:spcBef>
                 <a:spcPts val="0"/>
               </a:spcBef>
               <a:buNone/>
               <a:defRPr/>
             </a:lvl3pPr>
-            <a:lvl4pPr indent="0" lvl="3" marL="0" algn="r">
+            <a:lvl4pPr marL="0" lvl="3" indent="0" algn="r">
               <a:spcBef>
                 <a:spcPts val="0"/>
               </a:spcBef>
               <a:buNone/>
               <a:defRPr/>
             </a:lvl4pPr>
-            <a:lvl5pPr indent="0" lvl="4" marL="0" algn="r">
+            <a:lvl5pPr marL="0" lvl="4" indent="0" algn="r">
               <a:spcBef>
                 <a:spcPts val="0"/>
               </a:spcBef>
               <a:buNone/>
               <a:defRPr/>
             </a:lvl5pPr>
-            <a:lvl6pPr indent="0" lvl="5" marL="0" algn="r">
+            <a:lvl6pPr marL="0" lvl="5" indent="0" algn="r">
               <a:spcBef>
                 <a:spcPts val="0"/>
               </a:spcBef>
               <a:buNone/>
               <a:defRPr/>
             </a:lvl6pPr>
-            <a:lvl7pPr indent="0" lvl="6" marL="0" algn="r">
+            <a:lvl7pPr marL="0" lvl="6" indent="0" algn="r">
               <a:spcBef>
                 <a:spcPts val="0"/>
               </a:spcBef>
               <a:buNone/>
               <a:defRPr/>
             </a:lvl7pPr>
-            <a:lvl8pPr indent="0" lvl="7" marL="0" algn="r">
+            <a:lvl8pPr marL="0" lvl="7" indent="0" algn="r">
               <a:spcBef>
                 <a:spcPts val="0"/>
               </a:spcBef>
               <a:buNone/>
               <a:defRPr/>
             </a:lvl8pPr>
-            <a:lvl9pPr indent="0" lvl="8" marL="0" algn="r">
+            <a:lvl9pPr marL="0" lvl="8" indent="0" algn="r">
               <a:spcBef>
                 <a:spcPts val="0"/>
               </a:spcBef>
@@ -1860,7 +1925,7 @@
             </a:lvl9pPr>
           </a:lstStyle>
           <a:p>
-            <a:pPr indent="0" lvl="0" marL="0" rtl="0" algn="r">
+            <a:pPr marL="0" lvl="0" indent="0" algn="r" rtl="0">
               <a:spcBef>
                 <a:spcPts val="0"/>
               </a:spcBef>
@@ -1886,11 +1951,11 @@
 </file>
 
 <file path=ppt/slideLayouts/slideLayout10.xml><?xml version="1.0" encoding="utf-8"?>
-<p:sldLayout xmlns:a="http://schemas.openxmlformats.org/drawingml/2006/main" xmlns:r="http://schemas.openxmlformats.org/officeDocument/2006/relationships" xmlns:mc="http://schemas.openxmlformats.org/markup-compatibility/2006" xmlns:mv="urn:schemas-microsoft-com:mac:vml" xmlns:p="http://schemas.openxmlformats.org/presentationml/2006/main" xmlns:c="http://schemas.openxmlformats.org/drawingml/2006/chart" xmlns:dgm="http://schemas.openxmlformats.org/drawingml/2006/diagram" xmlns:o="urn:schemas-microsoft-com:office:office" xmlns:v="urn:schemas-microsoft-com:vml" xmlns:pvml="urn:schemas-microsoft-com:office:powerpoint" xmlns:com="http://schemas.openxmlformats.org/drawingml/2006/compatibility" xmlns:p14="http://schemas.microsoft.com/office/powerpoint/2010/main" xmlns:p15="http://schemas.microsoft.com/office/powerpoint/2012/main" xmlns:ahyp="http://schemas.microsoft.com/office/drawing/2018/hyperlinkcolor" matchingName="Title and Vertical Text" type="vertTx">
+<p:sldLayout xmlns:a="http://schemas.openxmlformats.org/drawingml/2006/main" xmlns:r="http://schemas.openxmlformats.org/officeDocument/2006/relationships" xmlns:p="http://schemas.openxmlformats.org/presentationml/2006/main" matchingName="Title and Vertical Text" type="vertTx">
   <p:cSld name="VERTICAL_TEXT">
     <p:spTree>
       <p:nvGrpSpPr>
-        <p:cNvPr id="68" name="Shape 68"/>
+        <p:cNvPr id="1" name="Shape 68"/>
         <p:cNvGrpSpPr/>
         <p:nvPr/>
       </p:nvGrpSpPr>
@@ -1905,7 +1970,9 @@
       <p:sp>
         <p:nvSpPr>
           <p:cNvPr id="69" name="Google Shape;69;p11"/>
-          <p:cNvSpPr txBox="1"/>
+          <p:cNvSpPr txBox="1">
+            <a:spLocks noGrp="1"/>
+          </p:cNvSpPr>
           <p:nvPr>
             <p:ph type="title"/>
           </p:nvPr>
@@ -1924,7 +1991,7 @@
           </a:ln>
         </p:spPr>
         <p:txBody>
-          <a:bodyPr anchorCtr="0" anchor="ctr" bIns="45700" lIns="91425" spcFirstLastPara="1" rIns="91425" wrap="square" tIns="45700">
+          <a:bodyPr spcFirstLastPara="1" wrap="square" lIns="91425" tIns="45700" rIns="91425" bIns="45700" anchor="ctr" anchorCtr="0">
             <a:normAutofit/>
           </a:bodyPr>
           <a:lstStyle>
@@ -2031,15 +2098,19 @@
               <a:defRPr/>
             </a:lvl9pPr>
           </a:lstStyle>
-          <a:p/>
+          <a:p>
+            <a:endParaRPr/>
+          </a:p>
         </p:txBody>
       </p:sp>
       <p:sp>
         <p:nvSpPr>
           <p:cNvPr id="70" name="Google Shape;70;p11"/>
-          <p:cNvSpPr txBox="1"/>
+          <p:cNvSpPr txBox="1">
+            <a:spLocks noGrp="1"/>
+          </p:cNvSpPr>
           <p:nvPr>
-            <p:ph idx="1" type="body"/>
+            <p:ph type="body" idx="1"/>
           </p:nvPr>
         </p:nvSpPr>
         <p:spPr>
@@ -2056,11 +2127,11 @@
           </a:ln>
         </p:spPr>
         <p:txBody>
-          <a:bodyPr anchorCtr="0" anchor="t" bIns="45700" lIns="91425" spcFirstLastPara="1" rIns="91425" wrap="square" tIns="45700">
+          <a:bodyPr spcFirstLastPara="1" wrap="square" lIns="91425" tIns="45700" rIns="91425" bIns="45700" anchor="t" anchorCtr="0">
             <a:normAutofit/>
           </a:bodyPr>
           <a:lstStyle>
-            <a:lvl1pPr indent="-342900" lvl="0" marL="457200" algn="l">
+            <a:lvl1pPr marL="457200" lvl="0" indent="-342900" algn="l">
               <a:spcBef>
                 <a:spcPts val="360"/>
               </a:spcBef>
@@ -2074,7 +2145,7 @@
               <a:buChar char="•"/>
               <a:defRPr/>
             </a:lvl1pPr>
-            <a:lvl2pPr indent="-342900" lvl="1" marL="914400" algn="l">
+            <a:lvl2pPr marL="914400" lvl="1" indent="-342900" algn="l">
               <a:spcBef>
                 <a:spcPts val="360"/>
               </a:spcBef>
@@ -2088,7 +2159,7 @@
               <a:buChar char="–"/>
               <a:defRPr/>
             </a:lvl2pPr>
-            <a:lvl3pPr indent="-342900" lvl="2" marL="1371600" algn="l">
+            <a:lvl3pPr marL="1371600" lvl="2" indent="-342900" algn="l">
               <a:spcBef>
                 <a:spcPts val="360"/>
               </a:spcBef>
@@ -2102,7 +2173,7 @@
               <a:buChar char="•"/>
               <a:defRPr/>
             </a:lvl3pPr>
-            <a:lvl4pPr indent="-342900" lvl="3" marL="1828800" algn="l">
+            <a:lvl4pPr marL="1828800" lvl="3" indent="-342900" algn="l">
               <a:spcBef>
                 <a:spcPts val="360"/>
               </a:spcBef>
@@ -2116,7 +2187,7 @@
               <a:buChar char="–"/>
               <a:defRPr/>
             </a:lvl4pPr>
-            <a:lvl5pPr indent="-342900" lvl="4" marL="2286000" algn="l">
+            <a:lvl5pPr marL="2286000" lvl="4" indent="-342900" algn="l">
               <a:spcBef>
                 <a:spcPts val="360"/>
               </a:spcBef>
@@ -2130,7 +2201,7 @@
               <a:buChar char="»"/>
               <a:defRPr/>
             </a:lvl5pPr>
-            <a:lvl6pPr indent="-342900" lvl="5" marL="2743200" algn="l">
+            <a:lvl6pPr marL="2743200" lvl="5" indent="-342900" algn="l">
               <a:spcBef>
                 <a:spcPts val="360"/>
               </a:spcBef>
@@ -2144,7 +2215,7 @@
               <a:buChar char="•"/>
               <a:defRPr/>
             </a:lvl6pPr>
-            <a:lvl7pPr indent="-342900" lvl="6" marL="3200400" algn="l">
+            <a:lvl7pPr marL="3200400" lvl="6" indent="-342900" algn="l">
               <a:spcBef>
                 <a:spcPts val="360"/>
               </a:spcBef>
@@ -2158,7 +2229,7 @@
               <a:buChar char="•"/>
               <a:defRPr/>
             </a:lvl7pPr>
-            <a:lvl8pPr indent="-342900" lvl="7" marL="3657600" algn="l">
+            <a:lvl8pPr marL="3657600" lvl="7" indent="-342900" algn="l">
               <a:spcBef>
                 <a:spcPts val="360"/>
               </a:spcBef>
@@ -2172,7 +2243,7 @@
               <a:buChar char="•"/>
               <a:defRPr/>
             </a:lvl8pPr>
-            <a:lvl9pPr indent="-342900" lvl="8" marL="4114800" algn="l">
+            <a:lvl9pPr marL="4114800" lvl="8" indent="-342900" algn="l">
               <a:spcBef>
                 <a:spcPts val="360"/>
               </a:spcBef>
@@ -2187,15 +2258,19 @@
               <a:defRPr/>
             </a:lvl9pPr>
           </a:lstStyle>
-          <a:p/>
+          <a:p>
+            <a:endParaRPr/>
+          </a:p>
         </p:txBody>
       </p:sp>
       <p:sp>
         <p:nvSpPr>
           <p:cNvPr id="71" name="Google Shape;71;p11"/>
-          <p:cNvSpPr txBox="1"/>
+          <p:cNvSpPr txBox="1">
+            <a:spLocks noGrp="1"/>
+          </p:cNvSpPr>
           <p:nvPr>
-            <p:ph idx="10" type="dt"/>
+            <p:ph type="dt" idx="10"/>
           </p:nvPr>
         </p:nvSpPr>
         <p:spPr>
@@ -2212,7 +2287,7 @@
           </a:ln>
         </p:spPr>
         <p:txBody>
-          <a:bodyPr anchorCtr="0" anchor="ctr" bIns="45700" lIns="91425" spcFirstLastPara="1" rIns="91425" wrap="square" tIns="45700">
+          <a:bodyPr spcFirstLastPara="1" wrap="square" lIns="91425" tIns="45700" rIns="91425" bIns="45700" anchor="ctr" anchorCtr="0">
             <a:noAutofit/>
           </a:bodyPr>
           <a:lstStyle>
@@ -2316,15 +2391,19 @@
               <a:defRPr/>
             </a:lvl9pPr>
           </a:lstStyle>
-          <a:p/>
+          <a:p>
+            <a:endParaRPr/>
+          </a:p>
         </p:txBody>
       </p:sp>
       <p:sp>
         <p:nvSpPr>
           <p:cNvPr id="72" name="Google Shape;72;p11"/>
-          <p:cNvSpPr txBox="1"/>
+          <p:cNvSpPr txBox="1">
+            <a:spLocks noGrp="1"/>
+          </p:cNvSpPr>
           <p:nvPr>
-            <p:ph idx="11" type="ftr"/>
+            <p:ph type="ftr" idx="11"/>
           </p:nvPr>
         </p:nvSpPr>
         <p:spPr>
@@ -2341,7 +2420,7 @@
           </a:ln>
         </p:spPr>
         <p:txBody>
-          <a:bodyPr anchorCtr="0" anchor="ctr" bIns="45700" lIns="91425" spcFirstLastPara="1" rIns="91425" wrap="square" tIns="45700">
+          <a:bodyPr spcFirstLastPara="1" wrap="square" lIns="91425" tIns="45700" rIns="91425" bIns="45700" anchor="ctr" anchorCtr="0">
             <a:noAutofit/>
           </a:bodyPr>
           <a:lstStyle>
@@ -2445,15 +2524,19 @@
               <a:defRPr/>
             </a:lvl9pPr>
           </a:lstStyle>
-          <a:p/>
+          <a:p>
+            <a:endParaRPr/>
+          </a:p>
         </p:txBody>
       </p:sp>
       <p:sp>
         <p:nvSpPr>
           <p:cNvPr id="73" name="Google Shape;73;p11"/>
-          <p:cNvSpPr txBox="1"/>
+          <p:cNvSpPr txBox="1">
+            <a:spLocks noGrp="1"/>
+          </p:cNvSpPr>
           <p:nvPr>
-            <p:ph idx="12" type="sldNum"/>
+            <p:ph type="sldNum" idx="12"/>
           </p:nvPr>
         </p:nvSpPr>
         <p:spPr>
@@ -2470,67 +2553,67 @@
           </a:ln>
         </p:spPr>
         <p:txBody>
-          <a:bodyPr anchorCtr="0" anchor="ctr" bIns="45700" lIns="91425" spcFirstLastPara="1" rIns="91425" wrap="square" tIns="45700">
+          <a:bodyPr spcFirstLastPara="1" wrap="square" lIns="91425" tIns="45700" rIns="91425" bIns="45700" anchor="ctr" anchorCtr="0">
             <a:noAutofit/>
           </a:bodyPr>
           <a:lstStyle>
-            <a:lvl1pPr indent="0" lvl="0" marL="0" algn="r">
+            <a:lvl1pPr marL="0" lvl="0" indent="0" algn="r">
               <a:spcBef>
                 <a:spcPts val="0"/>
               </a:spcBef>
               <a:buNone/>
               <a:defRPr/>
             </a:lvl1pPr>
-            <a:lvl2pPr indent="0" lvl="1" marL="0" algn="r">
+            <a:lvl2pPr marL="0" lvl="1" indent="0" algn="r">
               <a:spcBef>
                 <a:spcPts val="0"/>
               </a:spcBef>
               <a:buNone/>
               <a:defRPr/>
             </a:lvl2pPr>
-            <a:lvl3pPr indent="0" lvl="2" marL="0" algn="r">
+            <a:lvl3pPr marL="0" lvl="2" indent="0" algn="r">
               <a:spcBef>
                 <a:spcPts val="0"/>
               </a:spcBef>
               <a:buNone/>
               <a:defRPr/>
             </a:lvl3pPr>
-            <a:lvl4pPr indent="0" lvl="3" marL="0" algn="r">
+            <a:lvl4pPr marL="0" lvl="3" indent="0" algn="r">
               <a:spcBef>
                 <a:spcPts val="0"/>
               </a:spcBef>
               <a:buNone/>
               <a:defRPr/>
             </a:lvl4pPr>
-            <a:lvl5pPr indent="0" lvl="4" marL="0" algn="r">
+            <a:lvl5pPr marL="0" lvl="4" indent="0" algn="r">
               <a:spcBef>
                 <a:spcPts val="0"/>
               </a:spcBef>
               <a:buNone/>
               <a:defRPr/>
             </a:lvl5pPr>
-            <a:lvl6pPr indent="0" lvl="5" marL="0" algn="r">
+            <a:lvl6pPr marL="0" lvl="5" indent="0" algn="r">
               <a:spcBef>
                 <a:spcPts val="0"/>
               </a:spcBef>
               <a:buNone/>
               <a:defRPr/>
             </a:lvl6pPr>
-            <a:lvl7pPr indent="0" lvl="6" marL="0" algn="r">
+            <a:lvl7pPr marL="0" lvl="6" indent="0" algn="r">
               <a:spcBef>
                 <a:spcPts val="0"/>
               </a:spcBef>
               <a:buNone/>
               <a:defRPr/>
             </a:lvl7pPr>
-            <a:lvl8pPr indent="0" lvl="7" marL="0" algn="r">
+            <a:lvl8pPr marL="0" lvl="7" indent="0" algn="r">
               <a:spcBef>
                 <a:spcPts val="0"/>
               </a:spcBef>
               <a:buNone/>
               <a:defRPr/>
             </a:lvl8pPr>
-            <a:lvl9pPr indent="0" lvl="8" marL="0" algn="r">
+            <a:lvl9pPr marL="0" lvl="8" indent="0" algn="r">
               <a:spcBef>
                 <a:spcPts val="0"/>
               </a:spcBef>
@@ -2539,7 +2622,7 @@
             </a:lvl9pPr>
           </a:lstStyle>
           <a:p>
-            <a:pPr indent="0" lvl="0" marL="0" rtl="0" algn="r">
+            <a:pPr marL="0" lvl="0" indent="0" algn="r" rtl="0">
               <a:spcBef>
                 <a:spcPts val="0"/>
               </a:spcBef>
@@ -2565,11 +2648,11 @@
 </file>
 
 <file path=ppt/slideLayouts/slideLayout11.xml><?xml version="1.0" encoding="utf-8"?>
-<p:sldLayout xmlns:a="http://schemas.openxmlformats.org/drawingml/2006/main" xmlns:r="http://schemas.openxmlformats.org/officeDocument/2006/relationships" xmlns:mc="http://schemas.openxmlformats.org/markup-compatibility/2006" xmlns:mv="urn:schemas-microsoft-com:mac:vml" xmlns:p="http://schemas.openxmlformats.org/presentationml/2006/main" xmlns:c="http://schemas.openxmlformats.org/drawingml/2006/chart" xmlns:dgm="http://schemas.openxmlformats.org/drawingml/2006/diagram" xmlns:o="urn:schemas-microsoft-com:office:office" xmlns:v="urn:schemas-microsoft-com:vml" xmlns:pvml="urn:schemas-microsoft-com:office:powerpoint" xmlns:com="http://schemas.openxmlformats.org/drawingml/2006/compatibility" xmlns:p14="http://schemas.microsoft.com/office/powerpoint/2010/main" xmlns:p15="http://schemas.microsoft.com/office/powerpoint/2012/main" xmlns:ahyp="http://schemas.microsoft.com/office/drawing/2018/hyperlinkcolor" matchingName="Vertical Title and Text" type="vertTitleAndTx">
+<p:sldLayout xmlns:a="http://schemas.openxmlformats.org/drawingml/2006/main" xmlns:r="http://schemas.openxmlformats.org/officeDocument/2006/relationships" xmlns:p="http://schemas.openxmlformats.org/presentationml/2006/main" matchingName="Vertical Title and Text" type="vertTitleAndTx">
   <p:cSld name="VERTICAL_TITLE_AND_VERTICAL_TEXT">
     <p:spTree>
       <p:nvGrpSpPr>
-        <p:cNvPr id="74" name="Shape 74"/>
+        <p:cNvPr id="1" name="Shape 74"/>
         <p:cNvGrpSpPr/>
         <p:nvPr/>
       </p:nvGrpSpPr>
@@ -2584,7 +2667,9 @@
       <p:sp>
         <p:nvSpPr>
           <p:cNvPr id="75" name="Google Shape;75;p12"/>
-          <p:cNvSpPr txBox="1"/>
+          <p:cNvSpPr txBox="1">
+            <a:spLocks noGrp="1"/>
+          </p:cNvSpPr>
           <p:nvPr>
             <p:ph type="title"/>
           </p:nvPr>
@@ -2603,7 +2688,7 @@
           </a:ln>
         </p:spPr>
         <p:txBody>
-          <a:bodyPr anchorCtr="0" anchor="ctr" bIns="45700" lIns="91425" spcFirstLastPara="1" rIns="91425" wrap="square" tIns="45700">
+          <a:bodyPr spcFirstLastPara="1" wrap="square" lIns="91425" tIns="45700" rIns="91425" bIns="45700" anchor="ctr" anchorCtr="0">
             <a:normAutofit/>
           </a:bodyPr>
           <a:lstStyle>
@@ -2710,15 +2795,19 @@
               <a:defRPr/>
             </a:lvl9pPr>
           </a:lstStyle>
-          <a:p/>
+          <a:p>
+            <a:endParaRPr/>
+          </a:p>
         </p:txBody>
       </p:sp>
       <p:sp>
         <p:nvSpPr>
           <p:cNvPr id="76" name="Google Shape;76;p12"/>
-          <p:cNvSpPr txBox="1"/>
+          <p:cNvSpPr txBox="1">
+            <a:spLocks noGrp="1"/>
+          </p:cNvSpPr>
           <p:nvPr>
-            <p:ph idx="1" type="body"/>
+            <p:ph type="body" idx="1"/>
           </p:nvPr>
         </p:nvSpPr>
         <p:spPr>
@@ -2735,11 +2824,11 @@
           </a:ln>
         </p:spPr>
         <p:txBody>
-          <a:bodyPr anchorCtr="0" anchor="t" bIns="45700" lIns="91425" spcFirstLastPara="1" rIns="91425" wrap="square" tIns="45700">
+          <a:bodyPr spcFirstLastPara="1" wrap="square" lIns="91425" tIns="45700" rIns="91425" bIns="45700" anchor="t" anchorCtr="0">
             <a:normAutofit/>
           </a:bodyPr>
           <a:lstStyle>
-            <a:lvl1pPr indent="-342900" lvl="0" marL="457200" algn="l">
+            <a:lvl1pPr marL="457200" lvl="0" indent="-342900" algn="l">
               <a:spcBef>
                 <a:spcPts val="360"/>
               </a:spcBef>
@@ -2753,7 +2842,7 @@
               <a:buChar char="•"/>
               <a:defRPr/>
             </a:lvl1pPr>
-            <a:lvl2pPr indent="-342900" lvl="1" marL="914400" algn="l">
+            <a:lvl2pPr marL="914400" lvl="1" indent="-342900" algn="l">
               <a:spcBef>
                 <a:spcPts val="360"/>
               </a:spcBef>
@@ -2767,7 +2856,7 @@
               <a:buChar char="–"/>
               <a:defRPr/>
             </a:lvl2pPr>
-            <a:lvl3pPr indent="-342900" lvl="2" marL="1371600" algn="l">
+            <a:lvl3pPr marL="1371600" lvl="2" indent="-342900" algn="l">
               <a:spcBef>
                 <a:spcPts val="360"/>
               </a:spcBef>
@@ -2781,7 +2870,7 @@
               <a:buChar char="•"/>
               <a:defRPr/>
             </a:lvl3pPr>
-            <a:lvl4pPr indent="-342900" lvl="3" marL="1828800" algn="l">
+            <a:lvl4pPr marL="1828800" lvl="3" indent="-342900" algn="l">
               <a:spcBef>
                 <a:spcPts val="360"/>
               </a:spcBef>
@@ -2795,7 +2884,7 @@
               <a:buChar char="–"/>
               <a:defRPr/>
             </a:lvl4pPr>
-            <a:lvl5pPr indent="-342900" lvl="4" marL="2286000" algn="l">
+            <a:lvl5pPr marL="2286000" lvl="4" indent="-342900" algn="l">
               <a:spcBef>
                 <a:spcPts val="360"/>
               </a:spcBef>
@@ -2809,7 +2898,7 @@
               <a:buChar char="»"/>
               <a:defRPr/>
             </a:lvl5pPr>
-            <a:lvl6pPr indent="-342900" lvl="5" marL="2743200" algn="l">
+            <a:lvl6pPr marL="2743200" lvl="5" indent="-342900" algn="l">
               <a:spcBef>
                 <a:spcPts val="360"/>
               </a:spcBef>
@@ -2823,7 +2912,7 @@
               <a:buChar char="•"/>
               <a:defRPr/>
             </a:lvl6pPr>
-            <a:lvl7pPr indent="-342900" lvl="6" marL="3200400" algn="l">
+            <a:lvl7pPr marL="3200400" lvl="6" indent="-342900" algn="l">
               <a:spcBef>
                 <a:spcPts val="360"/>
               </a:spcBef>
@@ -2837,7 +2926,7 @@
               <a:buChar char="•"/>
               <a:defRPr/>
             </a:lvl7pPr>
-            <a:lvl8pPr indent="-342900" lvl="7" marL="3657600" algn="l">
+            <a:lvl8pPr marL="3657600" lvl="7" indent="-342900" algn="l">
               <a:spcBef>
                 <a:spcPts val="360"/>
               </a:spcBef>
@@ -2851,7 +2940,7 @@
               <a:buChar char="•"/>
               <a:defRPr/>
             </a:lvl8pPr>
-            <a:lvl9pPr indent="-342900" lvl="8" marL="4114800" algn="l">
+            <a:lvl9pPr marL="4114800" lvl="8" indent="-342900" algn="l">
               <a:spcBef>
                 <a:spcPts val="360"/>
               </a:spcBef>
@@ -2866,15 +2955,19 @@
               <a:defRPr/>
             </a:lvl9pPr>
           </a:lstStyle>
-          <a:p/>
+          <a:p>
+            <a:endParaRPr/>
+          </a:p>
         </p:txBody>
       </p:sp>
       <p:sp>
         <p:nvSpPr>
           <p:cNvPr id="77" name="Google Shape;77;p12"/>
-          <p:cNvSpPr txBox="1"/>
+          <p:cNvSpPr txBox="1">
+            <a:spLocks noGrp="1"/>
+          </p:cNvSpPr>
           <p:nvPr>
-            <p:ph idx="10" type="dt"/>
+            <p:ph type="dt" idx="10"/>
           </p:nvPr>
         </p:nvSpPr>
         <p:spPr>
@@ -2891,7 +2984,7 @@
           </a:ln>
         </p:spPr>
         <p:txBody>
-          <a:bodyPr anchorCtr="0" anchor="ctr" bIns="45700" lIns="91425" spcFirstLastPara="1" rIns="91425" wrap="square" tIns="45700">
+          <a:bodyPr spcFirstLastPara="1" wrap="square" lIns="91425" tIns="45700" rIns="91425" bIns="45700" anchor="ctr" anchorCtr="0">
             <a:noAutofit/>
           </a:bodyPr>
           <a:lstStyle>
@@ -2995,15 +3088,19 @@
               <a:defRPr/>
             </a:lvl9pPr>
           </a:lstStyle>
-          <a:p/>
+          <a:p>
+            <a:endParaRPr/>
+          </a:p>
         </p:txBody>
       </p:sp>
       <p:sp>
         <p:nvSpPr>
           <p:cNvPr id="78" name="Google Shape;78;p12"/>
-          <p:cNvSpPr txBox="1"/>
+          <p:cNvSpPr txBox="1">
+            <a:spLocks noGrp="1"/>
+          </p:cNvSpPr>
           <p:nvPr>
-            <p:ph idx="11" type="ftr"/>
+            <p:ph type="ftr" idx="11"/>
           </p:nvPr>
         </p:nvSpPr>
         <p:spPr>
@@ -3020,7 +3117,7 @@
           </a:ln>
         </p:spPr>
         <p:txBody>
-          <a:bodyPr anchorCtr="0" anchor="ctr" bIns="45700" lIns="91425" spcFirstLastPara="1" rIns="91425" wrap="square" tIns="45700">
+          <a:bodyPr spcFirstLastPara="1" wrap="square" lIns="91425" tIns="45700" rIns="91425" bIns="45700" anchor="ctr" anchorCtr="0">
             <a:noAutofit/>
           </a:bodyPr>
           <a:lstStyle>
@@ -3124,15 +3221,19 @@
               <a:defRPr/>
             </a:lvl9pPr>
           </a:lstStyle>
-          <a:p/>
+          <a:p>
+            <a:endParaRPr/>
+          </a:p>
         </p:txBody>
       </p:sp>
       <p:sp>
         <p:nvSpPr>
           <p:cNvPr id="79" name="Google Shape;79;p12"/>
-          <p:cNvSpPr txBox="1"/>
+          <p:cNvSpPr txBox="1">
+            <a:spLocks noGrp="1"/>
+          </p:cNvSpPr>
           <p:nvPr>
-            <p:ph idx="12" type="sldNum"/>
+            <p:ph type="sldNum" idx="12"/>
           </p:nvPr>
         </p:nvSpPr>
         <p:spPr>
@@ -3149,67 +3250,67 @@
           </a:ln>
         </p:spPr>
         <p:txBody>
-          <a:bodyPr anchorCtr="0" anchor="ctr" bIns="45700" lIns="91425" spcFirstLastPara="1" rIns="91425" wrap="square" tIns="45700">
+          <a:bodyPr spcFirstLastPara="1" wrap="square" lIns="91425" tIns="45700" rIns="91425" bIns="45700" anchor="ctr" anchorCtr="0">
             <a:noAutofit/>
           </a:bodyPr>
           <a:lstStyle>
-            <a:lvl1pPr indent="0" lvl="0" marL="0" algn="r">
+            <a:lvl1pPr marL="0" lvl="0" indent="0" algn="r">
               <a:spcBef>
                 <a:spcPts val="0"/>
               </a:spcBef>
               <a:buNone/>
               <a:defRPr/>
             </a:lvl1pPr>
-            <a:lvl2pPr indent="0" lvl="1" marL="0" algn="r">
+            <a:lvl2pPr marL="0" lvl="1" indent="0" algn="r">
               <a:spcBef>
                 <a:spcPts val="0"/>
               </a:spcBef>
               <a:buNone/>
               <a:defRPr/>
             </a:lvl2pPr>
-            <a:lvl3pPr indent="0" lvl="2" marL="0" algn="r">
+            <a:lvl3pPr marL="0" lvl="2" indent="0" algn="r">
               <a:spcBef>
                 <a:spcPts val="0"/>
               </a:spcBef>
               <a:buNone/>
               <a:defRPr/>
             </a:lvl3pPr>
-            <a:lvl4pPr indent="0" lvl="3" marL="0" algn="r">
+            <a:lvl4pPr marL="0" lvl="3" indent="0" algn="r">
               <a:spcBef>
                 <a:spcPts val="0"/>
               </a:spcBef>
               <a:buNone/>
               <a:defRPr/>
             </a:lvl4pPr>
-            <a:lvl5pPr indent="0" lvl="4" marL="0" algn="r">
+            <a:lvl5pPr marL="0" lvl="4" indent="0" algn="r">
               <a:spcBef>
                 <a:spcPts val="0"/>
               </a:spcBef>
               <a:buNone/>
               <a:defRPr/>
             </a:lvl5pPr>
-            <a:lvl6pPr indent="0" lvl="5" marL="0" algn="r">
+            <a:lvl6pPr marL="0" lvl="5" indent="0" algn="r">
               <a:spcBef>
                 <a:spcPts val="0"/>
               </a:spcBef>
               <a:buNone/>
               <a:defRPr/>
             </a:lvl6pPr>
-            <a:lvl7pPr indent="0" lvl="6" marL="0" algn="r">
+            <a:lvl7pPr marL="0" lvl="6" indent="0" algn="r">
               <a:spcBef>
                 <a:spcPts val="0"/>
               </a:spcBef>
               <a:buNone/>
               <a:defRPr/>
             </a:lvl7pPr>
-            <a:lvl8pPr indent="0" lvl="7" marL="0" algn="r">
+            <a:lvl8pPr marL="0" lvl="7" indent="0" algn="r">
               <a:spcBef>
                 <a:spcPts val="0"/>
               </a:spcBef>
               <a:buNone/>
               <a:defRPr/>
             </a:lvl8pPr>
-            <a:lvl9pPr indent="0" lvl="8" marL="0" algn="r">
+            <a:lvl9pPr marL="0" lvl="8" indent="0" algn="r">
               <a:spcBef>
                 <a:spcPts val="0"/>
               </a:spcBef>
@@ -3218,7 +3319,7 @@
             </a:lvl9pPr>
           </a:lstStyle>
           <a:p>
-            <a:pPr indent="0" lvl="0" marL="0" rtl="0" algn="r">
+            <a:pPr marL="0" lvl="0" indent="0" algn="r" rtl="0">
               <a:spcBef>
                 <a:spcPts val="0"/>
               </a:spcBef>
@@ -3244,11 +3345,11 @@
 </file>
 
 <file path=ppt/slideLayouts/slideLayout2.xml><?xml version="1.0" encoding="utf-8"?>
-<p:sldLayout xmlns:a="http://schemas.openxmlformats.org/drawingml/2006/main" xmlns:r="http://schemas.openxmlformats.org/officeDocument/2006/relationships" xmlns:mc="http://schemas.openxmlformats.org/markup-compatibility/2006" xmlns:mv="urn:schemas-microsoft-com:mac:vml" xmlns:p="http://schemas.openxmlformats.org/presentationml/2006/main" xmlns:c="http://schemas.openxmlformats.org/drawingml/2006/chart" xmlns:dgm="http://schemas.openxmlformats.org/drawingml/2006/diagram" xmlns:o="urn:schemas-microsoft-com:office:office" xmlns:v="urn:schemas-microsoft-com:vml" xmlns:pvml="urn:schemas-microsoft-com:office:powerpoint" xmlns:com="http://schemas.openxmlformats.org/drawingml/2006/compatibility" xmlns:p14="http://schemas.microsoft.com/office/powerpoint/2010/main" xmlns:p15="http://schemas.microsoft.com/office/powerpoint/2012/main" xmlns:ahyp="http://schemas.microsoft.com/office/drawing/2018/hyperlinkcolor" matchingName="Title Slide" type="title">
+<p:sldLayout xmlns:a="http://schemas.openxmlformats.org/drawingml/2006/main" xmlns:r="http://schemas.openxmlformats.org/officeDocument/2006/relationships" xmlns:p="http://schemas.openxmlformats.org/presentationml/2006/main" matchingName="Title Slide" type="title">
   <p:cSld name="TITLE">
     <p:spTree>
       <p:nvGrpSpPr>
-        <p:cNvPr id="15" name="Shape 15"/>
+        <p:cNvPr id="1" name="Shape 15"/>
         <p:cNvGrpSpPr/>
         <p:nvPr/>
       </p:nvGrpSpPr>
@@ -3263,7 +3364,9 @@
       <p:sp>
         <p:nvSpPr>
           <p:cNvPr id="16" name="Google Shape;16;p3"/>
-          <p:cNvSpPr txBox="1"/>
+          <p:cNvSpPr txBox="1">
+            <a:spLocks noGrp="1"/>
+          </p:cNvSpPr>
           <p:nvPr>
             <p:ph type="ctrTitle"/>
           </p:nvPr>
@@ -3282,7 +3385,7 @@
           </a:ln>
         </p:spPr>
         <p:txBody>
-          <a:bodyPr anchorCtr="0" anchor="ctr" bIns="45700" lIns="91425" spcFirstLastPara="1" rIns="91425" wrap="square" tIns="45700">
+          <a:bodyPr spcFirstLastPara="1" wrap="square" lIns="91425" tIns="45700" rIns="91425" bIns="45700" anchor="ctr" anchorCtr="0">
             <a:normAutofit/>
           </a:bodyPr>
           <a:lstStyle>
@@ -3389,15 +3492,19 @@
               <a:defRPr/>
             </a:lvl9pPr>
           </a:lstStyle>
-          <a:p/>
+          <a:p>
+            <a:endParaRPr/>
+          </a:p>
         </p:txBody>
       </p:sp>
       <p:sp>
         <p:nvSpPr>
           <p:cNvPr id="17" name="Google Shape;17;p3"/>
-          <p:cNvSpPr txBox="1"/>
+          <p:cNvSpPr txBox="1">
+            <a:spLocks noGrp="1"/>
+          </p:cNvSpPr>
           <p:nvPr>
-            <p:ph idx="1" type="subTitle"/>
+            <p:ph type="subTitle" idx="1"/>
           </p:nvPr>
         </p:nvSpPr>
         <p:spPr>
@@ -3414,7 +3521,7 @@
           </a:ln>
         </p:spPr>
         <p:txBody>
-          <a:bodyPr anchorCtr="0" anchor="t" bIns="45700" lIns="91425" spcFirstLastPara="1" rIns="91425" wrap="square" tIns="45700">
+          <a:bodyPr spcFirstLastPara="1" wrap="square" lIns="91425" tIns="45700" rIns="91425" bIns="45700" anchor="t" anchorCtr="0">
             <a:normAutofit/>
           </a:bodyPr>
           <a:lstStyle>
@@ -3581,15 +3688,19 @@
               </a:defRPr>
             </a:lvl9pPr>
           </a:lstStyle>
-          <a:p/>
+          <a:p>
+            <a:endParaRPr/>
+          </a:p>
         </p:txBody>
       </p:sp>
       <p:sp>
         <p:nvSpPr>
           <p:cNvPr id="18" name="Google Shape;18;p3"/>
-          <p:cNvSpPr txBox="1"/>
+          <p:cNvSpPr txBox="1">
+            <a:spLocks noGrp="1"/>
+          </p:cNvSpPr>
           <p:nvPr>
-            <p:ph idx="10" type="dt"/>
+            <p:ph type="dt" idx="10"/>
           </p:nvPr>
         </p:nvSpPr>
         <p:spPr>
@@ -3606,7 +3717,7 @@
           </a:ln>
         </p:spPr>
         <p:txBody>
-          <a:bodyPr anchorCtr="0" anchor="ctr" bIns="45700" lIns="91425" spcFirstLastPara="1" rIns="91425" wrap="square" tIns="45700">
+          <a:bodyPr spcFirstLastPara="1" wrap="square" lIns="91425" tIns="45700" rIns="91425" bIns="45700" anchor="ctr" anchorCtr="0">
             <a:noAutofit/>
           </a:bodyPr>
           <a:lstStyle>
@@ -3710,15 +3821,19 @@
               <a:defRPr/>
             </a:lvl9pPr>
           </a:lstStyle>
-          <a:p/>
+          <a:p>
+            <a:endParaRPr/>
+          </a:p>
         </p:txBody>
       </p:sp>
       <p:sp>
         <p:nvSpPr>
           <p:cNvPr id="19" name="Google Shape;19;p3"/>
-          <p:cNvSpPr txBox="1"/>
+          <p:cNvSpPr txBox="1">
+            <a:spLocks noGrp="1"/>
+          </p:cNvSpPr>
           <p:nvPr>
-            <p:ph idx="11" type="ftr"/>
+            <p:ph type="ftr" idx="11"/>
           </p:nvPr>
         </p:nvSpPr>
         <p:spPr>
@@ -3735,7 +3850,7 @@
           </a:ln>
         </p:spPr>
         <p:txBody>
-          <a:bodyPr anchorCtr="0" anchor="ctr" bIns="45700" lIns="91425" spcFirstLastPara="1" rIns="91425" wrap="square" tIns="45700">
+          <a:bodyPr spcFirstLastPara="1" wrap="square" lIns="91425" tIns="45700" rIns="91425" bIns="45700" anchor="ctr" anchorCtr="0">
             <a:noAutofit/>
           </a:bodyPr>
           <a:lstStyle>
@@ -3839,15 +3954,19 @@
               <a:defRPr/>
             </a:lvl9pPr>
           </a:lstStyle>
-          <a:p/>
+          <a:p>
+            <a:endParaRPr/>
+          </a:p>
         </p:txBody>
       </p:sp>
       <p:sp>
         <p:nvSpPr>
           <p:cNvPr id="20" name="Google Shape;20;p3"/>
-          <p:cNvSpPr txBox="1"/>
+          <p:cNvSpPr txBox="1">
+            <a:spLocks noGrp="1"/>
+          </p:cNvSpPr>
           <p:nvPr>
-            <p:ph idx="12" type="sldNum"/>
+            <p:ph type="sldNum" idx="12"/>
           </p:nvPr>
         </p:nvSpPr>
         <p:spPr>
@@ -3864,67 +3983,67 @@
           </a:ln>
         </p:spPr>
         <p:txBody>
-          <a:bodyPr anchorCtr="0" anchor="ctr" bIns="45700" lIns="91425" spcFirstLastPara="1" rIns="91425" wrap="square" tIns="45700">
+          <a:bodyPr spcFirstLastPara="1" wrap="square" lIns="91425" tIns="45700" rIns="91425" bIns="45700" anchor="ctr" anchorCtr="0">
             <a:noAutofit/>
           </a:bodyPr>
           <a:lstStyle>
-            <a:lvl1pPr indent="0" lvl="0" marL="0" algn="r">
+            <a:lvl1pPr marL="0" lvl="0" indent="0" algn="r">
               <a:spcBef>
                 <a:spcPts val="0"/>
               </a:spcBef>
               <a:buNone/>
               <a:defRPr/>
             </a:lvl1pPr>
-            <a:lvl2pPr indent="0" lvl="1" marL="0" algn="r">
+            <a:lvl2pPr marL="0" lvl="1" indent="0" algn="r">
               <a:spcBef>
                 <a:spcPts val="0"/>
               </a:spcBef>
               <a:buNone/>
               <a:defRPr/>
             </a:lvl2pPr>
-            <a:lvl3pPr indent="0" lvl="2" marL="0" algn="r">
+            <a:lvl3pPr marL="0" lvl="2" indent="0" algn="r">
               <a:spcBef>
                 <a:spcPts val="0"/>
               </a:spcBef>
               <a:buNone/>
               <a:defRPr/>
             </a:lvl3pPr>
-            <a:lvl4pPr indent="0" lvl="3" marL="0" algn="r">
+            <a:lvl4pPr marL="0" lvl="3" indent="0" algn="r">
               <a:spcBef>
                 <a:spcPts val="0"/>
               </a:spcBef>
               <a:buNone/>
               <a:defRPr/>
             </a:lvl4pPr>
-            <a:lvl5pPr indent="0" lvl="4" marL="0" algn="r">
+            <a:lvl5pPr marL="0" lvl="4" indent="0" algn="r">
               <a:spcBef>
                 <a:spcPts val="0"/>
               </a:spcBef>
               <a:buNone/>
               <a:defRPr/>
             </a:lvl5pPr>
-            <a:lvl6pPr indent="0" lvl="5" marL="0" algn="r">
+            <a:lvl6pPr marL="0" lvl="5" indent="0" algn="r">
               <a:spcBef>
                 <a:spcPts val="0"/>
               </a:spcBef>
               <a:buNone/>
               <a:defRPr/>
             </a:lvl6pPr>
-            <a:lvl7pPr indent="0" lvl="6" marL="0" algn="r">
+            <a:lvl7pPr marL="0" lvl="6" indent="0" algn="r">
               <a:spcBef>
                 <a:spcPts val="0"/>
               </a:spcBef>
               <a:buNone/>
               <a:defRPr/>
             </a:lvl7pPr>
-            <a:lvl8pPr indent="0" lvl="7" marL="0" algn="r">
+            <a:lvl8pPr marL="0" lvl="7" indent="0" algn="r">
               <a:spcBef>
                 <a:spcPts val="0"/>
               </a:spcBef>
               <a:buNone/>
               <a:defRPr/>
             </a:lvl8pPr>
-            <a:lvl9pPr indent="0" lvl="8" marL="0" algn="r">
+            <a:lvl9pPr marL="0" lvl="8" indent="0" algn="r">
               <a:spcBef>
                 <a:spcPts val="0"/>
               </a:spcBef>
@@ -3933,7 +4052,7 @@
             </a:lvl9pPr>
           </a:lstStyle>
           <a:p>
-            <a:pPr indent="0" lvl="0" marL="0" rtl="0" algn="r">
+            <a:pPr marL="0" lvl="0" indent="0" algn="r" rtl="0">
               <a:spcBef>
                 <a:spcPts val="0"/>
               </a:spcBef>
@@ -3959,11 +4078,11 @@
 </file>
 
 <file path=ppt/slideLayouts/slideLayout3.xml><?xml version="1.0" encoding="utf-8"?>
-<p:sldLayout xmlns:a="http://schemas.openxmlformats.org/drawingml/2006/main" xmlns:r="http://schemas.openxmlformats.org/officeDocument/2006/relationships" xmlns:mc="http://schemas.openxmlformats.org/markup-compatibility/2006" xmlns:mv="urn:schemas-microsoft-com:mac:vml" xmlns:p="http://schemas.openxmlformats.org/presentationml/2006/main" xmlns:c="http://schemas.openxmlformats.org/drawingml/2006/chart" xmlns:dgm="http://schemas.openxmlformats.org/drawingml/2006/diagram" xmlns:o="urn:schemas-microsoft-com:office:office" xmlns:v="urn:schemas-microsoft-com:vml" xmlns:pvml="urn:schemas-microsoft-com:office:powerpoint" xmlns:com="http://schemas.openxmlformats.org/drawingml/2006/compatibility" xmlns:p14="http://schemas.microsoft.com/office/powerpoint/2010/main" xmlns:p15="http://schemas.microsoft.com/office/powerpoint/2012/main" xmlns:ahyp="http://schemas.microsoft.com/office/drawing/2018/hyperlinkcolor" matchingName="Title and Content" type="obj">
+<p:sldLayout xmlns:a="http://schemas.openxmlformats.org/drawingml/2006/main" xmlns:r="http://schemas.openxmlformats.org/officeDocument/2006/relationships" xmlns:p="http://schemas.openxmlformats.org/presentationml/2006/main" matchingName="Title and Content" type="obj">
   <p:cSld name="OBJECT">
     <p:spTree>
       <p:nvGrpSpPr>
-        <p:cNvPr id="21" name="Shape 21"/>
+        <p:cNvPr id="1" name="Shape 21"/>
         <p:cNvGrpSpPr/>
         <p:nvPr/>
       </p:nvGrpSpPr>
@@ -3978,7 +4097,9 @@
       <p:sp>
         <p:nvSpPr>
           <p:cNvPr id="22" name="Google Shape;22;p4"/>
-          <p:cNvSpPr txBox="1"/>
+          <p:cNvSpPr txBox="1">
+            <a:spLocks noGrp="1"/>
+          </p:cNvSpPr>
           <p:nvPr>
             <p:ph type="title"/>
           </p:nvPr>
@@ -3997,7 +4118,7 @@
           </a:ln>
         </p:spPr>
         <p:txBody>
-          <a:bodyPr anchorCtr="0" anchor="ctr" bIns="45700" lIns="91425" spcFirstLastPara="1" rIns="91425" wrap="square" tIns="45700">
+          <a:bodyPr spcFirstLastPara="1" wrap="square" lIns="91425" tIns="45700" rIns="91425" bIns="45700" anchor="ctr" anchorCtr="0">
             <a:normAutofit/>
           </a:bodyPr>
           <a:lstStyle>
@@ -4104,15 +4225,19 @@
               <a:defRPr/>
             </a:lvl9pPr>
           </a:lstStyle>
-          <a:p/>
+          <a:p>
+            <a:endParaRPr/>
+          </a:p>
         </p:txBody>
       </p:sp>
       <p:sp>
         <p:nvSpPr>
           <p:cNvPr id="23" name="Google Shape;23;p4"/>
-          <p:cNvSpPr txBox="1"/>
+          <p:cNvSpPr txBox="1">
+            <a:spLocks noGrp="1"/>
+          </p:cNvSpPr>
           <p:nvPr>
-            <p:ph idx="1" type="body"/>
+            <p:ph type="body" idx="1"/>
           </p:nvPr>
         </p:nvSpPr>
         <p:spPr>
@@ -4129,11 +4254,11 @@
           </a:ln>
         </p:spPr>
         <p:txBody>
-          <a:bodyPr anchorCtr="0" anchor="t" bIns="45700" lIns="91425" spcFirstLastPara="1" rIns="91425" wrap="square" tIns="45700">
+          <a:bodyPr spcFirstLastPara="1" wrap="square" lIns="91425" tIns="45700" rIns="91425" bIns="45700" anchor="t" anchorCtr="0">
             <a:normAutofit/>
           </a:bodyPr>
           <a:lstStyle>
-            <a:lvl1pPr indent="-342900" lvl="0" marL="457200" algn="l">
+            <a:lvl1pPr marL="457200" lvl="0" indent="-342900" algn="l">
               <a:spcBef>
                 <a:spcPts val="360"/>
               </a:spcBef>
@@ -4147,7 +4272,7 @@
               <a:buChar char="•"/>
               <a:defRPr/>
             </a:lvl1pPr>
-            <a:lvl2pPr indent="-342900" lvl="1" marL="914400" algn="l">
+            <a:lvl2pPr marL="914400" lvl="1" indent="-342900" algn="l">
               <a:spcBef>
                 <a:spcPts val="360"/>
               </a:spcBef>
@@ -4161,7 +4286,7 @@
               <a:buChar char="–"/>
               <a:defRPr/>
             </a:lvl2pPr>
-            <a:lvl3pPr indent="-342900" lvl="2" marL="1371600" algn="l">
+            <a:lvl3pPr marL="1371600" lvl="2" indent="-342900" algn="l">
               <a:spcBef>
                 <a:spcPts val="360"/>
               </a:spcBef>
@@ -4175,7 +4300,7 @@
               <a:buChar char="•"/>
               <a:defRPr/>
             </a:lvl3pPr>
-            <a:lvl4pPr indent="-342900" lvl="3" marL="1828800" algn="l">
+            <a:lvl4pPr marL="1828800" lvl="3" indent="-342900" algn="l">
               <a:spcBef>
                 <a:spcPts val="360"/>
               </a:spcBef>
@@ -4189,7 +4314,7 @@
               <a:buChar char="–"/>
               <a:defRPr/>
             </a:lvl4pPr>
-            <a:lvl5pPr indent="-342900" lvl="4" marL="2286000" algn="l">
+            <a:lvl5pPr marL="2286000" lvl="4" indent="-342900" algn="l">
               <a:spcBef>
                 <a:spcPts val="360"/>
               </a:spcBef>
@@ -4203,7 +4328,7 @@
               <a:buChar char="»"/>
               <a:defRPr/>
             </a:lvl5pPr>
-            <a:lvl6pPr indent="-342900" lvl="5" marL="2743200" algn="l">
+            <a:lvl6pPr marL="2743200" lvl="5" indent="-342900" algn="l">
               <a:spcBef>
                 <a:spcPts val="360"/>
               </a:spcBef>
@@ -4217,7 +4342,7 @@
               <a:buChar char="•"/>
               <a:defRPr/>
             </a:lvl6pPr>
-            <a:lvl7pPr indent="-342900" lvl="6" marL="3200400" algn="l">
+            <a:lvl7pPr marL="3200400" lvl="6" indent="-342900" algn="l">
               <a:spcBef>
                 <a:spcPts val="360"/>
               </a:spcBef>
@@ -4231,7 +4356,7 @@
               <a:buChar char="•"/>
               <a:defRPr/>
             </a:lvl7pPr>
-            <a:lvl8pPr indent="-342900" lvl="7" marL="3657600" algn="l">
+            <a:lvl8pPr marL="3657600" lvl="7" indent="-342900" algn="l">
               <a:spcBef>
                 <a:spcPts val="360"/>
               </a:spcBef>
@@ -4245,7 +4370,7 @@
               <a:buChar char="•"/>
               <a:defRPr/>
             </a:lvl8pPr>
-            <a:lvl9pPr indent="-342900" lvl="8" marL="4114800" algn="l">
+            <a:lvl9pPr marL="4114800" lvl="8" indent="-342900" algn="l">
               <a:spcBef>
                 <a:spcPts val="360"/>
               </a:spcBef>
@@ -4260,15 +4385,19 @@
               <a:defRPr/>
             </a:lvl9pPr>
           </a:lstStyle>
-          <a:p/>
+          <a:p>
+            <a:endParaRPr/>
+          </a:p>
         </p:txBody>
       </p:sp>
       <p:sp>
         <p:nvSpPr>
           <p:cNvPr id="24" name="Google Shape;24;p4"/>
-          <p:cNvSpPr txBox="1"/>
+          <p:cNvSpPr txBox="1">
+            <a:spLocks noGrp="1"/>
+          </p:cNvSpPr>
           <p:nvPr>
-            <p:ph idx="10" type="dt"/>
+            <p:ph type="dt" idx="10"/>
           </p:nvPr>
         </p:nvSpPr>
         <p:spPr>
@@ -4285,7 +4414,7 @@
           </a:ln>
         </p:spPr>
         <p:txBody>
-          <a:bodyPr anchorCtr="0" anchor="ctr" bIns="45700" lIns="91425" spcFirstLastPara="1" rIns="91425" wrap="square" tIns="45700">
+          <a:bodyPr spcFirstLastPara="1" wrap="square" lIns="91425" tIns="45700" rIns="91425" bIns="45700" anchor="ctr" anchorCtr="0">
             <a:noAutofit/>
           </a:bodyPr>
           <a:lstStyle>
@@ -4389,15 +4518,19 @@
               <a:defRPr/>
             </a:lvl9pPr>
           </a:lstStyle>
-          <a:p/>
+          <a:p>
+            <a:endParaRPr/>
+          </a:p>
         </p:txBody>
       </p:sp>
       <p:sp>
         <p:nvSpPr>
           <p:cNvPr id="25" name="Google Shape;25;p4"/>
-          <p:cNvSpPr txBox="1"/>
+          <p:cNvSpPr txBox="1">
+            <a:spLocks noGrp="1"/>
+          </p:cNvSpPr>
           <p:nvPr>
-            <p:ph idx="11" type="ftr"/>
+            <p:ph type="ftr" idx="11"/>
           </p:nvPr>
         </p:nvSpPr>
         <p:spPr>
@@ -4414,7 +4547,7 @@
           </a:ln>
         </p:spPr>
         <p:txBody>
-          <a:bodyPr anchorCtr="0" anchor="ctr" bIns="45700" lIns="91425" spcFirstLastPara="1" rIns="91425" wrap="square" tIns="45700">
+          <a:bodyPr spcFirstLastPara="1" wrap="square" lIns="91425" tIns="45700" rIns="91425" bIns="45700" anchor="ctr" anchorCtr="0">
             <a:noAutofit/>
           </a:bodyPr>
           <a:lstStyle>
@@ -4518,15 +4651,19 @@
               <a:defRPr/>
             </a:lvl9pPr>
           </a:lstStyle>
-          <a:p/>
+          <a:p>
+            <a:endParaRPr/>
+          </a:p>
         </p:txBody>
       </p:sp>
       <p:sp>
         <p:nvSpPr>
           <p:cNvPr id="26" name="Google Shape;26;p4"/>
-          <p:cNvSpPr txBox="1"/>
+          <p:cNvSpPr txBox="1">
+            <a:spLocks noGrp="1"/>
+          </p:cNvSpPr>
           <p:nvPr>
-            <p:ph idx="12" type="sldNum"/>
+            <p:ph type="sldNum" idx="12"/>
           </p:nvPr>
         </p:nvSpPr>
         <p:spPr>
@@ -4543,67 +4680,67 @@
           </a:ln>
         </p:spPr>
         <p:txBody>
-          <a:bodyPr anchorCtr="0" anchor="ctr" bIns="45700" lIns="91425" spcFirstLastPara="1" rIns="91425" wrap="square" tIns="45700">
+          <a:bodyPr spcFirstLastPara="1" wrap="square" lIns="91425" tIns="45700" rIns="91425" bIns="45700" anchor="ctr" anchorCtr="0">
             <a:noAutofit/>
           </a:bodyPr>
           <a:lstStyle>
-            <a:lvl1pPr indent="0" lvl="0" marL="0" algn="r">
+            <a:lvl1pPr marL="0" lvl="0" indent="0" algn="r">
               <a:spcBef>
                 <a:spcPts val="0"/>
               </a:spcBef>
               <a:buNone/>
               <a:defRPr/>
             </a:lvl1pPr>
-            <a:lvl2pPr indent="0" lvl="1" marL="0" algn="r">
+            <a:lvl2pPr marL="0" lvl="1" indent="0" algn="r">
               <a:spcBef>
                 <a:spcPts val="0"/>
               </a:spcBef>
               <a:buNone/>
               <a:defRPr/>
             </a:lvl2pPr>
-            <a:lvl3pPr indent="0" lvl="2" marL="0" algn="r">
+            <a:lvl3pPr marL="0" lvl="2" indent="0" algn="r">
               <a:spcBef>
                 <a:spcPts val="0"/>
               </a:spcBef>
               <a:buNone/>
               <a:defRPr/>
             </a:lvl3pPr>
-            <a:lvl4pPr indent="0" lvl="3" marL="0" algn="r">
+            <a:lvl4pPr marL="0" lvl="3" indent="0" algn="r">
               <a:spcBef>
                 <a:spcPts val="0"/>
               </a:spcBef>
               <a:buNone/>
               <a:defRPr/>
             </a:lvl4pPr>
-            <a:lvl5pPr indent="0" lvl="4" marL="0" algn="r">
+            <a:lvl5pPr marL="0" lvl="4" indent="0" algn="r">
               <a:spcBef>
                 <a:spcPts val="0"/>
               </a:spcBef>
               <a:buNone/>
               <a:defRPr/>
             </a:lvl5pPr>
-            <a:lvl6pPr indent="0" lvl="5" marL="0" algn="r">
+            <a:lvl6pPr marL="0" lvl="5" indent="0" algn="r">
               <a:spcBef>
                 <a:spcPts val="0"/>
               </a:spcBef>
               <a:buNone/>
               <a:defRPr/>
             </a:lvl6pPr>
-            <a:lvl7pPr indent="0" lvl="6" marL="0" algn="r">
+            <a:lvl7pPr marL="0" lvl="6" indent="0" algn="r">
               <a:spcBef>
                 <a:spcPts val="0"/>
               </a:spcBef>
               <a:buNone/>
               <a:defRPr/>
             </a:lvl7pPr>
-            <a:lvl8pPr indent="0" lvl="7" marL="0" algn="r">
+            <a:lvl8pPr marL="0" lvl="7" indent="0" algn="r">
               <a:spcBef>
                 <a:spcPts val="0"/>
               </a:spcBef>
               <a:buNone/>
               <a:defRPr/>
             </a:lvl8pPr>
-            <a:lvl9pPr indent="0" lvl="8" marL="0" algn="r">
+            <a:lvl9pPr marL="0" lvl="8" indent="0" algn="r">
               <a:spcBef>
                 <a:spcPts val="0"/>
               </a:spcBef>
@@ -4612,7 +4749,7 @@
             </a:lvl9pPr>
           </a:lstStyle>
           <a:p>
-            <a:pPr indent="0" lvl="0" marL="0" rtl="0" algn="r">
+            <a:pPr marL="0" lvl="0" indent="0" algn="r" rtl="0">
               <a:spcBef>
                 <a:spcPts val="0"/>
               </a:spcBef>
@@ -4638,11 +4775,11 @@
 </file>
 
 <file path=ppt/slideLayouts/slideLayout4.xml><?xml version="1.0" encoding="utf-8"?>
-<p:sldLayout xmlns:a="http://schemas.openxmlformats.org/drawingml/2006/main" xmlns:r="http://schemas.openxmlformats.org/officeDocument/2006/relationships" xmlns:mc="http://schemas.openxmlformats.org/markup-compatibility/2006" xmlns:mv="urn:schemas-microsoft-com:mac:vml" xmlns:p="http://schemas.openxmlformats.org/presentationml/2006/main" xmlns:c="http://schemas.openxmlformats.org/drawingml/2006/chart" xmlns:dgm="http://schemas.openxmlformats.org/drawingml/2006/diagram" xmlns:o="urn:schemas-microsoft-com:office:office" xmlns:v="urn:schemas-microsoft-com:vml" xmlns:pvml="urn:schemas-microsoft-com:office:powerpoint" xmlns:com="http://schemas.openxmlformats.org/drawingml/2006/compatibility" xmlns:p14="http://schemas.microsoft.com/office/powerpoint/2010/main" xmlns:p15="http://schemas.microsoft.com/office/powerpoint/2012/main" xmlns:ahyp="http://schemas.microsoft.com/office/drawing/2018/hyperlinkcolor" matchingName="Section Header" type="secHead">
+<p:sldLayout xmlns:a="http://schemas.openxmlformats.org/drawingml/2006/main" xmlns:r="http://schemas.openxmlformats.org/officeDocument/2006/relationships" xmlns:p="http://schemas.openxmlformats.org/presentationml/2006/main" matchingName="Section Header" type="secHead">
   <p:cSld name="SECTION_HEADER">
     <p:spTree>
       <p:nvGrpSpPr>
-        <p:cNvPr id="27" name="Shape 27"/>
+        <p:cNvPr id="1" name="Shape 27"/>
         <p:cNvGrpSpPr/>
         <p:nvPr/>
       </p:nvGrpSpPr>
@@ -4657,7 +4794,9 @@
       <p:sp>
         <p:nvSpPr>
           <p:cNvPr id="28" name="Google Shape;28;p5"/>
-          <p:cNvSpPr txBox="1"/>
+          <p:cNvSpPr txBox="1">
+            <a:spLocks noGrp="1"/>
+          </p:cNvSpPr>
           <p:nvPr>
             <p:ph type="title"/>
           </p:nvPr>
@@ -4676,7 +4815,7 @@
           </a:ln>
         </p:spPr>
         <p:txBody>
-          <a:bodyPr anchorCtr="0" anchor="t" bIns="45700" lIns="91425" spcFirstLastPara="1" rIns="91425" wrap="square" tIns="45700">
+          <a:bodyPr spcFirstLastPara="1" wrap="square" lIns="91425" tIns="45700" rIns="91425" bIns="45700" anchor="t" anchorCtr="0">
             <a:normAutofit/>
           </a:bodyPr>
           <a:lstStyle>
@@ -4693,7 +4832,7 @@
               <a:buSzPts val="4000"/>
               <a:buFont typeface="Calibri"/>
               <a:buNone/>
-              <a:defRPr b="1" sz="4000" cap="none"/>
+              <a:defRPr sz="4000" b="1" cap="none"/>
             </a:lvl1pPr>
             <a:lvl2pPr lvl="1">
               <a:spcBef>
@@ -4784,15 +4923,19 @@
               <a:defRPr/>
             </a:lvl9pPr>
           </a:lstStyle>
-          <a:p/>
+          <a:p>
+            <a:endParaRPr/>
+          </a:p>
         </p:txBody>
       </p:sp>
       <p:sp>
         <p:nvSpPr>
           <p:cNvPr id="29" name="Google Shape;29;p5"/>
-          <p:cNvSpPr txBox="1"/>
+          <p:cNvSpPr txBox="1">
+            <a:spLocks noGrp="1"/>
+          </p:cNvSpPr>
           <p:nvPr>
-            <p:ph idx="1" type="body"/>
+            <p:ph type="body" idx="1"/>
           </p:nvPr>
         </p:nvSpPr>
         <p:spPr>
@@ -4809,11 +4952,11 @@
           </a:ln>
         </p:spPr>
         <p:txBody>
-          <a:bodyPr anchorCtr="0" anchor="b" bIns="45700" lIns="91425" spcFirstLastPara="1" rIns="91425" wrap="square" tIns="45700">
+          <a:bodyPr spcFirstLastPara="1" wrap="square" lIns="91425" tIns="45700" rIns="91425" bIns="45700" anchor="b" anchorCtr="0">
             <a:normAutofit/>
           </a:bodyPr>
           <a:lstStyle>
-            <a:lvl1pPr indent="-228600" lvl="0" marL="457200" algn="l">
+            <a:lvl1pPr marL="457200" lvl="0" indent="-228600" algn="l">
               <a:spcBef>
                 <a:spcPts val="400"/>
               </a:spcBef>
@@ -4831,7 +4974,7 @@
                 </a:solidFill>
               </a:defRPr>
             </a:lvl1pPr>
-            <a:lvl2pPr indent="-228600" lvl="1" marL="914400" algn="l">
+            <a:lvl2pPr marL="914400" lvl="1" indent="-228600" algn="l">
               <a:spcBef>
                 <a:spcPts val="360"/>
               </a:spcBef>
@@ -4849,7 +4992,7 @@
                 </a:solidFill>
               </a:defRPr>
             </a:lvl2pPr>
-            <a:lvl3pPr indent="-228600" lvl="2" marL="1371600" algn="l">
+            <a:lvl3pPr marL="1371600" lvl="2" indent="-228600" algn="l">
               <a:spcBef>
                 <a:spcPts val="320"/>
               </a:spcBef>
@@ -4867,7 +5010,7 @@
                 </a:solidFill>
               </a:defRPr>
             </a:lvl3pPr>
-            <a:lvl4pPr indent="-228600" lvl="3" marL="1828800" algn="l">
+            <a:lvl4pPr marL="1828800" lvl="3" indent="-228600" algn="l">
               <a:spcBef>
                 <a:spcPts val="280"/>
               </a:spcBef>
@@ -4885,7 +5028,7 @@
                 </a:solidFill>
               </a:defRPr>
             </a:lvl4pPr>
-            <a:lvl5pPr indent="-228600" lvl="4" marL="2286000" algn="l">
+            <a:lvl5pPr marL="2286000" lvl="4" indent="-228600" algn="l">
               <a:spcBef>
                 <a:spcPts val="280"/>
               </a:spcBef>
@@ -4903,7 +5046,7 @@
                 </a:solidFill>
               </a:defRPr>
             </a:lvl5pPr>
-            <a:lvl6pPr indent="-228600" lvl="5" marL="2743200" algn="l">
+            <a:lvl6pPr marL="2743200" lvl="5" indent="-228600" algn="l">
               <a:spcBef>
                 <a:spcPts val="280"/>
               </a:spcBef>
@@ -4921,7 +5064,7 @@
                 </a:solidFill>
               </a:defRPr>
             </a:lvl6pPr>
-            <a:lvl7pPr indent="-228600" lvl="6" marL="3200400" algn="l">
+            <a:lvl7pPr marL="3200400" lvl="6" indent="-228600" algn="l">
               <a:spcBef>
                 <a:spcPts val="280"/>
               </a:spcBef>
@@ -4939,7 +5082,7 @@
                 </a:solidFill>
               </a:defRPr>
             </a:lvl7pPr>
-            <a:lvl8pPr indent="-228600" lvl="7" marL="3657600" algn="l">
+            <a:lvl8pPr marL="3657600" lvl="7" indent="-228600" algn="l">
               <a:spcBef>
                 <a:spcPts val="280"/>
               </a:spcBef>
@@ -4957,7 +5100,7 @@
                 </a:solidFill>
               </a:defRPr>
             </a:lvl8pPr>
-            <a:lvl9pPr indent="-228600" lvl="8" marL="4114800" algn="l">
+            <a:lvl9pPr marL="4114800" lvl="8" indent="-228600" algn="l">
               <a:spcBef>
                 <a:spcPts val="280"/>
               </a:spcBef>
@@ -4976,15 +5119,19 @@
               </a:defRPr>
             </a:lvl9pPr>
           </a:lstStyle>
-          <a:p/>
+          <a:p>
+            <a:endParaRPr/>
+          </a:p>
         </p:txBody>
       </p:sp>
       <p:sp>
         <p:nvSpPr>
           <p:cNvPr id="30" name="Google Shape;30;p5"/>
-          <p:cNvSpPr txBox="1"/>
+          <p:cNvSpPr txBox="1">
+            <a:spLocks noGrp="1"/>
+          </p:cNvSpPr>
           <p:nvPr>
-            <p:ph idx="10" type="dt"/>
+            <p:ph type="dt" idx="10"/>
           </p:nvPr>
         </p:nvSpPr>
         <p:spPr>
@@ -5001,7 +5148,7 @@
           </a:ln>
         </p:spPr>
         <p:txBody>
-          <a:bodyPr anchorCtr="0" anchor="ctr" bIns="45700" lIns="91425" spcFirstLastPara="1" rIns="91425" wrap="square" tIns="45700">
+          <a:bodyPr spcFirstLastPara="1" wrap="square" lIns="91425" tIns="45700" rIns="91425" bIns="45700" anchor="ctr" anchorCtr="0">
             <a:noAutofit/>
           </a:bodyPr>
           <a:lstStyle>
@@ -5105,15 +5252,19 @@
               <a:defRPr/>
             </a:lvl9pPr>
           </a:lstStyle>
-          <a:p/>
+          <a:p>
+            <a:endParaRPr/>
+          </a:p>
         </p:txBody>
       </p:sp>
       <p:sp>
         <p:nvSpPr>
           <p:cNvPr id="31" name="Google Shape;31;p5"/>
-          <p:cNvSpPr txBox="1"/>
+          <p:cNvSpPr txBox="1">
+            <a:spLocks noGrp="1"/>
+          </p:cNvSpPr>
           <p:nvPr>
-            <p:ph idx="11" type="ftr"/>
+            <p:ph type="ftr" idx="11"/>
           </p:nvPr>
         </p:nvSpPr>
         <p:spPr>
@@ -5130,7 +5281,7 @@
           </a:ln>
         </p:spPr>
         <p:txBody>
-          <a:bodyPr anchorCtr="0" anchor="ctr" bIns="45700" lIns="91425" spcFirstLastPara="1" rIns="91425" wrap="square" tIns="45700">
+          <a:bodyPr spcFirstLastPara="1" wrap="square" lIns="91425" tIns="45700" rIns="91425" bIns="45700" anchor="ctr" anchorCtr="0">
             <a:noAutofit/>
           </a:bodyPr>
           <a:lstStyle>
@@ -5234,15 +5385,19 @@
               <a:defRPr/>
             </a:lvl9pPr>
           </a:lstStyle>
-          <a:p/>
+          <a:p>
+            <a:endParaRPr/>
+          </a:p>
         </p:txBody>
       </p:sp>
       <p:sp>
         <p:nvSpPr>
           <p:cNvPr id="32" name="Google Shape;32;p5"/>
-          <p:cNvSpPr txBox="1"/>
+          <p:cNvSpPr txBox="1">
+            <a:spLocks noGrp="1"/>
+          </p:cNvSpPr>
           <p:nvPr>
-            <p:ph idx="12" type="sldNum"/>
+            <p:ph type="sldNum" idx="12"/>
           </p:nvPr>
         </p:nvSpPr>
         <p:spPr>
@@ -5259,67 +5414,67 @@
           </a:ln>
         </p:spPr>
         <p:txBody>
-          <a:bodyPr anchorCtr="0" anchor="ctr" bIns="45700" lIns="91425" spcFirstLastPara="1" rIns="91425" wrap="square" tIns="45700">
+          <a:bodyPr spcFirstLastPara="1" wrap="square" lIns="91425" tIns="45700" rIns="91425" bIns="45700" anchor="ctr" anchorCtr="0">
             <a:noAutofit/>
           </a:bodyPr>
           <a:lstStyle>
-            <a:lvl1pPr indent="0" lvl="0" marL="0" algn="r">
+            <a:lvl1pPr marL="0" lvl="0" indent="0" algn="r">
               <a:spcBef>
                 <a:spcPts val="0"/>
               </a:spcBef>
               <a:buNone/>
               <a:defRPr/>
             </a:lvl1pPr>
-            <a:lvl2pPr indent="0" lvl="1" marL="0" algn="r">
+            <a:lvl2pPr marL="0" lvl="1" indent="0" algn="r">
               <a:spcBef>
                 <a:spcPts val="0"/>
               </a:spcBef>
               <a:buNone/>
               <a:defRPr/>
             </a:lvl2pPr>
-            <a:lvl3pPr indent="0" lvl="2" marL="0" algn="r">
+            <a:lvl3pPr marL="0" lvl="2" indent="0" algn="r">
               <a:spcBef>
                 <a:spcPts val="0"/>
               </a:spcBef>
               <a:buNone/>
               <a:defRPr/>
             </a:lvl3pPr>
-            <a:lvl4pPr indent="0" lvl="3" marL="0" algn="r">
+            <a:lvl4pPr marL="0" lvl="3" indent="0" algn="r">
               <a:spcBef>
                 <a:spcPts val="0"/>
               </a:spcBef>
               <a:buNone/>
               <a:defRPr/>
             </a:lvl4pPr>
-            <a:lvl5pPr indent="0" lvl="4" marL="0" algn="r">
+            <a:lvl5pPr marL="0" lvl="4" indent="0" algn="r">
               <a:spcBef>
                 <a:spcPts val="0"/>
               </a:spcBef>
               <a:buNone/>
               <a:defRPr/>
             </a:lvl5pPr>
-            <a:lvl6pPr indent="0" lvl="5" marL="0" algn="r">
+            <a:lvl6pPr marL="0" lvl="5" indent="0" algn="r">
               <a:spcBef>
                 <a:spcPts val="0"/>
               </a:spcBef>
               <a:buNone/>
               <a:defRPr/>
             </a:lvl6pPr>
-            <a:lvl7pPr indent="0" lvl="6" marL="0" algn="r">
+            <a:lvl7pPr marL="0" lvl="6" indent="0" algn="r">
               <a:spcBef>
                 <a:spcPts val="0"/>
               </a:spcBef>
               <a:buNone/>
               <a:defRPr/>
             </a:lvl7pPr>
-            <a:lvl8pPr indent="0" lvl="7" marL="0" algn="r">
+            <a:lvl8pPr marL="0" lvl="7" indent="0" algn="r">
               <a:spcBef>
                 <a:spcPts val="0"/>
               </a:spcBef>
               <a:buNone/>
               <a:defRPr/>
             </a:lvl8pPr>
-            <a:lvl9pPr indent="0" lvl="8" marL="0" algn="r">
+            <a:lvl9pPr marL="0" lvl="8" indent="0" algn="r">
               <a:spcBef>
                 <a:spcPts val="0"/>
               </a:spcBef>
@@ -5328,7 +5483,7 @@
             </a:lvl9pPr>
           </a:lstStyle>
           <a:p>
-            <a:pPr indent="0" lvl="0" marL="0" rtl="0" algn="r">
+            <a:pPr marL="0" lvl="0" indent="0" algn="r" rtl="0">
               <a:spcBef>
                 <a:spcPts val="0"/>
               </a:spcBef>
@@ -5354,11 +5509,11 @@
 </file>
 
 <file path=ppt/slideLayouts/slideLayout5.xml><?xml version="1.0" encoding="utf-8"?>
-<p:sldLayout xmlns:a="http://schemas.openxmlformats.org/drawingml/2006/main" xmlns:r="http://schemas.openxmlformats.org/officeDocument/2006/relationships" xmlns:mc="http://schemas.openxmlformats.org/markup-compatibility/2006" xmlns:mv="urn:schemas-microsoft-com:mac:vml" xmlns:p="http://schemas.openxmlformats.org/presentationml/2006/main" xmlns:c="http://schemas.openxmlformats.org/drawingml/2006/chart" xmlns:dgm="http://schemas.openxmlformats.org/drawingml/2006/diagram" xmlns:o="urn:schemas-microsoft-com:office:office" xmlns:v="urn:schemas-microsoft-com:vml" xmlns:pvml="urn:schemas-microsoft-com:office:powerpoint" xmlns:com="http://schemas.openxmlformats.org/drawingml/2006/compatibility" xmlns:p14="http://schemas.microsoft.com/office/powerpoint/2010/main" xmlns:p15="http://schemas.microsoft.com/office/powerpoint/2012/main" xmlns:ahyp="http://schemas.microsoft.com/office/drawing/2018/hyperlinkcolor" matchingName="Two Content" type="twoObj">
+<p:sldLayout xmlns:a="http://schemas.openxmlformats.org/drawingml/2006/main" xmlns:r="http://schemas.openxmlformats.org/officeDocument/2006/relationships" xmlns:p="http://schemas.openxmlformats.org/presentationml/2006/main" matchingName="Two Content" type="twoObj">
   <p:cSld name="TWO_OBJECTS">
     <p:spTree>
       <p:nvGrpSpPr>
-        <p:cNvPr id="33" name="Shape 33"/>
+        <p:cNvPr id="1" name="Shape 33"/>
         <p:cNvGrpSpPr/>
         <p:nvPr/>
       </p:nvGrpSpPr>
@@ -5373,7 +5528,9 @@
       <p:sp>
         <p:nvSpPr>
           <p:cNvPr id="34" name="Google Shape;34;p6"/>
-          <p:cNvSpPr txBox="1"/>
+          <p:cNvSpPr txBox="1">
+            <a:spLocks noGrp="1"/>
+          </p:cNvSpPr>
           <p:nvPr>
             <p:ph type="title"/>
           </p:nvPr>
@@ -5392,7 +5549,7 @@
           </a:ln>
         </p:spPr>
         <p:txBody>
-          <a:bodyPr anchorCtr="0" anchor="ctr" bIns="45700" lIns="91425" spcFirstLastPara="1" rIns="91425" wrap="square" tIns="45700">
+          <a:bodyPr spcFirstLastPara="1" wrap="square" lIns="91425" tIns="45700" rIns="91425" bIns="45700" anchor="ctr" anchorCtr="0">
             <a:normAutofit/>
           </a:bodyPr>
           <a:lstStyle>
@@ -5499,15 +5656,19 @@
               <a:defRPr/>
             </a:lvl9pPr>
           </a:lstStyle>
-          <a:p/>
+          <a:p>
+            <a:endParaRPr/>
+          </a:p>
         </p:txBody>
       </p:sp>
       <p:sp>
         <p:nvSpPr>
           <p:cNvPr id="35" name="Google Shape;35;p6"/>
-          <p:cNvSpPr txBox="1"/>
+          <p:cNvSpPr txBox="1">
+            <a:spLocks noGrp="1"/>
+          </p:cNvSpPr>
           <p:nvPr>
-            <p:ph idx="1" type="body"/>
+            <p:ph type="body" idx="1"/>
           </p:nvPr>
         </p:nvSpPr>
         <p:spPr>
@@ -5524,11 +5685,11 @@
           </a:ln>
         </p:spPr>
         <p:txBody>
-          <a:bodyPr anchorCtr="0" anchor="t" bIns="45700" lIns="91425" spcFirstLastPara="1" rIns="91425" wrap="square" tIns="45700">
+          <a:bodyPr spcFirstLastPara="1" wrap="square" lIns="91425" tIns="45700" rIns="91425" bIns="45700" anchor="t" anchorCtr="0">
             <a:normAutofit/>
           </a:bodyPr>
           <a:lstStyle>
-            <a:lvl1pPr indent="-406400" lvl="0" marL="457200" algn="l">
+            <a:lvl1pPr marL="457200" lvl="0" indent="-406400" algn="l">
               <a:spcBef>
                 <a:spcPts val="560"/>
               </a:spcBef>
@@ -5542,7 +5703,7 @@
               <a:buChar char="•"/>
               <a:defRPr sz="2800"/>
             </a:lvl1pPr>
-            <a:lvl2pPr indent="-381000" lvl="1" marL="914400" algn="l">
+            <a:lvl2pPr marL="914400" lvl="1" indent="-381000" algn="l">
               <a:spcBef>
                 <a:spcPts val="480"/>
               </a:spcBef>
@@ -5556,7 +5717,7 @@
               <a:buChar char="–"/>
               <a:defRPr sz="2400"/>
             </a:lvl2pPr>
-            <a:lvl3pPr indent="-355600" lvl="2" marL="1371600" algn="l">
+            <a:lvl3pPr marL="1371600" lvl="2" indent="-355600" algn="l">
               <a:spcBef>
                 <a:spcPts val="400"/>
               </a:spcBef>
@@ -5570,7 +5731,7 @@
               <a:buChar char="•"/>
               <a:defRPr sz="2000"/>
             </a:lvl3pPr>
-            <a:lvl4pPr indent="-342900" lvl="3" marL="1828800" algn="l">
+            <a:lvl4pPr marL="1828800" lvl="3" indent="-342900" algn="l">
               <a:spcBef>
                 <a:spcPts val="360"/>
               </a:spcBef>
@@ -5584,7 +5745,7 @@
               <a:buChar char="–"/>
               <a:defRPr sz="1800"/>
             </a:lvl4pPr>
-            <a:lvl5pPr indent="-342900" lvl="4" marL="2286000" algn="l">
+            <a:lvl5pPr marL="2286000" lvl="4" indent="-342900" algn="l">
               <a:spcBef>
                 <a:spcPts val="360"/>
               </a:spcBef>
@@ -5598,7 +5759,7 @@
               <a:buChar char="»"/>
               <a:defRPr sz="1800"/>
             </a:lvl5pPr>
-            <a:lvl6pPr indent="-342900" lvl="5" marL="2743200" algn="l">
+            <a:lvl6pPr marL="2743200" lvl="5" indent="-342900" algn="l">
               <a:spcBef>
                 <a:spcPts val="360"/>
               </a:spcBef>
@@ -5612,7 +5773,7 @@
               <a:buChar char="•"/>
               <a:defRPr sz="1800"/>
             </a:lvl6pPr>
-            <a:lvl7pPr indent="-342900" lvl="6" marL="3200400" algn="l">
+            <a:lvl7pPr marL="3200400" lvl="6" indent="-342900" algn="l">
               <a:spcBef>
                 <a:spcPts val="360"/>
               </a:spcBef>
@@ -5626,7 +5787,7 @@
               <a:buChar char="•"/>
               <a:defRPr sz="1800"/>
             </a:lvl7pPr>
-            <a:lvl8pPr indent="-342900" lvl="7" marL="3657600" algn="l">
+            <a:lvl8pPr marL="3657600" lvl="7" indent="-342900" algn="l">
               <a:spcBef>
                 <a:spcPts val="360"/>
               </a:spcBef>
@@ -5640,7 +5801,7 @@
               <a:buChar char="•"/>
               <a:defRPr sz="1800"/>
             </a:lvl8pPr>
-            <a:lvl9pPr indent="-342900" lvl="8" marL="4114800" algn="l">
+            <a:lvl9pPr marL="4114800" lvl="8" indent="-342900" algn="l">
               <a:spcBef>
                 <a:spcPts val="360"/>
               </a:spcBef>
@@ -5655,15 +5816,19 @@
               <a:defRPr sz="1800"/>
             </a:lvl9pPr>
           </a:lstStyle>
-          <a:p/>
+          <a:p>
+            <a:endParaRPr/>
+          </a:p>
         </p:txBody>
       </p:sp>
       <p:sp>
         <p:nvSpPr>
           <p:cNvPr id="36" name="Google Shape;36;p6"/>
-          <p:cNvSpPr txBox="1"/>
+          <p:cNvSpPr txBox="1">
+            <a:spLocks noGrp="1"/>
+          </p:cNvSpPr>
           <p:nvPr>
-            <p:ph idx="2" type="body"/>
+            <p:ph type="body" idx="2"/>
           </p:nvPr>
         </p:nvSpPr>
         <p:spPr>
@@ -5680,11 +5845,11 @@
           </a:ln>
         </p:spPr>
         <p:txBody>
-          <a:bodyPr anchorCtr="0" anchor="t" bIns="45700" lIns="91425" spcFirstLastPara="1" rIns="91425" wrap="square" tIns="45700">
+          <a:bodyPr spcFirstLastPara="1" wrap="square" lIns="91425" tIns="45700" rIns="91425" bIns="45700" anchor="t" anchorCtr="0">
             <a:normAutofit/>
           </a:bodyPr>
           <a:lstStyle>
-            <a:lvl1pPr indent="-406400" lvl="0" marL="457200" algn="l">
+            <a:lvl1pPr marL="457200" lvl="0" indent="-406400" algn="l">
               <a:spcBef>
                 <a:spcPts val="560"/>
               </a:spcBef>
@@ -5698,7 +5863,7 @@
               <a:buChar char="•"/>
               <a:defRPr sz="2800"/>
             </a:lvl1pPr>
-            <a:lvl2pPr indent="-381000" lvl="1" marL="914400" algn="l">
+            <a:lvl2pPr marL="914400" lvl="1" indent="-381000" algn="l">
               <a:spcBef>
                 <a:spcPts val="480"/>
               </a:spcBef>
@@ -5712,7 +5877,7 @@
               <a:buChar char="–"/>
               <a:defRPr sz="2400"/>
             </a:lvl2pPr>
-            <a:lvl3pPr indent="-355600" lvl="2" marL="1371600" algn="l">
+            <a:lvl3pPr marL="1371600" lvl="2" indent="-355600" algn="l">
               <a:spcBef>
                 <a:spcPts val="400"/>
               </a:spcBef>
@@ -5726,7 +5891,7 @@
               <a:buChar char="•"/>
               <a:defRPr sz="2000"/>
             </a:lvl3pPr>
-            <a:lvl4pPr indent="-342900" lvl="3" marL="1828800" algn="l">
+            <a:lvl4pPr marL="1828800" lvl="3" indent="-342900" algn="l">
               <a:spcBef>
                 <a:spcPts val="360"/>
               </a:spcBef>
@@ -5740,7 +5905,7 @@
               <a:buChar char="–"/>
               <a:defRPr sz="1800"/>
             </a:lvl4pPr>
-            <a:lvl5pPr indent="-342900" lvl="4" marL="2286000" algn="l">
+            <a:lvl5pPr marL="2286000" lvl="4" indent="-342900" algn="l">
               <a:spcBef>
                 <a:spcPts val="360"/>
               </a:spcBef>
@@ -5754,7 +5919,7 @@
               <a:buChar char="»"/>
               <a:defRPr sz="1800"/>
             </a:lvl5pPr>
-            <a:lvl6pPr indent="-342900" lvl="5" marL="2743200" algn="l">
+            <a:lvl6pPr marL="2743200" lvl="5" indent="-342900" algn="l">
               <a:spcBef>
                 <a:spcPts val="360"/>
               </a:spcBef>
@@ -5768,7 +5933,7 @@
               <a:buChar char="•"/>
               <a:defRPr sz="1800"/>
             </a:lvl6pPr>
-            <a:lvl7pPr indent="-342900" lvl="6" marL="3200400" algn="l">
+            <a:lvl7pPr marL="3200400" lvl="6" indent="-342900" algn="l">
               <a:spcBef>
                 <a:spcPts val="360"/>
               </a:spcBef>
@@ -5782,7 +5947,7 @@
               <a:buChar char="•"/>
               <a:defRPr sz="1800"/>
             </a:lvl7pPr>
-            <a:lvl8pPr indent="-342900" lvl="7" marL="3657600" algn="l">
+            <a:lvl8pPr marL="3657600" lvl="7" indent="-342900" algn="l">
               <a:spcBef>
                 <a:spcPts val="360"/>
               </a:spcBef>
@@ -5796,7 +5961,7 @@
               <a:buChar char="•"/>
               <a:defRPr sz="1800"/>
             </a:lvl8pPr>
-            <a:lvl9pPr indent="-342900" lvl="8" marL="4114800" algn="l">
+            <a:lvl9pPr marL="4114800" lvl="8" indent="-342900" algn="l">
               <a:spcBef>
                 <a:spcPts val="360"/>
               </a:spcBef>
@@ -5811,15 +5976,19 @@
               <a:defRPr sz="1800"/>
             </a:lvl9pPr>
           </a:lstStyle>
-          <a:p/>
+          <a:p>
+            <a:endParaRPr/>
+          </a:p>
         </p:txBody>
       </p:sp>
       <p:sp>
         <p:nvSpPr>
           <p:cNvPr id="37" name="Google Shape;37;p6"/>
-          <p:cNvSpPr txBox="1"/>
+          <p:cNvSpPr txBox="1">
+            <a:spLocks noGrp="1"/>
+          </p:cNvSpPr>
           <p:nvPr>
-            <p:ph idx="10" type="dt"/>
+            <p:ph type="dt" idx="10"/>
           </p:nvPr>
         </p:nvSpPr>
         <p:spPr>
@@ -5836,7 +6005,7 @@
           </a:ln>
         </p:spPr>
         <p:txBody>
-          <a:bodyPr anchorCtr="0" anchor="ctr" bIns="45700" lIns="91425" spcFirstLastPara="1" rIns="91425" wrap="square" tIns="45700">
+          <a:bodyPr spcFirstLastPara="1" wrap="square" lIns="91425" tIns="45700" rIns="91425" bIns="45700" anchor="ctr" anchorCtr="0">
             <a:noAutofit/>
           </a:bodyPr>
           <a:lstStyle>
@@ -5940,15 +6109,19 @@
               <a:defRPr/>
             </a:lvl9pPr>
           </a:lstStyle>
-          <a:p/>
+          <a:p>
+            <a:endParaRPr/>
+          </a:p>
         </p:txBody>
       </p:sp>
       <p:sp>
         <p:nvSpPr>
           <p:cNvPr id="38" name="Google Shape;38;p6"/>
-          <p:cNvSpPr txBox="1"/>
+          <p:cNvSpPr txBox="1">
+            <a:spLocks noGrp="1"/>
+          </p:cNvSpPr>
           <p:nvPr>
-            <p:ph idx="11" type="ftr"/>
+            <p:ph type="ftr" idx="11"/>
           </p:nvPr>
         </p:nvSpPr>
         <p:spPr>
@@ -5965,7 +6138,7 @@
           </a:ln>
         </p:spPr>
         <p:txBody>
-          <a:bodyPr anchorCtr="0" anchor="ctr" bIns="45700" lIns="91425" spcFirstLastPara="1" rIns="91425" wrap="square" tIns="45700">
+          <a:bodyPr spcFirstLastPara="1" wrap="square" lIns="91425" tIns="45700" rIns="91425" bIns="45700" anchor="ctr" anchorCtr="0">
             <a:noAutofit/>
           </a:bodyPr>
           <a:lstStyle>
@@ -6069,15 +6242,19 @@
               <a:defRPr/>
             </a:lvl9pPr>
           </a:lstStyle>
-          <a:p/>
+          <a:p>
+            <a:endParaRPr/>
+          </a:p>
         </p:txBody>
       </p:sp>
       <p:sp>
         <p:nvSpPr>
           <p:cNvPr id="39" name="Google Shape;39;p6"/>
-          <p:cNvSpPr txBox="1"/>
+          <p:cNvSpPr txBox="1">
+            <a:spLocks noGrp="1"/>
+          </p:cNvSpPr>
           <p:nvPr>
-            <p:ph idx="12" type="sldNum"/>
+            <p:ph type="sldNum" idx="12"/>
           </p:nvPr>
         </p:nvSpPr>
         <p:spPr>
@@ -6094,67 +6271,67 @@
           </a:ln>
         </p:spPr>
         <p:txBody>
-          <a:bodyPr anchorCtr="0" anchor="ctr" bIns="45700" lIns="91425" spcFirstLastPara="1" rIns="91425" wrap="square" tIns="45700">
+          <a:bodyPr spcFirstLastPara="1" wrap="square" lIns="91425" tIns="45700" rIns="91425" bIns="45700" anchor="ctr" anchorCtr="0">
             <a:noAutofit/>
           </a:bodyPr>
           <a:lstStyle>
-            <a:lvl1pPr indent="0" lvl="0" marL="0" algn="r">
+            <a:lvl1pPr marL="0" lvl="0" indent="0" algn="r">
               <a:spcBef>
                 <a:spcPts val="0"/>
               </a:spcBef>
               <a:buNone/>
               <a:defRPr/>
             </a:lvl1pPr>
-            <a:lvl2pPr indent="0" lvl="1" marL="0" algn="r">
+            <a:lvl2pPr marL="0" lvl="1" indent="0" algn="r">
               <a:spcBef>
                 <a:spcPts val="0"/>
               </a:spcBef>
               <a:buNone/>
               <a:defRPr/>
             </a:lvl2pPr>
-            <a:lvl3pPr indent="0" lvl="2" marL="0" algn="r">
+            <a:lvl3pPr marL="0" lvl="2" indent="0" algn="r">
               <a:spcBef>
                 <a:spcPts val="0"/>
               </a:spcBef>
               <a:buNone/>
               <a:defRPr/>
             </a:lvl3pPr>
-            <a:lvl4pPr indent="0" lvl="3" marL="0" algn="r">
+            <a:lvl4pPr marL="0" lvl="3" indent="0" algn="r">
               <a:spcBef>
                 <a:spcPts val="0"/>
               </a:spcBef>
               <a:buNone/>
               <a:defRPr/>
             </a:lvl4pPr>
-            <a:lvl5pPr indent="0" lvl="4" marL="0" algn="r">
+            <a:lvl5pPr marL="0" lvl="4" indent="0" algn="r">
               <a:spcBef>
                 <a:spcPts val="0"/>
               </a:spcBef>
               <a:buNone/>
               <a:defRPr/>
             </a:lvl5pPr>
-            <a:lvl6pPr indent="0" lvl="5" marL="0" algn="r">
+            <a:lvl6pPr marL="0" lvl="5" indent="0" algn="r">
               <a:spcBef>
                 <a:spcPts val="0"/>
               </a:spcBef>
               <a:buNone/>
               <a:defRPr/>
             </a:lvl6pPr>
-            <a:lvl7pPr indent="0" lvl="6" marL="0" algn="r">
+            <a:lvl7pPr marL="0" lvl="6" indent="0" algn="r">
               <a:spcBef>
                 <a:spcPts val="0"/>
               </a:spcBef>
               <a:buNone/>
               <a:defRPr/>
             </a:lvl7pPr>
-            <a:lvl8pPr indent="0" lvl="7" marL="0" algn="r">
+            <a:lvl8pPr marL="0" lvl="7" indent="0" algn="r">
               <a:spcBef>
                 <a:spcPts val="0"/>
               </a:spcBef>
               <a:buNone/>
               <a:defRPr/>
             </a:lvl8pPr>
-            <a:lvl9pPr indent="0" lvl="8" marL="0" algn="r">
+            <a:lvl9pPr marL="0" lvl="8" indent="0" algn="r">
               <a:spcBef>
                 <a:spcPts val="0"/>
               </a:spcBef>
@@ -6163,7 +6340,7 @@
             </a:lvl9pPr>
           </a:lstStyle>
           <a:p>
-            <a:pPr indent="0" lvl="0" marL="0" rtl="0" algn="r">
+            <a:pPr marL="0" lvl="0" indent="0" algn="r" rtl="0">
               <a:spcBef>
                 <a:spcPts val="0"/>
               </a:spcBef>
@@ -6189,11 +6366,11 @@
 </file>
 
 <file path=ppt/slideLayouts/slideLayout6.xml><?xml version="1.0" encoding="utf-8"?>
-<p:sldLayout xmlns:a="http://schemas.openxmlformats.org/drawingml/2006/main" xmlns:r="http://schemas.openxmlformats.org/officeDocument/2006/relationships" xmlns:mc="http://schemas.openxmlformats.org/markup-compatibility/2006" xmlns:mv="urn:schemas-microsoft-com:mac:vml" xmlns:p="http://schemas.openxmlformats.org/presentationml/2006/main" xmlns:c="http://schemas.openxmlformats.org/drawingml/2006/chart" xmlns:dgm="http://schemas.openxmlformats.org/drawingml/2006/diagram" xmlns:o="urn:schemas-microsoft-com:office:office" xmlns:v="urn:schemas-microsoft-com:vml" xmlns:pvml="urn:schemas-microsoft-com:office:powerpoint" xmlns:com="http://schemas.openxmlformats.org/drawingml/2006/compatibility" xmlns:p14="http://schemas.microsoft.com/office/powerpoint/2010/main" xmlns:p15="http://schemas.microsoft.com/office/powerpoint/2012/main" xmlns:ahyp="http://schemas.microsoft.com/office/drawing/2018/hyperlinkcolor" matchingName="Comparison" type="twoTxTwoObj">
+<p:sldLayout xmlns:a="http://schemas.openxmlformats.org/drawingml/2006/main" xmlns:r="http://schemas.openxmlformats.org/officeDocument/2006/relationships" xmlns:p="http://schemas.openxmlformats.org/presentationml/2006/main" matchingName="Comparison" type="twoTxTwoObj">
   <p:cSld name="TWO_OBJECTS_WITH_TEXT">
     <p:spTree>
       <p:nvGrpSpPr>
-        <p:cNvPr id="40" name="Shape 40"/>
+        <p:cNvPr id="1" name="Shape 40"/>
         <p:cNvGrpSpPr/>
         <p:nvPr/>
       </p:nvGrpSpPr>
@@ -6208,7 +6385,9 @@
       <p:sp>
         <p:nvSpPr>
           <p:cNvPr id="41" name="Google Shape;41;p7"/>
-          <p:cNvSpPr txBox="1"/>
+          <p:cNvSpPr txBox="1">
+            <a:spLocks noGrp="1"/>
+          </p:cNvSpPr>
           <p:nvPr>
             <p:ph type="title"/>
           </p:nvPr>
@@ -6227,7 +6406,7 @@
           </a:ln>
         </p:spPr>
         <p:txBody>
-          <a:bodyPr anchorCtr="0" anchor="ctr" bIns="45700" lIns="91425" spcFirstLastPara="1" rIns="91425" wrap="square" tIns="45700">
+          <a:bodyPr spcFirstLastPara="1" wrap="square" lIns="91425" tIns="45700" rIns="91425" bIns="45700" anchor="ctr" anchorCtr="0">
             <a:normAutofit/>
           </a:bodyPr>
           <a:lstStyle>
@@ -6335,15 +6514,19 @@
               <a:defRPr/>
             </a:lvl9pPr>
           </a:lstStyle>
-          <a:p/>
+          <a:p>
+            <a:endParaRPr/>
+          </a:p>
         </p:txBody>
       </p:sp>
       <p:sp>
         <p:nvSpPr>
           <p:cNvPr id="42" name="Google Shape;42;p7"/>
-          <p:cNvSpPr txBox="1"/>
+          <p:cNvSpPr txBox="1">
+            <a:spLocks noGrp="1"/>
+          </p:cNvSpPr>
           <p:nvPr>
-            <p:ph idx="1" type="body"/>
+            <p:ph type="body" idx="1"/>
           </p:nvPr>
         </p:nvSpPr>
         <p:spPr>
@@ -6360,11 +6543,11 @@
           </a:ln>
         </p:spPr>
         <p:txBody>
-          <a:bodyPr anchorCtr="0" anchor="b" bIns="45700" lIns="91425" spcFirstLastPara="1" rIns="91425" wrap="square" tIns="45700">
+          <a:bodyPr spcFirstLastPara="1" wrap="square" lIns="91425" tIns="45700" rIns="91425" bIns="45700" anchor="b" anchorCtr="0">
             <a:normAutofit/>
           </a:bodyPr>
           <a:lstStyle>
-            <a:lvl1pPr indent="-228600" lvl="0" marL="457200" algn="l">
+            <a:lvl1pPr marL="457200" lvl="0" indent="-228600" algn="l">
               <a:spcBef>
                 <a:spcPts val="480"/>
               </a:spcBef>
@@ -6376,9 +6559,9 @@
               </a:buClr>
               <a:buSzPts val="2400"/>
               <a:buNone/>
-              <a:defRPr b="1" sz="2400"/>
+              <a:defRPr sz="2400" b="1"/>
             </a:lvl1pPr>
-            <a:lvl2pPr indent="-228600" lvl="1" marL="914400" algn="l">
+            <a:lvl2pPr marL="914400" lvl="1" indent="-228600" algn="l">
               <a:spcBef>
                 <a:spcPts val="400"/>
               </a:spcBef>
@@ -6390,9 +6573,9 @@
               </a:buClr>
               <a:buSzPts val="2000"/>
               <a:buNone/>
-              <a:defRPr b="1" sz="2000"/>
+              <a:defRPr sz="2000" b="1"/>
             </a:lvl2pPr>
-            <a:lvl3pPr indent="-228600" lvl="2" marL="1371600" algn="l">
+            <a:lvl3pPr marL="1371600" lvl="2" indent="-228600" algn="l">
               <a:spcBef>
                 <a:spcPts val="360"/>
               </a:spcBef>
@@ -6404,9 +6587,9 @@
               </a:buClr>
               <a:buSzPts val="1800"/>
               <a:buNone/>
-              <a:defRPr b="1" sz="1800"/>
+              <a:defRPr sz="1800" b="1"/>
             </a:lvl3pPr>
-            <a:lvl4pPr indent="-228600" lvl="3" marL="1828800" algn="l">
+            <a:lvl4pPr marL="1828800" lvl="3" indent="-228600" algn="l">
               <a:spcBef>
                 <a:spcPts val="320"/>
               </a:spcBef>
@@ -6418,9 +6601,9 @@
               </a:buClr>
               <a:buSzPts val="1600"/>
               <a:buNone/>
-              <a:defRPr b="1" sz="1600"/>
+              <a:defRPr sz="1600" b="1"/>
             </a:lvl4pPr>
-            <a:lvl5pPr indent="-228600" lvl="4" marL="2286000" algn="l">
+            <a:lvl5pPr marL="2286000" lvl="4" indent="-228600" algn="l">
               <a:spcBef>
                 <a:spcPts val="320"/>
               </a:spcBef>
@@ -6432,9 +6615,9 @@
               </a:buClr>
               <a:buSzPts val="1600"/>
               <a:buNone/>
-              <a:defRPr b="1" sz="1600"/>
+              <a:defRPr sz="1600" b="1"/>
             </a:lvl5pPr>
-            <a:lvl6pPr indent="-228600" lvl="5" marL="2743200" algn="l">
+            <a:lvl6pPr marL="2743200" lvl="5" indent="-228600" algn="l">
               <a:spcBef>
                 <a:spcPts val="320"/>
               </a:spcBef>
@@ -6446,9 +6629,9 @@
               </a:buClr>
               <a:buSzPts val="1600"/>
               <a:buNone/>
-              <a:defRPr b="1" sz="1600"/>
+              <a:defRPr sz="1600" b="1"/>
             </a:lvl6pPr>
-            <a:lvl7pPr indent="-228600" lvl="6" marL="3200400" algn="l">
+            <a:lvl7pPr marL="3200400" lvl="6" indent="-228600" algn="l">
               <a:spcBef>
                 <a:spcPts val="320"/>
               </a:spcBef>
@@ -6460,9 +6643,9 @@
               </a:buClr>
               <a:buSzPts val="1600"/>
               <a:buNone/>
-              <a:defRPr b="1" sz="1600"/>
+              <a:defRPr sz="1600" b="1"/>
             </a:lvl7pPr>
-            <a:lvl8pPr indent="-228600" lvl="7" marL="3657600" algn="l">
+            <a:lvl8pPr marL="3657600" lvl="7" indent="-228600" algn="l">
               <a:spcBef>
                 <a:spcPts val="320"/>
               </a:spcBef>
@@ -6474,9 +6657,9 @@
               </a:buClr>
               <a:buSzPts val="1600"/>
               <a:buNone/>
-              <a:defRPr b="1" sz="1600"/>
+              <a:defRPr sz="1600" b="1"/>
             </a:lvl8pPr>
-            <a:lvl9pPr indent="-228600" lvl="8" marL="4114800" algn="l">
+            <a:lvl9pPr marL="4114800" lvl="8" indent="-228600" algn="l">
               <a:spcBef>
                 <a:spcPts val="320"/>
               </a:spcBef>
@@ -6488,18 +6671,22 @@
               </a:buClr>
               <a:buSzPts val="1600"/>
               <a:buNone/>
-              <a:defRPr b="1" sz="1600"/>
+              <a:defRPr sz="1600" b="1"/>
             </a:lvl9pPr>
           </a:lstStyle>
-          <a:p/>
+          <a:p>
+            <a:endParaRPr/>
+          </a:p>
         </p:txBody>
       </p:sp>
       <p:sp>
         <p:nvSpPr>
           <p:cNvPr id="43" name="Google Shape;43;p7"/>
-          <p:cNvSpPr txBox="1"/>
+          <p:cNvSpPr txBox="1">
+            <a:spLocks noGrp="1"/>
+          </p:cNvSpPr>
           <p:nvPr>
-            <p:ph idx="2" type="body"/>
+            <p:ph type="body" idx="2"/>
           </p:nvPr>
         </p:nvSpPr>
         <p:spPr>
@@ -6516,11 +6703,11 @@
           </a:ln>
         </p:spPr>
         <p:txBody>
-          <a:bodyPr anchorCtr="0" anchor="t" bIns="45700" lIns="91425" spcFirstLastPara="1" rIns="91425" wrap="square" tIns="45700">
+          <a:bodyPr spcFirstLastPara="1" wrap="square" lIns="91425" tIns="45700" rIns="91425" bIns="45700" anchor="t" anchorCtr="0">
             <a:normAutofit/>
           </a:bodyPr>
           <a:lstStyle>
-            <a:lvl1pPr indent="-381000" lvl="0" marL="457200" algn="l">
+            <a:lvl1pPr marL="457200" lvl="0" indent="-381000" algn="l">
               <a:spcBef>
                 <a:spcPts val="480"/>
               </a:spcBef>
@@ -6534,7 +6721,7 @@
               <a:buChar char="•"/>
               <a:defRPr sz="2400"/>
             </a:lvl1pPr>
-            <a:lvl2pPr indent="-355600" lvl="1" marL="914400" algn="l">
+            <a:lvl2pPr marL="914400" lvl="1" indent="-355600" algn="l">
               <a:spcBef>
                 <a:spcPts val="400"/>
               </a:spcBef>
@@ -6548,7 +6735,7 @@
               <a:buChar char="–"/>
               <a:defRPr sz="2000"/>
             </a:lvl2pPr>
-            <a:lvl3pPr indent="-342900" lvl="2" marL="1371600" algn="l">
+            <a:lvl3pPr marL="1371600" lvl="2" indent="-342900" algn="l">
               <a:spcBef>
                 <a:spcPts val="360"/>
               </a:spcBef>
@@ -6562,7 +6749,7 @@
               <a:buChar char="•"/>
               <a:defRPr sz="1800"/>
             </a:lvl3pPr>
-            <a:lvl4pPr indent="-330200" lvl="3" marL="1828800" algn="l">
+            <a:lvl4pPr marL="1828800" lvl="3" indent="-330200" algn="l">
               <a:spcBef>
                 <a:spcPts val="320"/>
               </a:spcBef>
@@ -6576,7 +6763,7 @@
               <a:buChar char="–"/>
               <a:defRPr sz="1600"/>
             </a:lvl4pPr>
-            <a:lvl5pPr indent="-330200" lvl="4" marL="2286000" algn="l">
+            <a:lvl5pPr marL="2286000" lvl="4" indent="-330200" algn="l">
               <a:spcBef>
                 <a:spcPts val="320"/>
               </a:spcBef>
@@ -6590,7 +6777,7 @@
               <a:buChar char="»"/>
               <a:defRPr sz="1600"/>
             </a:lvl5pPr>
-            <a:lvl6pPr indent="-330200" lvl="5" marL="2743200" algn="l">
+            <a:lvl6pPr marL="2743200" lvl="5" indent="-330200" algn="l">
               <a:spcBef>
                 <a:spcPts val="320"/>
               </a:spcBef>
@@ -6604,7 +6791,7 @@
               <a:buChar char="•"/>
               <a:defRPr sz="1600"/>
             </a:lvl6pPr>
-            <a:lvl7pPr indent="-330200" lvl="6" marL="3200400" algn="l">
+            <a:lvl7pPr marL="3200400" lvl="6" indent="-330200" algn="l">
               <a:spcBef>
                 <a:spcPts val="320"/>
               </a:spcBef>
@@ -6618,7 +6805,7 @@
               <a:buChar char="•"/>
               <a:defRPr sz="1600"/>
             </a:lvl7pPr>
-            <a:lvl8pPr indent="-330200" lvl="7" marL="3657600" algn="l">
+            <a:lvl8pPr marL="3657600" lvl="7" indent="-330200" algn="l">
               <a:spcBef>
                 <a:spcPts val="320"/>
               </a:spcBef>
@@ -6632,7 +6819,7 @@
               <a:buChar char="•"/>
               <a:defRPr sz="1600"/>
             </a:lvl8pPr>
-            <a:lvl9pPr indent="-330200" lvl="8" marL="4114800" algn="l">
+            <a:lvl9pPr marL="4114800" lvl="8" indent="-330200" algn="l">
               <a:spcBef>
                 <a:spcPts val="320"/>
               </a:spcBef>
@@ -6647,15 +6834,19 @@
               <a:defRPr sz="1600"/>
             </a:lvl9pPr>
           </a:lstStyle>
-          <a:p/>
+          <a:p>
+            <a:endParaRPr/>
+          </a:p>
         </p:txBody>
       </p:sp>
       <p:sp>
         <p:nvSpPr>
           <p:cNvPr id="44" name="Google Shape;44;p7"/>
-          <p:cNvSpPr txBox="1"/>
+          <p:cNvSpPr txBox="1">
+            <a:spLocks noGrp="1"/>
+          </p:cNvSpPr>
           <p:nvPr>
-            <p:ph idx="3" type="body"/>
+            <p:ph type="body" idx="3"/>
           </p:nvPr>
         </p:nvSpPr>
         <p:spPr>
@@ -6672,11 +6863,11 @@
           </a:ln>
         </p:spPr>
         <p:txBody>
-          <a:bodyPr anchorCtr="0" anchor="b" bIns="45700" lIns="91425" spcFirstLastPara="1" rIns="91425" wrap="square" tIns="45700">
+          <a:bodyPr spcFirstLastPara="1" wrap="square" lIns="91425" tIns="45700" rIns="91425" bIns="45700" anchor="b" anchorCtr="0">
             <a:normAutofit/>
           </a:bodyPr>
           <a:lstStyle>
-            <a:lvl1pPr indent="-228600" lvl="0" marL="457200" algn="l">
+            <a:lvl1pPr marL="457200" lvl="0" indent="-228600" algn="l">
               <a:spcBef>
                 <a:spcPts val="480"/>
               </a:spcBef>
@@ -6688,9 +6879,9 @@
               </a:buClr>
               <a:buSzPts val="2400"/>
               <a:buNone/>
-              <a:defRPr b="1" sz="2400"/>
+              <a:defRPr sz="2400" b="1"/>
             </a:lvl1pPr>
-            <a:lvl2pPr indent="-228600" lvl="1" marL="914400" algn="l">
+            <a:lvl2pPr marL="914400" lvl="1" indent="-228600" algn="l">
               <a:spcBef>
                 <a:spcPts val="400"/>
               </a:spcBef>
@@ -6702,9 +6893,9 @@
               </a:buClr>
               <a:buSzPts val="2000"/>
               <a:buNone/>
-              <a:defRPr b="1" sz="2000"/>
+              <a:defRPr sz="2000" b="1"/>
             </a:lvl2pPr>
-            <a:lvl3pPr indent="-228600" lvl="2" marL="1371600" algn="l">
+            <a:lvl3pPr marL="1371600" lvl="2" indent="-228600" algn="l">
               <a:spcBef>
                 <a:spcPts val="360"/>
               </a:spcBef>
@@ -6716,9 +6907,9 @@
               </a:buClr>
               <a:buSzPts val="1800"/>
               <a:buNone/>
-              <a:defRPr b="1" sz="1800"/>
+              <a:defRPr sz="1800" b="1"/>
             </a:lvl3pPr>
-            <a:lvl4pPr indent="-228600" lvl="3" marL="1828800" algn="l">
+            <a:lvl4pPr marL="1828800" lvl="3" indent="-228600" algn="l">
               <a:spcBef>
                 <a:spcPts val="320"/>
               </a:spcBef>
@@ -6730,9 +6921,9 @@
               </a:buClr>
               <a:buSzPts val="1600"/>
               <a:buNone/>
-              <a:defRPr b="1" sz="1600"/>
+              <a:defRPr sz="1600" b="1"/>
             </a:lvl4pPr>
-            <a:lvl5pPr indent="-228600" lvl="4" marL="2286000" algn="l">
+            <a:lvl5pPr marL="2286000" lvl="4" indent="-228600" algn="l">
               <a:spcBef>
                 <a:spcPts val="320"/>
               </a:spcBef>
@@ -6744,9 +6935,9 @@
               </a:buClr>
               <a:buSzPts val="1600"/>
               <a:buNone/>
-              <a:defRPr b="1" sz="1600"/>
+              <a:defRPr sz="1600" b="1"/>
             </a:lvl5pPr>
-            <a:lvl6pPr indent="-228600" lvl="5" marL="2743200" algn="l">
+            <a:lvl6pPr marL="2743200" lvl="5" indent="-228600" algn="l">
               <a:spcBef>
                 <a:spcPts val="320"/>
               </a:spcBef>
@@ -6758,9 +6949,9 @@
               </a:buClr>
               <a:buSzPts val="1600"/>
               <a:buNone/>
-              <a:defRPr b="1" sz="1600"/>
+              <a:defRPr sz="1600" b="1"/>
             </a:lvl6pPr>
-            <a:lvl7pPr indent="-228600" lvl="6" marL="3200400" algn="l">
+            <a:lvl7pPr marL="3200400" lvl="6" indent="-228600" algn="l">
               <a:spcBef>
                 <a:spcPts val="320"/>
               </a:spcBef>
@@ -6772,9 +6963,9 @@
               </a:buClr>
               <a:buSzPts val="1600"/>
               <a:buNone/>
-              <a:defRPr b="1" sz="1600"/>
+              <a:defRPr sz="1600" b="1"/>
             </a:lvl7pPr>
-            <a:lvl8pPr indent="-228600" lvl="7" marL="3657600" algn="l">
+            <a:lvl8pPr marL="3657600" lvl="7" indent="-228600" algn="l">
               <a:spcBef>
                 <a:spcPts val="320"/>
               </a:spcBef>
@@ -6786,9 +6977,9 @@
               </a:buClr>
               <a:buSzPts val="1600"/>
               <a:buNone/>
-              <a:defRPr b="1" sz="1600"/>
+              <a:defRPr sz="1600" b="1"/>
             </a:lvl8pPr>
-            <a:lvl9pPr indent="-228600" lvl="8" marL="4114800" algn="l">
+            <a:lvl9pPr marL="4114800" lvl="8" indent="-228600" algn="l">
               <a:spcBef>
                 <a:spcPts val="320"/>
               </a:spcBef>
@@ -6800,18 +6991,22 @@
               </a:buClr>
               <a:buSzPts val="1600"/>
               <a:buNone/>
-              <a:defRPr b="1" sz="1600"/>
+              <a:defRPr sz="1600" b="1"/>
             </a:lvl9pPr>
           </a:lstStyle>
-          <a:p/>
+          <a:p>
+            <a:endParaRPr/>
+          </a:p>
         </p:txBody>
       </p:sp>
       <p:sp>
         <p:nvSpPr>
           <p:cNvPr id="45" name="Google Shape;45;p7"/>
-          <p:cNvSpPr txBox="1"/>
+          <p:cNvSpPr txBox="1">
+            <a:spLocks noGrp="1"/>
+          </p:cNvSpPr>
           <p:nvPr>
-            <p:ph idx="4" type="body"/>
+            <p:ph type="body" idx="4"/>
           </p:nvPr>
         </p:nvSpPr>
         <p:spPr>
@@ -6828,11 +7023,11 @@
           </a:ln>
         </p:spPr>
         <p:txBody>
-          <a:bodyPr anchorCtr="0" anchor="t" bIns="45700" lIns="91425" spcFirstLastPara="1" rIns="91425" wrap="square" tIns="45700">
+          <a:bodyPr spcFirstLastPara="1" wrap="square" lIns="91425" tIns="45700" rIns="91425" bIns="45700" anchor="t" anchorCtr="0">
             <a:normAutofit/>
           </a:bodyPr>
           <a:lstStyle>
-            <a:lvl1pPr indent="-381000" lvl="0" marL="457200" algn="l">
+            <a:lvl1pPr marL="457200" lvl="0" indent="-381000" algn="l">
               <a:spcBef>
                 <a:spcPts val="480"/>
               </a:spcBef>
@@ -6846,7 +7041,7 @@
               <a:buChar char="•"/>
               <a:defRPr sz="2400"/>
             </a:lvl1pPr>
-            <a:lvl2pPr indent="-355600" lvl="1" marL="914400" algn="l">
+            <a:lvl2pPr marL="914400" lvl="1" indent="-355600" algn="l">
               <a:spcBef>
                 <a:spcPts val="400"/>
               </a:spcBef>
@@ -6860,7 +7055,7 @@
               <a:buChar char="–"/>
               <a:defRPr sz="2000"/>
             </a:lvl2pPr>
-            <a:lvl3pPr indent="-342900" lvl="2" marL="1371600" algn="l">
+            <a:lvl3pPr marL="1371600" lvl="2" indent="-342900" algn="l">
               <a:spcBef>
                 <a:spcPts val="360"/>
               </a:spcBef>
@@ -6874,7 +7069,7 @@
               <a:buChar char="•"/>
               <a:defRPr sz="1800"/>
             </a:lvl3pPr>
-            <a:lvl4pPr indent="-330200" lvl="3" marL="1828800" algn="l">
+            <a:lvl4pPr marL="1828800" lvl="3" indent="-330200" algn="l">
               <a:spcBef>
                 <a:spcPts val="320"/>
               </a:spcBef>
@@ -6888,7 +7083,7 @@
               <a:buChar char="–"/>
               <a:defRPr sz="1600"/>
             </a:lvl4pPr>
-            <a:lvl5pPr indent="-330200" lvl="4" marL="2286000" algn="l">
+            <a:lvl5pPr marL="2286000" lvl="4" indent="-330200" algn="l">
               <a:spcBef>
                 <a:spcPts val="320"/>
               </a:spcBef>
@@ -6902,7 +7097,7 @@
               <a:buChar char="»"/>
               <a:defRPr sz="1600"/>
             </a:lvl5pPr>
-            <a:lvl6pPr indent="-330200" lvl="5" marL="2743200" algn="l">
+            <a:lvl6pPr marL="2743200" lvl="5" indent="-330200" algn="l">
               <a:spcBef>
                 <a:spcPts val="320"/>
               </a:spcBef>
@@ -6916,7 +7111,7 @@
               <a:buChar char="•"/>
               <a:defRPr sz="1600"/>
             </a:lvl6pPr>
-            <a:lvl7pPr indent="-330200" lvl="6" marL="3200400" algn="l">
+            <a:lvl7pPr marL="3200400" lvl="6" indent="-330200" algn="l">
               <a:spcBef>
                 <a:spcPts val="320"/>
               </a:spcBef>
@@ -6930,7 +7125,7 @@
               <a:buChar char="•"/>
               <a:defRPr sz="1600"/>
             </a:lvl7pPr>
-            <a:lvl8pPr indent="-330200" lvl="7" marL="3657600" algn="l">
+            <a:lvl8pPr marL="3657600" lvl="7" indent="-330200" algn="l">
               <a:spcBef>
                 <a:spcPts val="320"/>
               </a:spcBef>
@@ -6944,7 +7139,7 @@
               <a:buChar char="•"/>
               <a:defRPr sz="1600"/>
             </a:lvl8pPr>
-            <a:lvl9pPr indent="-330200" lvl="8" marL="4114800" algn="l">
+            <a:lvl9pPr marL="4114800" lvl="8" indent="-330200" algn="l">
               <a:spcBef>
                 <a:spcPts val="320"/>
               </a:spcBef>
@@ -6959,15 +7154,19 @@
               <a:defRPr sz="1600"/>
             </a:lvl9pPr>
           </a:lstStyle>
-          <a:p/>
+          <a:p>
+            <a:endParaRPr/>
+          </a:p>
         </p:txBody>
       </p:sp>
       <p:sp>
         <p:nvSpPr>
           <p:cNvPr id="46" name="Google Shape;46;p7"/>
-          <p:cNvSpPr txBox="1"/>
+          <p:cNvSpPr txBox="1">
+            <a:spLocks noGrp="1"/>
+          </p:cNvSpPr>
           <p:nvPr>
-            <p:ph idx="10" type="dt"/>
+            <p:ph type="dt" idx="10"/>
           </p:nvPr>
         </p:nvSpPr>
         <p:spPr>
@@ -6984,7 +7183,7 @@
           </a:ln>
         </p:spPr>
         <p:txBody>
-          <a:bodyPr anchorCtr="0" anchor="ctr" bIns="45700" lIns="91425" spcFirstLastPara="1" rIns="91425" wrap="square" tIns="45700">
+          <a:bodyPr spcFirstLastPara="1" wrap="square" lIns="91425" tIns="45700" rIns="91425" bIns="45700" anchor="ctr" anchorCtr="0">
             <a:noAutofit/>
           </a:bodyPr>
           <a:lstStyle>
@@ -7088,15 +7287,19 @@
               <a:defRPr/>
             </a:lvl9pPr>
           </a:lstStyle>
-          <a:p/>
+          <a:p>
+            <a:endParaRPr/>
+          </a:p>
         </p:txBody>
       </p:sp>
       <p:sp>
         <p:nvSpPr>
           <p:cNvPr id="47" name="Google Shape;47;p7"/>
-          <p:cNvSpPr txBox="1"/>
+          <p:cNvSpPr txBox="1">
+            <a:spLocks noGrp="1"/>
+          </p:cNvSpPr>
           <p:nvPr>
-            <p:ph idx="11" type="ftr"/>
+            <p:ph type="ftr" idx="11"/>
           </p:nvPr>
         </p:nvSpPr>
         <p:spPr>
@@ -7113,7 +7316,7 @@
           </a:ln>
         </p:spPr>
         <p:txBody>
-          <a:bodyPr anchorCtr="0" anchor="ctr" bIns="45700" lIns="91425" spcFirstLastPara="1" rIns="91425" wrap="square" tIns="45700">
+          <a:bodyPr spcFirstLastPara="1" wrap="square" lIns="91425" tIns="45700" rIns="91425" bIns="45700" anchor="ctr" anchorCtr="0">
             <a:noAutofit/>
           </a:bodyPr>
           <a:lstStyle>
@@ -7217,15 +7420,19 @@
               <a:defRPr/>
             </a:lvl9pPr>
           </a:lstStyle>
-          <a:p/>
+          <a:p>
+            <a:endParaRPr/>
+          </a:p>
         </p:txBody>
       </p:sp>
       <p:sp>
         <p:nvSpPr>
           <p:cNvPr id="48" name="Google Shape;48;p7"/>
-          <p:cNvSpPr txBox="1"/>
+          <p:cNvSpPr txBox="1">
+            <a:spLocks noGrp="1"/>
+          </p:cNvSpPr>
           <p:nvPr>
-            <p:ph idx="12" type="sldNum"/>
+            <p:ph type="sldNum" idx="12"/>
           </p:nvPr>
         </p:nvSpPr>
         <p:spPr>
@@ -7242,67 +7449,67 @@
           </a:ln>
         </p:spPr>
         <p:txBody>
-          <a:bodyPr anchorCtr="0" anchor="ctr" bIns="45700" lIns="91425" spcFirstLastPara="1" rIns="91425" wrap="square" tIns="45700">
+          <a:bodyPr spcFirstLastPara="1" wrap="square" lIns="91425" tIns="45700" rIns="91425" bIns="45700" anchor="ctr" anchorCtr="0">
             <a:noAutofit/>
           </a:bodyPr>
           <a:lstStyle>
-            <a:lvl1pPr indent="0" lvl="0" marL="0" algn="r">
+            <a:lvl1pPr marL="0" lvl="0" indent="0" algn="r">
               <a:spcBef>
                 <a:spcPts val="0"/>
               </a:spcBef>
               <a:buNone/>
               <a:defRPr/>
             </a:lvl1pPr>
-            <a:lvl2pPr indent="0" lvl="1" marL="0" algn="r">
+            <a:lvl2pPr marL="0" lvl="1" indent="0" algn="r">
               <a:spcBef>
                 <a:spcPts val="0"/>
               </a:spcBef>
               <a:buNone/>
               <a:defRPr/>
             </a:lvl2pPr>
-            <a:lvl3pPr indent="0" lvl="2" marL="0" algn="r">
+            <a:lvl3pPr marL="0" lvl="2" indent="0" algn="r">
               <a:spcBef>
                 <a:spcPts val="0"/>
               </a:spcBef>
               <a:buNone/>
               <a:defRPr/>
             </a:lvl3pPr>
-            <a:lvl4pPr indent="0" lvl="3" marL="0" algn="r">
+            <a:lvl4pPr marL="0" lvl="3" indent="0" algn="r">
               <a:spcBef>
                 <a:spcPts val="0"/>
               </a:spcBef>
               <a:buNone/>
               <a:defRPr/>
             </a:lvl4pPr>
-            <a:lvl5pPr indent="0" lvl="4" marL="0" algn="r">
+            <a:lvl5pPr marL="0" lvl="4" indent="0" algn="r">
               <a:spcBef>
                 <a:spcPts val="0"/>
               </a:spcBef>
               <a:buNone/>
               <a:defRPr/>
             </a:lvl5pPr>
-            <a:lvl6pPr indent="0" lvl="5" marL="0" algn="r">
+            <a:lvl6pPr marL="0" lvl="5" indent="0" algn="r">
               <a:spcBef>
                 <a:spcPts val="0"/>
               </a:spcBef>
               <a:buNone/>
               <a:defRPr/>
             </a:lvl6pPr>
-            <a:lvl7pPr indent="0" lvl="6" marL="0" algn="r">
+            <a:lvl7pPr marL="0" lvl="6" indent="0" algn="r">
               <a:spcBef>
                 <a:spcPts val="0"/>
               </a:spcBef>
               <a:buNone/>
               <a:defRPr/>
             </a:lvl7pPr>
-            <a:lvl8pPr indent="0" lvl="7" marL="0" algn="r">
+            <a:lvl8pPr marL="0" lvl="7" indent="0" algn="r">
               <a:spcBef>
                 <a:spcPts val="0"/>
               </a:spcBef>
               <a:buNone/>
               <a:defRPr/>
             </a:lvl8pPr>
-            <a:lvl9pPr indent="0" lvl="8" marL="0" algn="r">
+            <a:lvl9pPr marL="0" lvl="8" indent="0" algn="r">
               <a:spcBef>
                 <a:spcPts val="0"/>
               </a:spcBef>
@@ -7311,7 +7518,7 @@
             </a:lvl9pPr>
           </a:lstStyle>
           <a:p>
-            <a:pPr indent="0" lvl="0" marL="0" rtl="0" algn="r">
+            <a:pPr marL="0" lvl="0" indent="0" algn="r" rtl="0">
               <a:spcBef>
                 <a:spcPts val="0"/>
               </a:spcBef>
@@ -7337,11 +7544,11 @@
 </file>
 
 <file path=ppt/slideLayouts/slideLayout7.xml><?xml version="1.0" encoding="utf-8"?>
-<p:sldLayout xmlns:a="http://schemas.openxmlformats.org/drawingml/2006/main" xmlns:r="http://schemas.openxmlformats.org/officeDocument/2006/relationships" xmlns:mc="http://schemas.openxmlformats.org/markup-compatibility/2006" xmlns:mv="urn:schemas-microsoft-com:mac:vml" xmlns:p="http://schemas.openxmlformats.org/presentationml/2006/main" xmlns:c="http://schemas.openxmlformats.org/drawingml/2006/chart" xmlns:dgm="http://schemas.openxmlformats.org/drawingml/2006/diagram" xmlns:o="urn:schemas-microsoft-com:office:office" xmlns:v="urn:schemas-microsoft-com:vml" xmlns:pvml="urn:schemas-microsoft-com:office:powerpoint" xmlns:com="http://schemas.openxmlformats.org/drawingml/2006/compatibility" xmlns:p14="http://schemas.microsoft.com/office/powerpoint/2010/main" xmlns:p15="http://schemas.microsoft.com/office/powerpoint/2012/main" xmlns:ahyp="http://schemas.microsoft.com/office/drawing/2018/hyperlinkcolor" matchingName="Title Only" type="titleOnly">
+<p:sldLayout xmlns:a="http://schemas.openxmlformats.org/drawingml/2006/main" xmlns:r="http://schemas.openxmlformats.org/officeDocument/2006/relationships" xmlns:p="http://schemas.openxmlformats.org/presentationml/2006/main" matchingName="Title Only" type="titleOnly">
   <p:cSld name="TITLE_ONLY">
     <p:spTree>
       <p:nvGrpSpPr>
-        <p:cNvPr id="49" name="Shape 49"/>
+        <p:cNvPr id="1" name="Shape 49"/>
         <p:cNvGrpSpPr/>
         <p:nvPr/>
       </p:nvGrpSpPr>
@@ -7356,7 +7563,9 @@
       <p:sp>
         <p:nvSpPr>
           <p:cNvPr id="50" name="Google Shape;50;p8"/>
-          <p:cNvSpPr txBox="1"/>
+          <p:cNvSpPr txBox="1">
+            <a:spLocks noGrp="1"/>
+          </p:cNvSpPr>
           <p:nvPr>
             <p:ph type="title"/>
           </p:nvPr>
@@ -7375,7 +7584,7 @@
           </a:ln>
         </p:spPr>
         <p:txBody>
-          <a:bodyPr anchorCtr="0" anchor="ctr" bIns="45700" lIns="91425" spcFirstLastPara="1" rIns="91425" wrap="square" tIns="45700">
+          <a:bodyPr spcFirstLastPara="1" wrap="square" lIns="91425" tIns="45700" rIns="91425" bIns="45700" anchor="ctr" anchorCtr="0">
             <a:normAutofit/>
           </a:bodyPr>
           <a:lstStyle>
@@ -7482,15 +7691,19 @@
               <a:defRPr/>
             </a:lvl9pPr>
           </a:lstStyle>
-          <a:p/>
+          <a:p>
+            <a:endParaRPr/>
+          </a:p>
         </p:txBody>
       </p:sp>
       <p:sp>
         <p:nvSpPr>
           <p:cNvPr id="51" name="Google Shape;51;p8"/>
-          <p:cNvSpPr txBox="1"/>
+          <p:cNvSpPr txBox="1">
+            <a:spLocks noGrp="1"/>
+          </p:cNvSpPr>
           <p:nvPr>
-            <p:ph idx="10" type="dt"/>
+            <p:ph type="dt" idx="10"/>
           </p:nvPr>
         </p:nvSpPr>
         <p:spPr>
@@ -7507,7 +7720,7 @@
           </a:ln>
         </p:spPr>
         <p:txBody>
-          <a:bodyPr anchorCtr="0" anchor="ctr" bIns="45700" lIns="91425" spcFirstLastPara="1" rIns="91425" wrap="square" tIns="45700">
+          <a:bodyPr spcFirstLastPara="1" wrap="square" lIns="91425" tIns="45700" rIns="91425" bIns="45700" anchor="ctr" anchorCtr="0">
             <a:noAutofit/>
           </a:bodyPr>
           <a:lstStyle>
@@ -7611,15 +7824,19 @@
               <a:defRPr/>
             </a:lvl9pPr>
           </a:lstStyle>
-          <a:p/>
+          <a:p>
+            <a:endParaRPr/>
+          </a:p>
         </p:txBody>
       </p:sp>
       <p:sp>
         <p:nvSpPr>
           <p:cNvPr id="52" name="Google Shape;52;p8"/>
-          <p:cNvSpPr txBox="1"/>
+          <p:cNvSpPr txBox="1">
+            <a:spLocks noGrp="1"/>
+          </p:cNvSpPr>
           <p:nvPr>
-            <p:ph idx="11" type="ftr"/>
+            <p:ph type="ftr" idx="11"/>
           </p:nvPr>
         </p:nvSpPr>
         <p:spPr>
@@ -7636,7 +7853,7 @@
           </a:ln>
         </p:spPr>
         <p:txBody>
-          <a:bodyPr anchorCtr="0" anchor="ctr" bIns="45700" lIns="91425" spcFirstLastPara="1" rIns="91425" wrap="square" tIns="45700">
+          <a:bodyPr spcFirstLastPara="1" wrap="square" lIns="91425" tIns="45700" rIns="91425" bIns="45700" anchor="ctr" anchorCtr="0">
             <a:noAutofit/>
           </a:bodyPr>
           <a:lstStyle>
@@ -7740,15 +7957,19 @@
               <a:defRPr/>
             </a:lvl9pPr>
           </a:lstStyle>
-          <a:p/>
+          <a:p>
+            <a:endParaRPr/>
+          </a:p>
         </p:txBody>
       </p:sp>
       <p:sp>
         <p:nvSpPr>
           <p:cNvPr id="53" name="Google Shape;53;p8"/>
-          <p:cNvSpPr txBox="1"/>
+          <p:cNvSpPr txBox="1">
+            <a:spLocks noGrp="1"/>
+          </p:cNvSpPr>
           <p:nvPr>
-            <p:ph idx="12" type="sldNum"/>
+            <p:ph type="sldNum" idx="12"/>
           </p:nvPr>
         </p:nvSpPr>
         <p:spPr>
@@ -7765,67 +7986,67 @@
           </a:ln>
         </p:spPr>
         <p:txBody>
-          <a:bodyPr anchorCtr="0" anchor="ctr" bIns="45700" lIns="91425" spcFirstLastPara="1" rIns="91425" wrap="square" tIns="45700">
+          <a:bodyPr spcFirstLastPara="1" wrap="square" lIns="91425" tIns="45700" rIns="91425" bIns="45700" anchor="ctr" anchorCtr="0">
             <a:noAutofit/>
           </a:bodyPr>
           <a:lstStyle>
-            <a:lvl1pPr indent="0" lvl="0" marL="0" algn="r">
+            <a:lvl1pPr marL="0" lvl="0" indent="0" algn="r">
               <a:spcBef>
                 <a:spcPts val="0"/>
               </a:spcBef>
               <a:buNone/>
               <a:defRPr/>
             </a:lvl1pPr>
-            <a:lvl2pPr indent="0" lvl="1" marL="0" algn="r">
+            <a:lvl2pPr marL="0" lvl="1" indent="0" algn="r">
               <a:spcBef>
                 <a:spcPts val="0"/>
               </a:spcBef>
               <a:buNone/>
               <a:defRPr/>
             </a:lvl2pPr>
-            <a:lvl3pPr indent="0" lvl="2" marL="0" algn="r">
+            <a:lvl3pPr marL="0" lvl="2" indent="0" algn="r">
               <a:spcBef>
                 <a:spcPts val="0"/>
               </a:spcBef>
               <a:buNone/>
               <a:defRPr/>
             </a:lvl3pPr>
-            <a:lvl4pPr indent="0" lvl="3" marL="0" algn="r">
+            <a:lvl4pPr marL="0" lvl="3" indent="0" algn="r">
               <a:spcBef>
                 <a:spcPts val="0"/>
               </a:spcBef>
               <a:buNone/>
               <a:defRPr/>
             </a:lvl4pPr>
-            <a:lvl5pPr indent="0" lvl="4" marL="0" algn="r">
+            <a:lvl5pPr marL="0" lvl="4" indent="0" algn="r">
               <a:spcBef>
                 <a:spcPts val="0"/>
               </a:spcBef>
               <a:buNone/>
               <a:defRPr/>
             </a:lvl5pPr>
-            <a:lvl6pPr indent="0" lvl="5" marL="0" algn="r">
+            <a:lvl6pPr marL="0" lvl="5" indent="0" algn="r">
               <a:spcBef>
                 <a:spcPts val="0"/>
               </a:spcBef>
               <a:buNone/>
               <a:defRPr/>
             </a:lvl6pPr>
-            <a:lvl7pPr indent="0" lvl="6" marL="0" algn="r">
+            <a:lvl7pPr marL="0" lvl="6" indent="0" algn="r">
               <a:spcBef>
                 <a:spcPts val="0"/>
               </a:spcBef>
               <a:buNone/>
               <a:defRPr/>
             </a:lvl7pPr>
-            <a:lvl8pPr indent="0" lvl="7" marL="0" algn="r">
+            <a:lvl8pPr marL="0" lvl="7" indent="0" algn="r">
               <a:spcBef>
                 <a:spcPts val="0"/>
               </a:spcBef>
               <a:buNone/>
               <a:defRPr/>
             </a:lvl8pPr>
-            <a:lvl9pPr indent="0" lvl="8" marL="0" algn="r">
+            <a:lvl9pPr marL="0" lvl="8" indent="0" algn="r">
               <a:spcBef>
                 <a:spcPts val="0"/>
               </a:spcBef>
@@ -7834,7 +8055,7 @@
             </a:lvl9pPr>
           </a:lstStyle>
           <a:p>
-            <a:pPr indent="0" lvl="0" marL="0" rtl="0" algn="r">
+            <a:pPr marL="0" lvl="0" indent="0" algn="r" rtl="0">
               <a:spcBef>
                 <a:spcPts val="0"/>
               </a:spcBef>
@@ -7860,11 +8081,11 @@
 </file>
 
 <file path=ppt/slideLayouts/slideLayout8.xml><?xml version="1.0" encoding="utf-8"?>
-<p:sldLayout xmlns:a="http://schemas.openxmlformats.org/drawingml/2006/main" xmlns:r="http://schemas.openxmlformats.org/officeDocument/2006/relationships" xmlns:mc="http://schemas.openxmlformats.org/markup-compatibility/2006" xmlns:mv="urn:schemas-microsoft-com:mac:vml" xmlns:p="http://schemas.openxmlformats.org/presentationml/2006/main" xmlns:c="http://schemas.openxmlformats.org/drawingml/2006/chart" xmlns:dgm="http://schemas.openxmlformats.org/drawingml/2006/diagram" xmlns:o="urn:schemas-microsoft-com:office:office" xmlns:v="urn:schemas-microsoft-com:vml" xmlns:pvml="urn:schemas-microsoft-com:office:powerpoint" xmlns:com="http://schemas.openxmlformats.org/drawingml/2006/compatibility" xmlns:p14="http://schemas.microsoft.com/office/powerpoint/2010/main" xmlns:p15="http://schemas.microsoft.com/office/powerpoint/2012/main" xmlns:ahyp="http://schemas.microsoft.com/office/drawing/2018/hyperlinkcolor" matchingName="Content with Caption" type="objTx">
+<p:sldLayout xmlns:a="http://schemas.openxmlformats.org/drawingml/2006/main" xmlns:r="http://schemas.openxmlformats.org/officeDocument/2006/relationships" xmlns:p="http://schemas.openxmlformats.org/presentationml/2006/main" matchingName="Content with Caption" type="objTx">
   <p:cSld name="OBJECT_WITH_CAPTION_TEXT">
     <p:spTree>
       <p:nvGrpSpPr>
-        <p:cNvPr id="54" name="Shape 54"/>
+        <p:cNvPr id="1" name="Shape 54"/>
         <p:cNvGrpSpPr/>
         <p:nvPr/>
       </p:nvGrpSpPr>
@@ -7879,7 +8100,9 @@
       <p:sp>
         <p:nvSpPr>
           <p:cNvPr id="55" name="Google Shape;55;p9"/>
-          <p:cNvSpPr txBox="1"/>
+          <p:cNvSpPr txBox="1">
+            <a:spLocks noGrp="1"/>
+          </p:cNvSpPr>
           <p:nvPr>
             <p:ph type="title"/>
           </p:nvPr>
@@ -7898,7 +8121,7 @@
           </a:ln>
         </p:spPr>
         <p:txBody>
-          <a:bodyPr anchorCtr="0" anchor="b" bIns="45700" lIns="91425" spcFirstLastPara="1" rIns="91425" wrap="square" tIns="45700">
+          <a:bodyPr spcFirstLastPara="1" wrap="square" lIns="91425" tIns="45700" rIns="91425" bIns="45700" anchor="b" anchorCtr="0">
             <a:normAutofit/>
           </a:bodyPr>
           <a:lstStyle>
@@ -7915,7 +8138,7 @@
               <a:buSzPts val="2000"/>
               <a:buFont typeface="Calibri"/>
               <a:buNone/>
-              <a:defRPr b="1" sz="2000"/>
+              <a:defRPr sz="2000" b="1"/>
             </a:lvl1pPr>
             <a:lvl2pPr lvl="1">
               <a:spcBef>
@@ -8006,15 +8229,19 @@
               <a:defRPr/>
             </a:lvl9pPr>
           </a:lstStyle>
-          <a:p/>
+          <a:p>
+            <a:endParaRPr/>
+          </a:p>
         </p:txBody>
       </p:sp>
       <p:sp>
         <p:nvSpPr>
           <p:cNvPr id="56" name="Google Shape;56;p9"/>
-          <p:cNvSpPr txBox="1"/>
+          <p:cNvSpPr txBox="1">
+            <a:spLocks noGrp="1"/>
+          </p:cNvSpPr>
           <p:nvPr>
-            <p:ph idx="1" type="body"/>
+            <p:ph type="body" idx="1"/>
           </p:nvPr>
         </p:nvSpPr>
         <p:spPr>
@@ -8031,11 +8258,11 @@
           </a:ln>
         </p:spPr>
         <p:txBody>
-          <a:bodyPr anchorCtr="0" anchor="t" bIns="45700" lIns="91425" spcFirstLastPara="1" rIns="91425" wrap="square" tIns="45700">
+          <a:bodyPr spcFirstLastPara="1" wrap="square" lIns="91425" tIns="45700" rIns="91425" bIns="45700" anchor="t" anchorCtr="0">
             <a:normAutofit/>
           </a:bodyPr>
           <a:lstStyle>
-            <a:lvl1pPr indent="-431800" lvl="0" marL="457200" algn="l">
+            <a:lvl1pPr marL="457200" lvl="0" indent="-431800" algn="l">
               <a:spcBef>
                 <a:spcPts val="640"/>
               </a:spcBef>
@@ -8049,7 +8276,7 @@
               <a:buChar char="•"/>
               <a:defRPr sz="3200"/>
             </a:lvl1pPr>
-            <a:lvl2pPr indent="-406400" lvl="1" marL="914400" algn="l">
+            <a:lvl2pPr marL="914400" lvl="1" indent="-406400" algn="l">
               <a:spcBef>
                 <a:spcPts val="560"/>
               </a:spcBef>
@@ -8063,7 +8290,7 @@
               <a:buChar char="–"/>
               <a:defRPr sz="2800"/>
             </a:lvl2pPr>
-            <a:lvl3pPr indent="-381000" lvl="2" marL="1371600" algn="l">
+            <a:lvl3pPr marL="1371600" lvl="2" indent="-381000" algn="l">
               <a:spcBef>
                 <a:spcPts val="480"/>
               </a:spcBef>
@@ -8077,7 +8304,7 @@
               <a:buChar char="•"/>
               <a:defRPr sz="2400"/>
             </a:lvl3pPr>
-            <a:lvl4pPr indent="-355600" lvl="3" marL="1828800" algn="l">
+            <a:lvl4pPr marL="1828800" lvl="3" indent="-355600" algn="l">
               <a:spcBef>
                 <a:spcPts val="400"/>
               </a:spcBef>
@@ -8091,7 +8318,7 @@
               <a:buChar char="–"/>
               <a:defRPr sz="2000"/>
             </a:lvl4pPr>
-            <a:lvl5pPr indent="-355600" lvl="4" marL="2286000" algn="l">
+            <a:lvl5pPr marL="2286000" lvl="4" indent="-355600" algn="l">
               <a:spcBef>
                 <a:spcPts val="400"/>
               </a:spcBef>
@@ -8105,7 +8332,7 @@
               <a:buChar char="»"/>
               <a:defRPr sz="2000"/>
             </a:lvl5pPr>
-            <a:lvl6pPr indent="-355600" lvl="5" marL="2743200" algn="l">
+            <a:lvl6pPr marL="2743200" lvl="5" indent="-355600" algn="l">
               <a:spcBef>
                 <a:spcPts val="400"/>
               </a:spcBef>
@@ -8119,7 +8346,7 @@
               <a:buChar char="•"/>
               <a:defRPr sz="2000"/>
             </a:lvl6pPr>
-            <a:lvl7pPr indent="-355600" lvl="6" marL="3200400" algn="l">
+            <a:lvl7pPr marL="3200400" lvl="6" indent="-355600" algn="l">
               <a:spcBef>
                 <a:spcPts val="400"/>
               </a:spcBef>
@@ -8133,7 +8360,7 @@
               <a:buChar char="•"/>
               <a:defRPr sz="2000"/>
             </a:lvl7pPr>
-            <a:lvl8pPr indent="-355600" lvl="7" marL="3657600" algn="l">
+            <a:lvl8pPr marL="3657600" lvl="7" indent="-355600" algn="l">
               <a:spcBef>
                 <a:spcPts val="400"/>
               </a:spcBef>
@@ -8147,7 +8374,7 @@
               <a:buChar char="•"/>
               <a:defRPr sz="2000"/>
             </a:lvl8pPr>
-            <a:lvl9pPr indent="-355600" lvl="8" marL="4114800" algn="l">
+            <a:lvl9pPr marL="4114800" lvl="8" indent="-355600" algn="l">
               <a:spcBef>
                 <a:spcPts val="400"/>
               </a:spcBef>
@@ -8162,15 +8389,19 @@
               <a:defRPr sz="2000"/>
             </a:lvl9pPr>
           </a:lstStyle>
-          <a:p/>
+          <a:p>
+            <a:endParaRPr/>
+          </a:p>
         </p:txBody>
       </p:sp>
       <p:sp>
         <p:nvSpPr>
           <p:cNvPr id="57" name="Google Shape;57;p9"/>
-          <p:cNvSpPr txBox="1"/>
+          <p:cNvSpPr txBox="1">
+            <a:spLocks noGrp="1"/>
+          </p:cNvSpPr>
           <p:nvPr>
-            <p:ph idx="2" type="body"/>
+            <p:ph type="body" idx="2"/>
           </p:nvPr>
         </p:nvSpPr>
         <p:spPr>
@@ -8187,11 +8418,11 @@
           </a:ln>
         </p:spPr>
         <p:txBody>
-          <a:bodyPr anchorCtr="0" anchor="t" bIns="45700" lIns="91425" spcFirstLastPara="1" rIns="91425" wrap="square" tIns="45700">
+          <a:bodyPr spcFirstLastPara="1" wrap="square" lIns="91425" tIns="45700" rIns="91425" bIns="45700" anchor="t" anchorCtr="0">
             <a:normAutofit/>
           </a:bodyPr>
           <a:lstStyle>
-            <a:lvl1pPr indent="-228600" lvl="0" marL="457200" algn="l">
+            <a:lvl1pPr marL="457200" lvl="0" indent="-228600" algn="l">
               <a:spcBef>
                 <a:spcPts val="280"/>
               </a:spcBef>
@@ -8205,7 +8436,7 @@
               <a:buNone/>
               <a:defRPr sz="1400"/>
             </a:lvl1pPr>
-            <a:lvl2pPr indent="-228600" lvl="1" marL="914400" algn="l">
+            <a:lvl2pPr marL="914400" lvl="1" indent="-228600" algn="l">
               <a:spcBef>
                 <a:spcPts val="240"/>
               </a:spcBef>
@@ -8219,7 +8450,7 @@
               <a:buNone/>
               <a:defRPr sz="1200"/>
             </a:lvl2pPr>
-            <a:lvl3pPr indent="-228600" lvl="2" marL="1371600" algn="l">
+            <a:lvl3pPr marL="1371600" lvl="2" indent="-228600" algn="l">
               <a:spcBef>
                 <a:spcPts val="200"/>
               </a:spcBef>
@@ -8233,7 +8464,7 @@
               <a:buNone/>
               <a:defRPr sz="1000"/>
             </a:lvl3pPr>
-            <a:lvl4pPr indent="-228600" lvl="3" marL="1828800" algn="l">
+            <a:lvl4pPr marL="1828800" lvl="3" indent="-228600" algn="l">
               <a:spcBef>
                 <a:spcPts val="180"/>
               </a:spcBef>
@@ -8247,7 +8478,7 @@
               <a:buNone/>
               <a:defRPr sz="900"/>
             </a:lvl4pPr>
-            <a:lvl5pPr indent="-228600" lvl="4" marL="2286000" algn="l">
+            <a:lvl5pPr marL="2286000" lvl="4" indent="-228600" algn="l">
               <a:spcBef>
                 <a:spcPts val="180"/>
               </a:spcBef>
@@ -8261,7 +8492,7 @@
               <a:buNone/>
               <a:defRPr sz="900"/>
             </a:lvl5pPr>
-            <a:lvl6pPr indent="-228600" lvl="5" marL="2743200" algn="l">
+            <a:lvl6pPr marL="2743200" lvl="5" indent="-228600" algn="l">
               <a:spcBef>
                 <a:spcPts val="180"/>
               </a:spcBef>
@@ -8275,7 +8506,7 @@
               <a:buNone/>
               <a:defRPr sz="900"/>
             </a:lvl6pPr>
-            <a:lvl7pPr indent="-228600" lvl="6" marL="3200400" algn="l">
+            <a:lvl7pPr marL="3200400" lvl="6" indent="-228600" algn="l">
               <a:spcBef>
                 <a:spcPts val="180"/>
               </a:spcBef>
@@ -8289,7 +8520,7 @@
               <a:buNone/>
               <a:defRPr sz="900"/>
             </a:lvl7pPr>
-            <a:lvl8pPr indent="-228600" lvl="7" marL="3657600" algn="l">
+            <a:lvl8pPr marL="3657600" lvl="7" indent="-228600" algn="l">
               <a:spcBef>
                 <a:spcPts val="180"/>
               </a:spcBef>
@@ -8303,7 +8534,7 @@
               <a:buNone/>
               <a:defRPr sz="900"/>
             </a:lvl8pPr>
-            <a:lvl9pPr indent="-228600" lvl="8" marL="4114800" algn="l">
+            <a:lvl9pPr marL="4114800" lvl="8" indent="-228600" algn="l">
               <a:spcBef>
                 <a:spcPts val="180"/>
               </a:spcBef>
@@ -8318,15 +8549,19 @@
               <a:defRPr sz="900"/>
             </a:lvl9pPr>
           </a:lstStyle>
-          <a:p/>
+          <a:p>
+            <a:endParaRPr/>
+          </a:p>
         </p:txBody>
       </p:sp>
       <p:sp>
         <p:nvSpPr>
           <p:cNvPr id="58" name="Google Shape;58;p9"/>
-          <p:cNvSpPr txBox="1"/>
+          <p:cNvSpPr txBox="1">
+            <a:spLocks noGrp="1"/>
+          </p:cNvSpPr>
           <p:nvPr>
-            <p:ph idx="10" type="dt"/>
+            <p:ph type="dt" idx="10"/>
           </p:nvPr>
         </p:nvSpPr>
         <p:spPr>
@@ -8343,7 +8578,7 @@
           </a:ln>
         </p:spPr>
         <p:txBody>
-          <a:bodyPr anchorCtr="0" anchor="ctr" bIns="45700" lIns="91425" spcFirstLastPara="1" rIns="91425" wrap="square" tIns="45700">
+          <a:bodyPr spcFirstLastPara="1" wrap="square" lIns="91425" tIns="45700" rIns="91425" bIns="45700" anchor="ctr" anchorCtr="0">
             <a:noAutofit/>
           </a:bodyPr>
           <a:lstStyle>
@@ -8447,15 +8682,19 @@
               <a:defRPr/>
             </a:lvl9pPr>
           </a:lstStyle>
-          <a:p/>
+          <a:p>
+            <a:endParaRPr/>
+          </a:p>
         </p:txBody>
       </p:sp>
       <p:sp>
         <p:nvSpPr>
           <p:cNvPr id="59" name="Google Shape;59;p9"/>
-          <p:cNvSpPr txBox="1"/>
+          <p:cNvSpPr txBox="1">
+            <a:spLocks noGrp="1"/>
+          </p:cNvSpPr>
           <p:nvPr>
-            <p:ph idx="11" type="ftr"/>
+            <p:ph type="ftr" idx="11"/>
           </p:nvPr>
         </p:nvSpPr>
         <p:spPr>
@@ -8472,7 +8711,7 @@
           </a:ln>
         </p:spPr>
         <p:txBody>
-          <a:bodyPr anchorCtr="0" anchor="ctr" bIns="45700" lIns="91425" spcFirstLastPara="1" rIns="91425" wrap="square" tIns="45700">
+          <a:bodyPr spcFirstLastPara="1" wrap="square" lIns="91425" tIns="45700" rIns="91425" bIns="45700" anchor="ctr" anchorCtr="0">
             <a:noAutofit/>
           </a:bodyPr>
           <a:lstStyle>
@@ -8576,15 +8815,19 @@
               <a:defRPr/>
             </a:lvl9pPr>
           </a:lstStyle>
-          <a:p/>
+          <a:p>
+            <a:endParaRPr/>
+          </a:p>
         </p:txBody>
       </p:sp>
       <p:sp>
         <p:nvSpPr>
           <p:cNvPr id="60" name="Google Shape;60;p9"/>
-          <p:cNvSpPr txBox="1"/>
+          <p:cNvSpPr txBox="1">
+            <a:spLocks noGrp="1"/>
+          </p:cNvSpPr>
           <p:nvPr>
-            <p:ph idx="12" type="sldNum"/>
+            <p:ph type="sldNum" idx="12"/>
           </p:nvPr>
         </p:nvSpPr>
         <p:spPr>
@@ -8601,67 +8844,67 @@
           </a:ln>
         </p:spPr>
         <p:txBody>
-          <a:bodyPr anchorCtr="0" anchor="ctr" bIns="45700" lIns="91425" spcFirstLastPara="1" rIns="91425" wrap="square" tIns="45700">
+          <a:bodyPr spcFirstLastPara="1" wrap="square" lIns="91425" tIns="45700" rIns="91425" bIns="45700" anchor="ctr" anchorCtr="0">
             <a:noAutofit/>
           </a:bodyPr>
           <a:lstStyle>
-            <a:lvl1pPr indent="0" lvl="0" marL="0" algn="r">
+            <a:lvl1pPr marL="0" lvl="0" indent="0" algn="r">
               <a:spcBef>
                 <a:spcPts val="0"/>
               </a:spcBef>
               <a:buNone/>
               <a:defRPr/>
             </a:lvl1pPr>
-            <a:lvl2pPr indent="0" lvl="1" marL="0" algn="r">
+            <a:lvl2pPr marL="0" lvl="1" indent="0" algn="r">
               <a:spcBef>
                 <a:spcPts val="0"/>
               </a:spcBef>
               <a:buNone/>
               <a:defRPr/>
             </a:lvl2pPr>
-            <a:lvl3pPr indent="0" lvl="2" marL="0" algn="r">
+            <a:lvl3pPr marL="0" lvl="2" indent="0" algn="r">
               <a:spcBef>
                 <a:spcPts val="0"/>
               </a:spcBef>
               <a:buNone/>
               <a:defRPr/>
             </a:lvl3pPr>
-            <a:lvl4pPr indent="0" lvl="3" marL="0" algn="r">
+            <a:lvl4pPr marL="0" lvl="3" indent="0" algn="r">
               <a:spcBef>
                 <a:spcPts val="0"/>
               </a:spcBef>
               <a:buNone/>
               <a:defRPr/>
             </a:lvl4pPr>
-            <a:lvl5pPr indent="0" lvl="4" marL="0" algn="r">
+            <a:lvl5pPr marL="0" lvl="4" indent="0" algn="r">
               <a:spcBef>
                 <a:spcPts val="0"/>
               </a:spcBef>
               <a:buNone/>
               <a:defRPr/>
             </a:lvl5pPr>
-            <a:lvl6pPr indent="0" lvl="5" marL="0" algn="r">
+            <a:lvl6pPr marL="0" lvl="5" indent="0" algn="r">
               <a:spcBef>
                 <a:spcPts val="0"/>
               </a:spcBef>
               <a:buNone/>
               <a:defRPr/>
             </a:lvl6pPr>
-            <a:lvl7pPr indent="0" lvl="6" marL="0" algn="r">
+            <a:lvl7pPr marL="0" lvl="6" indent="0" algn="r">
               <a:spcBef>
                 <a:spcPts val="0"/>
               </a:spcBef>
               <a:buNone/>
               <a:defRPr/>
             </a:lvl7pPr>
-            <a:lvl8pPr indent="0" lvl="7" marL="0" algn="r">
+            <a:lvl8pPr marL="0" lvl="7" indent="0" algn="r">
               <a:spcBef>
                 <a:spcPts val="0"/>
               </a:spcBef>
               <a:buNone/>
               <a:defRPr/>
             </a:lvl8pPr>
-            <a:lvl9pPr indent="0" lvl="8" marL="0" algn="r">
+            <a:lvl9pPr marL="0" lvl="8" indent="0" algn="r">
               <a:spcBef>
                 <a:spcPts val="0"/>
               </a:spcBef>
@@ -8670,7 +8913,7 @@
             </a:lvl9pPr>
           </a:lstStyle>
           <a:p>
-            <a:pPr indent="0" lvl="0" marL="0" rtl="0" algn="r">
+            <a:pPr marL="0" lvl="0" indent="0" algn="r" rtl="0">
               <a:spcBef>
                 <a:spcPts val="0"/>
               </a:spcBef>
@@ -8696,11 +8939,11 @@
 </file>
 
 <file path=ppt/slideLayouts/slideLayout9.xml><?xml version="1.0" encoding="utf-8"?>
-<p:sldLayout xmlns:a="http://schemas.openxmlformats.org/drawingml/2006/main" xmlns:r="http://schemas.openxmlformats.org/officeDocument/2006/relationships" xmlns:mc="http://schemas.openxmlformats.org/markup-compatibility/2006" xmlns:mv="urn:schemas-microsoft-com:mac:vml" xmlns:p="http://schemas.openxmlformats.org/presentationml/2006/main" xmlns:c="http://schemas.openxmlformats.org/drawingml/2006/chart" xmlns:dgm="http://schemas.openxmlformats.org/drawingml/2006/diagram" xmlns:o="urn:schemas-microsoft-com:office:office" xmlns:v="urn:schemas-microsoft-com:vml" xmlns:pvml="urn:schemas-microsoft-com:office:powerpoint" xmlns:com="http://schemas.openxmlformats.org/drawingml/2006/compatibility" xmlns:p14="http://schemas.microsoft.com/office/powerpoint/2010/main" xmlns:p15="http://schemas.microsoft.com/office/powerpoint/2012/main" xmlns:ahyp="http://schemas.microsoft.com/office/drawing/2018/hyperlinkcolor" matchingName="Picture with Caption" type="picTx">
+<p:sldLayout xmlns:a="http://schemas.openxmlformats.org/drawingml/2006/main" xmlns:r="http://schemas.openxmlformats.org/officeDocument/2006/relationships" xmlns:p="http://schemas.openxmlformats.org/presentationml/2006/main" matchingName="Picture with Caption" type="picTx">
   <p:cSld name="PICTURE_WITH_CAPTION_TEXT">
     <p:spTree>
       <p:nvGrpSpPr>
-        <p:cNvPr id="61" name="Shape 61"/>
+        <p:cNvPr id="1" name="Shape 61"/>
         <p:cNvGrpSpPr/>
         <p:nvPr/>
       </p:nvGrpSpPr>
@@ -8715,7 +8958,9 @@
       <p:sp>
         <p:nvSpPr>
           <p:cNvPr id="62" name="Google Shape;62;p10"/>
-          <p:cNvSpPr txBox="1"/>
+          <p:cNvSpPr txBox="1">
+            <a:spLocks noGrp="1"/>
+          </p:cNvSpPr>
           <p:nvPr>
             <p:ph type="title"/>
           </p:nvPr>
@@ -8734,7 +8979,7 @@
           </a:ln>
         </p:spPr>
         <p:txBody>
-          <a:bodyPr anchorCtr="0" anchor="b" bIns="45700" lIns="91425" spcFirstLastPara="1" rIns="91425" wrap="square" tIns="45700">
+          <a:bodyPr spcFirstLastPara="1" wrap="square" lIns="91425" tIns="45700" rIns="91425" bIns="45700" anchor="b" anchorCtr="0">
             <a:normAutofit/>
           </a:bodyPr>
           <a:lstStyle>
@@ -8751,7 +8996,7 @@
               <a:buSzPts val="2000"/>
               <a:buFont typeface="Calibri"/>
               <a:buNone/>
-              <a:defRPr b="1" sz="2000"/>
+              <a:defRPr sz="2000" b="1"/>
             </a:lvl1pPr>
             <a:lvl2pPr lvl="1">
               <a:spcBef>
@@ -8842,15 +9087,19 @@
               <a:defRPr/>
             </a:lvl9pPr>
           </a:lstStyle>
-          <a:p/>
+          <a:p>
+            <a:endParaRPr/>
+          </a:p>
         </p:txBody>
       </p:sp>
       <p:sp>
         <p:nvSpPr>
           <p:cNvPr id="63" name="Google Shape;63;p10"/>
-          <p:cNvSpPr/>
+          <p:cNvSpPr>
+            <a:spLocks noGrp="1"/>
+          </p:cNvSpPr>
           <p:nvPr>
-            <p:ph idx="2" type="pic"/>
+            <p:ph type="pic" idx="2"/>
           </p:nvPr>
         </p:nvSpPr>
         <p:spPr>
@@ -8870,9 +9119,11 @@
       <p:sp>
         <p:nvSpPr>
           <p:cNvPr id="64" name="Google Shape;64;p10"/>
-          <p:cNvSpPr txBox="1"/>
+          <p:cNvSpPr txBox="1">
+            <a:spLocks noGrp="1"/>
+          </p:cNvSpPr>
           <p:nvPr>
-            <p:ph idx="1" type="body"/>
+            <p:ph type="body" idx="1"/>
           </p:nvPr>
         </p:nvSpPr>
         <p:spPr>
@@ -8889,11 +9140,11 @@
           </a:ln>
         </p:spPr>
         <p:txBody>
-          <a:bodyPr anchorCtr="0" anchor="t" bIns="45700" lIns="91425" spcFirstLastPara="1" rIns="91425" wrap="square" tIns="45700">
+          <a:bodyPr spcFirstLastPara="1" wrap="square" lIns="91425" tIns="45700" rIns="91425" bIns="45700" anchor="t" anchorCtr="0">
             <a:normAutofit/>
           </a:bodyPr>
           <a:lstStyle>
-            <a:lvl1pPr indent="-228600" lvl="0" marL="457200" algn="l">
+            <a:lvl1pPr marL="457200" lvl="0" indent="-228600" algn="l">
               <a:spcBef>
                 <a:spcPts val="280"/>
               </a:spcBef>
@@ -8907,7 +9158,7 @@
               <a:buNone/>
               <a:defRPr sz="1400"/>
             </a:lvl1pPr>
-            <a:lvl2pPr indent="-228600" lvl="1" marL="914400" algn="l">
+            <a:lvl2pPr marL="914400" lvl="1" indent="-228600" algn="l">
               <a:spcBef>
                 <a:spcPts val="240"/>
               </a:spcBef>
@@ -8921,7 +9172,7 @@
               <a:buNone/>
               <a:defRPr sz="1200"/>
             </a:lvl2pPr>
-            <a:lvl3pPr indent="-228600" lvl="2" marL="1371600" algn="l">
+            <a:lvl3pPr marL="1371600" lvl="2" indent="-228600" algn="l">
               <a:spcBef>
                 <a:spcPts val="200"/>
               </a:spcBef>
@@ -8935,7 +9186,7 @@
               <a:buNone/>
               <a:defRPr sz="1000"/>
             </a:lvl3pPr>
-            <a:lvl4pPr indent="-228600" lvl="3" marL="1828800" algn="l">
+            <a:lvl4pPr marL="1828800" lvl="3" indent="-228600" algn="l">
               <a:spcBef>
                 <a:spcPts val="180"/>
               </a:spcBef>
@@ -8949,7 +9200,7 @@
               <a:buNone/>
               <a:defRPr sz="900"/>
             </a:lvl4pPr>
-            <a:lvl5pPr indent="-228600" lvl="4" marL="2286000" algn="l">
+            <a:lvl5pPr marL="2286000" lvl="4" indent="-228600" algn="l">
               <a:spcBef>
                 <a:spcPts val="180"/>
               </a:spcBef>
@@ -8963,7 +9214,7 @@
               <a:buNone/>
               <a:defRPr sz="900"/>
             </a:lvl5pPr>
-            <a:lvl6pPr indent="-228600" lvl="5" marL="2743200" algn="l">
+            <a:lvl6pPr marL="2743200" lvl="5" indent="-228600" algn="l">
               <a:spcBef>
                 <a:spcPts val="180"/>
               </a:spcBef>
@@ -8977,7 +9228,7 @@
               <a:buNone/>
               <a:defRPr sz="900"/>
             </a:lvl6pPr>
-            <a:lvl7pPr indent="-228600" lvl="6" marL="3200400" algn="l">
+            <a:lvl7pPr marL="3200400" lvl="6" indent="-228600" algn="l">
               <a:spcBef>
                 <a:spcPts val="180"/>
               </a:spcBef>
@@ -8991,7 +9242,7 @@
               <a:buNone/>
               <a:defRPr sz="900"/>
             </a:lvl7pPr>
-            <a:lvl8pPr indent="-228600" lvl="7" marL="3657600" algn="l">
+            <a:lvl8pPr marL="3657600" lvl="7" indent="-228600" algn="l">
               <a:spcBef>
                 <a:spcPts val="180"/>
               </a:spcBef>
@@ -9005,7 +9256,7 @@
               <a:buNone/>
               <a:defRPr sz="900"/>
             </a:lvl8pPr>
-            <a:lvl9pPr indent="-228600" lvl="8" marL="4114800" algn="l">
+            <a:lvl9pPr marL="4114800" lvl="8" indent="-228600" algn="l">
               <a:spcBef>
                 <a:spcPts val="180"/>
               </a:spcBef>
@@ -9020,15 +9271,19 @@
               <a:defRPr sz="900"/>
             </a:lvl9pPr>
           </a:lstStyle>
-          <a:p/>
+          <a:p>
+            <a:endParaRPr/>
+          </a:p>
         </p:txBody>
       </p:sp>
       <p:sp>
         <p:nvSpPr>
           <p:cNvPr id="65" name="Google Shape;65;p10"/>
-          <p:cNvSpPr txBox="1"/>
+          <p:cNvSpPr txBox="1">
+            <a:spLocks noGrp="1"/>
+          </p:cNvSpPr>
           <p:nvPr>
-            <p:ph idx="10" type="dt"/>
+            <p:ph type="dt" idx="10"/>
           </p:nvPr>
         </p:nvSpPr>
         <p:spPr>
@@ -9045,7 +9300,7 @@
           </a:ln>
         </p:spPr>
         <p:txBody>
-          <a:bodyPr anchorCtr="0" anchor="ctr" bIns="45700" lIns="91425" spcFirstLastPara="1" rIns="91425" wrap="square" tIns="45700">
+          <a:bodyPr spcFirstLastPara="1" wrap="square" lIns="91425" tIns="45700" rIns="91425" bIns="45700" anchor="ctr" anchorCtr="0">
             <a:noAutofit/>
           </a:bodyPr>
           <a:lstStyle>
@@ -9149,15 +9404,19 @@
               <a:defRPr/>
             </a:lvl9pPr>
           </a:lstStyle>
-          <a:p/>
+          <a:p>
+            <a:endParaRPr/>
+          </a:p>
         </p:txBody>
       </p:sp>
       <p:sp>
         <p:nvSpPr>
           <p:cNvPr id="66" name="Google Shape;66;p10"/>
-          <p:cNvSpPr txBox="1"/>
+          <p:cNvSpPr txBox="1">
+            <a:spLocks noGrp="1"/>
+          </p:cNvSpPr>
           <p:nvPr>
-            <p:ph idx="11" type="ftr"/>
+            <p:ph type="ftr" idx="11"/>
           </p:nvPr>
         </p:nvSpPr>
         <p:spPr>
@@ -9174,7 +9433,7 @@
           </a:ln>
         </p:spPr>
         <p:txBody>
-          <a:bodyPr anchorCtr="0" anchor="ctr" bIns="45700" lIns="91425" spcFirstLastPara="1" rIns="91425" wrap="square" tIns="45700">
+          <a:bodyPr spcFirstLastPara="1" wrap="square" lIns="91425" tIns="45700" rIns="91425" bIns="45700" anchor="ctr" anchorCtr="0">
             <a:noAutofit/>
           </a:bodyPr>
           <a:lstStyle>
@@ -9278,15 +9537,19 @@
               <a:defRPr/>
             </a:lvl9pPr>
           </a:lstStyle>
-          <a:p/>
+          <a:p>
+            <a:endParaRPr/>
+          </a:p>
         </p:txBody>
       </p:sp>
       <p:sp>
         <p:nvSpPr>
           <p:cNvPr id="67" name="Google Shape;67;p10"/>
-          <p:cNvSpPr txBox="1"/>
+          <p:cNvSpPr txBox="1">
+            <a:spLocks noGrp="1"/>
+          </p:cNvSpPr>
           <p:nvPr>
-            <p:ph idx="12" type="sldNum"/>
+            <p:ph type="sldNum" idx="12"/>
           </p:nvPr>
         </p:nvSpPr>
         <p:spPr>
@@ -9303,67 +9566,67 @@
           </a:ln>
         </p:spPr>
         <p:txBody>
-          <a:bodyPr anchorCtr="0" anchor="ctr" bIns="45700" lIns="91425" spcFirstLastPara="1" rIns="91425" wrap="square" tIns="45700">
+          <a:bodyPr spcFirstLastPara="1" wrap="square" lIns="91425" tIns="45700" rIns="91425" bIns="45700" anchor="ctr" anchorCtr="0">
             <a:noAutofit/>
           </a:bodyPr>
           <a:lstStyle>
-            <a:lvl1pPr indent="0" lvl="0" marL="0" algn="r">
+            <a:lvl1pPr marL="0" lvl="0" indent="0" algn="r">
               <a:spcBef>
                 <a:spcPts val="0"/>
               </a:spcBef>
               <a:buNone/>
               <a:defRPr/>
             </a:lvl1pPr>
-            <a:lvl2pPr indent="0" lvl="1" marL="0" algn="r">
+            <a:lvl2pPr marL="0" lvl="1" indent="0" algn="r">
               <a:spcBef>
                 <a:spcPts val="0"/>
               </a:spcBef>
               <a:buNone/>
               <a:defRPr/>
             </a:lvl2pPr>
-            <a:lvl3pPr indent="0" lvl="2" marL="0" algn="r">
+            <a:lvl3pPr marL="0" lvl="2" indent="0" algn="r">
               <a:spcBef>
                 <a:spcPts val="0"/>
               </a:spcBef>
               <a:buNone/>
               <a:defRPr/>
             </a:lvl3pPr>
-            <a:lvl4pPr indent="0" lvl="3" marL="0" algn="r">
+            <a:lvl4pPr marL="0" lvl="3" indent="0" algn="r">
               <a:spcBef>
                 <a:spcPts val="0"/>
               </a:spcBef>
               <a:buNone/>
               <a:defRPr/>
             </a:lvl4pPr>
-            <a:lvl5pPr indent="0" lvl="4" marL="0" algn="r">
+            <a:lvl5pPr marL="0" lvl="4" indent="0" algn="r">
               <a:spcBef>
                 <a:spcPts val="0"/>
               </a:spcBef>
               <a:buNone/>
               <a:defRPr/>
             </a:lvl5pPr>
-            <a:lvl6pPr indent="0" lvl="5" marL="0" algn="r">
+            <a:lvl6pPr marL="0" lvl="5" indent="0" algn="r">
               <a:spcBef>
                 <a:spcPts val="0"/>
               </a:spcBef>
               <a:buNone/>
               <a:defRPr/>
             </a:lvl6pPr>
-            <a:lvl7pPr indent="0" lvl="6" marL="0" algn="r">
+            <a:lvl7pPr marL="0" lvl="6" indent="0" algn="r">
               <a:spcBef>
                 <a:spcPts val="0"/>
               </a:spcBef>
               <a:buNone/>
               <a:defRPr/>
             </a:lvl7pPr>
-            <a:lvl8pPr indent="0" lvl="7" marL="0" algn="r">
+            <a:lvl8pPr marL="0" lvl="7" indent="0" algn="r">
               <a:spcBef>
                 <a:spcPts val="0"/>
               </a:spcBef>
               <a:buNone/>
               <a:defRPr/>
             </a:lvl8pPr>
-            <a:lvl9pPr indent="0" lvl="8" marL="0" algn="r">
+            <a:lvl9pPr marL="0" lvl="8" indent="0" algn="r">
               <a:spcBef>
                 <a:spcPts val="0"/>
               </a:spcBef>
@@ -9372,7 +9635,7 @@
             </a:lvl9pPr>
           </a:lstStyle>
           <a:p>
-            <a:pPr indent="0" lvl="0" marL="0" rtl="0" algn="r">
+            <a:pPr marL="0" lvl="0" indent="0" algn="r" rtl="0">
               <a:spcBef>
                 <a:spcPts val="0"/>
               </a:spcBef>
@@ -9398,18 +9661,19 @@
 </file>
 
 <file path=ppt/slideMasters/slideMaster1.xml><?xml version="1.0" encoding="utf-8"?>
-<p:sldMaster xmlns:a="http://schemas.openxmlformats.org/drawingml/2006/main" xmlns:r="http://schemas.openxmlformats.org/officeDocument/2006/relationships" xmlns:mc="http://schemas.openxmlformats.org/markup-compatibility/2006" xmlns:mv="urn:schemas-microsoft-com:mac:vml" xmlns:p="http://schemas.openxmlformats.org/presentationml/2006/main" xmlns:c="http://schemas.openxmlformats.org/drawingml/2006/chart" xmlns:dgm="http://schemas.openxmlformats.org/drawingml/2006/diagram" xmlns:o="urn:schemas-microsoft-com:office:office" xmlns:v="urn:schemas-microsoft-com:vml" xmlns:pvml="urn:schemas-microsoft-com:office:powerpoint" xmlns:com="http://schemas.openxmlformats.org/drawingml/2006/compatibility" xmlns:p14="http://schemas.microsoft.com/office/powerpoint/2010/main" xmlns:p15="http://schemas.microsoft.com/office/powerpoint/2012/main" xmlns:ahyp="http://schemas.microsoft.com/office/drawing/2018/hyperlinkcolor">
+<p:sldMaster xmlns:a="http://schemas.openxmlformats.org/drawingml/2006/main" xmlns:r="http://schemas.openxmlformats.org/officeDocument/2006/relationships" xmlns:p="http://schemas.openxmlformats.org/presentationml/2006/main">
   <p:cSld>
     <p:bg>
       <p:bgPr>
         <a:solidFill>
           <a:schemeClr val="lt1"/>
         </a:solidFill>
+        <a:effectLst/>
       </p:bgPr>
     </p:bg>
     <p:spTree>
       <p:nvGrpSpPr>
-        <p:cNvPr id="5" name="Shape 5"/>
+        <p:cNvPr id="1" name="Shape 5"/>
         <p:cNvGrpSpPr/>
         <p:nvPr/>
       </p:nvGrpSpPr>
@@ -9424,7 +9688,9 @@
       <p:sp>
         <p:nvSpPr>
           <p:cNvPr id="6" name="Google Shape;6;p1"/>
-          <p:cNvSpPr txBox="1"/>
+          <p:cNvSpPr txBox="1">
+            <a:spLocks noGrp="1"/>
+          </p:cNvSpPr>
           <p:nvPr>
             <p:ph type="title"/>
           </p:nvPr>
@@ -9443,11 +9709,11 @@
           </a:ln>
         </p:spPr>
         <p:txBody>
-          <a:bodyPr anchorCtr="0" anchor="ctr" bIns="45700" lIns="91425" spcFirstLastPara="1" rIns="91425" wrap="square" tIns="45700">
+          <a:bodyPr spcFirstLastPara="1" wrap="square" lIns="91425" tIns="45700" rIns="91425" bIns="45700" anchor="ctr" anchorCtr="0">
             <a:normAutofit/>
           </a:bodyPr>
           <a:lstStyle>
-            <a:lvl1pPr lvl="0" marR="0" rtl="0" algn="ctr">
+            <a:lvl1pPr marR="0" lvl="0" algn="ctr" rtl="0">
               <a:spcBef>
                 <a:spcPts val="0"/>
               </a:spcBef>
@@ -9460,7 +9726,7 @@
               <a:buSzPts val="4400"/>
               <a:buFont typeface="Calibri"/>
               <a:buNone/>
-              <a:defRPr b="0" i="0" sz="4400" u="none" cap="none" strike="noStrike">
+              <a:defRPr sz="4400" b="0" i="0" u="none" strike="noStrike" cap="none">
                 <a:solidFill>
                   <a:schemeClr val="dk1"/>
                 </a:solidFill>
@@ -9559,15 +9825,19 @@
               <a:defRPr sz="1800"/>
             </a:lvl9pPr>
           </a:lstStyle>
-          <a:p/>
+          <a:p>
+            <a:endParaRPr/>
+          </a:p>
         </p:txBody>
       </p:sp>
       <p:sp>
         <p:nvSpPr>
           <p:cNvPr id="7" name="Google Shape;7;p1"/>
-          <p:cNvSpPr txBox="1"/>
+          <p:cNvSpPr txBox="1">
+            <a:spLocks noGrp="1"/>
+          </p:cNvSpPr>
           <p:nvPr>
-            <p:ph idx="1" type="body"/>
+            <p:ph type="body" idx="1"/>
           </p:nvPr>
         </p:nvSpPr>
         <p:spPr>
@@ -9584,11 +9854,11 @@
           </a:ln>
         </p:spPr>
         <p:txBody>
-          <a:bodyPr anchorCtr="0" anchor="t" bIns="45700" lIns="91425" spcFirstLastPara="1" rIns="91425" wrap="square" tIns="45700">
+          <a:bodyPr spcFirstLastPara="1" wrap="square" lIns="91425" tIns="45700" rIns="91425" bIns="45700" anchor="t" anchorCtr="0">
             <a:normAutofit/>
           </a:bodyPr>
           <a:lstStyle>
-            <a:lvl1pPr indent="-431800" lvl="0" marL="457200" marR="0" rtl="0" algn="l">
+            <a:lvl1pPr marL="457200" marR="0" lvl="0" indent="-431800" algn="l" rtl="0">
               <a:spcBef>
                 <a:spcPts val="640"/>
               </a:spcBef>
@@ -9601,7 +9871,7 @@
               <a:buSzPts val="3200"/>
               <a:buFont typeface="Arial"/>
               <a:buChar char="•"/>
-              <a:defRPr b="0" i="0" sz="3200" u="none" cap="none" strike="noStrike">
+              <a:defRPr sz="3200" b="0" i="0" u="none" strike="noStrike" cap="none">
                 <a:solidFill>
                   <a:schemeClr val="dk1"/>
                 </a:solidFill>
@@ -9611,7 +9881,7 @@
                 <a:sym typeface="Calibri"/>
               </a:defRPr>
             </a:lvl1pPr>
-            <a:lvl2pPr indent="-406400" lvl="1" marL="914400" marR="0" rtl="0" algn="l">
+            <a:lvl2pPr marL="914400" marR="0" lvl="1" indent="-406400" algn="l" rtl="0">
               <a:spcBef>
                 <a:spcPts val="560"/>
               </a:spcBef>
@@ -9624,7 +9894,7 @@
               <a:buSzPts val="2800"/>
               <a:buFont typeface="Arial"/>
               <a:buChar char="–"/>
-              <a:defRPr b="0" i="0" sz="2800" u="none" cap="none" strike="noStrike">
+              <a:defRPr sz="2800" b="0" i="0" u="none" strike="noStrike" cap="none">
                 <a:solidFill>
                   <a:schemeClr val="dk1"/>
                 </a:solidFill>
@@ -9634,7 +9904,7 @@
                 <a:sym typeface="Calibri"/>
               </a:defRPr>
             </a:lvl2pPr>
-            <a:lvl3pPr indent="-381000" lvl="2" marL="1371600" marR="0" rtl="0" algn="l">
+            <a:lvl3pPr marL="1371600" marR="0" lvl="2" indent="-381000" algn="l" rtl="0">
               <a:spcBef>
                 <a:spcPts val="480"/>
               </a:spcBef>
@@ -9647,7 +9917,7 @@
               <a:buSzPts val="2400"/>
               <a:buFont typeface="Arial"/>
               <a:buChar char="•"/>
-              <a:defRPr b="0" i="0" sz="2400" u="none" cap="none" strike="noStrike">
+              <a:defRPr sz="2400" b="0" i="0" u="none" strike="noStrike" cap="none">
                 <a:solidFill>
                   <a:schemeClr val="dk1"/>
                 </a:solidFill>
@@ -9657,7 +9927,7 @@
                 <a:sym typeface="Calibri"/>
               </a:defRPr>
             </a:lvl3pPr>
-            <a:lvl4pPr indent="-355600" lvl="3" marL="1828800" marR="0" rtl="0" algn="l">
+            <a:lvl4pPr marL="1828800" marR="0" lvl="3" indent="-355600" algn="l" rtl="0">
               <a:spcBef>
                 <a:spcPts val="400"/>
               </a:spcBef>
@@ -9670,7 +9940,7 @@
               <a:buSzPts val="2000"/>
               <a:buFont typeface="Arial"/>
               <a:buChar char="–"/>
-              <a:defRPr b="0" i="0" sz="2000" u="none" cap="none" strike="noStrike">
+              <a:defRPr sz="2000" b="0" i="0" u="none" strike="noStrike" cap="none">
                 <a:solidFill>
                   <a:schemeClr val="dk1"/>
                 </a:solidFill>
@@ -9680,7 +9950,7 @@
                 <a:sym typeface="Calibri"/>
               </a:defRPr>
             </a:lvl4pPr>
-            <a:lvl5pPr indent="-355600" lvl="4" marL="2286000" marR="0" rtl="0" algn="l">
+            <a:lvl5pPr marL="2286000" marR="0" lvl="4" indent="-355600" algn="l" rtl="0">
               <a:spcBef>
                 <a:spcPts val="400"/>
               </a:spcBef>
@@ -9693,7 +9963,7 @@
               <a:buSzPts val="2000"/>
               <a:buFont typeface="Arial"/>
               <a:buChar char="»"/>
-              <a:defRPr b="0" i="0" sz="2000" u="none" cap="none" strike="noStrike">
+              <a:defRPr sz="2000" b="0" i="0" u="none" strike="noStrike" cap="none">
                 <a:solidFill>
                   <a:schemeClr val="dk1"/>
                 </a:solidFill>
@@ -9703,7 +9973,7 @@
                 <a:sym typeface="Calibri"/>
               </a:defRPr>
             </a:lvl5pPr>
-            <a:lvl6pPr indent="-355600" lvl="5" marL="2743200" marR="0" rtl="0" algn="l">
+            <a:lvl6pPr marL="2743200" marR="0" lvl="5" indent="-355600" algn="l" rtl="0">
               <a:spcBef>
                 <a:spcPts val="400"/>
               </a:spcBef>
@@ -9716,7 +9986,7 @@
               <a:buSzPts val="2000"/>
               <a:buFont typeface="Arial"/>
               <a:buChar char="•"/>
-              <a:defRPr b="0" i="0" sz="2000" u="none" cap="none" strike="noStrike">
+              <a:defRPr sz="2000" b="0" i="0" u="none" strike="noStrike" cap="none">
                 <a:solidFill>
                   <a:schemeClr val="dk1"/>
                 </a:solidFill>
@@ -9726,7 +9996,7 @@
                 <a:sym typeface="Calibri"/>
               </a:defRPr>
             </a:lvl6pPr>
-            <a:lvl7pPr indent="-355600" lvl="6" marL="3200400" marR="0" rtl="0" algn="l">
+            <a:lvl7pPr marL="3200400" marR="0" lvl="6" indent="-355600" algn="l" rtl="0">
               <a:spcBef>
                 <a:spcPts val="400"/>
               </a:spcBef>
@@ -9739,7 +10009,7 @@
               <a:buSzPts val="2000"/>
               <a:buFont typeface="Arial"/>
               <a:buChar char="•"/>
-              <a:defRPr b="0" i="0" sz="2000" u="none" cap="none" strike="noStrike">
+              <a:defRPr sz="2000" b="0" i="0" u="none" strike="noStrike" cap="none">
                 <a:solidFill>
                   <a:schemeClr val="dk1"/>
                 </a:solidFill>
@@ -9749,7 +10019,7 @@
                 <a:sym typeface="Calibri"/>
               </a:defRPr>
             </a:lvl7pPr>
-            <a:lvl8pPr indent="-355600" lvl="7" marL="3657600" marR="0" rtl="0" algn="l">
+            <a:lvl8pPr marL="3657600" marR="0" lvl="7" indent="-355600" algn="l" rtl="0">
               <a:spcBef>
                 <a:spcPts val="400"/>
               </a:spcBef>
@@ -9762,7 +10032,7 @@
               <a:buSzPts val="2000"/>
               <a:buFont typeface="Arial"/>
               <a:buChar char="•"/>
-              <a:defRPr b="0" i="0" sz="2000" u="none" cap="none" strike="noStrike">
+              <a:defRPr sz="2000" b="0" i="0" u="none" strike="noStrike" cap="none">
                 <a:solidFill>
                   <a:schemeClr val="dk1"/>
                 </a:solidFill>
@@ -9772,7 +10042,7 @@
                 <a:sym typeface="Calibri"/>
               </a:defRPr>
             </a:lvl8pPr>
-            <a:lvl9pPr indent="-355600" lvl="8" marL="4114800" marR="0" rtl="0" algn="l">
+            <a:lvl9pPr marL="4114800" marR="0" lvl="8" indent="-355600" algn="l" rtl="0">
               <a:spcBef>
                 <a:spcPts val="400"/>
               </a:spcBef>
@@ -9785,7 +10055,7 @@
               <a:buSzPts val="2000"/>
               <a:buFont typeface="Arial"/>
               <a:buChar char="•"/>
-              <a:defRPr b="0" i="0" sz="2000" u="none" cap="none" strike="noStrike">
+              <a:defRPr sz="2000" b="0" i="0" u="none" strike="noStrike" cap="none">
                 <a:solidFill>
                   <a:schemeClr val="dk1"/>
                 </a:solidFill>
@@ -9796,15 +10066,19 @@
               </a:defRPr>
             </a:lvl9pPr>
           </a:lstStyle>
-          <a:p/>
+          <a:p>
+            <a:endParaRPr/>
+          </a:p>
         </p:txBody>
       </p:sp>
       <p:sp>
         <p:nvSpPr>
           <p:cNvPr id="8" name="Google Shape;8;p1"/>
-          <p:cNvSpPr txBox="1"/>
+          <p:cNvSpPr txBox="1">
+            <a:spLocks noGrp="1"/>
+          </p:cNvSpPr>
           <p:nvPr>
-            <p:ph idx="10" type="dt"/>
+            <p:ph type="dt" idx="10"/>
           </p:nvPr>
         </p:nvSpPr>
         <p:spPr>
@@ -9821,20 +10095,20 @@
           </a:ln>
         </p:spPr>
         <p:txBody>
-          <a:bodyPr anchorCtr="0" anchor="ctr" bIns="45700" lIns="91425" spcFirstLastPara="1" rIns="91425" wrap="square" tIns="45700">
+          <a:bodyPr spcFirstLastPara="1" wrap="square" lIns="91425" tIns="45700" rIns="91425" bIns="45700" anchor="ctr" anchorCtr="0">
             <a:noAutofit/>
           </a:bodyPr>
           <a:lstStyle>
-            <a:lvl1pPr lvl="0" marR="0" rtl="0" algn="l">
-              <a:spcBef>
-                <a:spcPts val="0"/>
-              </a:spcBef>
-              <a:spcAft>
-                <a:spcPts val="0"/>
-              </a:spcAft>
-              <a:buSzPts val="1400"/>
-              <a:buNone/>
-              <a:defRPr b="0" i="0" sz="1200" u="none" cap="none" strike="noStrike">
+            <a:lvl1pPr marR="0" lvl="0" algn="l" rtl="0">
+              <a:spcBef>
+                <a:spcPts val="0"/>
+              </a:spcBef>
+              <a:spcAft>
+                <a:spcPts val="0"/>
+              </a:spcAft>
+              <a:buSzPts val="1400"/>
+              <a:buNone/>
+              <a:defRPr sz="1200" b="0" i="0" u="none" strike="noStrike" cap="none">
                 <a:solidFill>
                   <a:srgbClr val="888888"/>
                 </a:solidFill>
@@ -9844,16 +10118,16 @@
                 <a:sym typeface="Calibri"/>
               </a:defRPr>
             </a:lvl1pPr>
-            <a:lvl2pPr lvl="1" marR="0" rtl="0" algn="l">
-              <a:spcBef>
-                <a:spcPts val="0"/>
-              </a:spcBef>
-              <a:spcAft>
-                <a:spcPts val="0"/>
-              </a:spcAft>
-              <a:buSzPts val="1400"/>
-              <a:buNone/>
-              <a:defRPr b="0" i="0" sz="1800" u="none" cap="none" strike="noStrike">
+            <a:lvl2pPr marR="0" lvl="1" algn="l" rtl="0">
+              <a:spcBef>
+                <a:spcPts val="0"/>
+              </a:spcBef>
+              <a:spcAft>
+                <a:spcPts val="0"/>
+              </a:spcAft>
+              <a:buSzPts val="1400"/>
+              <a:buNone/>
+              <a:defRPr sz="1800" b="0" i="0" u="none" strike="noStrike" cap="none">
                 <a:solidFill>
                   <a:schemeClr val="dk1"/>
                 </a:solidFill>
@@ -9863,16 +10137,16 @@
                 <a:sym typeface="Calibri"/>
               </a:defRPr>
             </a:lvl2pPr>
-            <a:lvl3pPr lvl="2" marR="0" rtl="0" algn="l">
-              <a:spcBef>
-                <a:spcPts val="0"/>
-              </a:spcBef>
-              <a:spcAft>
-                <a:spcPts val="0"/>
-              </a:spcAft>
-              <a:buSzPts val="1400"/>
-              <a:buNone/>
-              <a:defRPr b="0" i="0" sz="1800" u="none" cap="none" strike="noStrike">
+            <a:lvl3pPr marR="0" lvl="2" algn="l" rtl="0">
+              <a:spcBef>
+                <a:spcPts val="0"/>
+              </a:spcBef>
+              <a:spcAft>
+                <a:spcPts val="0"/>
+              </a:spcAft>
+              <a:buSzPts val="1400"/>
+              <a:buNone/>
+              <a:defRPr sz="1800" b="0" i="0" u="none" strike="noStrike" cap="none">
                 <a:solidFill>
                   <a:schemeClr val="dk1"/>
                 </a:solidFill>
@@ -9882,16 +10156,16 @@
                 <a:sym typeface="Calibri"/>
               </a:defRPr>
             </a:lvl3pPr>
-            <a:lvl4pPr lvl="3" marR="0" rtl="0" algn="l">
-              <a:spcBef>
-                <a:spcPts val="0"/>
-              </a:spcBef>
-              <a:spcAft>
-                <a:spcPts val="0"/>
-              </a:spcAft>
-              <a:buSzPts val="1400"/>
-              <a:buNone/>
-              <a:defRPr b="0" i="0" sz="1800" u="none" cap="none" strike="noStrike">
+            <a:lvl4pPr marR="0" lvl="3" algn="l" rtl="0">
+              <a:spcBef>
+                <a:spcPts val="0"/>
+              </a:spcBef>
+              <a:spcAft>
+                <a:spcPts val="0"/>
+              </a:spcAft>
+              <a:buSzPts val="1400"/>
+              <a:buNone/>
+              <a:defRPr sz="1800" b="0" i="0" u="none" strike="noStrike" cap="none">
                 <a:solidFill>
                   <a:schemeClr val="dk1"/>
                 </a:solidFill>
@@ -9901,16 +10175,16 @@
                 <a:sym typeface="Calibri"/>
               </a:defRPr>
             </a:lvl4pPr>
-            <a:lvl5pPr lvl="4" marR="0" rtl="0" algn="l">
-              <a:spcBef>
-                <a:spcPts val="0"/>
-              </a:spcBef>
-              <a:spcAft>
-                <a:spcPts val="0"/>
-              </a:spcAft>
-              <a:buSzPts val="1400"/>
-              <a:buNone/>
-              <a:defRPr b="0" i="0" sz="1800" u="none" cap="none" strike="noStrike">
+            <a:lvl5pPr marR="0" lvl="4" algn="l" rtl="0">
+              <a:spcBef>
+                <a:spcPts val="0"/>
+              </a:spcBef>
+              <a:spcAft>
+                <a:spcPts val="0"/>
+              </a:spcAft>
+              <a:buSzPts val="1400"/>
+              <a:buNone/>
+              <a:defRPr sz="1800" b="0" i="0" u="none" strike="noStrike" cap="none">
                 <a:solidFill>
                   <a:schemeClr val="dk1"/>
                 </a:solidFill>
@@ -9920,16 +10194,16 @@
                 <a:sym typeface="Calibri"/>
               </a:defRPr>
             </a:lvl5pPr>
-            <a:lvl6pPr lvl="5" marR="0" rtl="0" algn="l">
-              <a:spcBef>
-                <a:spcPts val="0"/>
-              </a:spcBef>
-              <a:spcAft>
-                <a:spcPts val="0"/>
-              </a:spcAft>
-              <a:buSzPts val="1400"/>
-              <a:buNone/>
-              <a:defRPr b="0" i="0" sz="1800" u="none" cap="none" strike="noStrike">
+            <a:lvl6pPr marR="0" lvl="5" algn="l" rtl="0">
+              <a:spcBef>
+                <a:spcPts val="0"/>
+              </a:spcBef>
+              <a:spcAft>
+                <a:spcPts val="0"/>
+              </a:spcAft>
+              <a:buSzPts val="1400"/>
+              <a:buNone/>
+              <a:defRPr sz="1800" b="0" i="0" u="none" strike="noStrike" cap="none">
                 <a:solidFill>
                   <a:schemeClr val="dk1"/>
                 </a:solidFill>
@@ -9939,16 +10213,16 @@
                 <a:sym typeface="Calibri"/>
               </a:defRPr>
             </a:lvl6pPr>
-            <a:lvl7pPr lvl="6" marR="0" rtl="0" algn="l">
-              <a:spcBef>
-                <a:spcPts val="0"/>
-              </a:spcBef>
-              <a:spcAft>
-                <a:spcPts val="0"/>
-              </a:spcAft>
-              <a:buSzPts val="1400"/>
-              <a:buNone/>
-              <a:defRPr b="0" i="0" sz="1800" u="none" cap="none" strike="noStrike">
+            <a:lvl7pPr marR="0" lvl="6" algn="l" rtl="0">
+              <a:spcBef>
+                <a:spcPts val="0"/>
+              </a:spcBef>
+              <a:spcAft>
+                <a:spcPts val="0"/>
+              </a:spcAft>
+              <a:buSzPts val="1400"/>
+              <a:buNone/>
+              <a:defRPr sz="1800" b="0" i="0" u="none" strike="noStrike" cap="none">
                 <a:solidFill>
                   <a:schemeClr val="dk1"/>
                 </a:solidFill>
@@ -9958,16 +10232,16 @@
                 <a:sym typeface="Calibri"/>
               </a:defRPr>
             </a:lvl7pPr>
-            <a:lvl8pPr lvl="7" marR="0" rtl="0" algn="l">
-              <a:spcBef>
-                <a:spcPts val="0"/>
-              </a:spcBef>
-              <a:spcAft>
-                <a:spcPts val="0"/>
-              </a:spcAft>
-              <a:buSzPts val="1400"/>
-              <a:buNone/>
-              <a:defRPr b="0" i="0" sz="1800" u="none" cap="none" strike="noStrike">
+            <a:lvl8pPr marR="0" lvl="7" algn="l" rtl="0">
+              <a:spcBef>
+                <a:spcPts val="0"/>
+              </a:spcBef>
+              <a:spcAft>
+                <a:spcPts val="0"/>
+              </a:spcAft>
+              <a:buSzPts val="1400"/>
+              <a:buNone/>
+              <a:defRPr sz="1800" b="0" i="0" u="none" strike="noStrike" cap="none">
                 <a:solidFill>
                   <a:schemeClr val="dk1"/>
                 </a:solidFill>
@@ -9977,16 +10251,16 @@
                 <a:sym typeface="Calibri"/>
               </a:defRPr>
             </a:lvl8pPr>
-            <a:lvl9pPr lvl="8" marR="0" rtl="0" algn="l">
-              <a:spcBef>
-                <a:spcPts val="0"/>
-              </a:spcBef>
-              <a:spcAft>
-                <a:spcPts val="0"/>
-              </a:spcAft>
-              <a:buSzPts val="1400"/>
-              <a:buNone/>
-              <a:defRPr b="0" i="0" sz="1800" u="none" cap="none" strike="noStrike">
+            <a:lvl9pPr marR="0" lvl="8" algn="l" rtl="0">
+              <a:spcBef>
+                <a:spcPts val="0"/>
+              </a:spcBef>
+              <a:spcAft>
+                <a:spcPts val="0"/>
+              </a:spcAft>
+              <a:buSzPts val="1400"/>
+              <a:buNone/>
+              <a:defRPr sz="1800" b="0" i="0" u="none" strike="noStrike" cap="none">
                 <a:solidFill>
                   <a:schemeClr val="dk1"/>
                 </a:solidFill>
@@ -9997,15 +10271,19 @@
               </a:defRPr>
             </a:lvl9pPr>
           </a:lstStyle>
-          <a:p/>
+          <a:p>
+            <a:endParaRPr/>
+          </a:p>
         </p:txBody>
       </p:sp>
       <p:sp>
         <p:nvSpPr>
           <p:cNvPr id="9" name="Google Shape;9;p1"/>
-          <p:cNvSpPr txBox="1"/>
+          <p:cNvSpPr txBox="1">
+            <a:spLocks noGrp="1"/>
+          </p:cNvSpPr>
           <p:nvPr>
-            <p:ph idx="11" type="ftr"/>
+            <p:ph type="ftr" idx="11"/>
           </p:nvPr>
         </p:nvSpPr>
         <p:spPr>
@@ -10022,20 +10300,20 @@
           </a:ln>
         </p:spPr>
         <p:txBody>
-          <a:bodyPr anchorCtr="0" anchor="ctr" bIns="45700" lIns="91425" spcFirstLastPara="1" rIns="91425" wrap="square" tIns="45700">
+          <a:bodyPr spcFirstLastPara="1" wrap="square" lIns="91425" tIns="45700" rIns="91425" bIns="45700" anchor="ctr" anchorCtr="0">
             <a:noAutofit/>
           </a:bodyPr>
           <a:lstStyle>
-            <a:lvl1pPr lvl="0" marR="0" rtl="0" algn="ctr">
-              <a:spcBef>
-                <a:spcPts val="0"/>
-              </a:spcBef>
-              <a:spcAft>
-                <a:spcPts val="0"/>
-              </a:spcAft>
-              <a:buSzPts val="1400"/>
-              <a:buNone/>
-              <a:defRPr b="0" i="0" sz="1200" u="none" cap="none" strike="noStrike">
+            <a:lvl1pPr marR="0" lvl="0" algn="ctr" rtl="0">
+              <a:spcBef>
+                <a:spcPts val="0"/>
+              </a:spcBef>
+              <a:spcAft>
+                <a:spcPts val="0"/>
+              </a:spcAft>
+              <a:buSzPts val="1400"/>
+              <a:buNone/>
+              <a:defRPr sz="1200" b="0" i="0" u="none" strike="noStrike" cap="none">
                 <a:solidFill>
                   <a:srgbClr val="888888"/>
                 </a:solidFill>
@@ -10045,16 +10323,16 @@
                 <a:sym typeface="Calibri"/>
               </a:defRPr>
             </a:lvl1pPr>
-            <a:lvl2pPr lvl="1" marR="0" rtl="0" algn="l">
-              <a:spcBef>
-                <a:spcPts val="0"/>
-              </a:spcBef>
-              <a:spcAft>
-                <a:spcPts val="0"/>
-              </a:spcAft>
-              <a:buSzPts val="1400"/>
-              <a:buNone/>
-              <a:defRPr b="0" i="0" sz="1800" u="none" cap="none" strike="noStrike">
+            <a:lvl2pPr marR="0" lvl="1" algn="l" rtl="0">
+              <a:spcBef>
+                <a:spcPts val="0"/>
+              </a:spcBef>
+              <a:spcAft>
+                <a:spcPts val="0"/>
+              </a:spcAft>
+              <a:buSzPts val="1400"/>
+              <a:buNone/>
+              <a:defRPr sz="1800" b="0" i="0" u="none" strike="noStrike" cap="none">
                 <a:solidFill>
                   <a:schemeClr val="dk1"/>
                 </a:solidFill>
@@ -10064,16 +10342,16 @@
                 <a:sym typeface="Calibri"/>
               </a:defRPr>
             </a:lvl2pPr>
-            <a:lvl3pPr lvl="2" marR="0" rtl="0" algn="l">
-              <a:spcBef>
-                <a:spcPts val="0"/>
-              </a:spcBef>
-              <a:spcAft>
-                <a:spcPts val="0"/>
-              </a:spcAft>
-              <a:buSzPts val="1400"/>
-              <a:buNone/>
-              <a:defRPr b="0" i="0" sz="1800" u="none" cap="none" strike="noStrike">
+            <a:lvl3pPr marR="0" lvl="2" algn="l" rtl="0">
+              <a:spcBef>
+                <a:spcPts val="0"/>
+              </a:spcBef>
+              <a:spcAft>
+                <a:spcPts val="0"/>
+              </a:spcAft>
+              <a:buSzPts val="1400"/>
+              <a:buNone/>
+              <a:defRPr sz="1800" b="0" i="0" u="none" strike="noStrike" cap="none">
                 <a:solidFill>
                   <a:schemeClr val="dk1"/>
                 </a:solidFill>
@@ -10083,16 +10361,16 @@
                 <a:sym typeface="Calibri"/>
               </a:defRPr>
             </a:lvl3pPr>
-            <a:lvl4pPr lvl="3" marR="0" rtl="0" algn="l">
-              <a:spcBef>
-                <a:spcPts val="0"/>
-              </a:spcBef>
-              <a:spcAft>
-                <a:spcPts val="0"/>
-              </a:spcAft>
-              <a:buSzPts val="1400"/>
-              <a:buNone/>
-              <a:defRPr b="0" i="0" sz="1800" u="none" cap="none" strike="noStrike">
+            <a:lvl4pPr marR="0" lvl="3" algn="l" rtl="0">
+              <a:spcBef>
+                <a:spcPts val="0"/>
+              </a:spcBef>
+              <a:spcAft>
+                <a:spcPts val="0"/>
+              </a:spcAft>
+              <a:buSzPts val="1400"/>
+              <a:buNone/>
+              <a:defRPr sz="1800" b="0" i="0" u="none" strike="noStrike" cap="none">
                 <a:solidFill>
                   <a:schemeClr val="dk1"/>
                 </a:solidFill>
@@ -10102,16 +10380,16 @@
                 <a:sym typeface="Calibri"/>
               </a:defRPr>
             </a:lvl4pPr>
-            <a:lvl5pPr lvl="4" marR="0" rtl="0" algn="l">
-              <a:spcBef>
-                <a:spcPts val="0"/>
-              </a:spcBef>
-              <a:spcAft>
-                <a:spcPts val="0"/>
-              </a:spcAft>
-              <a:buSzPts val="1400"/>
-              <a:buNone/>
-              <a:defRPr b="0" i="0" sz="1800" u="none" cap="none" strike="noStrike">
+            <a:lvl5pPr marR="0" lvl="4" algn="l" rtl="0">
+              <a:spcBef>
+                <a:spcPts val="0"/>
+              </a:spcBef>
+              <a:spcAft>
+                <a:spcPts val="0"/>
+              </a:spcAft>
+              <a:buSzPts val="1400"/>
+              <a:buNone/>
+              <a:defRPr sz="1800" b="0" i="0" u="none" strike="noStrike" cap="none">
                 <a:solidFill>
                   <a:schemeClr val="dk1"/>
                 </a:solidFill>
@@ -10121,16 +10399,16 @@
                 <a:sym typeface="Calibri"/>
               </a:defRPr>
             </a:lvl5pPr>
-            <a:lvl6pPr lvl="5" marR="0" rtl="0" algn="l">
-              <a:spcBef>
-                <a:spcPts val="0"/>
-              </a:spcBef>
-              <a:spcAft>
-                <a:spcPts val="0"/>
-              </a:spcAft>
-              <a:buSzPts val="1400"/>
-              <a:buNone/>
-              <a:defRPr b="0" i="0" sz="1800" u="none" cap="none" strike="noStrike">
+            <a:lvl6pPr marR="0" lvl="5" algn="l" rtl="0">
+              <a:spcBef>
+                <a:spcPts val="0"/>
+              </a:spcBef>
+              <a:spcAft>
+                <a:spcPts val="0"/>
+              </a:spcAft>
+              <a:buSzPts val="1400"/>
+              <a:buNone/>
+              <a:defRPr sz="1800" b="0" i="0" u="none" strike="noStrike" cap="none">
                 <a:solidFill>
                   <a:schemeClr val="dk1"/>
                 </a:solidFill>
@@ -10140,16 +10418,16 @@
                 <a:sym typeface="Calibri"/>
               </a:defRPr>
             </a:lvl6pPr>
-            <a:lvl7pPr lvl="6" marR="0" rtl="0" algn="l">
-              <a:spcBef>
-                <a:spcPts val="0"/>
-              </a:spcBef>
-              <a:spcAft>
-                <a:spcPts val="0"/>
-              </a:spcAft>
-              <a:buSzPts val="1400"/>
-              <a:buNone/>
-              <a:defRPr b="0" i="0" sz="1800" u="none" cap="none" strike="noStrike">
+            <a:lvl7pPr marR="0" lvl="6" algn="l" rtl="0">
+              <a:spcBef>
+                <a:spcPts val="0"/>
+              </a:spcBef>
+              <a:spcAft>
+                <a:spcPts val="0"/>
+              </a:spcAft>
+              <a:buSzPts val="1400"/>
+              <a:buNone/>
+              <a:defRPr sz="1800" b="0" i="0" u="none" strike="noStrike" cap="none">
                 <a:solidFill>
                   <a:schemeClr val="dk1"/>
                 </a:solidFill>
@@ -10159,16 +10437,16 @@
                 <a:sym typeface="Calibri"/>
               </a:defRPr>
             </a:lvl7pPr>
-            <a:lvl8pPr lvl="7" marR="0" rtl="0" algn="l">
-              <a:spcBef>
-                <a:spcPts val="0"/>
-              </a:spcBef>
-              <a:spcAft>
-                <a:spcPts val="0"/>
-              </a:spcAft>
-              <a:buSzPts val="1400"/>
-              <a:buNone/>
-              <a:defRPr b="0" i="0" sz="1800" u="none" cap="none" strike="noStrike">
+            <a:lvl8pPr marR="0" lvl="7" algn="l" rtl="0">
+              <a:spcBef>
+                <a:spcPts val="0"/>
+              </a:spcBef>
+              <a:spcAft>
+                <a:spcPts val="0"/>
+              </a:spcAft>
+              <a:buSzPts val="1400"/>
+              <a:buNone/>
+              <a:defRPr sz="1800" b="0" i="0" u="none" strike="noStrike" cap="none">
                 <a:solidFill>
                   <a:schemeClr val="dk1"/>
                 </a:solidFill>
@@ -10178,16 +10456,16 @@
                 <a:sym typeface="Calibri"/>
               </a:defRPr>
             </a:lvl8pPr>
-            <a:lvl9pPr lvl="8" marR="0" rtl="0" algn="l">
-              <a:spcBef>
-                <a:spcPts val="0"/>
-              </a:spcBef>
-              <a:spcAft>
-                <a:spcPts val="0"/>
-              </a:spcAft>
-              <a:buSzPts val="1400"/>
-              <a:buNone/>
-              <a:defRPr b="0" i="0" sz="1800" u="none" cap="none" strike="noStrike">
+            <a:lvl9pPr marR="0" lvl="8" algn="l" rtl="0">
+              <a:spcBef>
+                <a:spcPts val="0"/>
+              </a:spcBef>
+              <a:spcAft>
+                <a:spcPts val="0"/>
+              </a:spcAft>
+              <a:buSzPts val="1400"/>
+              <a:buNone/>
+              <a:defRPr sz="1800" b="0" i="0" u="none" strike="noStrike" cap="none">
                 <a:solidFill>
                   <a:schemeClr val="dk1"/>
                 </a:solidFill>
@@ -10198,15 +10476,19 @@
               </a:defRPr>
             </a:lvl9pPr>
           </a:lstStyle>
-          <a:p/>
+          <a:p>
+            <a:endParaRPr/>
+          </a:p>
         </p:txBody>
       </p:sp>
       <p:sp>
         <p:nvSpPr>
           <p:cNvPr id="10" name="Google Shape;10;p1"/>
-          <p:cNvSpPr txBox="1"/>
+          <p:cNvSpPr txBox="1">
+            <a:spLocks noGrp="1"/>
+          </p:cNvSpPr>
           <p:nvPr>
-            <p:ph idx="12" type="sldNum"/>
+            <p:ph type="sldNum" idx="12"/>
           </p:nvPr>
         </p:nvSpPr>
         <p:spPr>
@@ -10223,16 +10505,16 @@
           </a:ln>
         </p:spPr>
         <p:txBody>
-          <a:bodyPr anchorCtr="0" anchor="ctr" bIns="45700" lIns="91425" spcFirstLastPara="1" rIns="91425" wrap="square" tIns="45700">
+          <a:bodyPr spcFirstLastPara="1" wrap="square" lIns="91425" tIns="45700" rIns="91425" bIns="45700" anchor="ctr" anchorCtr="0">
             <a:noAutofit/>
           </a:bodyPr>
           <a:lstStyle>
-            <a:lvl1pPr indent="0" lvl="0" marL="0" marR="0" rtl="0" algn="r">
-              <a:spcBef>
-                <a:spcPts val="0"/>
-              </a:spcBef>
-              <a:buNone/>
-              <a:defRPr b="0" i="0" sz="1200" u="none" cap="none" strike="noStrike">
+            <a:lvl1pPr marL="0" marR="0" lvl="0" indent="0" algn="r" rtl="0">
+              <a:spcBef>
+                <a:spcPts val="0"/>
+              </a:spcBef>
+              <a:buNone/>
+              <a:defRPr sz="1200" b="0" i="0" u="none" strike="noStrike" cap="none">
                 <a:solidFill>
                   <a:srgbClr val="888888"/>
                 </a:solidFill>
@@ -10242,12 +10524,12 @@
                 <a:sym typeface="Calibri"/>
               </a:defRPr>
             </a:lvl1pPr>
-            <a:lvl2pPr indent="0" lvl="1" marL="0" marR="0" rtl="0" algn="r">
-              <a:spcBef>
-                <a:spcPts val="0"/>
-              </a:spcBef>
-              <a:buNone/>
-              <a:defRPr b="0" i="0" sz="1200" u="none" cap="none" strike="noStrike">
+            <a:lvl2pPr marL="0" marR="0" lvl="1" indent="0" algn="r" rtl="0">
+              <a:spcBef>
+                <a:spcPts val="0"/>
+              </a:spcBef>
+              <a:buNone/>
+              <a:defRPr sz="1200" b="0" i="0" u="none" strike="noStrike" cap="none">
                 <a:solidFill>
                   <a:srgbClr val="888888"/>
                 </a:solidFill>
@@ -10257,12 +10539,12 @@
                 <a:sym typeface="Calibri"/>
               </a:defRPr>
             </a:lvl2pPr>
-            <a:lvl3pPr indent="0" lvl="2" marL="0" marR="0" rtl="0" algn="r">
-              <a:spcBef>
-                <a:spcPts val="0"/>
-              </a:spcBef>
-              <a:buNone/>
-              <a:defRPr b="0" i="0" sz="1200" u="none" cap="none" strike="noStrike">
+            <a:lvl3pPr marL="0" marR="0" lvl="2" indent="0" algn="r" rtl="0">
+              <a:spcBef>
+                <a:spcPts val="0"/>
+              </a:spcBef>
+              <a:buNone/>
+              <a:defRPr sz="1200" b="0" i="0" u="none" strike="noStrike" cap="none">
                 <a:solidFill>
                   <a:srgbClr val="888888"/>
                 </a:solidFill>
@@ -10272,12 +10554,12 @@
                 <a:sym typeface="Calibri"/>
               </a:defRPr>
             </a:lvl3pPr>
-            <a:lvl4pPr indent="0" lvl="3" marL="0" marR="0" rtl="0" algn="r">
-              <a:spcBef>
-                <a:spcPts val="0"/>
-              </a:spcBef>
-              <a:buNone/>
-              <a:defRPr b="0" i="0" sz="1200" u="none" cap="none" strike="noStrike">
+            <a:lvl4pPr marL="0" marR="0" lvl="3" indent="0" algn="r" rtl="0">
+              <a:spcBef>
+                <a:spcPts val="0"/>
+              </a:spcBef>
+              <a:buNone/>
+              <a:defRPr sz="1200" b="0" i="0" u="none" strike="noStrike" cap="none">
                 <a:solidFill>
                   <a:srgbClr val="888888"/>
                 </a:solidFill>
@@ -10287,12 +10569,12 @@
                 <a:sym typeface="Calibri"/>
               </a:defRPr>
             </a:lvl4pPr>
-            <a:lvl5pPr indent="0" lvl="4" marL="0" marR="0" rtl="0" algn="r">
-              <a:spcBef>
-                <a:spcPts val="0"/>
-              </a:spcBef>
-              <a:buNone/>
-              <a:defRPr b="0" i="0" sz="1200" u="none" cap="none" strike="noStrike">
+            <a:lvl5pPr marL="0" marR="0" lvl="4" indent="0" algn="r" rtl="0">
+              <a:spcBef>
+                <a:spcPts val="0"/>
+              </a:spcBef>
+              <a:buNone/>
+              <a:defRPr sz="1200" b="0" i="0" u="none" strike="noStrike" cap="none">
                 <a:solidFill>
                   <a:srgbClr val="888888"/>
                 </a:solidFill>
@@ -10302,12 +10584,12 @@
                 <a:sym typeface="Calibri"/>
               </a:defRPr>
             </a:lvl5pPr>
-            <a:lvl6pPr indent="0" lvl="5" marL="0" marR="0" rtl="0" algn="r">
-              <a:spcBef>
-                <a:spcPts val="0"/>
-              </a:spcBef>
-              <a:buNone/>
-              <a:defRPr b="0" i="0" sz="1200" u="none" cap="none" strike="noStrike">
+            <a:lvl6pPr marL="0" marR="0" lvl="5" indent="0" algn="r" rtl="0">
+              <a:spcBef>
+                <a:spcPts val="0"/>
+              </a:spcBef>
+              <a:buNone/>
+              <a:defRPr sz="1200" b="0" i="0" u="none" strike="noStrike" cap="none">
                 <a:solidFill>
                   <a:srgbClr val="888888"/>
                 </a:solidFill>
@@ -10317,12 +10599,12 @@
                 <a:sym typeface="Calibri"/>
               </a:defRPr>
             </a:lvl6pPr>
-            <a:lvl7pPr indent="0" lvl="6" marL="0" marR="0" rtl="0" algn="r">
-              <a:spcBef>
-                <a:spcPts val="0"/>
-              </a:spcBef>
-              <a:buNone/>
-              <a:defRPr b="0" i="0" sz="1200" u="none" cap="none" strike="noStrike">
+            <a:lvl7pPr marL="0" marR="0" lvl="6" indent="0" algn="r" rtl="0">
+              <a:spcBef>
+                <a:spcPts val="0"/>
+              </a:spcBef>
+              <a:buNone/>
+              <a:defRPr sz="1200" b="0" i="0" u="none" strike="noStrike" cap="none">
                 <a:solidFill>
                   <a:srgbClr val="888888"/>
                 </a:solidFill>
@@ -10332,12 +10614,12 @@
                 <a:sym typeface="Calibri"/>
               </a:defRPr>
             </a:lvl7pPr>
-            <a:lvl8pPr indent="0" lvl="7" marL="0" marR="0" rtl="0" algn="r">
-              <a:spcBef>
-                <a:spcPts val="0"/>
-              </a:spcBef>
-              <a:buNone/>
-              <a:defRPr b="0" i="0" sz="1200" u="none" cap="none" strike="noStrike">
+            <a:lvl8pPr marL="0" marR="0" lvl="7" indent="0" algn="r" rtl="0">
+              <a:spcBef>
+                <a:spcPts val="0"/>
+              </a:spcBef>
+              <a:buNone/>
+              <a:defRPr sz="1200" b="0" i="0" u="none" strike="noStrike" cap="none">
                 <a:solidFill>
                   <a:srgbClr val="888888"/>
                 </a:solidFill>
@@ -10347,12 +10629,12 @@
                 <a:sym typeface="Calibri"/>
               </a:defRPr>
             </a:lvl8pPr>
-            <a:lvl9pPr indent="0" lvl="8" marL="0" marR="0" rtl="0" algn="r">
-              <a:spcBef>
-                <a:spcPts val="0"/>
-              </a:spcBef>
-              <a:buNone/>
-              <a:defRPr b="0" i="0" sz="1200" u="none" cap="none" strike="noStrike">
+            <a:lvl9pPr marL="0" marR="0" lvl="8" indent="0" algn="r" rtl="0">
+              <a:spcBef>
+                <a:spcPts val="0"/>
+              </a:spcBef>
+              <a:buNone/>
+              <a:defRPr sz="1200" b="0" i="0" u="none" strike="noStrike" cap="none">
                 <a:solidFill>
                   <a:srgbClr val="888888"/>
                 </a:solidFill>
@@ -10364,7 +10646,7 @@
             </a:lvl9pPr>
           </a:lstStyle>
           <a:p>
-            <a:pPr indent="0" lvl="0" marL="0" rtl="0" algn="r">
+            <a:pPr marL="0" lvl="0" indent="0" algn="r" rtl="0">
               <a:spcBef>
                 <a:spcPts val="0"/>
               </a:spcBef>
@@ -10383,7 +10665,7 @@
       </p:sp>
     </p:spTree>
   </p:cSld>
-  <p:clrMap accent1="accent1" accent2="accent2" accent3="accent3" accent4="accent4" accent5="accent5" accent6="accent6" bg1="lt1" bg2="dk2" tx1="dk1" tx2="lt2" folHlink="folHlink" hlink="hlink"/>
+  <p:clrMap bg1="lt1" tx1="dk1" bg2="dk2" tx2="lt2" accent1="accent1" accent2="accent2" accent3="accent3" accent4="accent4" accent5="accent5" accent6="accent6" hlink="hlink" folHlink="folHlink"/>
   <p:sldLayoutIdLst>
     <p:sldLayoutId id="2147483648" r:id="rId1"/>
     <p:sldLayoutId id="2147483649" r:id="rId2"/>
@@ -10397,10 +10679,10 @@
     <p:sldLayoutId id="2147483657" r:id="rId10"/>
     <p:sldLayoutId id="2147483658" r:id="rId11"/>
   </p:sldLayoutIdLst>
-  <p:hf dt="0" ftr="0" hdr="0" sldNum="0"/>
+  <p:hf sldNum="0" hdr="0" ftr="0" dt="0"/>
   <p:txStyles>
     <p:titleStyle>
-      <a:defPPr lvl="0" marR="0" rtl="0" algn="l">
+      <a:defPPr marR="0" lvl="0" algn="l" rtl="0">
         <a:lnSpc>
           <a:spcPct val="100000"/>
         </a:lnSpc>
@@ -10411,7 +10693,7 @@
           <a:spcPts val="0"/>
         </a:spcAft>
       </a:defPPr>
-      <a:lvl1pPr lvl="0" marR="0" rtl="0" algn="l">
+      <a:lvl1pPr marR="0" lvl="0" algn="l" rtl="0">
         <a:lnSpc>
           <a:spcPct val="100000"/>
         </a:lnSpc>
@@ -10425,7 +10707,7 @@
           <a:srgbClr val="000000"/>
         </a:buClr>
         <a:buFont typeface="Arial"/>
-        <a:defRPr b="0" i="0" sz="1400" u="none" cap="none" strike="noStrike">
+        <a:defRPr sz="1400" b="0" i="0" u="none" strike="noStrike" cap="none">
           <a:solidFill>
             <a:srgbClr val="000000"/>
           </a:solidFill>
@@ -10435,7 +10717,7 @@
           <a:sym typeface="Arial"/>
         </a:defRPr>
       </a:lvl1pPr>
-      <a:lvl2pPr lvl="1" marR="0" rtl="0" algn="l">
+      <a:lvl2pPr marR="0" lvl="1" algn="l" rtl="0">
         <a:lnSpc>
           <a:spcPct val="100000"/>
         </a:lnSpc>
@@ -10449,7 +10731,7 @@
           <a:srgbClr val="000000"/>
         </a:buClr>
         <a:buFont typeface="Arial"/>
-        <a:defRPr b="0" i="0" sz="1400" u="none" cap="none" strike="noStrike">
+        <a:defRPr sz="1400" b="0" i="0" u="none" strike="noStrike" cap="none">
           <a:solidFill>
             <a:srgbClr val="000000"/>
           </a:solidFill>
@@ -10459,7 +10741,7 @@
           <a:sym typeface="Arial"/>
         </a:defRPr>
       </a:lvl2pPr>
-      <a:lvl3pPr lvl="2" marR="0" rtl="0" algn="l">
+      <a:lvl3pPr marR="0" lvl="2" algn="l" rtl="0">
         <a:lnSpc>
           <a:spcPct val="100000"/>
         </a:lnSpc>
@@ -10473,7 +10755,7 @@
           <a:srgbClr val="000000"/>
         </a:buClr>
         <a:buFont typeface="Arial"/>
-        <a:defRPr b="0" i="0" sz="1400" u="none" cap="none" strike="noStrike">
+        <a:defRPr sz="1400" b="0" i="0" u="none" strike="noStrike" cap="none">
           <a:solidFill>
             <a:srgbClr val="000000"/>
           </a:solidFill>
@@ -10483,7 +10765,7 @@
           <a:sym typeface="Arial"/>
         </a:defRPr>
       </a:lvl3pPr>
-      <a:lvl4pPr lvl="3" marR="0" rtl="0" algn="l">
+      <a:lvl4pPr marR="0" lvl="3" algn="l" rtl="0">
         <a:lnSpc>
           <a:spcPct val="100000"/>
         </a:lnSpc>
@@ -10497,7 +10779,7 @@
           <a:srgbClr val="000000"/>
         </a:buClr>
         <a:buFont typeface="Arial"/>
-        <a:defRPr b="0" i="0" sz="1400" u="none" cap="none" strike="noStrike">
+        <a:defRPr sz="1400" b="0" i="0" u="none" strike="noStrike" cap="none">
           <a:solidFill>
             <a:srgbClr val="000000"/>
           </a:solidFill>
@@ -10507,7 +10789,7 @@
           <a:sym typeface="Arial"/>
         </a:defRPr>
       </a:lvl4pPr>
-      <a:lvl5pPr lvl="4" marR="0" rtl="0" algn="l">
+      <a:lvl5pPr marR="0" lvl="4" algn="l" rtl="0">
         <a:lnSpc>
           <a:spcPct val="100000"/>
         </a:lnSpc>
@@ -10521,7 +10803,7 @@
           <a:srgbClr val="000000"/>
         </a:buClr>
         <a:buFont typeface="Arial"/>
-        <a:defRPr b="0" i="0" sz="1400" u="none" cap="none" strike="noStrike">
+        <a:defRPr sz="1400" b="0" i="0" u="none" strike="noStrike" cap="none">
           <a:solidFill>
             <a:srgbClr val="000000"/>
           </a:solidFill>
@@ -10531,7 +10813,7 @@
           <a:sym typeface="Arial"/>
         </a:defRPr>
       </a:lvl5pPr>
-      <a:lvl6pPr lvl="5" marR="0" rtl="0" algn="l">
+      <a:lvl6pPr marR="0" lvl="5" algn="l" rtl="0">
         <a:lnSpc>
           <a:spcPct val="100000"/>
         </a:lnSpc>
@@ -10545,7 +10827,7 @@
           <a:srgbClr val="000000"/>
         </a:buClr>
         <a:buFont typeface="Arial"/>
-        <a:defRPr b="0" i="0" sz="1400" u="none" cap="none" strike="noStrike">
+        <a:defRPr sz="1400" b="0" i="0" u="none" strike="noStrike" cap="none">
           <a:solidFill>
             <a:srgbClr val="000000"/>
           </a:solidFill>
@@ -10555,7 +10837,7 @@
           <a:sym typeface="Arial"/>
         </a:defRPr>
       </a:lvl6pPr>
-      <a:lvl7pPr lvl="6" marR="0" rtl="0" algn="l">
+      <a:lvl7pPr marR="0" lvl="6" algn="l" rtl="0">
         <a:lnSpc>
           <a:spcPct val="100000"/>
         </a:lnSpc>
@@ -10569,7 +10851,7 @@
           <a:srgbClr val="000000"/>
         </a:buClr>
         <a:buFont typeface="Arial"/>
-        <a:defRPr b="0" i="0" sz="1400" u="none" cap="none" strike="noStrike">
+        <a:defRPr sz="1400" b="0" i="0" u="none" strike="noStrike" cap="none">
           <a:solidFill>
             <a:srgbClr val="000000"/>
           </a:solidFill>
@@ -10579,7 +10861,7 @@
           <a:sym typeface="Arial"/>
         </a:defRPr>
       </a:lvl7pPr>
-      <a:lvl8pPr lvl="7" marR="0" rtl="0" algn="l">
+      <a:lvl8pPr marR="0" lvl="7" algn="l" rtl="0">
         <a:lnSpc>
           <a:spcPct val="100000"/>
         </a:lnSpc>
@@ -10593,7 +10875,7 @@
           <a:srgbClr val="000000"/>
         </a:buClr>
         <a:buFont typeface="Arial"/>
-        <a:defRPr b="0" i="0" sz="1400" u="none" cap="none" strike="noStrike">
+        <a:defRPr sz="1400" b="0" i="0" u="none" strike="noStrike" cap="none">
           <a:solidFill>
             <a:srgbClr val="000000"/>
           </a:solidFill>
@@ -10603,7 +10885,7 @@
           <a:sym typeface="Arial"/>
         </a:defRPr>
       </a:lvl8pPr>
-      <a:lvl9pPr lvl="8" marR="0" rtl="0" algn="l">
+      <a:lvl9pPr marR="0" lvl="8" algn="l" rtl="0">
         <a:lnSpc>
           <a:spcPct val="100000"/>
         </a:lnSpc>
@@ -10617,7 +10899,7 @@
           <a:srgbClr val="000000"/>
         </a:buClr>
         <a:buFont typeface="Arial"/>
-        <a:defRPr b="0" i="0" sz="1400" u="none" cap="none" strike="noStrike">
+        <a:defRPr sz="1400" b="0" i="0" u="none" strike="noStrike" cap="none">
           <a:solidFill>
             <a:srgbClr val="000000"/>
           </a:solidFill>
@@ -10629,7 +10911,7 @@
       </a:lvl9pPr>
     </p:titleStyle>
     <p:bodyStyle>
-      <a:defPPr lvl="0" marR="0" rtl="0" algn="l">
+      <a:defPPr marR="0" lvl="0" algn="l" rtl="0">
         <a:lnSpc>
           <a:spcPct val="100000"/>
         </a:lnSpc>
@@ -10640,7 +10922,7 @@
           <a:spcPts val="0"/>
         </a:spcAft>
       </a:defPPr>
-      <a:lvl1pPr lvl="0" marR="0" rtl="0" algn="l">
+      <a:lvl1pPr marR="0" lvl="0" algn="l" rtl="0">
         <a:lnSpc>
           <a:spcPct val="100000"/>
         </a:lnSpc>
@@ -10654,7 +10936,7 @@
           <a:srgbClr val="000000"/>
         </a:buClr>
         <a:buFont typeface="Arial"/>
-        <a:defRPr b="0" i="0" sz="1400" u="none" cap="none" strike="noStrike">
+        <a:defRPr sz="1400" b="0" i="0" u="none" strike="noStrike" cap="none">
           <a:solidFill>
             <a:srgbClr val="000000"/>
           </a:solidFill>
@@ -10664,7 +10946,7 @@
           <a:sym typeface="Arial"/>
         </a:defRPr>
       </a:lvl1pPr>
-      <a:lvl2pPr lvl="1" marR="0" rtl="0" algn="l">
+      <a:lvl2pPr marR="0" lvl="1" algn="l" rtl="0">
         <a:lnSpc>
           <a:spcPct val="100000"/>
         </a:lnSpc>
@@ -10678,7 +10960,7 @@
           <a:srgbClr val="000000"/>
         </a:buClr>
         <a:buFont typeface="Arial"/>
-        <a:defRPr b="0" i="0" sz="1400" u="none" cap="none" strike="noStrike">
+        <a:defRPr sz="1400" b="0" i="0" u="none" strike="noStrike" cap="none">
           <a:solidFill>
             <a:srgbClr val="000000"/>
           </a:solidFill>
@@ -10688,7 +10970,7 @@
           <a:sym typeface="Arial"/>
         </a:defRPr>
       </a:lvl2pPr>
-      <a:lvl3pPr lvl="2" marR="0" rtl="0" algn="l">
+      <a:lvl3pPr marR="0" lvl="2" algn="l" rtl="0">
         <a:lnSpc>
           <a:spcPct val="100000"/>
         </a:lnSpc>
@@ -10702,7 +10984,7 @@
           <a:srgbClr val="000000"/>
         </a:buClr>
         <a:buFont typeface="Arial"/>
-        <a:defRPr b="0" i="0" sz="1400" u="none" cap="none" strike="noStrike">
+        <a:defRPr sz="1400" b="0" i="0" u="none" strike="noStrike" cap="none">
           <a:solidFill>
             <a:srgbClr val="000000"/>
           </a:solidFill>
@@ -10712,7 +10994,7 @@
           <a:sym typeface="Arial"/>
         </a:defRPr>
       </a:lvl3pPr>
-      <a:lvl4pPr lvl="3" marR="0" rtl="0" algn="l">
+      <a:lvl4pPr marR="0" lvl="3" algn="l" rtl="0">
         <a:lnSpc>
           <a:spcPct val="100000"/>
         </a:lnSpc>
@@ -10726,7 +11008,7 @@
           <a:srgbClr val="000000"/>
         </a:buClr>
         <a:buFont typeface="Arial"/>
-        <a:defRPr b="0" i="0" sz="1400" u="none" cap="none" strike="noStrike">
+        <a:defRPr sz="1400" b="0" i="0" u="none" strike="noStrike" cap="none">
           <a:solidFill>
             <a:srgbClr val="000000"/>
           </a:solidFill>
@@ -10736,7 +11018,7 @@
           <a:sym typeface="Arial"/>
         </a:defRPr>
       </a:lvl4pPr>
-      <a:lvl5pPr lvl="4" marR="0" rtl="0" algn="l">
+      <a:lvl5pPr marR="0" lvl="4" algn="l" rtl="0">
         <a:lnSpc>
           <a:spcPct val="100000"/>
         </a:lnSpc>
@@ -10750,7 +11032,7 @@
           <a:srgbClr val="000000"/>
         </a:buClr>
         <a:buFont typeface="Arial"/>
-        <a:defRPr b="0" i="0" sz="1400" u="none" cap="none" strike="noStrike">
+        <a:defRPr sz="1400" b="0" i="0" u="none" strike="noStrike" cap="none">
           <a:solidFill>
             <a:srgbClr val="000000"/>
           </a:solidFill>
@@ -10760,7 +11042,7 @@
           <a:sym typeface="Arial"/>
         </a:defRPr>
       </a:lvl5pPr>
-      <a:lvl6pPr lvl="5" marR="0" rtl="0" algn="l">
+      <a:lvl6pPr marR="0" lvl="5" algn="l" rtl="0">
         <a:lnSpc>
           <a:spcPct val="100000"/>
         </a:lnSpc>
@@ -10774,7 +11056,7 @@
           <a:srgbClr val="000000"/>
         </a:buClr>
         <a:buFont typeface="Arial"/>
-        <a:defRPr b="0" i="0" sz="1400" u="none" cap="none" strike="noStrike">
+        <a:defRPr sz="1400" b="0" i="0" u="none" strike="noStrike" cap="none">
           <a:solidFill>
             <a:srgbClr val="000000"/>
           </a:solidFill>
@@ -10784,7 +11066,7 @@
           <a:sym typeface="Arial"/>
         </a:defRPr>
       </a:lvl6pPr>
-      <a:lvl7pPr lvl="6" marR="0" rtl="0" algn="l">
+      <a:lvl7pPr marR="0" lvl="6" algn="l" rtl="0">
         <a:lnSpc>
           <a:spcPct val="100000"/>
         </a:lnSpc>
@@ -10798,7 +11080,7 @@
           <a:srgbClr val="000000"/>
         </a:buClr>
         <a:buFont typeface="Arial"/>
-        <a:defRPr b="0" i="0" sz="1400" u="none" cap="none" strike="noStrike">
+        <a:defRPr sz="1400" b="0" i="0" u="none" strike="noStrike" cap="none">
           <a:solidFill>
             <a:srgbClr val="000000"/>
           </a:solidFill>
@@ -10808,7 +11090,7 @@
           <a:sym typeface="Arial"/>
         </a:defRPr>
       </a:lvl7pPr>
-      <a:lvl8pPr lvl="7" marR="0" rtl="0" algn="l">
+      <a:lvl8pPr marR="0" lvl="7" algn="l" rtl="0">
         <a:lnSpc>
           <a:spcPct val="100000"/>
         </a:lnSpc>
@@ -10822,7 +11104,7 @@
           <a:srgbClr val="000000"/>
         </a:buClr>
         <a:buFont typeface="Arial"/>
-        <a:defRPr b="0" i="0" sz="1400" u="none" cap="none" strike="noStrike">
+        <a:defRPr sz="1400" b="0" i="0" u="none" strike="noStrike" cap="none">
           <a:solidFill>
             <a:srgbClr val="000000"/>
           </a:solidFill>
@@ -10832,7 +11114,7 @@
           <a:sym typeface="Arial"/>
         </a:defRPr>
       </a:lvl8pPr>
-      <a:lvl9pPr lvl="8" marR="0" rtl="0" algn="l">
+      <a:lvl9pPr marR="0" lvl="8" algn="l" rtl="0">
         <a:lnSpc>
           <a:spcPct val="100000"/>
         </a:lnSpc>
@@ -10846,7 +11128,7 @@
           <a:srgbClr val="000000"/>
         </a:buClr>
         <a:buFont typeface="Arial"/>
-        <a:defRPr b="0" i="0" sz="1400" u="none" cap="none" strike="noStrike">
+        <a:defRPr sz="1400" b="0" i="0" u="none" strike="noStrike" cap="none">
           <a:solidFill>
             <a:srgbClr val="000000"/>
           </a:solidFill>
@@ -10858,7 +11140,7 @@
       </a:lvl9pPr>
     </p:bodyStyle>
     <p:otherStyle>
-      <a:defPPr lvl="0" marR="0" rtl="0" algn="l">
+      <a:defPPr marR="0" lvl="0" algn="l" rtl="0">
         <a:lnSpc>
           <a:spcPct val="100000"/>
         </a:lnSpc>
@@ -10869,7 +11151,7 @@
           <a:spcPts val="0"/>
         </a:spcAft>
       </a:defPPr>
-      <a:lvl1pPr lvl="0" marR="0" rtl="0" algn="l">
+      <a:lvl1pPr marR="0" lvl="0" algn="l" rtl="0">
         <a:lnSpc>
           <a:spcPct val="100000"/>
         </a:lnSpc>
@@ -10883,7 +11165,7 @@
           <a:srgbClr val="000000"/>
         </a:buClr>
         <a:buFont typeface="Arial"/>
-        <a:defRPr b="0" i="0" sz="1400" u="none" cap="none" strike="noStrike">
+        <a:defRPr sz="1400" b="0" i="0" u="none" strike="noStrike" cap="none">
           <a:solidFill>
             <a:srgbClr val="000000"/>
           </a:solidFill>
@@ -10893,7 +11175,7 @@
           <a:sym typeface="Arial"/>
         </a:defRPr>
       </a:lvl1pPr>
-      <a:lvl2pPr lvl="1" marR="0" rtl="0" algn="l">
+      <a:lvl2pPr marR="0" lvl="1" algn="l" rtl="0">
         <a:lnSpc>
           <a:spcPct val="100000"/>
         </a:lnSpc>
@@ -10907,7 +11189,7 @@
           <a:srgbClr val="000000"/>
         </a:buClr>
         <a:buFont typeface="Arial"/>
-        <a:defRPr b="0" i="0" sz="1400" u="none" cap="none" strike="noStrike">
+        <a:defRPr sz="1400" b="0" i="0" u="none" strike="noStrike" cap="none">
           <a:solidFill>
             <a:srgbClr val="000000"/>
           </a:solidFill>
@@ -10917,7 +11199,7 @@
           <a:sym typeface="Arial"/>
         </a:defRPr>
       </a:lvl2pPr>
-      <a:lvl3pPr lvl="2" marR="0" rtl="0" algn="l">
+      <a:lvl3pPr marR="0" lvl="2" algn="l" rtl="0">
         <a:lnSpc>
           <a:spcPct val="100000"/>
         </a:lnSpc>
@@ -10931,7 +11213,7 @@
           <a:srgbClr val="000000"/>
         </a:buClr>
         <a:buFont typeface="Arial"/>
-        <a:defRPr b="0" i="0" sz="1400" u="none" cap="none" strike="noStrike">
+        <a:defRPr sz="1400" b="0" i="0" u="none" strike="noStrike" cap="none">
           <a:solidFill>
             <a:srgbClr val="000000"/>
           </a:solidFill>
@@ -10941,7 +11223,7 @@
           <a:sym typeface="Arial"/>
         </a:defRPr>
       </a:lvl3pPr>
-      <a:lvl4pPr lvl="3" marR="0" rtl="0" algn="l">
+      <a:lvl4pPr marR="0" lvl="3" algn="l" rtl="0">
         <a:lnSpc>
           <a:spcPct val="100000"/>
         </a:lnSpc>
@@ -10955,7 +11237,7 @@
           <a:srgbClr val="000000"/>
         </a:buClr>
         <a:buFont typeface="Arial"/>
-        <a:defRPr b="0" i="0" sz="1400" u="none" cap="none" strike="noStrike">
+        <a:defRPr sz="1400" b="0" i="0" u="none" strike="noStrike" cap="none">
           <a:solidFill>
             <a:srgbClr val="000000"/>
           </a:solidFill>
@@ -10965,7 +11247,7 @@
           <a:sym typeface="Arial"/>
         </a:defRPr>
       </a:lvl4pPr>
-      <a:lvl5pPr lvl="4" marR="0" rtl="0" algn="l">
+      <a:lvl5pPr marR="0" lvl="4" algn="l" rtl="0">
         <a:lnSpc>
           <a:spcPct val="100000"/>
         </a:lnSpc>
@@ -10979,7 +11261,7 @@
           <a:srgbClr val="000000"/>
         </a:buClr>
         <a:buFont typeface="Arial"/>
-        <a:defRPr b="0" i="0" sz="1400" u="none" cap="none" strike="noStrike">
+        <a:defRPr sz="1400" b="0" i="0" u="none" strike="noStrike" cap="none">
           <a:solidFill>
             <a:srgbClr val="000000"/>
           </a:solidFill>
@@ -10989,7 +11271,7 @@
           <a:sym typeface="Arial"/>
         </a:defRPr>
       </a:lvl5pPr>
-      <a:lvl6pPr lvl="5" marR="0" rtl="0" algn="l">
+      <a:lvl6pPr marR="0" lvl="5" algn="l" rtl="0">
         <a:lnSpc>
           <a:spcPct val="100000"/>
         </a:lnSpc>
@@ -11003,7 +11285,7 @@
           <a:srgbClr val="000000"/>
         </a:buClr>
         <a:buFont typeface="Arial"/>
-        <a:defRPr b="0" i="0" sz="1400" u="none" cap="none" strike="noStrike">
+        <a:defRPr sz="1400" b="0" i="0" u="none" strike="noStrike" cap="none">
           <a:solidFill>
             <a:srgbClr val="000000"/>
           </a:solidFill>
@@ -11013,7 +11295,7 @@
           <a:sym typeface="Arial"/>
         </a:defRPr>
       </a:lvl6pPr>
-      <a:lvl7pPr lvl="6" marR="0" rtl="0" algn="l">
+      <a:lvl7pPr marR="0" lvl="6" algn="l" rtl="0">
         <a:lnSpc>
           <a:spcPct val="100000"/>
         </a:lnSpc>
@@ -11027,7 +11309,7 @@
           <a:srgbClr val="000000"/>
         </a:buClr>
         <a:buFont typeface="Arial"/>
-        <a:defRPr b="0" i="0" sz="1400" u="none" cap="none" strike="noStrike">
+        <a:defRPr sz="1400" b="0" i="0" u="none" strike="noStrike" cap="none">
           <a:solidFill>
             <a:srgbClr val="000000"/>
           </a:solidFill>
@@ -11037,7 +11319,7 @@
           <a:sym typeface="Arial"/>
         </a:defRPr>
       </a:lvl7pPr>
-      <a:lvl8pPr lvl="7" marR="0" rtl="0" algn="l">
+      <a:lvl8pPr marR="0" lvl="7" algn="l" rtl="0">
         <a:lnSpc>
           <a:spcPct val="100000"/>
         </a:lnSpc>
@@ -11051,7 +11333,7 @@
           <a:srgbClr val="000000"/>
         </a:buClr>
         <a:buFont typeface="Arial"/>
-        <a:defRPr b="0" i="0" sz="1400" u="none" cap="none" strike="noStrike">
+        <a:defRPr sz="1400" b="0" i="0" u="none" strike="noStrike" cap="none">
           <a:solidFill>
             <a:srgbClr val="000000"/>
           </a:solidFill>
@@ -11061,7 +11343,7 @@
           <a:sym typeface="Arial"/>
         </a:defRPr>
       </a:lvl8pPr>
-      <a:lvl9pPr lvl="8" marR="0" rtl="0" algn="l">
+      <a:lvl9pPr marR="0" lvl="8" algn="l" rtl="0">
         <a:lnSpc>
           <a:spcPct val="100000"/>
         </a:lnSpc>
@@ -11075,7 +11357,7 @@
           <a:srgbClr val="000000"/>
         </a:buClr>
         <a:buFont typeface="Arial"/>
-        <a:defRPr b="0" i="0" sz="1400" u="none" cap="none" strike="noStrike">
+        <a:defRPr sz="1400" b="0" i="0" u="none" strike="noStrike" cap="none">
           <a:solidFill>
             <a:srgbClr val="000000"/>
           </a:solidFill>
@@ -11091,7 +11373,7 @@
 </file>
 
 <file path=ppt/slides/slide1.xml><?xml version="1.0" encoding="utf-8"?>
-<p:sld xmlns:a="http://schemas.openxmlformats.org/drawingml/2006/main" xmlns:r="http://schemas.openxmlformats.org/officeDocument/2006/relationships" xmlns:mc="http://schemas.openxmlformats.org/markup-compatibility/2006" xmlns:mv="urn:schemas-microsoft-com:mac:vml" xmlns:p="http://schemas.openxmlformats.org/presentationml/2006/main" xmlns:c="http://schemas.openxmlformats.org/drawingml/2006/chart" xmlns:dgm="http://schemas.openxmlformats.org/drawingml/2006/diagram" xmlns:o="urn:schemas-microsoft-com:office:office" xmlns:v="urn:schemas-microsoft-com:vml" xmlns:pvml="urn:schemas-microsoft-com:office:powerpoint" xmlns:com="http://schemas.openxmlformats.org/drawingml/2006/compatibility" xmlns:p14="http://schemas.microsoft.com/office/powerpoint/2010/main" xmlns:p15="http://schemas.microsoft.com/office/powerpoint/2012/main" xmlns:ahyp="http://schemas.microsoft.com/office/drawing/2018/hyperlinkcolor">
+<p:sld xmlns:a="http://schemas.openxmlformats.org/drawingml/2006/main" xmlns:r="http://schemas.openxmlformats.org/officeDocument/2006/relationships" xmlns:p="http://schemas.openxmlformats.org/presentationml/2006/main">
   <p:cSld>
     <p:bg>
       <p:bgPr>
@@ -11103,11 +11385,12 @@
             <a:fillRect/>
           </a:stretch>
         </a:blipFill>
+        <a:effectLst/>
       </p:bgPr>
     </p:bg>
     <p:spTree>
       <p:nvGrpSpPr>
-        <p:cNvPr id="83" name="Shape 83"/>
+        <p:cNvPr id="1" name="Shape 83"/>
         <p:cNvGrpSpPr/>
         <p:nvPr/>
       </p:nvGrpSpPr>
@@ -11139,12 +11422,12 @@
           </a:ln>
         </p:spPr>
         <p:txBody>
-          <a:bodyPr anchorCtr="0" anchor="t" bIns="0" lIns="0" spcFirstLastPara="1" rIns="0" wrap="square" tIns="0">
+          <a:bodyPr spcFirstLastPara="1" wrap="square" lIns="0" tIns="0" rIns="0" bIns="0" anchor="t" anchorCtr="0">
             <a:spAutoFit/>
           </a:bodyPr>
           <a:lstStyle/>
           <a:p>
-            <a:pPr indent="0" lvl="0" marL="0" marR="0" rtl="0" algn="l">
+            <a:pPr marL="0" marR="0" lvl="0" indent="0" algn="l" rtl="0">
               <a:lnSpc>
                 <a:spcPct val="160000"/>
               </a:lnSpc>
@@ -11157,7 +11440,7 @@
               <a:buNone/>
             </a:pPr>
             <a:r>
-              <a:rPr b="0" i="0" lang="en-US" sz="1950" u="none" cap="none" strike="noStrike">
+              <a:rPr lang="en-US" sz="1950" b="0" i="0" u="none" strike="noStrike" cap="none">
                 <a:solidFill>
                   <a:srgbClr val="38BDF8"/>
                 </a:solidFill>
@@ -11192,12 +11475,12 @@
           </a:ln>
         </p:spPr>
         <p:txBody>
-          <a:bodyPr anchorCtr="0" anchor="t" bIns="0" lIns="0" spcFirstLastPara="1" rIns="0" wrap="square" tIns="0">
+          <a:bodyPr spcFirstLastPara="1" wrap="square" lIns="0" tIns="0" rIns="0" bIns="0" anchor="t" anchorCtr="0">
             <a:spAutoFit/>
           </a:bodyPr>
           <a:lstStyle/>
           <a:p>
-            <a:pPr indent="0" lvl="0" marL="0" marR="0" rtl="0" algn="l">
+            <a:pPr marL="0" marR="0" lvl="0" indent="0" algn="l" rtl="0">
               <a:lnSpc>
                 <a:spcPct val="120000"/>
               </a:lnSpc>
@@ -11210,7 +11493,7 @@
               <a:buNone/>
             </a:pPr>
             <a:r>
-              <a:rPr b="1" i="0" lang="en-US" sz="5400" u="none" cap="none" strike="noStrike">
+              <a:rPr lang="en-US" sz="5400" b="1" i="0" u="none" strike="noStrike" cap="none">
                 <a:solidFill>
                   <a:srgbClr val="F8FAFC"/>
                 </a:solidFill>
@@ -11222,7 +11505,7 @@
               <a:t>Plataforma de</a:t>
             </a:r>
             <a:br>
-              <a:rPr b="0" i="0" lang="en-US" sz="1800" u="none" cap="none" strike="noStrike">
+              <a:rPr lang="en-US" sz="1800" b="0" i="0" u="none" strike="noStrike" cap="none">
                 <a:solidFill>
                   <a:schemeClr val="dk1"/>
                 </a:solidFill>
@@ -11233,7 +11516,7 @@
               </a:rPr>
             </a:br>
             <a:r>
-              <a:rPr b="1" i="0" lang="en-US" sz="5400" u="none" cap="none" strike="noStrike">
+              <a:rPr lang="en-US" sz="5400" b="1" i="0" u="none" strike="noStrike" cap="none">
                 <a:solidFill>
                   <a:srgbClr val="38BDF8"/>
                 </a:solidFill>
@@ -11268,12 +11551,12 @@
           </a:ln>
         </p:spPr>
         <p:txBody>
-          <a:bodyPr anchorCtr="0" anchor="t" bIns="0" lIns="0" spcFirstLastPara="1" rIns="0" wrap="square" tIns="0">
+          <a:bodyPr spcFirstLastPara="1" wrap="square" lIns="0" tIns="0" rIns="0" bIns="0" anchor="t" anchorCtr="0">
             <a:spAutoFit/>
           </a:bodyPr>
           <a:lstStyle/>
           <a:p>
-            <a:pPr indent="0" lvl="0" marL="0" marR="0" rtl="0" algn="l">
+            <a:pPr marL="0" marR="0" lvl="0" indent="0" algn="l" rtl="0">
               <a:lnSpc>
                 <a:spcPct val="160000"/>
               </a:lnSpc>
@@ -11286,7 +11569,7 @@
               <a:buNone/>
             </a:pPr>
             <a:r>
-              <a:rPr b="0" i="0" lang="en-US" sz="1950" u="none" cap="none" strike="noStrike">
+              <a:rPr lang="en-US" sz="1950" b="0" i="0" u="none" strike="noStrike" cap="none">
                 <a:solidFill>
                   <a:srgbClr val="94A3B8"/>
                 </a:solidFill>
@@ -11321,12 +11604,12 @@
           </a:ln>
         </p:spPr>
         <p:txBody>
-          <a:bodyPr anchorCtr="0" anchor="t" bIns="0" lIns="0" spcFirstLastPara="1" rIns="0" wrap="square" tIns="0">
+          <a:bodyPr spcFirstLastPara="1" wrap="square" lIns="0" tIns="0" rIns="0" bIns="0" anchor="t" anchorCtr="0">
             <a:spAutoFit/>
           </a:bodyPr>
           <a:lstStyle/>
           <a:p>
-            <a:pPr indent="0" lvl="0" marL="0" marR="0" rtl="0" algn="l">
+            <a:pPr marL="0" marR="0" lvl="0" indent="0" algn="l" rtl="0">
               <a:lnSpc>
                 <a:spcPct val="160000"/>
               </a:lnSpc>
@@ -11339,7 +11622,7 @@
               <a:buNone/>
             </a:pPr>
             <a:r>
-              <a:rPr b="1" i="0" lang="en-US" sz="1650" u="none" cap="none" strike="noStrike">
+              <a:rPr lang="en-US" sz="1650" b="1" i="0" u="none" strike="noStrike" cap="none">
                 <a:solidFill>
                   <a:srgbClr val="CBD5E1"/>
                 </a:solidFill>
@@ -11351,7 +11634,7 @@
               <a:t>Integrantes:</a:t>
             </a:r>
             <a:r>
-              <a:rPr b="0" i="0" lang="en-US" sz="1650" u="none" cap="none" strike="noStrike">
+              <a:rPr lang="en-US" sz="1650" b="0" i="0" u="none" strike="noStrike" cap="none">
                 <a:solidFill>
                   <a:srgbClr val="CBD5E1"/>
                 </a:solidFill>
@@ -11386,12 +11669,12 @@
           </a:ln>
         </p:spPr>
         <p:txBody>
-          <a:bodyPr anchorCtr="0" anchor="t" bIns="0" lIns="0" spcFirstLastPara="1" rIns="0" wrap="square" tIns="0">
+          <a:bodyPr spcFirstLastPara="1" wrap="square" lIns="0" tIns="0" rIns="0" bIns="0" anchor="t" anchorCtr="0">
             <a:spAutoFit/>
           </a:bodyPr>
           <a:lstStyle/>
           <a:p>
-            <a:pPr indent="0" lvl="0" marL="0" marR="0" rtl="0" algn="l">
+            <a:pPr marL="0" marR="0" lvl="0" indent="0" algn="l" rtl="0">
               <a:lnSpc>
                 <a:spcPct val="160000"/>
               </a:lnSpc>
@@ -11404,7 +11687,7 @@
               <a:buNone/>
             </a:pPr>
             <a:r>
-              <a:rPr b="1" i="0" lang="en-US" sz="1650" u="none" cap="none" strike="noStrike">
+              <a:rPr lang="en-US" sz="1650" b="1" i="0" u="none" strike="noStrike" cap="none">
                 <a:solidFill>
                   <a:srgbClr val="CBD5E1"/>
                 </a:solidFill>
@@ -11416,7 +11699,7 @@
               <a:t>Asignatura:</a:t>
             </a:r>
             <a:r>
-              <a:rPr b="0" i="0" lang="en-US" sz="1650" u="none" cap="none" strike="noStrike">
+              <a:rPr lang="en-US" sz="1650" b="0" i="0" u="none" strike="noStrike" cap="none">
                 <a:solidFill>
                   <a:srgbClr val="CBD5E1"/>
                 </a:solidFill>
@@ -11451,12 +11734,12 @@
           </a:ln>
         </p:spPr>
         <p:txBody>
-          <a:bodyPr anchorCtr="0" anchor="t" bIns="0" lIns="0" spcFirstLastPara="1" rIns="0" wrap="square" tIns="0">
+          <a:bodyPr spcFirstLastPara="1" wrap="square" lIns="0" tIns="0" rIns="0" bIns="0" anchor="t" anchorCtr="0">
             <a:spAutoFit/>
           </a:bodyPr>
           <a:lstStyle/>
           <a:p>
-            <a:pPr indent="0" lvl="0" marL="0" marR="0" rtl="0" algn="l">
+            <a:pPr marL="0" marR="0" lvl="0" indent="0" algn="l" rtl="0">
               <a:lnSpc>
                 <a:spcPct val="160000"/>
               </a:lnSpc>
@@ -11469,7 +11752,7 @@
               <a:buNone/>
             </a:pPr>
             <a:r>
-              <a:rPr b="1" i="0" lang="en-US" sz="1650" u="none" cap="none" strike="noStrike">
+              <a:rPr lang="en-US" sz="1650" b="1" i="0" u="none" strike="noStrike" cap="none">
                 <a:solidFill>
                   <a:srgbClr val="CBD5E1"/>
                 </a:solidFill>
@@ -11481,7 +11764,7 @@
               <a:t>Fecha:</a:t>
             </a:r>
             <a:r>
-              <a:rPr b="0" i="0" lang="en-US" sz="1650" u="none" cap="none" strike="noStrike">
+              <a:rPr lang="en-US" sz="1650" b="0" i="0" u="none" strike="noStrike" cap="none">
                 <a:solidFill>
                   <a:srgbClr val="CBD5E1"/>
                 </a:solidFill>
@@ -11505,7 +11788,7 @@
 </file>
 
 <file path=ppt/slides/slide2.xml><?xml version="1.0" encoding="utf-8"?>
-<p:sld xmlns:a="http://schemas.openxmlformats.org/drawingml/2006/main" xmlns:r="http://schemas.openxmlformats.org/officeDocument/2006/relationships" xmlns:mc="http://schemas.openxmlformats.org/markup-compatibility/2006" xmlns:mv="urn:schemas-microsoft-com:mac:vml" xmlns:p="http://schemas.openxmlformats.org/presentationml/2006/main" xmlns:c="http://schemas.openxmlformats.org/drawingml/2006/chart" xmlns:dgm="http://schemas.openxmlformats.org/drawingml/2006/diagram" xmlns:o="urn:schemas-microsoft-com:office:office" xmlns:v="urn:schemas-microsoft-com:vml" xmlns:pvml="urn:schemas-microsoft-com:office:powerpoint" xmlns:com="http://schemas.openxmlformats.org/drawingml/2006/compatibility" xmlns:p14="http://schemas.microsoft.com/office/powerpoint/2010/main" xmlns:p15="http://schemas.microsoft.com/office/powerpoint/2012/main" xmlns:ahyp="http://schemas.microsoft.com/office/drawing/2018/hyperlinkcolor">
+<p:sld xmlns:a="http://schemas.openxmlformats.org/drawingml/2006/main" xmlns:r="http://schemas.openxmlformats.org/officeDocument/2006/relationships" xmlns:p="http://schemas.openxmlformats.org/presentationml/2006/main">
   <p:cSld>
     <p:bg>
       <p:bgPr>
@@ -11517,11 +11800,12 @@
             <a:fillRect/>
           </a:stretch>
         </a:blipFill>
+        <a:effectLst/>
       </p:bgPr>
     </p:bg>
     <p:spTree>
       <p:nvGrpSpPr>
-        <p:cNvPr id="93" name="Shape 93"/>
+        <p:cNvPr id="1" name="Shape 93"/>
         <p:cNvGrpSpPr/>
         <p:nvPr/>
       </p:nvGrpSpPr>
@@ -11553,12 +11837,12 @@
           </a:ln>
         </p:spPr>
         <p:txBody>
-          <a:bodyPr anchorCtr="0" anchor="t" bIns="0" lIns="0" spcFirstLastPara="1" rIns="0" wrap="square" tIns="0">
+          <a:bodyPr spcFirstLastPara="1" wrap="square" lIns="0" tIns="0" rIns="0" bIns="0" anchor="t" anchorCtr="0">
             <a:spAutoFit/>
           </a:bodyPr>
           <a:lstStyle/>
           <a:p>
-            <a:pPr indent="0" lvl="0" marL="0" marR="0" rtl="0" algn="l">
+            <a:pPr marL="0" marR="0" lvl="0" indent="0" algn="l" rtl="0">
               <a:lnSpc>
                 <a:spcPct val="120000"/>
               </a:lnSpc>
@@ -11571,7 +11855,7 @@
               <a:buNone/>
             </a:pPr>
             <a:r>
-              <a:rPr b="1" i="0" lang="en-US" sz="3750" u="none" cap="none" strike="noStrike">
+              <a:rPr lang="en-US" sz="3750" b="1" i="0" u="none" strike="noStrike" cap="none">
                 <a:solidFill>
                   <a:srgbClr val="F8FAFC"/>
                 </a:solidFill>
@@ -11606,12 +11890,12 @@
           </a:ln>
         </p:spPr>
         <p:txBody>
-          <a:bodyPr anchorCtr="0" anchor="t" bIns="0" lIns="0" spcFirstLastPara="1" rIns="0" wrap="square" tIns="0">
+          <a:bodyPr spcFirstLastPara="1" wrap="square" lIns="0" tIns="0" rIns="0" bIns="0" anchor="t" anchorCtr="0">
             <a:spAutoFit/>
           </a:bodyPr>
           <a:lstStyle/>
           <a:p>
-            <a:pPr indent="0" lvl="0" marL="0" marR="0" rtl="0" algn="l">
+            <a:pPr marL="0" marR="0" lvl="0" indent="0" algn="l" rtl="0">
               <a:lnSpc>
                 <a:spcPct val="160000"/>
               </a:lnSpc>
@@ -11624,7 +11908,7 @@
               <a:buNone/>
             </a:pPr>
             <a:r>
-              <a:rPr b="0" i="0" lang="en-US" sz="1650" u="none" cap="none" strike="noStrike">
+              <a:rPr lang="en-US" sz="1650" b="0" i="0" u="none" strike="noStrike" cap="none">
                 <a:solidFill>
                   <a:srgbClr val="CBD5E1"/>
                 </a:solidFill>
@@ -11636,7 +11920,7 @@
               <a:t>Plataforma digital diseñada para reemplazar registros físicos y sistemas fragmentados. El </a:t>
             </a:r>
             <a:r>
-              <a:rPr b="1" i="0" lang="en-US" sz="1650" u="none" cap="none" strike="noStrike">
+              <a:rPr lang="en-US" sz="1650" b="1" i="0" u="none" strike="noStrike" cap="none">
                 <a:solidFill>
                   <a:srgbClr val="CBD5E1"/>
                 </a:solidFill>
@@ -11648,7 +11932,7 @@
               <a:t>MVP de 3 meses</a:t>
             </a:r>
             <a:r>
-              <a:rPr b="0" i="0" lang="en-US" sz="1650" u="none" cap="none" strike="noStrike">
+              <a:rPr lang="en-US" sz="1650" b="0" i="0" u="none" strike="noStrike" cap="none">
                 <a:solidFill>
                   <a:srgbClr val="CBD5E1"/>
                 </a:solidFill>
@@ -11683,12 +11967,12 @@
           </a:ln>
         </p:spPr>
         <p:txBody>
-          <a:bodyPr anchorCtr="0" anchor="t" bIns="0" lIns="0" spcFirstLastPara="1" rIns="0" wrap="square" tIns="0">
+          <a:bodyPr spcFirstLastPara="1" wrap="square" lIns="0" tIns="0" rIns="0" bIns="0" anchor="t" anchorCtr="0">
             <a:spAutoFit/>
           </a:bodyPr>
           <a:lstStyle/>
           <a:p>
-            <a:pPr indent="0" lvl="0" marL="0" marR="0" rtl="0" algn="l">
+            <a:pPr marL="0" marR="0" lvl="0" indent="0" algn="l" rtl="0">
               <a:lnSpc>
                 <a:spcPct val="160000"/>
               </a:lnSpc>
@@ -11701,7 +11985,7 @@
               <a:buNone/>
             </a:pPr>
             <a:r>
-              <a:rPr b="0" i="0" lang="en-US" sz="1650" u="none" cap="none" strike="noStrike">
+              <a:rPr lang="en-US" sz="1650" b="0" i="0" u="none" strike="noStrike" cap="none">
                 <a:solidFill>
                   <a:srgbClr val="CBD5E1"/>
                 </a:solidFill>
@@ -11736,12 +12020,12 @@
           </a:ln>
         </p:spPr>
         <p:txBody>
-          <a:bodyPr anchorCtr="0" anchor="t" bIns="0" lIns="0" spcFirstLastPara="1" rIns="0" wrap="square" tIns="0">
+          <a:bodyPr spcFirstLastPara="1" wrap="square" lIns="0" tIns="0" rIns="0" bIns="0" anchor="t" anchorCtr="0">
             <a:spAutoFit/>
           </a:bodyPr>
           <a:lstStyle/>
           <a:p>
-            <a:pPr indent="0" lvl="0" marL="0" marR="0" rtl="0" algn="l">
+            <a:pPr marL="0" marR="0" lvl="0" indent="0" algn="l" rtl="0">
               <a:lnSpc>
                 <a:spcPct val="160000"/>
               </a:lnSpc>
@@ -11754,7 +12038,7 @@
               <a:buNone/>
             </a:pPr>
             <a:r>
-              <a:rPr b="0" i="0" lang="en-US" sz="1650" u="none" cap="none" strike="noStrike">
+              <a:rPr lang="en-US" sz="1650" b="0" i="0" u="none" strike="noStrike" cap="none">
                 <a:solidFill>
                   <a:srgbClr val="CBD5E1"/>
                 </a:solidFill>
@@ -11789,12 +12073,12 @@
           </a:ln>
         </p:spPr>
         <p:txBody>
-          <a:bodyPr anchorCtr="0" anchor="t" bIns="0" lIns="0" spcFirstLastPara="1" rIns="0" wrap="square" tIns="0">
+          <a:bodyPr spcFirstLastPara="1" wrap="square" lIns="0" tIns="0" rIns="0" bIns="0" anchor="t" anchorCtr="0">
             <a:spAutoFit/>
           </a:bodyPr>
           <a:lstStyle/>
           <a:p>
-            <a:pPr indent="0" lvl="0" marL="0" marR="0" rtl="0" algn="l">
+            <a:pPr marL="0" marR="0" lvl="0" indent="0" algn="l" rtl="0">
               <a:lnSpc>
                 <a:spcPct val="160000"/>
               </a:lnSpc>
@@ -11807,7 +12091,7 @@
               <a:buNone/>
             </a:pPr>
             <a:r>
-              <a:rPr b="0" i="0" lang="en-US" sz="1650" u="none" cap="none" strike="noStrike">
+              <a:rPr lang="en-US" sz="1650" b="0" i="0" u="none" strike="noStrike" cap="none">
                 <a:solidFill>
                   <a:srgbClr val="CBD5E1"/>
                 </a:solidFill>
@@ -11842,12 +12126,12 @@
           </a:ln>
         </p:spPr>
         <p:txBody>
-          <a:bodyPr anchorCtr="0" anchor="t" bIns="0" lIns="0" spcFirstLastPara="1" rIns="0" wrap="square" tIns="0">
+          <a:bodyPr spcFirstLastPara="1" wrap="square" lIns="0" tIns="0" rIns="0" bIns="0" anchor="t" anchorCtr="0">
             <a:spAutoFit/>
           </a:bodyPr>
           <a:lstStyle/>
           <a:p>
-            <a:pPr indent="0" lvl="0" marL="0" marR="0" rtl="0" algn="l">
+            <a:pPr marL="0" marR="0" lvl="0" indent="0" algn="l" rtl="0">
               <a:lnSpc>
                 <a:spcPct val="160000"/>
               </a:lnSpc>
@@ -11860,7 +12144,7 @@
               <a:buNone/>
             </a:pPr>
             <a:r>
-              <a:rPr b="0" i="0" lang="en-US" sz="1650" u="none" cap="none" strike="noStrike">
+              <a:rPr lang="en-US" sz="1650" b="0" i="0" u="none" strike="noStrike" cap="none">
                 <a:solidFill>
                   <a:srgbClr val="CBD5E1"/>
                 </a:solidFill>
@@ -11895,12 +12179,12 @@
           </a:ln>
         </p:spPr>
         <p:txBody>
-          <a:bodyPr anchorCtr="0" anchor="t" bIns="0" lIns="0" spcFirstLastPara="1" rIns="0" wrap="square" tIns="0">
+          <a:bodyPr spcFirstLastPara="1" wrap="square" lIns="0" tIns="0" rIns="0" bIns="0" anchor="t" anchorCtr="0">
             <a:spAutoFit/>
           </a:bodyPr>
           <a:lstStyle/>
           <a:p>
-            <a:pPr indent="0" lvl="0" marL="0" marR="0" rtl="0" algn="l">
+            <a:pPr marL="0" marR="0" lvl="0" indent="0" algn="l" rtl="0">
               <a:lnSpc>
                 <a:spcPct val="159944"/>
               </a:lnSpc>
@@ -11913,7 +12197,7 @@
               <a:buNone/>
             </a:pPr>
             <a:r>
-              <a:rPr b="0" i="0" lang="en-US" sz="1800" u="none" cap="none" strike="noStrike">
+              <a:rPr lang="en-US" sz="1800" b="0" i="0" u="none" strike="noStrike" cap="none">
                 <a:solidFill>
                   <a:srgbClr val="38BDF8"/>
                 </a:solidFill>
@@ -11948,12 +12232,12 @@
           </a:ln>
         </p:spPr>
         <p:txBody>
-          <a:bodyPr anchorCtr="0" anchor="t" bIns="0" lIns="0" spcFirstLastPara="1" rIns="0" wrap="square" tIns="0">
+          <a:bodyPr spcFirstLastPara="1" wrap="square" lIns="0" tIns="0" rIns="0" bIns="0" anchor="t" anchorCtr="0">
             <a:spAutoFit/>
           </a:bodyPr>
           <a:lstStyle/>
           <a:p>
-            <a:pPr indent="0" lvl="0" marL="0" marR="0" rtl="0" algn="l">
+            <a:pPr marL="0" marR="0" lvl="0" indent="0" algn="l" rtl="0">
               <a:lnSpc>
                 <a:spcPct val="159944"/>
               </a:lnSpc>
@@ -11966,7 +12250,7 @@
               <a:buNone/>
             </a:pPr>
             <a:r>
-              <a:rPr b="0" i="0" lang="en-US" sz="1800" u="none" cap="none" strike="noStrike">
+              <a:rPr lang="en-US" sz="1800" b="0" i="0" u="none" strike="noStrike" cap="none">
                 <a:solidFill>
                   <a:srgbClr val="38BDF8"/>
                 </a:solidFill>
@@ -12001,12 +12285,12 @@
           </a:ln>
         </p:spPr>
         <p:txBody>
-          <a:bodyPr anchorCtr="0" anchor="t" bIns="0" lIns="0" spcFirstLastPara="1" rIns="0" wrap="square" tIns="0">
+          <a:bodyPr spcFirstLastPara="1" wrap="square" lIns="0" tIns="0" rIns="0" bIns="0" anchor="t" anchorCtr="0">
             <a:spAutoFit/>
           </a:bodyPr>
           <a:lstStyle/>
           <a:p>
-            <a:pPr indent="0" lvl="0" marL="0" marR="0" rtl="0" algn="l">
+            <a:pPr marL="0" marR="0" lvl="0" indent="0" algn="l" rtl="0">
               <a:lnSpc>
                 <a:spcPct val="159944"/>
               </a:lnSpc>
@@ -12019,7 +12303,7 @@
               <a:buNone/>
             </a:pPr>
             <a:r>
-              <a:rPr b="0" i="0" lang="en-US" sz="1800" u="none" cap="none" strike="noStrike">
+              <a:rPr lang="en-US" sz="1800" b="0" i="0" u="none" strike="noStrike" cap="none">
                 <a:solidFill>
                   <a:srgbClr val="38BDF8"/>
                 </a:solidFill>
@@ -12043,7 +12327,7 @@
 </file>
 
 <file path=ppt/slides/slide3.xml><?xml version="1.0" encoding="utf-8"?>
-<p:sld xmlns:a="http://schemas.openxmlformats.org/drawingml/2006/main" xmlns:r="http://schemas.openxmlformats.org/officeDocument/2006/relationships" xmlns:mc="http://schemas.openxmlformats.org/markup-compatibility/2006" xmlns:mv="urn:schemas-microsoft-com:mac:vml" xmlns:p="http://schemas.openxmlformats.org/presentationml/2006/main" xmlns:c="http://schemas.openxmlformats.org/drawingml/2006/chart" xmlns:dgm="http://schemas.openxmlformats.org/drawingml/2006/diagram" xmlns:o="urn:schemas-microsoft-com:office:office" xmlns:v="urn:schemas-microsoft-com:vml" xmlns:pvml="urn:schemas-microsoft-com:office:powerpoint" xmlns:com="http://schemas.openxmlformats.org/drawingml/2006/compatibility" xmlns:p14="http://schemas.microsoft.com/office/powerpoint/2010/main" xmlns:p15="http://schemas.microsoft.com/office/powerpoint/2012/main" xmlns:ahyp="http://schemas.microsoft.com/office/drawing/2018/hyperlinkcolor">
+<p:sld xmlns:a="http://schemas.openxmlformats.org/drawingml/2006/main" xmlns:r="http://schemas.openxmlformats.org/officeDocument/2006/relationships" xmlns:p="http://schemas.openxmlformats.org/presentationml/2006/main">
   <p:cSld>
     <p:bg>
       <p:bgPr>
@@ -12055,11 +12339,12 @@
             <a:fillRect/>
           </a:stretch>
         </a:blipFill>
+        <a:effectLst/>
       </p:bgPr>
     </p:bg>
     <p:spTree>
       <p:nvGrpSpPr>
-        <p:cNvPr id="106" name="Shape 106"/>
+        <p:cNvPr id="1" name="Shape 106"/>
         <p:cNvGrpSpPr/>
         <p:nvPr/>
       </p:nvGrpSpPr>
@@ -12073,7 +12358,7 @@
       </p:grpSpPr>
       <p:pic>
         <p:nvPicPr>
-          <p:cNvPr descr="image.png" id="107" name="Google Shape;107;p15"/>
+          <p:cNvPr id="107" name="Google Shape;107;p15" descr="image.png"/>
           <p:cNvPicPr preferRelativeResize="0"/>
           <p:nvPr/>
         </p:nvPicPr>
@@ -12081,7 +12366,7 @@
           <a:blip r:embed="rId4">
             <a:alphaModFix/>
           </a:blip>
-          <a:srcRect b="0" l="0" r="0" t="0"/>
+          <a:srcRect/>
           <a:stretch/>
         </p:blipFill>
         <p:spPr>
@@ -12100,7 +12385,7 @@
       </p:pic>
       <p:pic>
         <p:nvPicPr>
-          <p:cNvPr descr="image.png" id="108" name="Google Shape;108;p15"/>
+          <p:cNvPr id="108" name="Google Shape;108;p15" descr="image.png"/>
           <p:cNvPicPr preferRelativeResize="0"/>
           <p:nvPr/>
         </p:nvPicPr>
@@ -12108,7 +12393,7 @@
           <a:blip r:embed="rId5">
             <a:alphaModFix/>
           </a:blip>
-          <a:srcRect b="0" l="0" r="0" t="0"/>
+          <a:srcRect/>
           <a:stretch/>
         </p:blipFill>
         <p:spPr>
@@ -12127,7 +12412,7 @@
       </p:pic>
       <p:pic>
         <p:nvPicPr>
-          <p:cNvPr descr="image.png" id="109" name="Google Shape;109;p15"/>
+          <p:cNvPr id="109" name="Google Shape;109;p15" descr="image.png"/>
           <p:cNvPicPr preferRelativeResize="0"/>
           <p:nvPr/>
         </p:nvPicPr>
@@ -12135,7 +12420,7 @@
           <a:blip r:embed="rId6">
             <a:alphaModFix/>
           </a:blip>
-          <a:srcRect b="0" l="0" r="0" t="0"/>
+          <a:srcRect/>
           <a:stretch/>
         </p:blipFill>
         <p:spPr>
@@ -12154,7 +12439,7 @@
       </p:pic>
       <p:pic>
         <p:nvPicPr>
-          <p:cNvPr descr="image.png" id="110" name="Google Shape;110;p15"/>
+          <p:cNvPr id="110" name="Google Shape;110;p15" descr="image.png"/>
           <p:cNvPicPr preferRelativeResize="0"/>
           <p:nvPr/>
         </p:nvPicPr>
@@ -12162,7 +12447,7 @@
           <a:blip r:embed="rId7">
             <a:alphaModFix/>
           </a:blip>
-          <a:srcRect b="0" l="0" r="0" t="0"/>
+          <a:srcRect/>
           <a:stretch/>
         </p:blipFill>
         <p:spPr>
@@ -12199,12 +12484,12 @@
           </a:ln>
         </p:spPr>
         <p:txBody>
-          <a:bodyPr anchorCtr="0" anchor="t" bIns="0" lIns="0" spcFirstLastPara="1" rIns="0" wrap="square" tIns="0">
+          <a:bodyPr spcFirstLastPara="1" wrap="square" lIns="0" tIns="0" rIns="0" bIns="0" anchor="t" anchorCtr="0">
             <a:spAutoFit/>
           </a:bodyPr>
           <a:lstStyle/>
           <a:p>
-            <a:pPr indent="0" lvl="0" marL="0" marR="0" rtl="0" algn="l">
+            <a:pPr marL="0" marR="0" lvl="0" indent="0" algn="l" rtl="0">
               <a:lnSpc>
                 <a:spcPct val="119958"/>
               </a:lnSpc>
@@ -12217,7 +12502,7 @@
               <a:buNone/>
             </a:pPr>
             <a:r>
-              <a:rPr b="1" i="0" lang="en-US" sz="2400" u="none" cap="none" strike="noStrike">
+              <a:rPr lang="en-US" sz="2400" b="1" i="0" u="none" strike="noStrike" cap="none">
                 <a:solidFill>
                   <a:srgbClr val="E2E8F0"/>
                 </a:solidFill>
@@ -12252,12 +12537,12 @@
           </a:ln>
         </p:spPr>
         <p:txBody>
-          <a:bodyPr anchorCtr="0" anchor="t" bIns="0" lIns="0" spcFirstLastPara="1" rIns="0" wrap="square" tIns="0">
+          <a:bodyPr spcFirstLastPara="1" wrap="square" lIns="0" tIns="0" rIns="0" bIns="0" anchor="t" anchorCtr="0">
             <a:spAutoFit/>
           </a:bodyPr>
           <a:lstStyle/>
           <a:p>
-            <a:pPr indent="0" lvl="0" marL="0" marR="0" rtl="0" algn="l">
+            <a:pPr marL="0" marR="0" lvl="0" indent="0" algn="l" rtl="0">
               <a:lnSpc>
                 <a:spcPct val="112500"/>
               </a:lnSpc>
@@ -12270,7 +12555,7 @@
               <a:buNone/>
             </a:pPr>
             <a:r>
-              <a:rPr b="1" i="0" lang="en-US" sz="1350" u="none" cap="none" strike="noStrike">
+              <a:rPr lang="en-US" sz="1350" b="1" i="0" u="none" strike="noStrike" cap="none">
                 <a:solidFill>
                   <a:srgbClr val="CBD5E1"/>
                 </a:solidFill>
@@ -12282,7 +12567,7 @@
               <a:t>Java 21 &amp; Spring Boot</a:t>
             </a:r>
             <a:br>
-              <a:rPr b="0" i="0" lang="en-US" sz="1800" u="none" cap="none" strike="noStrike">
+              <a:rPr lang="en-US" sz="1800" b="0" i="0" u="none" strike="noStrike" cap="none">
                 <a:solidFill>
                   <a:schemeClr val="dk1"/>
                 </a:solidFill>
@@ -12293,7 +12578,7 @@
               </a:rPr>
             </a:br>
             <a:r>
-              <a:rPr b="0" i="0" lang="en-US" sz="1350" u="none" cap="none" strike="noStrike">
+              <a:rPr lang="en-US" sz="1350" b="0" i="0" u="none" strike="noStrike" cap="none">
                 <a:solidFill>
                   <a:srgbClr val="CBD5E1"/>
                 </a:solidFill>
@@ -12328,12 +12613,12 @@
           </a:ln>
         </p:spPr>
         <p:txBody>
-          <a:bodyPr anchorCtr="0" anchor="t" bIns="0" lIns="0" spcFirstLastPara="1" rIns="0" wrap="square" tIns="0">
+          <a:bodyPr spcFirstLastPara="1" wrap="square" lIns="0" tIns="0" rIns="0" bIns="0" anchor="t" anchorCtr="0">
             <a:spAutoFit/>
           </a:bodyPr>
           <a:lstStyle/>
           <a:p>
-            <a:pPr indent="0" lvl="0" marL="0" marR="0" rtl="0" algn="l">
+            <a:pPr marL="0" marR="0" lvl="0" indent="0" algn="l" rtl="0">
               <a:lnSpc>
                 <a:spcPct val="119958"/>
               </a:lnSpc>
@@ -12346,7 +12631,7 @@
               <a:buNone/>
             </a:pPr>
             <a:r>
-              <a:rPr b="1" i="0" lang="en-US" sz="2400" u="none" cap="none" strike="noStrike">
+              <a:rPr lang="en-US" sz="2400" b="1" i="0" u="none" strike="noStrike" cap="none">
                 <a:solidFill>
                   <a:srgbClr val="E2E8F0"/>
                 </a:solidFill>
@@ -12381,12 +12666,12 @@
           </a:ln>
         </p:spPr>
         <p:txBody>
-          <a:bodyPr anchorCtr="0" anchor="t" bIns="0" lIns="0" spcFirstLastPara="1" rIns="0" wrap="square" tIns="0">
+          <a:bodyPr spcFirstLastPara="1" wrap="square" lIns="0" tIns="0" rIns="0" bIns="0" anchor="t" anchorCtr="0">
             <a:spAutoFit/>
           </a:bodyPr>
           <a:lstStyle/>
           <a:p>
-            <a:pPr indent="0" lvl="0" marL="0" marR="0" rtl="0" algn="l">
+            <a:pPr marL="0" marR="0" lvl="0" indent="0" algn="l" rtl="0">
               <a:lnSpc>
                 <a:spcPct val="112500"/>
               </a:lnSpc>
@@ -12399,7 +12684,7 @@
               <a:buNone/>
             </a:pPr>
             <a:r>
-              <a:rPr b="1" i="0" lang="en-US" sz="1350" u="none" cap="none" strike="noStrike">
+              <a:rPr lang="en-US" sz="1350" b="1" i="0" u="none" strike="noStrike" cap="none">
                 <a:solidFill>
                   <a:srgbClr val="CBD5E1"/>
                 </a:solidFill>
@@ -12411,7 +12696,7 @@
               <a:t>React.js &amp; Vite</a:t>
             </a:r>
             <a:br>
-              <a:rPr b="0" i="0" lang="en-US" sz="1800" u="none" cap="none" strike="noStrike">
+              <a:rPr lang="en-US" sz="1800" b="0" i="0" u="none" strike="noStrike" cap="none">
                 <a:solidFill>
                   <a:schemeClr val="dk1"/>
                 </a:solidFill>
@@ -12422,7 +12707,7 @@
               </a:rPr>
             </a:br>
             <a:r>
-              <a:rPr b="0" i="0" lang="en-US" sz="1350" u="none" cap="none" strike="noStrike">
+              <a:rPr lang="en-US" sz="1350" b="0" i="0" u="none" strike="noStrike" cap="none">
                 <a:solidFill>
                   <a:srgbClr val="CBD5E1"/>
                 </a:solidFill>
@@ -12457,12 +12742,12 @@
           </a:ln>
         </p:spPr>
         <p:txBody>
-          <a:bodyPr anchorCtr="0" anchor="t" bIns="0" lIns="0" spcFirstLastPara="1" rIns="0" wrap="square" tIns="0">
+          <a:bodyPr spcFirstLastPara="1" wrap="square" lIns="0" tIns="0" rIns="0" bIns="0" anchor="t" anchorCtr="0">
             <a:spAutoFit/>
           </a:bodyPr>
           <a:lstStyle/>
           <a:p>
-            <a:pPr indent="0" lvl="0" marL="0" marR="0" rtl="0" algn="l">
+            <a:pPr marL="0" marR="0" lvl="0" indent="0" algn="l" rtl="0">
               <a:lnSpc>
                 <a:spcPct val="119958"/>
               </a:lnSpc>
@@ -12475,7 +12760,7 @@
               <a:buNone/>
             </a:pPr>
             <a:r>
-              <a:rPr b="1" i="0" lang="en-US" sz="2400" u="none" cap="none" strike="noStrike">
+              <a:rPr lang="en-US" sz="2400" b="1" i="0" u="none" strike="noStrike" cap="none">
                 <a:solidFill>
                   <a:srgbClr val="E2E8F0"/>
                 </a:solidFill>
@@ -12510,12 +12795,12 @@
           </a:ln>
         </p:spPr>
         <p:txBody>
-          <a:bodyPr anchorCtr="0" anchor="t" bIns="0" lIns="0" spcFirstLastPara="1" rIns="0" wrap="square" tIns="0">
+          <a:bodyPr spcFirstLastPara="1" wrap="square" lIns="0" tIns="0" rIns="0" bIns="0" anchor="t" anchorCtr="0">
             <a:spAutoFit/>
           </a:bodyPr>
           <a:lstStyle/>
           <a:p>
-            <a:pPr indent="0" lvl="0" marL="0" marR="0" rtl="0" algn="l">
+            <a:pPr marL="0" marR="0" lvl="0" indent="0" algn="l" rtl="0">
               <a:lnSpc>
                 <a:spcPct val="112500"/>
               </a:lnSpc>
@@ -12528,7 +12813,7 @@
               <a:buNone/>
             </a:pPr>
             <a:r>
-              <a:rPr b="1" i="0" lang="en-US" sz="1350" u="none" cap="none" strike="noStrike">
+              <a:rPr lang="en-US" sz="1350" b="1" i="0" u="none" strike="noStrike" cap="none">
                 <a:solidFill>
                   <a:srgbClr val="CBD5E1"/>
                 </a:solidFill>
@@ -12540,7 +12825,7 @@
               <a:t>PostgreSQL &amp; RabbitMQ</a:t>
             </a:r>
             <a:br>
-              <a:rPr b="0" i="0" lang="en-US" sz="1800" u="none" cap="none" strike="noStrike">
+              <a:rPr lang="en-US" sz="1800" b="0" i="0" u="none" strike="noStrike" cap="none">
                 <a:solidFill>
                   <a:schemeClr val="dk1"/>
                 </a:solidFill>
@@ -12551,7 +12836,7 @@
               </a:rPr>
             </a:br>
             <a:r>
-              <a:rPr b="0" i="0" lang="en-US" sz="1350" u="none" cap="none" strike="noStrike">
+              <a:rPr lang="en-US" sz="1350" b="0" i="0" u="none" strike="noStrike" cap="none">
                 <a:solidFill>
                   <a:srgbClr val="CBD5E1"/>
                 </a:solidFill>
@@ -12586,12 +12871,12 @@
           </a:ln>
         </p:spPr>
         <p:txBody>
-          <a:bodyPr anchorCtr="0" anchor="t" bIns="0" lIns="0" spcFirstLastPara="1" rIns="0" wrap="square" tIns="0">
+          <a:bodyPr spcFirstLastPara="1" wrap="square" lIns="0" tIns="0" rIns="0" bIns="0" anchor="t" anchorCtr="0">
             <a:spAutoFit/>
           </a:bodyPr>
           <a:lstStyle/>
           <a:p>
-            <a:pPr indent="0" lvl="0" marL="0" marR="0" rtl="0" algn="l">
+            <a:pPr marL="0" marR="0" lvl="0" indent="0" algn="l" rtl="0">
               <a:lnSpc>
                 <a:spcPct val="119958"/>
               </a:lnSpc>
@@ -12604,7 +12889,7 @@
               <a:buNone/>
             </a:pPr>
             <a:r>
-              <a:rPr b="1" i="0" lang="en-US" sz="2400" u="none" cap="none" strike="noStrike">
+              <a:rPr lang="en-US" sz="2400" b="1" i="0" u="none" strike="noStrike" cap="none">
                 <a:solidFill>
                   <a:srgbClr val="E2E8F0"/>
                 </a:solidFill>
@@ -12639,12 +12924,12 @@
           </a:ln>
         </p:spPr>
         <p:txBody>
-          <a:bodyPr anchorCtr="0" anchor="t" bIns="0" lIns="0" spcFirstLastPara="1" rIns="0" wrap="square" tIns="0">
+          <a:bodyPr spcFirstLastPara="1" wrap="square" lIns="0" tIns="0" rIns="0" bIns="0" anchor="t" anchorCtr="0">
             <a:spAutoFit/>
           </a:bodyPr>
           <a:lstStyle/>
           <a:p>
-            <a:pPr indent="0" lvl="0" marL="0" marR="0" rtl="0" algn="l">
+            <a:pPr marL="0" marR="0" lvl="0" indent="0" algn="l" rtl="0">
               <a:lnSpc>
                 <a:spcPct val="112500"/>
               </a:lnSpc>
@@ -12657,7 +12942,7 @@
               <a:buNone/>
             </a:pPr>
             <a:r>
-              <a:rPr b="1" i="0" lang="en-US" sz="1350" u="none" cap="none" strike="noStrike">
+              <a:rPr lang="en-US" sz="1350" b="1" i="0" u="none" strike="noStrike" cap="none">
                 <a:solidFill>
                   <a:srgbClr val="CBD5E1"/>
                 </a:solidFill>
@@ -12669,7 +12954,7 @@
               <a:t>Docker &amp; Kubernetes</a:t>
             </a:r>
             <a:br>
-              <a:rPr b="0" i="0" lang="en-US" sz="1800" u="none" cap="none" strike="noStrike">
+              <a:rPr lang="en-US" sz="1800" b="0" i="0" u="none" strike="noStrike" cap="none">
                 <a:solidFill>
                   <a:schemeClr val="dk1"/>
                 </a:solidFill>
@@ -12680,7 +12965,7 @@
               </a:rPr>
             </a:br>
             <a:r>
-              <a:rPr b="0" i="0" lang="en-US" sz="1350" u="none" cap="none" strike="noStrike">
+              <a:rPr lang="en-US" sz="1350" b="0" i="0" u="none" strike="noStrike" cap="none">
                 <a:solidFill>
                   <a:srgbClr val="CBD5E1"/>
                 </a:solidFill>
@@ -12697,7 +12982,7 @@
       </p:sp>
       <p:pic>
         <p:nvPicPr>
-          <p:cNvPr descr="image.png" id="119" name="Google Shape;119;p15"/>
+          <p:cNvPr id="119" name="Google Shape;119;p15" descr="image.png"/>
           <p:cNvPicPr preferRelativeResize="0"/>
           <p:nvPr/>
         </p:nvPicPr>
@@ -12705,7 +12990,7 @@
           <a:blip r:embed="rId8">
             <a:alphaModFix/>
           </a:blip>
-          <a:srcRect b="0" l="0" r="0" t="0"/>
+          <a:srcRect/>
           <a:stretch/>
         </p:blipFill>
         <p:spPr>
@@ -12724,7 +13009,7 @@
       </p:pic>
       <p:pic>
         <p:nvPicPr>
-          <p:cNvPr descr="image.png" id="120" name="Google Shape;120;p15"/>
+          <p:cNvPr id="120" name="Google Shape;120;p15" descr="image.png"/>
           <p:cNvPicPr preferRelativeResize="0"/>
           <p:nvPr/>
         </p:nvPicPr>
@@ -12732,7 +13017,7 @@
           <a:blip r:embed="rId9">
             <a:alphaModFix/>
           </a:blip>
-          <a:srcRect b="0" l="0" r="0" t="0"/>
+          <a:srcRect/>
           <a:stretch/>
         </p:blipFill>
         <p:spPr>
@@ -12751,7 +13036,7 @@
       </p:pic>
       <p:pic>
         <p:nvPicPr>
-          <p:cNvPr descr="image.png" id="121" name="Google Shape;121;p15"/>
+          <p:cNvPr id="121" name="Google Shape;121;p15" descr="image.png"/>
           <p:cNvPicPr preferRelativeResize="0"/>
           <p:nvPr/>
         </p:nvPicPr>
@@ -12759,7 +13044,7 @@
           <a:blip r:embed="rId10">
             <a:alphaModFix/>
           </a:blip>
-          <a:srcRect b="0" l="0" r="0" t="0"/>
+          <a:srcRect/>
           <a:stretch/>
         </p:blipFill>
         <p:spPr>
@@ -12778,7 +13063,7 @@
       </p:pic>
       <p:pic>
         <p:nvPicPr>
-          <p:cNvPr descr="image.png" id="122" name="Google Shape;122;p15"/>
+          <p:cNvPr id="122" name="Google Shape;122;p15" descr="image.png"/>
           <p:cNvPicPr preferRelativeResize="0"/>
           <p:nvPr/>
         </p:nvPicPr>
@@ -12786,7 +13071,7 @@
           <a:blip r:embed="rId11">
             <a:alphaModFix/>
           </a:blip>
-          <a:srcRect b="0" l="0" r="0" t="0"/>
+          <a:srcRect/>
           <a:stretch/>
         </p:blipFill>
         <p:spPr>
@@ -12823,12 +13108,12 @@
           </a:ln>
         </p:spPr>
         <p:txBody>
-          <a:bodyPr anchorCtr="0" anchor="t" bIns="0" lIns="0" spcFirstLastPara="1" rIns="0" wrap="square" tIns="0">
+          <a:bodyPr spcFirstLastPara="1" wrap="square" lIns="0" tIns="0" rIns="0" bIns="0" anchor="t" anchorCtr="0">
             <a:spAutoFit/>
           </a:bodyPr>
           <a:lstStyle/>
           <a:p>
-            <a:pPr indent="0" lvl="0" marL="0" marR="0" rtl="0" algn="l">
+            <a:pPr marL="0" marR="0" lvl="0" indent="0" algn="l" rtl="0">
               <a:lnSpc>
                 <a:spcPct val="120000"/>
               </a:lnSpc>
@@ -12841,7 +13126,7 @@
               <a:buNone/>
             </a:pPr>
             <a:r>
-              <a:rPr b="1" i="0" lang="en-US" sz="3750" u="none" cap="none" strike="noStrike">
+              <a:rPr lang="en-US" sz="3750" b="1" i="0" u="none" strike="noStrike" cap="none">
                 <a:solidFill>
                   <a:srgbClr val="F8FAFC"/>
                 </a:solidFill>
@@ -12853,7 +13138,7 @@
               <a:t>Selección de </a:t>
             </a:r>
             <a:r>
-              <a:rPr b="1" i="0" lang="en-US" sz="3750" u="none" cap="none" strike="noStrike">
+              <a:rPr lang="en-US" sz="3750" b="1" i="0" u="none" strike="noStrike" cap="none">
                 <a:solidFill>
                   <a:srgbClr val="38BDF8"/>
                 </a:solidFill>
@@ -12877,7 +13162,7 @@
 </file>
 
 <file path=ppt/slides/slide4.xml><?xml version="1.0" encoding="utf-8"?>
-<p:sld xmlns:a="http://schemas.openxmlformats.org/drawingml/2006/main" xmlns:r="http://schemas.openxmlformats.org/officeDocument/2006/relationships" xmlns:mc="http://schemas.openxmlformats.org/markup-compatibility/2006" xmlns:mv="urn:schemas-microsoft-com:mac:vml" xmlns:p="http://schemas.openxmlformats.org/presentationml/2006/main" xmlns:c="http://schemas.openxmlformats.org/drawingml/2006/chart" xmlns:dgm="http://schemas.openxmlformats.org/drawingml/2006/diagram" xmlns:o="urn:schemas-microsoft-com:office:office" xmlns:v="urn:schemas-microsoft-com:vml" xmlns:pvml="urn:schemas-microsoft-com:office:powerpoint" xmlns:com="http://schemas.openxmlformats.org/drawingml/2006/compatibility" xmlns:p14="http://schemas.microsoft.com/office/powerpoint/2010/main" xmlns:p15="http://schemas.microsoft.com/office/powerpoint/2012/main" xmlns:ahyp="http://schemas.microsoft.com/office/drawing/2018/hyperlinkcolor">
+<p:sld xmlns:a="http://schemas.openxmlformats.org/drawingml/2006/main" xmlns:r="http://schemas.openxmlformats.org/officeDocument/2006/relationships" xmlns:p="http://schemas.openxmlformats.org/presentationml/2006/main">
   <p:cSld>
     <p:bg>
       <p:bgPr>
@@ -12889,11 +13174,12 @@
             <a:fillRect/>
           </a:stretch>
         </a:blipFill>
+        <a:effectLst/>
       </p:bgPr>
     </p:bg>
     <p:spTree>
       <p:nvGrpSpPr>
-        <p:cNvPr id="127" name="Shape 127"/>
+        <p:cNvPr id="1" name="Shape 127"/>
         <p:cNvGrpSpPr/>
         <p:nvPr/>
       </p:nvGrpSpPr>
@@ -12907,7 +13193,7 @@
       </p:grpSpPr>
       <p:pic>
         <p:nvPicPr>
-          <p:cNvPr descr="image.png" id="128" name="Google Shape;128;p16"/>
+          <p:cNvPr id="128" name="Google Shape;128;p16" descr="image.png"/>
           <p:cNvPicPr preferRelativeResize="0"/>
           <p:nvPr/>
         </p:nvPicPr>
@@ -12915,7 +13201,7 @@
           <a:blip r:embed="rId4">
             <a:alphaModFix/>
           </a:blip>
-          <a:srcRect b="0" l="0" r="0" t="0"/>
+          <a:srcRect/>
           <a:stretch/>
         </p:blipFill>
         <p:spPr>
@@ -12952,12 +13238,12 @@
           </a:ln>
         </p:spPr>
         <p:txBody>
-          <a:bodyPr anchorCtr="0" anchor="t" bIns="0" lIns="0" spcFirstLastPara="1" rIns="0" wrap="square" tIns="0">
+          <a:bodyPr spcFirstLastPara="1" wrap="square" lIns="0" tIns="0" rIns="0" bIns="0" anchor="t" anchorCtr="0">
             <a:spAutoFit/>
           </a:bodyPr>
           <a:lstStyle/>
           <a:p>
-            <a:pPr indent="0" lvl="0" marL="0" marR="0" rtl="0" algn="l">
+            <a:pPr marL="0" marR="0" lvl="0" indent="0" algn="l" rtl="0">
               <a:lnSpc>
                 <a:spcPct val="160000"/>
               </a:lnSpc>
@@ -12969,9 +13255,6 @@
               </a:spcAft>
               <a:buNone/>
             </a:pPr>
-            <a:r>
-              <a:t/>
-            </a:r>
             <a:endParaRPr/>
           </a:p>
         </p:txBody>
@@ -12996,12 +13279,12 @@
           </a:ln>
         </p:spPr>
         <p:txBody>
-          <a:bodyPr anchorCtr="0" anchor="t" bIns="0" lIns="0" spcFirstLastPara="1" rIns="0" wrap="square" tIns="0">
+          <a:bodyPr spcFirstLastPara="1" wrap="square" lIns="0" tIns="0" rIns="0" bIns="0" anchor="t" anchorCtr="0">
             <a:spAutoFit/>
           </a:bodyPr>
           <a:lstStyle/>
           <a:p>
-            <a:pPr indent="0" lvl="0" marL="0" marR="0" rtl="0" algn="l">
+            <a:pPr marL="0" marR="0" lvl="0" indent="0" algn="l" rtl="0">
               <a:lnSpc>
                 <a:spcPct val="160000"/>
               </a:lnSpc>
@@ -13014,7 +13297,7 @@
               <a:buNone/>
             </a:pPr>
             <a:r>
-              <a:rPr b="1" i="0" lang="en-US" sz="1650" u="none" cap="none" strike="noStrike">
+              <a:rPr lang="en-US" sz="1650" b="1" i="0" u="none" strike="noStrike" cap="none">
                 <a:solidFill>
                   <a:srgbClr val="CBD5E1"/>
                 </a:solidFill>
@@ -13026,7 +13309,7 @@
               <a:t>API Gateway &amp; BFF:</a:t>
             </a:r>
             <a:r>
-              <a:rPr b="0" i="0" lang="en-US" sz="1650" u="none" cap="none" strike="noStrike">
+              <a:rPr lang="en-US" sz="1650" b="0" i="0" u="none" strike="noStrike" cap="none">
                 <a:solidFill>
                   <a:srgbClr val="CBD5E1"/>
                 </a:solidFill>
@@ -13061,12 +13344,12 @@
           </a:ln>
         </p:spPr>
         <p:txBody>
-          <a:bodyPr anchorCtr="0" anchor="t" bIns="0" lIns="0" spcFirstLastPara="1" rIns="0" wrap="square" tIns="0">
+          <a:bodyPr spcFirstLastPara="1" wrap="square" lIns="0" tIns="0" rIns="0" bIns="0" anchor="t" anchorCtr="0">
             <a:spAutoFit/>
           </a:bodyPr>
           <a:lstStyle/>
           <a:p>
-            <a:pPr indent="0" lvl="0" marL="0" marR="0" rtl="0" algn="l">
+            <a:pPr marL="0" marR="0" lvl="0" indent="0" algn="l" rtl="0">
               <a:lnSpc>
                 <a:spcPct val="160000"/>
               </a:lnSpc>
@@ -13079,7 +13362,7 @@
               <a:buNone/>
             </a:pPr>
             <a:r>
-              <a:rPr b="1" i="0" lang="en-US" sz="1650" u="none" cap="none" strike="noStrike">
+              <a:rPr lang="en-US" sz="1650" b="1" i="0" u="none" strike="noStrike" cap="none">
                 <a:solidFill>
                   <a:srgbClr val="CBD5E1"/>
                 </a:solidFill>
@@ -13091,7 +13374,7 @@
               <a:t>Event-Driven (EDA):</a:t>
             </a:r>
             <a:r>
-              <a:rPr b="0" i="0" lang="en-US" sz="1650" u="none" cap="none" strike="noStrike">
+              <a:rPr lang="en-US" sz="1650" b="0" i="0" u="none" strike="noStrike" cap="none">
                 <a:solidFill>
                   <a:srgbClr val="CBD5E1"/>
                 </a:solidFill>
@@ -13126,12 +13409,12 @@
           </a:ln>
         </p:spPr>
         <p:txBody>
-          <a:bodyPr anchorCtr="0" anchor="t" bIns="0" lIns="0" spcFirstLastPara="1" rIns="0" wrap="square" tIns="0">
+          <a:bodyPr spcFirstLastPara="1" wrap="square" lIns="0" tIns="0" rIns="0" bIns="0" anchor="t" anchorCtr="0">
             <a:spAutoFit/>
           </a:bodyPr>
           <a:lstStyle/>
           <a:p>
-            <a:pPr indent="0" lvl="0" marL="0" marR="0" rtl="0" algn="l">
+            <a:pPr marL="0" marR="0" lvl="0" indent="0" algn="l" rtl="0">
               <a:lnSpc>
                 <a:spcPct val="160000"/>
               </a:lnSpc>
@@ -13144,7 +13427,7 @@
               <a:buNone/>
             </a:pPr>
             <a:r>
-              <a:rPr b="1" i="0" lang="en-US" sz="1650" u="none" cap="none" strike="noStrike">
+              <a:rPr lang="en-US" sz="1650" b="1" i="0" u="none" strike="noStrike" cap="none">
                 <a:solidFill>
                   <a:srgbClr val="CBD5E1"/>
                 </a:solidFill>
@@ -13156,7 +13439,7 @@
               <a:t>Repository &amp; Factory:</a:t>
             </a:r>
             <a:r>
-              <a:rPr b="0" i="0" lang="en-US" sz="1650" u="none" cap="none" strike="noStrike">
+              <a:rPr lang="en-US" sz="1650" b="0" i="0" u="none" strike="noStrike" cap="none">
                 <a:solidFill>
                   <a:srgbClr val="CBD5E1"/>
                 </a:solidFill>
@@ -13191,12 +13474,12 @@
           </a:ln>
         </p:spPr>
         <p:txBody>
-          <a:bodyPr anchorCtr="0" anchor="t" bIns="0" lIns="0" spcFirstLastPara="1" rIns="0" wrap="square" tIns="0">
+          <a:bodyPr spcFirstLastPara="1" wrap="square" lIns="0" tIns="0" rIns="0" bIns="0" anchor="t" anchorCtr="0">
             <a:spAutoFit/>
           </a:bodyPr>
           <a:lstStyle/>
           <a:p>
-            <a:pPr indent="0" lvl="0" marL="0" marR="0" rtl="0" algn="l">
+            <a:pPr marL="0" marR="0" lvl="0" indent="0" algn="l" rtl="0">
               <a:lnSpc>
                 <a:spcPct val="160000"/>
               </a:lnSpc>
@@ -13209,7 +13492,7 @@
               <a:buNone/>
             </a:pPr>
             <a:r>
-              <a:rPr b="1" i="0" lang="en-US" sz="1650" u="none" cap="none" strike="noStrike">
+              <a:rPr lang="en-US" sz="1650" b="1" i="0" u="none" strike="noStrike" cap="none">
                 <a:solidFill>
                   <a:srgbClr val="CBD5E1"/>
                 </a:solidFill>
@@ -13221,7 +13504,7 @@
               <a:t>Circuit Breaker:</a:t>
             </a:r>
             <a:r>
-              <a:rPr b="0" i="0" lang="en-US" sz="1650" u="none" cap="none" strike="noStrike">
+              <a:rPr lang="en-US" sz="1650" b="0" i="0" u="none" strike="noStrike" cap="none">
                 <a:solidFill>
                   <a:srgbClr val="CBD5E1"/>
                 </a:solidFill>
@@ -13256,12 +13539,12 @@
           </a:ln>
         </p:spPr>
         <p:txBody>
-          <a:bodyPr anchorCtr="0" anchor="t" bIns="0" lIns="0" spcFirstLastPara="1" rIns="0" wrap="square" tIns="0">
+          <a:bodyPr spcFirstLastPara="1" wrap="square" lIns="0" tIns="0" rIns="0" bIns="0" anchor="t" anchorCtr="0">
             <a:spAutoFit/>
           </a:bodyPr>
           <a:lstStyle/>
           <a:p>
-            <a:pPr indent="0" lvl="0" marL="0" marR="0" rtl="0" algn="l">
+            <a:pPr marL="0" marR="0" lvl="0" indent="0" algn="l" rtl="0">
               <a:lnSpc>
                 <a:spcPct val="159944"/>
               </a:lnSpc>
@@ -13273,9 +13556,6 @@
               </a:spcAft>
               <a:buNone/>
             </a:pPr>
-            <a:r>
-              <a:t/>
-            </a:r>
             <a:endParaRPr/>
           </a:p>
         </p:txBody>
@@ -13300,12 +13580,12 @@
           </a:ln>
         </p:spPr>
         <p:txBody>
-          <a:bodyPr anchorCtr="0" anchor="t" bIns="0" lIns="0" spcFirstLastPara="1" rIns="0" wrap="square" tIns="0">
+          <a:bodyPr spcFirstLastPara="1" wrap="square" lIns="0" tIns="0" rIns="0" bIns="0" anchor="t" anchorCtr="0">
             <a:spAutoFit/>
           </a:bodyPr>
           <a:lstStyle/>
           <a:p>
-            <a:pPr indent="0" lvl="0" marL="0" marR="0" rtl="0" algn="l">
+            <a:pPr marL="0" marR="0" lvl="0" indent="0" algn="l" rtl="0">
               <a:lnSpc>
                 <a:spcPct val="120000"/>
               </a:lnSpc>
@@ -13318,7 +13598,7 @@
               <a:buNone/>
             </a:pPr>
             <a:r>
-              <a:rPr b="1" i="0" lang="en-US" sz="3750" u="none" cap="none" strike="noStrike">
+              <a:rPr lang="en-US" sz="3750" b="1" i="0" u="none" strike="noStrike" cap="none">
                 <a:solidFill>
                   <a:srgbClr val="F8FAFC"/>
                 </a:solidFill>
@@ -13330,7 +13610,7 @@
               <a:t>Patrones de </a:t>
             </a:r>
             <a:r>
-              <a:rPr b="1" i="0" lang="en-US" sz="3750" u="none" cap="none" strike="noStrike">
+              <a:rPr lang="en-US" sz="3750" b="1" i="0" u="none" strike="noStrike" cap="none">
                 <a:solidFill>
                   <a:srgbClr val="38BDF8"/>
                 </a:solidFill>
@@ -13382,7 +13662,7 @@
 </file>
 
 <file path=ppt/slides/slide5.xml><?xml version="1.0" encoding="utf-8"?>
-<p:sld xmlns:a="http://schemas.openxmlformats.org/drawingml/2006/main" xmlns:r="http://schemas.openxmlformats.org/officeDocument/2006/relationships" xmlns:mc="http://schemas.openxmlformats.org/markup-compatibility/2006" xmlns:mv="urn:schemas-microsoft-com:mac:vml" xmlns:p="http://schemas.openxmlformats.org/presentationml/2006/main" xmlns:c="http://schemas.openxmlformats.org/drawingml/2006/chart" xmlns:dgm="http://schemas.openxmlformats.org/drawingml/2006/diagram" xmlns:o="urn:schemas-microsoft-com:office:office" xmlns:v="urn:schemas-microsoft-com:vml" xmlns:pvml="urn:schemas-microsoft-com:office:powerpoint" xmlns:com="http://schemas.openxmlformats.org/drawingml/2006/compatibility" xmlns:p14="http://schemas.microsoft.com/office/powerpoint/2010/main" xmlns:p15="http://schemas.microsoft.com/office/powerpoint/2012/main" xmlns:ahyp="http://schemas.microsoft.com/office/drawing/2018/hyperlinkcolor">
+<p:sld xmlns:a="http://schemas.openxmlformats.org/drawingml/2006/main" xmlns:r="http://schemas.openxmlformats.org/officeDocument/2006/relationships" xmlns:p="http://schemas.openxmlformats.org/presentationml/2006/main">
   <p:cSld>
     <p:bg>
       <p:bgPr>
@@ -13394,11 +13674,12 @@
             <a:fillRect/>
           </a:stretch>
         </a:blipFill>
+        <a:effectLst/>
       </p:bgPr>
     </p:bg>
     <p:spTree>
       <p:nvGrpSpPr>
-        <p:cNvPr id="140" name="Shape 140"/>
+        <p:cNvPr id="1" name="Shape 140"/>
         <p:cNvGrpSpPr/>
         <p:nvPr/>
       </p:nvGrpSpPr>
@@ -13430,12 +13711,12 @@
           </a:ln>
         </p:spPr>
         <p:txBody>
-          <a:bodyPr anchorCtr="0" anchor="t" bIns="0" lIns="409575" spcFirstLastPara="1" rIns="0" wrap="square" tIns="0">
+          <a:bodyPr spcFirstLastPara="1" wrap="square" lIns="409575" tIns="0" rIns="0" bIns="0" anchor="t" anchorCtr="0">
             <a:spAutoFit/>
           </a:bodyPr>
           <a:lstStyle/>
           <a:p>
-            <a:pPr indent="0" lvl="0" marL="0" marR="0" rtl="0" algn="l">
+            <a:pPr marL="0" marR="0" lvl="0" indent="0" algn="l" rtl="0">
               <a:lnSpc>
                 <a:spcPct val="119958"/>
               </a:lnSpc>
@@ -13448,7 +13729,7 @@
               <a:buNone/>
             </a:pPr>
             <a:r>
-              <a:rPr b="1" i="0" lang="en-US" sz="2400" u="none" cap="none" strike="noStrike">
+              <a:rPr lang="en-US" sz="2400" b="1" i="0" u="none" strike="noStrike" cap="none">
                 <a:solidFill>
                   <a:srgbClr val="38BDF8"/>
                 </a:solidFill>
@@ -13485,12 +13766,12 @@
           </a:ln>
         </p:spPr>
         <p:txBody>
-          <a:bodyPr anchorCtr="0" anchor="ctr" bIns="45700" lIns="91425" spcFirstLastPara="1" rIns="91425" wrap="square" tIns="45700">
+          <a:bodyPr spcFirstLastPara="1" wrap="square" lIns="91425" tIns="45700" rIns="91425" bIns="45700" anchor="ctr" anchorCtr="0">
             <a:noAutofit/>
           </a:bodyPr>
           <a:lstStyle/>
           <a:p>
-            <a:pPr indent="0" lvl="0" marL="0" marR="0" rtl="0" algn="ctr">
+            <a:pPr marL="0" marR="0" lvl="0" indent="0" algn="ctr" rtl="0">
               <a:spcBef>
                 <a:spcPts val="0"/>
               </a:spcBef>
@@ -13499,10 +13780,7 @@
               </a:spcAft>
               <a:buNone/>
             </a:pPr>
-            <a:r>
-              <a:t/>
-            </a:r>
-            <a:endParaRPr b="0" i="0" sz="1800" u="none" cap="none" strike="noStrike">
+            <a:endParaRPr sz="1800" b="0" i="0" u="none" strike="noStrike" cap="none">
               <a:solidFill>
                 <a:schemeClr val="dk1"/>
               </a:solidFill>
@@ -13534,12 +13812,12 @@
           </a:ln>
         </p:spPr>
         <p:txBody>
-          <a:bodyPr anchorCtr="0" anchor="t" bIns="0" lIns="0" spcFirstLastPara="1" rIns="0" wrap="square" tIns="0">
+          <a:bodyPr spcFirstLastPara="1" wrap="square" lIns="0" tIns="0" rIns="0" bIns="0" anchor="t" anchorCtr="0">
             <a:spAutoFit/>
           </a:bodyPr>
           <a:lstStyle/>
           <a:p>
-            <a:pPr indent="0" lvl="0" marL="0" marR="0" rtl="0" algn="l">
+            <a:pPr marL="0" marR="0" lvl="0" indent="0" algn="l" rtl="0">
               <a:lnSpc>
                 <a:spcPct val="160000"/>
               </a:lnSpc>
@@ -13551,9 +13829,6 @@
               </a:spcAft>
               <a:buNone/>
             </a:pPr>
-            <a:r>
-              <a:t/>
-            </a:r>
             <a:endParaRPr/>
           </a:p>
         </p:txBody>
@@ -13578,12 +13853,12 @@
           </a:ln>
         </p:spPr>
         <p:txBody>
-          <a:bodyPr anchorCtr="0" anchor="t" bIns="0" lIns="447675" spcFirstLastPara="1" rIns="0" wrap="square" tIns="0">
+          <a:bodyPr spcFirstLastPara="1" wrap="square" lIns="447675" tIns="0" rIns="0" bIns="0" anchor="t" anchorCtr="0">
             <a:spAutoFit/>
           </a:bodyPr>
           <a:lstStyle/>
           <a:p>
-            <a:pPr indent="0" lvl="0" marL="0" marR="0" rtl="0" algn="l">
+            <a:pPr marL="0" marR="0" lvl="0" indent="0" algn="l" rtl="0">
               <a:lnSpc>
                 <a:spcPct val="119958"/>
               </a:lnSpc>
@@ -13596,7 +13871,7 @@
               <a:buNone/>
             </a:pPr>
             <a:r>
-              <a:rPr b="1" i="0" lang="en-US" sz="2400" u="none" cap="none" strike="noStrike">
+              <a:rPr lang="en-US" sz="2400" b="1" i="0" u="none" strike="noStrike" cap="none">
                 <a:solidFill>
                   <a:srgbClr val="38BDF8"/>
                 </a:solidFill>
@@ -13633,12 +13908,12 @@
           </a:ln>
         </p:spPr>
         <p:txBody>
-          <a:bodyPr anchorCtr="0" anchor="ctr" bIns="45700" lIns="91425" spcFirstLastPara="1" rIns="91425" wrap="square" tIns="45700">
+          <a:bodyPr spcFirstLastPara="1" wrap="square" lIns="91425" tIns="45700" rIns="91425" bIns="45700" anchor="ctr" anchorCtr="0">
             <a:noAutofit/>
           </a:bodyPr>
           <a:lstStyle/>
           <a:p>
-            <a:pPr indent="0" lvl="0" marL="0" marR="0" rtl="0" algn="ctr">
+            <a:pPr marL="0" marR="0" lvl="0" indent="0" algn="ctr" rtl="0">
               <a:spcBef>
                 <a:spcPts val="0"/>
               </a:spcBef>
@@ -13647,10 +13922,7 @@
               </a:spcAft>
               <a:buNone/>
             </a:pPr>
-            <a:r>
-              <a:t/>
-            </a:r>
-            <a:endParaRPr b="0" i="0" sz="1800" u="none" cap="none" strike="noStrike">
+            <a:endParaRPr sz="1800" b="0" i="0" u="none" strike="noStrike" cap="none">
               <a:solidFill>
                 <a:schemeClr val="dk1"/>
               </a:solidFill>
@@ -13664,7 +13936,7 @@
       </p:sp>
       <p:pic>
         <p:nvPicPr>
-          <p:cNvPr descr="image.png" id="146" name="Google Shape;146;p17"/>
+          <p:cNvPr id="146" name="Google Shape;146;p17" descr="image.png"/>
           <p:cNvPicPr preferRelativeResize="0"/>
           <p:nvPr/>
         </p:nvPicPr>
@@ -13672,7 +13944,7 @@
           <a:blip r:embed="rId4">
             <a:alphaModFix/>
           </a:blip>
-          <a:srcRect b="0" l="0" r="0" t="0"/>
+          <a:srcRect/>
           <a:stretch/>
         </p:blipFill>
         <p:spPr>
@@ -13709,12 +13981,12 @@
           </a:ln>
         </p:spPr>
         <p:txBody>
-          <a:bodyPr anchorCtr="0" anchor="t" bIns="0" lIns="0" spcFirstLastPara="1" rIns="0" wrap="square" tIns="0">
+          <a:bodyPr spcFirstLastPara="1" wrap="square" lIns="0" tIns="0" rIns="0" bIns="0" anchor="t" anchorCtr="0">
             <a:spAutoFit/>
           </a:bodyPr>
           <a:lstStyle/>
           <a:p>
-            <a:pPr indent="0" lvl="0" marL="0" marR="0" rtl="0" algn="l">
+            <a:pPr marL="0" marR="0" lvl="0" indent="0" algn="l" rtl="0">
               <a:lnSpc>
                 <a:spcPct val="160000"/>
               </a:lnSpc>
@@ -13727,7 +13999,7 @@
               <a:buNone/>
             </a:pPr>
             <a:r>
-              <a:rPr b="0" i="0" lang="en-US" sz="1650" u="none" cap="none" strike="noStrike">
+              <a:rPr lang="en-US" sz="1650" b="0" i="0" u="none" strike="noStrike" cap="none">
                 <a:solidFill>
                   <a:srgbClr val="CBD5E1"/>
                 </a:solidFill>
@@ -13762,12 +14034,12 @@
           </a:ln>
         </p:spPr>
         <p:txBody>
-          <a:bodyPr anchorCtr="0" anchor="t" bIns="0" lIns="0" spcFirstLastPara="1" rIns="0" wrap="square" tIns="0">
+          <a:bodyPr spcFirstLastPara="1" wrap="square" lIns="0" tIns="0" rIns="0" bIns="0" anchor="t" anchorCtr="0">
             <a:spAutoFit/>
           </a:bodyPr>
           <a:lstStyle/>
           <a:p>
-            <a:pPr indent="0" lvl="0" marL="0" marR="0" rtl="0" algn="l">
+            <a:pPr marL="0" marR="0" lvl="0" indent="0" algn="l" rtl="0">
               <a:lnSpc>
                 <a:spcPct val="160000"/>
               </a:lnSpc>
@@ -13780,7 +14052,7 @@
               <a:buNone/>
             </a:pPr>
             <a:r>
-              <a:rPr b="0" i="0" lang="en-US" sz="1650" u="none" cap="none" strike="noStrike">
+              <a:rPr lang="en-US" sz="1650" b="0" i="0" u="none" strike="noStrike" cap="none">
                 <a:solidFill>
                   <a:srgbClr val="CBD5E1"/>
                 </a:solidFill>
@@ -13815,12 +14087,12 @@
           </a:ln>
         </p:spPr>
         <p:txBody>
-          <a:bodyPr anchorCtr="0" anchor="t" bIns="0" lIns="0" spcFirstLastPara="1" rIns="0" wrap="square" tIns="0">
+          <a:bodyPr spcFirstLastPara="1" wrap="square" lIns="0" tIns="0" rIns="0" bIns="0" anchor="t" anchorCtr="0">
             <a:spAutoFit/>
           </a:bodyPr>
           <a:lstStyle/>
           <a:p>
-            <a:pPr indent="0" lvl="0" marL="0" marR="0" rtl="0" algn="l">
+            <a:pPr marL="0" marR="0" lvl="0" indent="0" algn="l" rtl="0">
               <a:lnSpc>
                 <a:spcPct val="160000"/>
               </a:lnSpc>
@@ -13833,7 +14105,7 @@
               <a:buNone/>
             </a:pPr>
             <a:r>
-              <a:rPr b="0" i="0" lang="en-US" sz="1650" u="none" cap="none" strike="noStrike">
+              <a:rPr lang="en-US" sz="1650" b="0" i="0" u="none" strike="noStrike" cap="none">
                 <a:solidFill>
                   <a:srgbClr val="CBD5E1"/>
                 </a:solidFill>
@@ -13868,12 +14140,12 @@
           </a:ln>
         </p:spPr>
         <p:txBody>
-          <a:bodyPr anchorCtr="0" anchor="t" bIns="0" lIns="0" spcFirstLastPara="1" rIns="0" wrap="square" tIns="0">
+          <a:bodyPr spcFirstLastPara="1" wrap="square" lIns="0" tIns="0" rIns="0" bIns="0" anchor="t" anchorCtr="0">
             <a:spAutoFit/>
           </a:bodyPr>
           <a:lstStyle/>
           <a:p>
-            <a:pPr indent="0" lvl="0" marL="0" marR="0" rtl="0" algn="l">
+            <a:pPr marL="0" marR="0" lvl="0" indent="0" algn="l" rtl="0">
               <a:lnSpc>
                 <a:spcPct val="160000"/>
               </a:lnSpc>
@@ -13886,7 +14158,7 @@
               <a:buNone/>
             </a:pPr>
             <a:r>
-              <a:rPr b="0" i="0" lang="en-US" sz="1650" u="none" cap="none" strike="noStrike">
+              <a:rPr lang="en-US" sz="1650" b="0" i="0" u="none" strike="noStrike" cap="none">
                 <a:solidFill>
                   <a:srgbClr val="CBD5E1"/>
                 </a:solidFill>
@@ -13903,7 +14175,7 @@
       </p:sp>
       <p:pic>
         <p:nvPicPr>
-          <p:cNvPr descr="image.png" id="151" name="Google Shape;151;p17"/>
+          <p:cNvPr id="151" name="Google Shape;151;p17" descr="image.png"/>
           <p:cNvPicPr preferRelativeResize="0"/>
           <p:nvPr/>
         </p:nvPicPr>
@@ -13911,7 +14183,7 @@
           <a:blip r:embed="rId5">
             <a:alphaModFix/>
           </a:blip>
-          <a:srcRect b="0" l="0" r="0" t="0"/>
+          <a:srcRect/>
           <a:stretch/>
         </p:blipFill>
         <p:spPr>
@@ -13948,12 +14220,12 @@
           </a:ln>
         </p:spPr>
         <p:txBody>
-          <a:bodyPr anchorCtr="0" anchor="t" bIns="0" lIns="0" spcFirstLastPara="1" rIns="0" wrap="square" tIns="0">
+          <a:bodyPr spcFirstLastPara="1" wrap="square" lIns="0" tIns="0" rIns="0" bIns="0" anchor="t" anchorCtr="0">
             <a:spAutoFit/>
           </a:bodyPr>
           <a:lstStyle/>
           <a:p>
-            <a:pPr indent="0" lvl="0" marL="0" marR="0" rtl="0" algn="l">
+            <a:pPr marL="0" marR="0" lvl="0" indent="0" algn="l" rtl="0">
               <a:lnSpc>
                 <a:spcPct val="160000"/>
               </a:lnSpc>
@@ -13966,7 +14238,7 @@
               <a:buNone/>
             </a:pPr>
             <a:r>
-              <a:rPr b="0" i="0" lang="en-US" sz="1650" u="none" cap="none" strike="noStrike">
+              <a:rPr lang="en-US" sz="1650" b="0" i="0" u="none" strike="noStrike" cap="none">
                 <a:solidFill>
                   <a:srgbClr val="CBD5E1"/>
                 </a:solidFill>
@@ -14001,12 +14273,12 @@
           </a:ln>
         </p:spPr>
         <p:txBody>
-          <a:bodyPr anchorCtr="0" anchor="t" bIns="0" lIns="0" spcFirstLastPara="1" rIns="0" wrap="square" tIns="0">
+          <a:bodyPr spcFirstLastPara="1" wrap="square" lIns="0" tIns="0" rIns="0" bIns="0" anchor="t" anchorCtr="0">
             <a:spAutoFit/>
           </a:bodyPr>
           <a:lstStyle/>
           <a:p>
-            <a:pPr indent="0" lvl="0" marL="0" marR="0" rtl="0" algn="l">
+            <a:pPr marL="0" marR="0" lvl="0" indent="0" algn="l" rtl="0">
               <a:lnSpc>
                 <a:spcPct val="160000"/>
               </a:lnSpc>
@@ -14019,7 +14291,7 @@
               <a:buNone/>
             </a:pPr>
             <a:r>
-              <a:rPr b="0" i="0" lang="en-US" sz="1650" u="none" cap="none" strike="noStrike">
+              <a:rPr lang="en-US" sz="1650" b="0" i="0" u="none" strike="noStrike" cap="none">
                 <a:solidFill>
                   <a:srgbClr val="CBD5E1"/>
                 </a:solidFill>
@@ -14054,12 +14326,12 @@
           </a:ln>
         </p:spPr>
         <p:txBody>
-          <a:bodyPr anchorCtr="0" anchor="t" bIns="0" lIns="0" spcFirstLastPara="1" rIns="0" wrap="square" tIns="0">
+          <a:bodyPr spcFirstLastPara="1" wrap="square" lIns="0" tIns="0" rIns="0" bIns="0" anchor="t" anchorCtr="0">
             <a:spAutoFit/>
           </a:bodyPr>
           <a:lstStyle/>
           <a:p>
-            <a:pPr indent="0" lvl="0" marL="0" marR="0" rtl="0" algn="l">
+            <a:pPr marL="0" marR="0" lvl="0" indent="0" algn="l" rtl="0">
               <a:lnSpc>
                 <a:spcPct val="160000"/>
               </a:lnSpc>
@@ -14072,7 +14344,7 @@
               <a:buNone/>
             </a:pPr>
             <a:r>
-              <a:rPr b="0" i="0" lang="en-US" sz="1650" u="none" cap="none" strike="noStrike">
+              <a:rPr lang="en-US" sz="1650" b="0" i="0" u="none" strike="noStrike" cap="none">
                 <a:solidFill>
                   <a:srgbClr val="CBD5E1"/>
                 </a:solidFill>
@@ -14107,12 +14379,12 @@
           </a:ln>
         </p:spPr>
         <p:txBody>
-          <a:bodyPr anchorCtr="0" anchor="t" bIns="0" lIns="0" spcFirstLastPara="1" rIns="0" wrap="square" tIns="0">
+          <a:bodyPr spcFirstLastPara="1" wrap="square" lIns="0" tIns="0" rIns="0" bIns="0" anchor="t" anchorCtr="0">
             <a:spAutoFit/>
           </a:bodyPr>
           <a:lstStyle/>
           <a:p>
-            <a:pPr indent="0" lvl="0" marL="0" marR="0" rtl="0" algn="l">
+            <a:pPr marL="0" marR="0" lvl="0" indent="0" algn="l" rtl="0">
               <a:lnSpc>
                 <a:spcPct val="159944"/>
               </a:lnSpc>
@@ -14125,7 +14397,7 @@
               <a:buNone/>
             </a:pPr>
             <a:r>
-              <a:rPr b="0" i="0" lang="en-US" sz="1800" u="none" cap="none" strike="noStrike">
+              <a:rPr lang="en-US" sz="1800" b="0" i="0" u="none" strike="noStrike" cap="none">
                 <a:solidFill>
                   <a:srgbClr val="38BDF8"/>
                 </a:solidFill>
@@ -14160,12 +14432,12 @@
           </a:ln>
         </p:spPr>
         <p:txBody>
-          <a:bodyPr anchorCtr="0" anchor="t" bIns="0" lIns="0" spcFirstLastPara="1" rIns="0" wrap="square" tIns="0">
+          <a:bodyPr spcFirstLastPara="1" wrap="square" lIns="0" tIns="0" rIns="0" bIns="0" anchor="t" anchorCtr="0">
             <a:spAutoFit/>
           </a:bodyPr>
           <a:lstStyle/>
           <a:p>
-            <a:pPr indent="0" lvl="0" marL="0" marR="0" rtl="0" algn="l">
+            <a:pPr marL="0" marR="0" lvl="0" indent="0" algn="l" rtl="0">
               <a:lnSpc>
                 <a:spcPct val="159944"/>
               </a:lnSpc>
@@ -14178,7 +14450,7 @@
               <a:buNone/>
             </a:pPr>
             <a:r>
-              <a:rPr b="0" i="0" lang="en-US" sz="1800" u="none" cap="none" strike="noStrike">
+              <a:rPr lang="en-US" sz="1800" b="0" i="0" u="none" strike="noStrike" cap="none">
                 <a:solidFill>
                   <a:srgbClr val="38BDF8"/>
                 </a:solidFill>
@@ -14213,12 +14485,12 @@
           </a:ln>
         </p:spPr>
         <p:txBody>
-          <a:bodyPr anchorCtr="0" anchor="t" bIns="0" lIns="0" spcFirstLastPara="1" rIns="0" wrap="square" tIns="0">
+          <a:bodyPr spcFirstLastPara="1" wrap="square" lIns="0" tIns="0" rIns="0" bIns="0" anchor="t" anchorCtr="0">
             <a:spAutoFit/>
           </a:bodyPr>
           <a:lstStyle/>
           <a:p>
-            <a:pPr indent="0" lvl="0" marL="0" marR="0" rtl="0" algn="l">
+            <a:pPr marL="0" marR="0" lvl="0" indent="0" algn="l" rtl="0">
               <a:lnSpc>
                 <a:spcPct val="159944"/>
               </a:lnSpc>
@@ -14231,7 +14503,7 @@
               <a:buNone/>
             </a:pPr>
             <a:r>
-              <a:rPr b="0" i="0" lang="en-US" sz="1800" u="none" cap="none" strike="noStrike">
+              <a:rPr lang="en-US" sz="1800" b="0" i="0" u="none" strike="noStrike" cap="none">
                 <a:solidFill>
                   <a:srgbClr val="38BDF8"/>
                 </a:solidFill>
@@ -14266,12 +14538,12 @@
           </a:ln>
         </p:spPr>
         <p:txBody>
-          <a:bodyPr anchorCtr="0" anchor="t" bIns="0" lIns="0" spcFirstLastPara="1" rIns="0" wrap="square" tIns="0">
+          <a:bodyPr spcFirstLastPara="1" wrap="square" lIns="0" tIns="0" rIns="0" bIns="0" anchor="t" anchorCtr="0">
             <a:spAutoFit/>
           </a:bodyPr>
           <a:lstStyle/>
           <a:p>
-            <a:pPr indent="0" lvl="0" marL="0" marR="0" rtl="0" algn="l">
+            <a:pPr marL="0" marR="0" lvl="0" indent="0" algn="l" rtl="0">
               <a:lnSpc>
                 <a:spcPct val="159944"/>
               </a:lnSpc>
@@ -14284,7 +14556,7 @@
               <a:buNone/>
             </a:pPr>
             <a:r>
-              <a:rPr b="0" i="0" lang="en-US" sz="1800" u="none" cap="none" strike="noStrike">
+              <a:rPr lang="en-US" sz="1800" b="0" i="0" u="none" strike="noStrike" cap="none">
                 <a:solidFill>
                   <a:srgbClr val="38BDF8"/>
                 </a:solidFill>
@@ -14319,12 +14591,12 @@
           </a:ln>
         </p:spPr>
         <p:txBody>
-          <a:bodyPr anchorCtr="0" anchor="t" bIns="0" lIns="0" spcFirstLastPara="1" rIns="0" wrap="square" tIns="0">
+          <a:bodyPr spcFirstLastPara="1" wrap="square" lIns="0" tIns="0" rIns="0" bIns="0" anchor="t" anchorCtr="0">
             <a:spAutoFit/>
           </a:bodyPr>
           <a:lstStyle/>
           <a:p>
-            <a:pPr indent="0" lvl="0" marL="0" marR="0" rtl="0" algn="l">
+            <a:pPr marL="0" marR="0" lvl="0" indent="0" algn="l" rtl="0">
               <a:lnSpc>
                 <a:spcPct val="159944"/>
               </a:lnSpc>
@@ -14337,7 +14609,7 @@
               <a:buNone/>
             </a:pPr>
             <a:r>
-              <a:rPr b="0" i="0" lang="en-US" sz="1800" u="none" cap="none" strike="noStrike">
+              <a:rPr lang="en-US" sz="1800" b="0" i="0" u="none" strike="noStrike" cap="none">
                 <a:solidFill>
                   <a:srgbClr val="38BDF8"/>
                 </a:solidFill>
@@ -14372,12 +14644,12 @@
           </a:ln>
         </p:spPr>
         <p:txBody>
-          <a:bodyPr anchorCtr="0" anchor="t" bIns="0" lIns="0" spcFirstLastPara="1" rIns="0" wrap="square" tIns="0">
+          <a:bodyPr spcFirstLastPara="1" wrap="square" lIns="0" tIns="0" rIns="0" bIns="0" anchor="t" anchorCtr="0">
             <a:spAutoFit/>
           </a:bodyPr>
           <a:lstStyle/>
           <a:p>
-            <a:pPr indent="0" lvl="0" marL="0" marR="0" rtl="0" algn="l">
+            <a:pPr marL="0" marR="0" lvl="0" indent="0" algn="l" rtl="0">
               <a:lnSpc>
                 <a:spcPct val="159944"/>
               </a:lnSpc>
@@ -14390,7 +14662,7 @@
               <a:buNone/>
             </a:pPr>
             <a:r>
-              <a:rPr b="0" i="0" lang="en-US" sz="1800" u="none" cap="none" strike="noStrike">
+              <a:rPr lang="en-US" sz="1800" b="0" i="0" u="none" strike="noStrike" cap="none">
                 <a:solidFill>
                   <a:srgbClr val="38BDF8"/>
                 </a:solidFill>
@@ -14425,12 +14697,12 @@
           </a:ln>
         </p:spPr>
         <p:txBody>
-          <a:bodyPr anchorCtr="0" anchor="t" bIns="0" lIns="0" spcFirstLastPara="1" rIns="0" wrap="square" tIns="0">
+          <a:bodyPr spcFirstLastPara="1" wrap="square" lIns="0" tIns="0" rIns="0" bIns="0" anchor="t" anchorCtr="0">
             <a:spAutoFit/>
           </a:bodyPr>
           <a:lstStyle/>
           <a:p>
-            <a:pPr indent="0" lvl="0" marL="0" marR="0" rtl="0" algn="l">
+            <a:pPr marL="0" marR="0" lvl="0" indent="0" algn="l" rtl="0">
               <a:lnSpc>
                 <a:spcPct val="159944"/>
               </a:lnSpc>
@@ -14443,7 +14715,7 @@
               <a:buNone/>
             </a:pPr>
             <a:r>
-              <a:rPr b="0" i="0" lang="en-US" sz="1800" u="none" cap="none" strike="noStrike">
+              <a:rPr lang="en-US" sz="1800" b="0" i="0" u="none" strike="noStrike" cap="none">
                 <a:solidFill>
                   <a:srgbClr val="38BDF8"/>
                 </a:solidFill>
@@ -14478,12 +14750,12 @@
           </a:ln>
         </p:spPr>
         <p:txBody>
-          <a:bodyPr anchorCtr="0" anchor="t" bIns="0" lIns="0" spcFirstLastPara="1" rIns="0" wrap="square" tIns="0">
+          <a:bodyPr spcFirstLastPara="1" wrap="square" lIns="0" tIns="0" rIns="0" bIns="0" anchor="t" anchorCtr="0">
             <a:spAutoFit/>
           </a:bodyPr>
           <a:lstStyle/>
           <a:p>
-            <a:pPr indent="0" lvl="0" marL="0" marR="0" rtl="0" algn="l">
+            <a:pPr marL="0" marR="0" lvl="0" indent="0" algn="l" rtl="0">
               <a:lnSpc>
                 <a:spcPct val="120000"/>
               </a:lnSpc>
@@ -14496,7 +14768,7 @@
               <a:buNone/>
             </a:pPr>
             <a:r>
-              <a:rPr b="1" i="0" lang="en-US" sz="3750" u="none" cap="none" strike="noStrike">
+              <a:rPr lang="en-US" sz="3750" b="1" i="0" u="none" strike="noStrike" cap="none">
                 <a:solidFill>
                   <a:srgbClr val="F8FAFC"/>
                 </a:solidFill>
@@ -14508,7 +14780,7 @@
               <a:t>Flujo de </a:t>
             </a:r>
             <a:r>
-              <a:rPr b="1" i="0" lang="en-US" sz="3750" u="none" cap="none" strike="noStrike">
+              <a:rPr lang="en-US" sz="3750" b="1" i="0" u="none" strike="noStrike" cap="none">
                 <a:solidFill>
                   <a:srgbClr val="38BDF8"/>
                 </a:solidFill>
@@ -14560,7 +14832,7 @@
 </file>
 
 <file path=ppt/slides/slide6.xml><?xml version="1.0" encoding="utf-8"?>
-<p:sld xmlns:a="http://schemas.openxmlformats.org/drawingml/2006/main" xmlns:r="http://schemas.openxmlformats.org/officeDocument/2006/relationships" xmlns:mc="http://schemas.openxmlformats.org/markup-compatibility/2006" xmlns:mv="urn:schemas-microsoft-com:mac:vml" xmlns:p="http://schemas.openxmlformats.org/presentationml/2006/main" xmlns:c="http://schemas.openxmlformats.org/drawingml/2006/chart" xmlns:dgm="http://schemas.openxmlformats.org/drawingml/2006/diagram" xmlns:o="urn:schemas-microsoft-com:office:office" xmlns:v="urn:schemas-microsoft-com:vml" xmlns:pvml="urn:schemas-microsoft-com:office:powerpoint" xmlns:com="http://schemas.openxmlformats.org/drawingml/2006/compatibility" xmlns:p14="http://schemas.microsoft.com/office/powerpoint/2010/main" xmlns:p15="http://schemas.microsoft.com/office/powerpoint/2012/main" xmlns:ahyp="http://schemas.microsoft.com/office/drawing/2018/hyperlinkcolor">
+<p:sld xmlns:a="http://schemas.openxmlformats.org/drawingml/2006/main" xmlns:r="http://schemas.openxmlformats.org/officeDocument/2006/relationships" xmlns:p="http://schemas.openxmlformats.org/presentationml/2006/main">
   <p:cSld>
     <p:bg>
       <p:bgPr>
@@ -14572,11 +14844,12 @@
             <a:fillRect/>
           </a:stretch>
         </a:blipFill>
+        <a:effectLst/>
       </p:bgPr>
     </p:bg>
     <p:spTree>
       <p:nvGrpSpPr>
-        <p:cNvPr id="167" name="Shape 167"/>
+        <p:cNvPr id="1" name="Shape 167"/>
         <p:cNvGrpSpPr/>
         <p:nvPr/>
       </p:nvGrpSpPr>
@@ -14608,12 +14881,12 @@
           </a:ln>
         </p:spPr>
         <p:txBody>
-          <a:bodyPr anchorCtr="0" anchor="t" bIns="0" lIns="0" spcFirstLastPara="1" rIns="0" wrap="square" tIns="0">
+          <a:bodyPr spcFirstLastPara="1" wrap="square" lIns="0" tIns="0" rIns="0" bIns="0" anchor="t" anchorCtr="0">
             <a:spAutoFit/>
           </a:bodyPr>
           <a:lstStyle/>
           <a:p>
-            <a:pPr indent="0" lvl="0" marL="0" marR="0" rtl="0" algn="l">
+            <a:pPr marL="0" marR="0" lvl="0" indent="0" algn="l" rtl="0">
               <a:lnSpc>
                 <a:spcPct val="120000"/>
               </a:lnSpc>
@@ -14626,7 +14899,7 @@
               <a:buNone/>
             </a:pPr>
             <a:r>
-              <a:rPr b="1" i="0" lang="en-US" sz="3750" u="none" cap="none" strike="noStrike">
+              <a:rPr lang="en-US" sz="3750" b="1" i="0" u="none" strike="noStrike" cap="none">
                 <a:solidFill>
                   <a:srgbClr val="F8FAFC"/>
                 </a:solidFill>
@@ -14661,12 +14934,12 @@
           </a:ln>
         </p:spPr>
         <p:txBody>
-          <a:bodyPr anchorCtr="0" anchor="t" bIns="0" lIns="0" spcFirstLastPara="1" rIns="0" wrap="square" tIns="0">
+          <a:bodyPr spcFirstLastPara="1" wrap="square" lIns="0" tIns="0" rIns="0" bIns="0" anchor="t" anchorCtr="0">
             <a:spAutoFit/>
           </a:bodyPr>
           <a:lstStyle/>
           <a:p>
-            <a:pPr indent="0" lvl="0" marL="0" marR="0" rtl="0" algn="l">
+            <a:pPr marL="0" marR="0" lvl="0" indent="0" algn="l" rtl="0">
               <a:lnSpc>
                 <a:spcPct val="160000"/>
               </a:lnSpc>
@@ -14679,7 +14952,7 @@
               <a:buNone/>
             </a:pPr>
             <a:r>
-              <a:rPr b="0" i="0" lang="en-US" sz="1650" u="none" cap="none" strike="noStrike">
+              <a:rPr lang="en-US" sz="1650" b="0" i="0" u="none" strike="noStrike" cap="none">
                 <a:solidFill>
                   <a:srgbClr val="CBD5E1"/>
                 </a:solidFill>
@@ -14691,7 +14964,7 @@
               <a:t>Despliegue basado en contenedores </a:t>
             </a:r>
             <a:r>
-              <a:rPr b="1" i="0" lang="en-US" sz="1650" u="none" cap="none" strike="noStrike">
+              <a:rPr lang="en-US" sz="1650" b="1" i="0" u="none" strike="noStrike" cap="none">
                 <a:solidFill>
                   <a:srgbClr val="CBD5E1"/>
                 </a:solidFill>
@@ -14703,7 +14976,7 @@
               <a:t>Docker</a:t>
             </a:r>
             <a:r>
-              <a:rPr b="0" i="0" lang="en-US" sz="1650" u="none" cap="none" strike="noStrike">
+              <a:rPr lang="en-US" sz="1650" b="0" i="0" u="none" strike="noStrike" cap="none">
                 <a:solidFill>
                   <a:srgbClr val="CBD5E1"/>
                 </a:solidFill>
@@ -14715,7 +14988,7 @@
               <a:t> gestionados por un clúster </a:t>
             </a:r>
             <a:r>
-              <a:rPr b="1" i="0" lang="en-US" sz="1650" u="none" cap="none" strike="noStrike">
+              <a:rPr lang="en-US" sz="1650" b="1" i="0" u="none" strike="noStrike" cap="none">
                 <a:solidFill>
                   <a:srgbClr val="CBD5E1"/>
                 </a:solidFill>
@@ -14727,7 +15000,7 @@
               <a:t>Kubernetes</a:t>
             </a:r>
             <a:r>
-              <a:rPr b="0" i="0" lang="en-US" sz="1650" u="none" cap="none" strike="noStrike">
+              <a:rPr lang="en-US" sz="1650" b="0" i="0" u="none" strike="noStrike" cap="none">
                 <a:solidFill>
                   <a:srgbClr val="CBD5E1"/>
                 </a:solidFill>
@@ -14762,12 +15035,12 @@
           </a:ln>
         </p:spPr>
         <p:txBody>
-          <a:bodyPr anchorCtr="0" anchor="t" bIns="0" lIns="0" spcFirstLastPara="1" rIns="0" wrap="square" tIns="0">
+          <a:bodyPr spcFirstLastPara="1" wrap="square" lIns="0" tIns="0" rIns="0" bIns="0" anchor="t" anchorCtr="0">
             <a:spAutoFit/>
           </a:bodyPr>
           <a:lstStyle/>
           <a:p>
-            <a:pPr indent="0" lvl="0" marL="0" marR="0" rtl="0" algn="l">
+            <a:pPr marL="0" marR="0" lvl="0" indent="0" algn="l" rtl="0">
               <a:lnSpc>
                 <a:spcPct val="160000"/>
               </a:lnSpc>
@@ -14780,7 +15053,7 @@
               <a:buNone/>
             </a:pPr>
             <a:r>
-              <a:rPr b="1" i="0" lang="en-US" sz="1650" u="none" cap="none" strike="noStrike">
+              <a:rPr lang="en-US" sz="1650" b="1" i="0" u="none" strike="noStrike" cap="none">
                 <a:solidFill>
                   <a:srgbClr val="CBD5E1"/>
                 </a:solidFill>
@@ -14815,12 +15088,12 @@
           </a:ln>
         </p:spPr>
         <p:txBody>
-          <a:bodyPr anchorCtr="0" anchor="t" bIns="0" lIns="0" spcFirstLastPara="1" rIns="0" wrap="square" tIns="0">
+          <a:bodyPr spcFirstLastPara="1" wrap="square" lIns="0" tIns="0" rIns="0" bIns="0" anchor="t" anchorCtr="0">
             <a:spAutoFit/>
           </a:bodyPr>
           <a:lstStyle/>
           <a:p>
-            <a:pPr indent="0" lvl="0" marL="0" marR="0" rtl="0" algn="l">
+            <a:pPr marL="0" marR="0" lvl="0" indent="0" algn="l" rtl="0">
               <a:lnSpc>
                 <a:spcPct val="160000"/>
               </a:lnSpc>
@@ -14833,7 +15106,7 @@
               <a:buNone/>
             </a:pPr>
             <a:r>
-              <a:rPr b="1" i="0" lang="en-US" sz="1650" u="none" cap="none" strike="noStrike">
+              <a:rPr lang="en-US" sz="1650" b="1" i="0" u="none" strike="noStrike" cap="none">
                 <a:solidFill>
                   <a:srgbClr val="CBD5E1"/>
                 </a:solidFill>
@@ -14868,12 +15141,12 @@
           </a:ln>
         </p:spPr>
         <p:txBody>
-          <a:bodyPr anchorCtr="0" anchor="t" bIns="0" lIns="0" spcFirstLastPara="1" rIns="0" wrap="square" tIns="0">
+          <a:bodyPr spcFirstLastPara="1" wrap="square" lIns="0" tIns="0" rIns="0" bIns="0" anchor="t" anchorCtr="0">
             <a:spAutoFit/>
           </a:bodyPr>
           <a:lstStyle/>
           <a:p>
-            <a:pPr indent="0" lvl="0" marL="0" marR="0" rtl="0" algn="l">
+            <a:pPr marL="0" marR="0" lvl="0" indent="0" algn="l" rtl="0">
               <a:lnSpc>
                 <a:spcPct val="160000"/>
               </a:lnSpc>
@@ -14886,7 +15159,7 @@
               <a:buNone/>
             </a:pPr>
             <a:r>
-              <a:rPr b="1" i="0" lang="en-US" sz="1650" u="none" cap="none" strike="noStrike">
+              <a:rPr lang="en-US" sz="1650" b="1" i="0" u="none" strike="noStrike" cap="none">
                 <a:solidFill>
                   <a:srgbClr val="CBD5E1"/>
                 </a:solidFill>
@@ -14921,12 +15194,12 @@
           </a:ln>
         </p:spPr>
         <p:txBody>
-          <a:bodyPr anchorCtr="0" anchor="t" bIns="0" lIns="0" spcFirstLastPara="1" rIns="0" wrap="square" tIns="0">
+          <a:bodyPr spcFirstLastPara="1" wrap="square" lIns="0" tIns="0" rIns="0" bIns="0" anchor="t" anchorCtr="0">
             <a:spAutoFit/>
           </a:bodyPr>
           <a:lstStyle/>
           <a:p>
-            <a:pPr indent="0" lvl="0" marL="0" marR="0" rtl="0" algn="l">
+            <a:pPr marL="0" marR="0" lvl="0" indent="0" algn="l" rtl="0">
               <a:lnSpc>
                 <a:spcPct val="159944"/>
               </a:lnSpc>
@@ -14939,7 +15212,7 @@
               <a:buNone/>
             </a:pPr>
             <a:r>
-              <a:rPr b="0" i="0" lang="en-US" sz="1800" u="none" cap="none" strike="noStrike">
+              <a:rPr lang="en-US" sz="1800" b="0" i="0" u="none" strike="noStrike" cap="none">
                 <a:solidFill>
                   <a:srgbClr val="38BDF8"/>
                 </a:solidFill>
@@ -14974,12 +15247,12 @@
           </a:ln>
         </p:spPr>
         <p:txBody>
-          <a:bodyPr anchorCtr="0" anchor="t" bIns="0" lIns="0" spcFirstLastPara="1" rIns="0" wrap="square" tIns="0">
+          <a:bodyPr spcFirstLastPara="1" wrap="square" lIns="0" tIns="0" rIns="0" bIns="0" anchor="t" anchorCtr="0">
             <a:spAutoFit/>
           </a:bodyPr>
           <a:lstStyle/>
           <a:p>
-            <a:pPr indent="0" lvl="0" marL="0" marR="0" rtl="0" algn="l">
+            <a:pPr marL="0" marR="0" lvl="0" indent="0" algn="l" rtl="0">
               <a:lnSpc>
                 <a:spcPct val="159944"/>
               </a:lnSpc>
@@ -14992,7 +15265,7 @@
               <a:buNone/>
             </a:pPr>
             <a:r>
-              <a:rPr b="0" i="0" lang="en-US" sz="1800" u="none" cap="none" strike="noStrike">
+              <a:rPr lang="en-US" sz="1800" b="0" i="0" u="none" strike="noStrike" cap="none">
                 <a:solidFill>
                   <a:srgbClr val="38BDF8"/>
                 </a:solidFill>
@@ -15027,12 +15300,12 @@
           </a:ln>
         </p:spPr>
         <p:txBody>
-          <a:bodyPr anchorCtr="0" anchor="t" bIns="0" lIns="0" spcFirstLastPara="1" rIns="0" wrap="square" tIns="0">
+          <a:bodyPr spcFirstLastPara="1" wrap="square" lIns="0" tIns="0" rIns="0" bIns="0" anchor="t" anchorCtr="0">
             <a:spAutoFit/>
           </a:bodyPr>
           <a:lstStyle/>
           <a:p>
-            <a:pPr indent="0" lvl="0" marL="0" marR="0" rtl="0" algn="l">
+            <a:pPr marL="0" marR="0" lvl="0" indent="0" algn="l" rtl="0">
               <a:lnSpc>
                 <a:spcPct val="159944"/>
               </a:lnSpc>
@@ -15045,7 +15318,7 @@
               <a:buNone/>
             </a:pPr>
             <a:r>
-              <a:rPr b="0" i="0" lang="en-US" sz="1800" u="none" cap="none" strike="noStrike">
+              <a:rPr lang="en-US" sz="1800" b="0" i="0" u="none" strike="noStrike" cap="none">
                 <a:solidFill>
                   <a:srgbClr val="38BDF8"/>
                 </a:solidFill>
@@ -15076,7 +15349,7 @@
         </p:blipFill>
         <p:spPr>
           <a:xfrm>
-            <a:off x="3378325" y="1841575"/>
+            <a:off x="4140325" y="1998030"/>
             <a:ext cx="8051675" cy="4442100"/>
           </a:xfrm>
           <a:prstGeom prst="rect">
@@ -15097,11 +15370,11 @@
 </file>
 
 <file path=ppt/slides/slide7.xml><?xml version="1.0" encoding="utf-8"?>
-<p:sld xmlns:a="http://schemas.openxmlformats.org/drawingml/2006/main" xmlns:r="http://schemas.openxmlformats.org/officeDocument/2006/relationships" xmlns:mc="http://schemas.openxmlformats.org/markup-compatibility/2006" xmlns:mv="urn:schemas-microsoft-com:mac:vml" xmlns:p="http://schemas.openxmlformats.org/presentationml/2006/main" xmlns:c="http://schemas.openxmlformats.org/drawingml/2006/chart" xmlns:dgm="http://schemas.openxmlformats.org/drawingml/2006/diagram" xmlns:o="urn:schemas-microsoft-com:office:office" xmlns:v="urn:schemas-microsoft-com:vml" xmlns:pvml="urn:schemas-microsoft-com:office:powerpoint" xmlns:com="http://schemas.openxmlformats.org/drawingml/2006/compatibility" xmlns:p14="http://schemas.microsoft.com/office/powerpoint/2010/main" xmlns:p15="http://schemas.microsoft.com/office/powerpoint/2012/main" xmlns:ahyp="http://schemas.microsoft.com/office/drawing/2018/hyperlinkcolor">
+<p:sld xmlns:a="http://schemas.openxmlformats.org/drawingml/2006/main" xmlns:r="http://schemas.openxmlformats.org/officeDocument/2006/relationships" xmlns:p="http://schemas.openxmlformats.org/presentationml/2006/main">
   <p:cSld>
     <p:spTree>
       <p:nvGrpSpPr>
-        <p:cNvPr id="180" name="Shape 180"/>
+        <p:cNvPr id="1" name="Shape 180"/>
         <p:cNvGrpSpPr/>
         <p:nvPr/>
       </p:nvGrpSpPr>
@@ -15115,7 +15388,7 @@
       </p:grpSpPr>
       <p:pic>
         <p:nvPicPr>
-          <p:cNvPr descr="image.png" id="181" name="Google Shape;181;p19"/>
+          <p:cNvPr id="181" name="Google Shape;181;p19" descr="image.png"/>
           <p:cNvPicPr preferRelativeResize="0"/>
           <p:nvPr/>
         </p:nvPicPr>
@@ -15123,7 +15396,7 @@
           <a:blip r:embed="rId3">
             <a:alphaModFix/>
           </a:blip>
-          <a:srcRect b="0" l="0" r="0" t="0"/>
+          <a:srcRect/>
           <a:stretch/>
         </p:blipFill>
         <p:spPr>
@@ -15142,7 +15415,7 @@
       </p:pic>
       <p:pic>
         <p:nvPicPr>
-          <p:cNvPr descr="image.png" id="182" name="Google Shape;182;p19"/>
+          <p:cNvPr id="182" name="Google Shape;182;p19" descr="image.png"/>
           <p:cNvPicPr preferRelativeResize="0"/>
           <p:nvPr/>
         </p:nvPicPr>
@@ -15150,7 +15423,7 @@
           <a:blip r:embed="rId4">
             <a:alphaModFix/>
           </a:blip>
-          <a:srcRect b="0" l="0" r="0" t="0"/>
+          <a:srcRect/>
           <a:stretch/>
         </p:blipFill>
         <p:spPr>
@@ -15169,7 +15442,7 @@
       </p:pic>
       <p:pic>
         <p:nvPicPr>
-          <p:cNvPr descr="image.png" id="183" name="Google Shape;183;p19"/>
+          <p:cNvPr id="183" name="Google Shape;183;p19" descr="image.png"/>
           <p:cNvPicPr preferRelativeResize="0"/>
           <p:nvPr/>
         </p:nvPicPr>
@@ -15177,7 +15450,7 @@
           <a:blip r:embed="rId5">
             <a:alphaModFix/>
           </a:blip>
-          <a:srcRect b="0" l="0" r="0" t="0"/>
+          <a:srcRect/>
           <a:stretch/>
         </p:blipFill>
         <p:spPr>
@@ -15196,7 +15469,7 @@
       </p:pic>
       <p:pic>
         <p:nvPicPr>
-          <p:cNvPr descr="image.png" id="184" name="Google Shape;184;p19"/>
+          <p:cNvPr id="184" name="Google Shape;184;p19" descr="image.png"/>
           <p:cNvPicPr preferRelativeResize="0"/>
           <p:nvPr/>
         </p:nvPicPr>
@@ -15204,7 +15477,7 @@
           <a:blip r:embed="rId6">
             <a:alphaModFix/>
           </a:blip>
-          <a:srcRect b="0" l="0" r="0" t="0"/>
+          <a:srcRect/>
           <a:stretch/>
         </p:blipFill>
         <p:spPr>
@@ -15241,12 +15514,12 @@
           </a:ln>
         </p:spPr>
         <p:txBody>
-          <a:bodyPr anchorCtr="0" anchor="t" bIns="0" lIns="0" spcFirstLastPara="1" rIns="0" wrap="square" tIns="0">
+          <a:bodyPr spcFirstLastPara="1" wrap="square" lIns="0" tIns="0" rIns="0" bIns="0" anchor="t" anchorCtr="0">
             <a:spAutoFit/>
           </a:bodyPr>
           <a:lstStyle/>
           <a:p>
-            <a:pPr indent="0" lvl="0" marL="0" marR="0" rtl="0" algn="l">
+            <a:pPr marL="0" marR="0" lvl="0" indent="0" algn="l" rtl="0">
               <a:lnSpc>
                 <a:spcPct val="119958"/>
               </a:lnSpc>
@@ -15259,7 +15532,7 @@
               <a:buNone/>
             </a:pPr>
             <a:r>
-              <a:rPr b="1" i="0" lang="en-US" sz="2400" u="none" cap="none" strike="noStrike">
+              <a:rPr lang="en-US" sz="2400" b="1" i="0" u="none" strike="noStrike" cap="none">
                 <a:solidFill>
                   <a:srgbClr val="E2E8F0"/>
                 </a:solidFill>
@@ -15294,12 +15567,12 @@
           </a:ln>
         </p:spPr>
         <p:txBody>
-          <a:bodyPr anchorCtr="0" anchor="t" bIns="0" lIns="0" spcFirstLastPara="1" rIns="0" wrap="square" tIns="0">
+          <a:bodyPr spcFirstLastPara="1" wrap="square" lIns="0" tIns="0" rIns="0" bIns="0" anchor="t" anchorCtr="0">
             <a:spAutoFit/>
           </a:bodyPr>
           <a:lstStyle/>
           <a:p>
-            <a:pPr indent="0" lvl="0" marL="0" marR="0" rtl="0" algn="l">
+            <a:pPr marL="0" marR="0" lvl="0" indent="0" algn="l" rtl="0">
               <a:lnSpc>
                 <a:spcPct val="150000"/>
               </a:lnSpc>
@@ -15312,7 +15585,7 @@
               <a:buNone/>
             </a:pPr>
             <a:r>
-              <a:rPr b="0" i="0" lang="en-US" sz="1350" u="none" cap="none" strike="noStrike">
+              <a:rPr lang="en-US" sz="1350" b="0" i="0" u="none" strike="noStrike" cap="none">
                 <a:solidFill>
                   <a:srgbClr val="CBD5E1"/>
                 </a:solidFill>
@@ -15347,12 +15620,12 @@
           </a:ln>
         </p:spPr>
         <p:txBody>
-          <a:bodyPr anchorCtr="0" anchor="t" bIns="0" lIns="0" spcFirstLastPara="1" rIns="0" wrap="square" tIns="0">
+          <a:bodyPr spcFirstLastPara="1" wrap="square" lIns="0" tIns="0" rIns="0" bIns="0" anchor="t" anchorCtr="0">
             <a:spAutoFit/>
           </a:bodyPr>
           <a:lstStyle/>
           <a:p>
-            <a:pPr indent="0" lvl="0" marL="0" marR="0" rtl="0" algn="l">
+            <a:pPr marL="0" marR="0" lvl="0" indent="0" algn="l" rtl="0">
               <a:lnSpc>
                 <a:spcPct val="119958"/>
               </a:lnSpc>
@@ -15365,7 +15638,7 @@
               <a:buNone/>
             </a:pPr>
             <a:r>
-              <a:rPr b="1" i="0" lang="en-US" sz="2400" u="none" cap="none" strike="noStrike">
+              <a:rPr lang="en-US" sz="2400" b="1" i="0" u="none" strike="noStrike" cap="none">
                 <a:solidFill>
                   <a:srgbClr val="E2E8F0"/>
                 </a:solidFill>
@@ -15400,12 +15673,12 @@
           </a:ln>
         </p:spPr>
         <p:txBody>
-          <a:bodyPr anchorCtr="0" anchor="t" bIns="0" lIns="0" spcFirstLastPara="1" rIns="0" wrap="square" tIns="0">
+          <a:bodyPr spcFirstLastPara="1" wrap="square" lIns="0" tIns="0" rIns="0" bIns="0" anchor="t" anchorCtr="0">
             <a:spAutoFit/>
           </a:bodyPr>
           <a:lstStyle/>
           <a:p>
-            <a:pPr indent="0" lvl="0" marL="0" marR="0" rtl="0" algn="l">
+            <a:pPr marL="0" marR="0" lvl="0" indent="0" algn="l" rtl="0">
               <a:lnSpc>
                 <a:spcPct val="150000"/>
               </a:lnSpc>
@@ -15418,7 +15691,7 @@
               <a:buNone/>
             </a:pPr>
             <a:r>
-              <a:rPr b="0" i="0" lang="en-US" sz="1350" u="none" cap="none" strike="noStrike">
+              <a:rPr lang="en-US" sz="1350" b="0" i="0" u="none" strike="noStrike" cap="none">
                 <a:solidFill>
                   <a:srgbClr val="CBD5E1"/>
                 </a:solidFill>
@@ -15453,12 +15726,12 @@
           </a:ln>
         </p:spPr>
         <p:txBody>
-          <a:bodyPr anchorCtr="0" anchor="t" bIns="0" lIns="0" spcFirstLastPara="1" rIns="0" wrap="square" tIns="0">
+          <a:bodyPr spcFirstLastPara="1" wrap="square" lIns="0" tIns="0" rIns="0" bIns="0" anchor="t" anchorCtr="0">
             <a:spAutoFit/>
           </a:bodyPr>
           <a:lstStyle/>
           <a:p>
-            <a:pPr indent="0" lvl="0" marL="0" marR="0" rtl="0" algn="l">
+            <a:pPr marL="0" marR="0" lvl="0" indent="0" algn="l" rtl="0">
               <a:lnSpc>
                 <a:spcPct val="119958"/>
               </a:lnSpc>
@@ -15471,7 +15744,7 @@
               <a:buNone/>
             </a:pPr>
             <a:r>
-              <a:rPr b="1" i="0" lang="en-US" sz="2400" u="none" cap="none" strike="noStrike">
+              <a:rPr lang="en-US" sz="2400" b="1" i="0" u="none" strike="noStrike" cap="none">
                 <a:solidFill>
                   <a:srgbClr val="E2E8F0"/>
                 </a:solidFill>
@@ -15506,12 +15779,12 @@
           </a:ln>
         </p:spPr>
         <p:txBody>
-          <a:bodyPr anchorCtr="0" anchor="t" bIns="0" lIns="0" spcFirstLastPara="1" rIns="0" wrap="square" tIns="0">
+          <a:bodyPr spcFirstLastPara="1" wrap="square" lIns="0" tIns="0" rIns="0" bIns="0" anchor="t" anchorCtr="0">
             <a:spAutoFit/>
           </a:bodyPr>
           <a:lstStyle/>
           <a:p>
-            <a:pPr indent="0" lvl="0" marL="0" marR="0" rtl="0" algn="l">
+            <a:pPr marL="0" marR="0" lvl="0" indent="0" algn="l" rtl="0">
               <a:lnSpc>
                 <a:spcPct val="150000"/>
               </a:lnSpc>
@@ -15524,7 +15797,7 @@
               <a:buNone/>
             </a:pPr>
             <a:r>
-              <a:rPr b="0" i="0" lang="en-US" sz="1350" u="none" cap="none" strike="noStrike">
+              <a:rPr lang="en-US" sz="1350" b="0" i="0" u="none" strike="noStrike" cap="none">
                 <a:solidFill>
                   <a:srgbClr val="CBD5E1"/>
                 </a:solidFill>
@@ -15541,7 +15814,7 @@
       </p:sp>
       <p:pic>
         <p:nvPicPr>
-          <p:cNvPr descr="image.png" id="191" name="Google Shape;191;p19"/>
+          <p:cNvPr id="191" name="Google Shape;191;p19" descr="image.png"/>
           <p:cNvPicPr preferRelativeResize="0"/>
           <p:nvPr/>
         </p:nvPicPr>
@@ -15549,7 +15822,7 @@
           <a:blip r:embed="rId7">
             <a:alphaModFix/>
           </a:blip>
-          <a:srcRect b="0" l="0" r="0" t="0"/>
+          <a:srcRect/>
           <a:stretch/>
         </p:blipFill>
         <p:spPr>
@@ -15568,7 +15841,7 @@
       </p:pic>
       <p:pic>
         <p:nvPicPr>
-          <p:cNvPr descr="image.png" id="192" name="Google Shape;192;p19"/>
+          <p:cNvPr id="192" name="Google Shape;192;p19" descr="image.png"/>
           <p:cNvPicPr preferRelativeResize="0"/>
           <p:nvPr/>
         </p:nvPicPr>
@@ -15576,7 +15849,7 @@
           <a:blip r:embed="rId8">
             <a:alphaModFix/>
           </a:blip>
-          <a:srcRect b="0" l="0" r="0" t="0"/>
+          <a:srcRect/>
           <a:stretch/>
         </p:blipFill>
         <p:spPr>
@@ -15595,7 +15868,7 @@
       </p:pic>
       <p:pic>
         <p:nvPicPr>
-          <p:cNvPr descr="image.png" id="193" name="Google Shape;193;p19"/>
+          <p:cNvPr id="193" name="Google Shape;193;p19" descr="image.png"/>
           <p:cNvPicPr preferRelativeResize="0"/>
           <p:nvPr/>
         </p:nvPicPr>
@@ -15603,7 +15876,7 @@
           <a:blip r:embed="rId9">
             <a:alphaModFix/>
           </a:blip>
-          <a:srcRect b="0" l="0" r="0" t="0"/>
+          <a:srcRect/>
           <a:stretch/>
         </p:blipFill>
         <p:spPr>
@@ -15640,12 +15913,12 @@
           </a:ln>
         </p:spPr>
         <p:txBody>
-          <a:bodyPr anchorCtr="0" anchor="t" bIns="0" lIns="0" spcFirstLastPara="1" rIns="0" wrap="square" tIns="0">
+          <a:bodyPr spcFirstLastPara="1" wrap="square" lIns="0" tIns="0" rIns="0" bIns="0" anchor="t" anchorCtr="0">
             <a:spAutoFit/>
           </a:bodyPr>
           <a:lstStyle/>
           <a:p>
-            <a:pPr indent="0" lvl="0" marL="0" marR="0" rtl="0" algn="l">
+            <a:pPr marL="0" marR="0" lvl="0" indent="0" algn="l" rtl="0">
               <a:lnSpc>
                 <a:spcPct val="120000"/>
               </a:lnSpc>
@@ -15658,7 +15931,7 @@
               <a:buNone/>
             </a:pPr>
             <a:r>
-              <a:rPr b="1" i="0" lang="en-US" sz="3750" u="none" cap="none" strike="noStrike">
+              <a:rPr lang="en-US" sz="3750" b="1" i="0" u="none" strike="noStrike" cap="none">
                 <a:solidFill>
                   <a:srgbClr val="F8FAFC"/>
                 </a:solidFill>
@@ -15670,7 +15943,7 @@
               <a:t>Evaluación del </a:t>
             </a:r>
             <a:r>
-              <a:rPr b="1" i="0" lang="en-US" sz="3750" u="none" cap="none" strike="noStrike">
+              <a:rPr lang="en-US" sz="3750" b="1" i="0" u="none" strike="noStrike" cap="none">
                 <a:solidFill>
                   <a:srgbClr val="38BDF8"/>
                 </a:solidFill>
@@ -15694,11 +15967,11 @@
 </file>
 
 <file path=ppt/slides/slide8.xml><?xml version="1.0" encoding="utf-8"?>
-<p:sld xmlns:a="http://schemas.openxmlformats.org/drawingml/2006/main" xmlns:r="http://schemas.openxmlformats.org/officeDocument/2006/relationships" xmlns:mc="http://schemas.openxmlformats.org/markup-compatibility/2006" xmlns:mv="urn:schemas-microsoft-com:mac:vml" xmlns:p="http://schemas.openxmlformats.org/presentationml/2006/main" xmlns:c="http://schemas.openxmlformats.org/drawingml/2006/chart" xmlns:dgm="http://schemas.openxmlformats.org/drawingml/2006/diagram" xmlns:o="urn:schemas-microsoft-com:office:office" xmlns:v="urn:schemas-microsoft-com:vml" xmlns:pvml="urn:schemas-microsoft-com:office:powerpoint" xmlns:com="http://schemas.openxmlformats.org/drawingml/2006/compatibility" xmlns:p14="http://schemas.microsoft.com/office/powerpoint/2010/main" xmlns:p15="http://schemas.microsoft.com/office/powerpoint/2012/main" xmlns:ahyp="http://schemas.microsoft.com/office/drawing/2018/hyperlinkcolor">
+<p:sld xmlns:a="http://schemas.openxmlformats.org/drawingml/2006/main" xmlns:r="http://schemas.openxmlformats.org/officeDocument/2006/relationships" xmlns:p="http://schemas.openxmlformats.org/presentationml/2006/main">
   <p:cSld>
     <p:spTree>
       <p:nvGrpSpPr>
-        <p:cNvPr id="198" name="Shape 198"/>
+        <p:cNvPr id="1" name="Shape 198"/>
         <p:cNvGrpSpPr/>
         <p:nvPr/>
       </p:nvGrpSpPr>
@@ -15712,7 +15985,7 @@
       </p:grpSpPr>
       <p:pic>
         <p:nvPicPr>
-          <p:cNvPr descr="image.png" id="199" name="Google Shape;199;p20"/>
+          <p:cNvPr id="199" name="Google Shape;199;p20" descr="image.png"/>
           <p:cNvPicPr preferRelativeResize="0"/>
           <p:nvPr/>
         </p:nvPicPr>
@@ -15720,7 +15993,7 @@
           <a:blip r:embed="rId3">
             <a:alphaModFix/>
           </a:blip>
-          <a:srcRect b="0" l="0" r="0" t="0"/>
+          <a:srcRect/>
           <a:stretch/>
         </p:blipFill>
         <p:spPr>
@@ -15739,7 +16012,7 @@
       </p:pic>
       <p:pic>
         <p:nvPicPr>
-          <p:cNvPr descr="image.png" id="200" name="Google Shape;200;p20"/>
+          <p:cNvPr id="200" name="Google Shape;200;p20" descr="image.png"/>
           <p:cNvPicPr preferRelativeResize="0"/>
           <p:nvPr/>
         </p:nvPicPr>
@@ -15747,7 +16020,7 @@
           <a:blip r:embed="rId4">
             <a:alphaModFix/>
           </a:blip>
-          <a:srcRect b="0" l="0" r="0" t="0"/>
+          <a:srcRect/>
           <a:stretch/>
         </p:blipFill>
         <p:spPr>
@@ -15784,12 +16057,12 @@
           </a:ln>
         </p:spPr>
         <p:txBody>
-          <a:bodyPr anchorCtr="0" anchor="t" bIns="0" lIns="0" spcFirstLastPara="1" rIns="0" wrap="square" tIns="0">
+          <a:bodyPr spcFirstLastPara="1" wrap="square" lIns="0" tIns="0" rIns="0" bIns="0" anchor="t" anchorCtr="0">
             <a:spAutoFit/>
           </a:bodyPr>
           <a:lstStyle/>
           <a:p>
-            <a:pPr indent="0" lvl="0" marL="0" marR="0" rtl="0" algn="ctr">
+            <a:pPr marL="0" marR="0" lvl="0" indent="0" algn="ctr" rtl="0">
               <a:lnSpc>
                 <a:spcPct val="120000"/>
               </a:lnSpc>
@@ -15802,7 +16075,7 @@
               <a:buNone/>
             </a:pPr>
             <a:r>
-              <a:rPr b="1" i="0" lang="en-US" sz="6750" u="none" cap="none" strike="noStrike">
+              <a:rPr lang="en-US" sz="6750" b="1" i="0" u="none" strike="noStrike" cap="none">
                 <a:solidFill>
                   <a:srgbClr val="38BDF8"/>
                 </a:solidFill>
@@ -15837,12 +16110,12 @@
           </a:ln>
         </p:spPr>
         <p:txBody>
-          <a:bodyPr anchorCtr="0" anchor="t" bIns="0" lIns="0" spcFirstLastPara="1" rIns="0" wrap="square" tIns="0">
+          <a:bodyPr spcFirstLastPara="1" wrap="square" lIns="0" tIns="0" rIns="0" bIns="0" anchor="t" anchorCtr="0">
             <a:spAutoFit/>
           </a:bodyPr>
           <a:lstStyle/>
           <a:p>
-            <a:pPr indent="0" lvl="0" marL="0" marR="0" rtl="0" algn="ctr">
+            <a:pPr marL="0" marR="0" lvl="0" indent="0" algn="ctr" rtl="0">
               <a:lnSpc>
                 <a:spcPct val="159944"/>
               </a:lnSpc>
@@ -15855,7 +16128,7 @@
               <a:buNone/>
             </a:pPr>
             <a:r>
-              <a:rPr b="0" i="0" lang="en-US" sz="1800" u="none" cap="none" strike="noStrike">
+              <a:rPr lang="en-US" sz="1800" b="0" i="0" u="none" strike="noStrike" cap="none">
                 <a:solidFill>
                   <a:srgbClr val="CBD5E1"/>
                 </a:solidFill>
@@ -15890,12 +16163,12 @@
           </a:ln>
         </p:spPr>
         <p:txBody>
-          <a:bodyPr anchorCtr="0" anchor="t" bIns="0" lIns="0" spcFirstLastPara="1" rIns="0" wrap="square" tIns="0">
+          <a:bodyPr spcFirstLastPara="1" wrap="square" lIns="0" tIns="0" rIns="0" bIns="0" anchor="t" anchorCtr="0">
             <a:spAutoFit/>
           </a:bodyPr>
           <a:lstStyle/>
           <a:p>
-            <a:pPr indent="0" lvl="0" marL="0" marR="0" rtl="0" algn="l">
+            <a:pPr marL="0" marR="0" lvl="0" indent="0" algn="l" rtl="0">
               <a:lnSpc>
                 <a:spcPct val="120000"/>
               </a:lnSpc>
@@ -15908,7 +16181,7 @@
               <a:buNone/>
             </a:pPr>
             <a:r>
-              <a:rPr b="1" i="0" lang="en-US" sz="1500" u="none" cap="none" strike="noStrike">
+              <a:rPr lang="en-US" sz="1500" b="1" i="0" u="none" strike="noStrike" cap="none">
                 <a:solidFill>
                   <a:srgbClr val="38BDF8"/>
                 </a:solidFill>
@@ -15943,12 +16216,12 @@
           </a:ln>
         </p:spPr>
         <p:txBody>
-          <a:bodyPr anchorCtr="0" anchor="t" bIns="0" lIns="0" spcFirstLastPara="1" rIns="0" wrap="square" tIns="0">
+          <a:bodyPr spcFirstLastPara="1" wrap="square" lIns="0" tIns="0" rIns="0" bIns="0" anchor="t" anchorCtr="0">
             <a:spAutoFit/>
           </a:bodyPr>
           <a:lstStyle/>
           <a:p>
-            <a:pPr indent="0" lvl="0" marL="0" marR="0" rtl="0" algn="l">
+            <a:pPr marL="0" marR="0" lvl="0" indent="0" algn="l" rtl="0">
               <a:lnSpc>
                 <a:spcPct val="160000"/>
               </a:lnSpc>
@@ -15961,7 +16234,7 @@
               <a:buNone/>
             </a:pPr>
             <a:r>
-              <a:rPr b="0" i="0" lang="en-US" sz="1650" u="none" cap="none" strike="noStrike">
+              <a:rPr lang="en-US" sz="1650" b="0" i="0" u="none" strike="noStrike" cap="none">
                 <a:solidFill>
                   <a:srgbClr val="CBD5E1"/>
                 </a:solidFill>
@@ -15973,7 +16246,7 @@
               <a:t>• Fowler, M. (2018). </a:t>
             </a:r>
             <a:r>
-              <a:rPr b="0" i="1" lang="en-US" sz="1650" u="none" cap="none" strike="noStrike">
+              <a:rPr lang="en-US" sz="1650" b="0" i="1" u="none" strike="noStrike" cap="none">
                 <a:solidFill>
                   <a:srgbClr val="CBD5E1"/>
                 </a:solidFill>
@@ -15985,7 +16258,7 @@
               <a:t>Microservices Patterns</a:t>
             </a:r>
             <a:r>
-              <a:rPr b="0" i="0" lang="en-US" sz="1650" u="none" cap="none" strike="noStrike">
+              <a:rPr lang="en-US" sz="1650" b="0" i="0" u="none" strike="noStrike" cap="none">
                 <a:solidFill>
                   <a:srgbClr val="CBD5E1"/>
                 </a:solidFill>
@@ -16020,12 +16293,12 @@
           </a:ln>
         </p:spPr>
         <p:txBody>
-          <a:bodyPr anchorCtr="0" anchor="t" bIns="0" lIns="0" spcFirstLastPara="1" rIns="0" wrap="square" tIns="0">
+          <a:bodyPr spcFirstLastPara="1" wrap="square" lIns="0" tIns="0" rIns="0" bIns="0" anchor="t" anchorCtr="0">
             <a:spAutoFit/>
           </a:bodyPr>
           <a:lstStyle/>
           <a:p>
-            <a:pPr indent="0" lvl="0" marL="0" marR="0" rtl="0" algn="l">
+            <a:pPr marL="0" marR="0" lvl="0" indent="0" algn="l" rtl="0">
               <a:lnSpc>
                 <a:spcPct val="160000"/>
               </a:lnSpc>
@@ -16038,7 +16311,7 @@
               <a:buNone/>
             </a:pPr>
             <a:r>
-              <a:rPr b="0" i="0" lang="en-US" sz="1650" u="none" cap="none" strike="noStrike">
+              <a:rPr lang="en-US" sz="1650" b="0" i="0" u="none" strike="noStrike" cap="none">
                 <a:solidFill>
                   <a:srgbClr val="CBD5E1"/>
                 </a:solidFill>
@@ -16050,7 +16323,7 @@
               <a:t>• Newman, S. (2021). </a:t>
             </a:r>
             <a:r>
-              <a:rPr b="0" i="1" lang="en-US" sz="1650" u="none" cap="none" strike="noStrike">
+              <a:rPr lang="en-US" sz="1650" b="0" i="1" u="none" strike="noStrike" cap="none">
                 <a:solidFill>
                   <a:srgbClr val="CBD5E1"/>
                 </a:solidFill>
@@ -16062,7 +16335,7 @@
               <a:t>Building Microservices</a:t>
             </a:r>
             <a:r>
-              <a:rPr b="0" i="0" lang="en-US" sz="1650" u="none" cap="none" strike="noStrike">
+              <a:rPr lang="en-US" sz="1650" b="0" i="0" u="none" strike="noStrike" cap="none">
                 <a:solidFill>
                   <a:srgbClr val="CBD5E1"/>
                 </a:solidFill>
@@ -16097,12 +16370,12 @@
           </a:ln>
         </p:spPr>
         <p:txBody>
-          <a:bodyPr anchorCtr="0" anchor="t" bIns="0" lIns="0" spcFirstLastPara="1" rIns="0" wrap="square" tIns="0">
+          <a:bodyPr spcFirstLastPara="1" wrap="square" lIns="0" tIns="0" rIns="0" bIns="0" anchor="t" anchorCtr="0">
             <a:spAutoFit/>
           </a:bodyPr>
           <a:lstStyle/>
           <a:p>
-            <a:pPr indent="0" lvl="0" marL="0" marR="0" rtl="0" algn="l">
+            <a:pPr marL="0" marR="0" lvl="0" indent="0" algn="l" rtl="0">
               <a:lnSpc>
                 <a:spcPct val="160000"/>
               </a:lnSpc>
@@ -16115,7 +16388,7 @@
               <a:buNone/>
             </a:pPr>
             <a:r>
-              <a:rPr b="0" i="0" lang="en-US" sz="1650" u="none" cap="none" strike="noStrike">
+              <a:rPr lang="en-US" sz="1650" b="0" i="0" u="none" strike="noStrike" cap="none">
                 <a:solidFill>
                   <a:srgbClr val="CBD5E1"/>
                 </a:solidFill>
@@ -16127,7 +16400,7 @@
               <a:t>• Richardson, C. (2020). </a:t>
             </a:r>
             <a:r>
-              <a:rPr b="0" i="1" lang="en-US" sz="1650" u="none" cap="none" strike="noStrike">
+              <a:rPr lang="en-US" sz="1650" b="0" i="1" u="none" strike="noStrike" cap="none">
                 <a:solidFill>
                   <a:srgbClr val="CBD5E1"/>
                 </a:solidFill>
@@ -16139,7 +16412,7 @@
               <a:t>Microservices Patterns</a:t>
             </a:r>
             <a:r>
-              <a:rPr b="0" i="0" lang="en-US" sz="1650" u="none" cap="none" strike="noStrike">
+              <a:rPr lang="en-US" sz="1650" b="0" i="0" u="none" strike="noStrike" cap="none">
                 <a:solidFill>
                   <a:srgbClr val="CBD5E1"/>
                 </a:solidFill>
@@ -16174,12 +16447,12 @@
           </a:ln>
         </p:spPr>
         <p:txBody>
-          <a:bodyPr anchorCtr="0" anchor="t" bIns="0" lIns="0" spcFirstLastPara="1" rIns="0" wrap="square" tIns="0">
+          <a:bodyPr spcFirstLastPara="1" wrap="square" lIns="0" tIns="0" rIns="0" bIns="0" anchor="t" anchorCtr="0">
             <a:spAutoFit/>
           </a:bodyPr>
           <a:lstStyle/>
           <a:p>
-            <a:pPr indent="0" lvl="0" marL="0" marR="0" rtl="0" algn="l">
+            <a:pPr marL="0" marR="0" lvl="0" indent="0" algn="l" rtl="0">
               <a:lnSpc>
                 <a:spcPct val="160000"/>
               </a:lnSpc>
@@ -16192,7 +16465,7 @@
               <a:buNone/>
             </a:pPr>
             <a:r>
-              <a:rPr b="0" i="0" lang="en-US" sz="1650" u="none" cap="none" strike="noStrike">
+              <a:rPr lang="en-US" sz="1650" b="0" i="0" u="none" strike="noStrike" cap="none">
                 <a:solidFill>
                   <a:srgbClr val="CBD5E1"/>
                 </a:solidFill>
@@ -16216,7 +16489,288 @@
 </file>
 
 <file path=ppt/theme/theme1.xml><?xml version="1.0" encoding="utf-8"?>
-<a:theme xmlns:a="http://schemas.openxmlformats.org/drawingml/2006/main" xmlns:r="http://schemas.openxmlformats.org/officeDocument/2006/relationships">
+<a:theme xmlns:a="http://schemas.openxmlformats.org/drawingml/2006/main" name="Office Theme">
+  <a:themeElements>
+    <a:clrScheme name="Office">
+      <a:dk1>
+        <a:srgbClr val="000000"/>
+      </a:dk1>
+      <a:lt1>
+        <a:srgbClr val="FFFFFF"/>
+      </a:lt1>
+      <a:dk2>
+        <a:srgbClr val="1F497D"/>
+      </a:dk2>
+      <a:lt2>
+        <a:srgbClr val="EEECE1"/>
+      </a:lt2>
+      <a:accent1>
+        <a:srgbClr val="4F81BD"/>
+      </a:accent1>
+      <a:accent2>
+        <a:srgbClr val="C0504D"/>
+      </a:accent2>
+      <a:accent3>
+        <a:srgbClr val="9BBB59"/>
+      </a:accent3>
+      <a:accent4>
+        <a:srgbClr val="8064A2"/>
+      </a:accent4>
+      <a:accent5>
+        <a:srgbClr val="4BACC6"/>
+      </a:accent5>
+      <a:accent6>
+        <a:srgbClr val="F79646"/>
+      </a:accent6>
+      <a:hlink>
+        <a:srgbClr val="0000FF"/>
+      </a:hlink>
+      <a:folHlink>
+        <a:srgbClr val="800080"/>
+      </a:folHlink>
+    </a:clrScheme>
+    <a:fontScheme name="Office">
+      <a:majorFont>
+        <a:latin typeface="Arial"/>
+        <a:ea typeface=""/>
+        <a:cs typeface=""/>
+        <a:font script="Jpan" typeface="ＭＳ Ｐゴシック"/>
+        <a:font script="Hang" typeface="맑은 고딕"/>
+        <a:font script="Hans" typeface="宋体"/>
+        <a:font script="Hant" typeface="新細明體"/>
+        <a:font script="Arab" typeface="Times New Roman"/>
+        <a:font script="Hebr" typeface="Times New Roman"/>
+        <a:font script="Thai" typeface="Angsana New"/>
+        <a:font script="Ethi" typeface="Nyala"/>
+        <a:font script="Beng" typeface="Vrinda"/>
+        <a:font script="Gujr" typeface="Shruti"/>
+        <a:font script="Khmr" typeface="MoolBoran"/>
+        <a:font script="Knda" typeface="Tunga"/>
+        <a:font script="Guru" typeface="Raavi"/>
+        <a:font script="Cans" typeface="Euphemia"/>
+        <a:font script="Cher" typeface="Plantagenet Cherokee"/>
+        <a:font script="Yiii" typeface="Microsoft Yi Baiti"/>
+        <a:font script="Tibt" typeface="Microsoft Himalaya"/>
+        <a:font script="Thaa" typeface="MV Boli"/>
+        <a:font script="Deva" typeface="Mangal"/>
+        <a:font script="Telu" typeface="Gautami"/>
+        <a:font script="Taml" typeface="Latha"/>
+        <a:font script="Syrc" typeface="Estrangelo Edessa"/>
+        <a:font script="Orya" typeface="Kalinga"/>
+        <a:font script="Mlym" typeface="Kartika"/>
+        <a:font script="Laoo" typeface="DokChampa"/>
+        <a:font script="Sinh" typeface="Iskoola Pota"/>
+        <a:font script="Mong" typeface="Mongolian Baiti"/>
+        <a:font script="Viet" typeface="Times New Roman"/>
+        <a:font script="Uigh" typeface="Microsoft Uighur"/>
+        <a:font script="Geor" typeface="Sylfaen"/>
+      </a:majorFont>
+      <a:minorFont>
+        <a:latin typeface="Arial"/>
+        <a:ea typeface=""/>
+        <a:cs typeface=""/>
+        <a:font script="Jpan" typeface="ＭＳ Ｐゴシック"/>
+        <a:font script="Hang" typeface="맑은 고딕"/>
+        <a:font script="Hans" typeface="宋体"/>
+        <a:font script="Hant" typeface="新細明體"/>
+        <a:font script="Arab" typeface="Arial"/>
+        <a:font script="Hebr" typeface="Arial"/>
+        <a:font script="Thai" typeface="Cordia New"/>
+        <a:font script="Ethi" typeface="Nyala"/>
+        <a:font script="Beng" typeface="Vrinda"/>
+        <a:font script="Gujr" typeface="Shruti"/>
+        <a:font script="Khmr" typeface="DaunPenh"/>
+        <a:font script="Knda" typeface="Tunga"/>
+        <a:font script="Guru" typeface="Raavi"/>
+        <a:font script="Cans" typeface="Euphemia"/>
+        <a:font script="Cher" typeface="Plantagenet Cherokee"/>
+        <a:font script="Yiii" typeface="Microsoft Yi Baiti"/>
+        <a:font script="Tibt" typeface="Microsoft Himalaya"/>
+        <a:font script="Thaa" typeface="MV Boli"/>
+        <a:font script="Deva" typeface="Mangal"/>
+        <a:font script="Telu" typeface="Gautami"/>
+        <a:font script="Taml" typeface="Latha"/>
+        <a:font script="Syrc" typeface="Estrangelo Edessa"/>
+        <a:font script="Orya" typeface="Kalinga"/>
+        <a:font script="Mlym" typeface="Kartika"/>
+        <a:font script="Laoo" typeface="DokChampa"/>
+        <a:font script="Sinh" typeface="Iskoola Pota"/>
+        <a:font script="Mong" typeface="Mongolian Baiti"/>
+        <a:font script="Viet" typeface="Arial"/>
+        <a:font script="Uigh" typeface="Microsoft Uighur"/>
+        <a:font script="Geor" typeface="Sylfaen"/>
+      </a:minorFont>
+    </a:fontScheme>
+    <a:fmtScheme name="Office">
+      <a:fillStyleLst>
+        <a:solidFill>
+          <a:schemeClr val="phClr"/>
+        </a:solidFill>
+        <a:gradFill rotWithShape="1">
+          <a:gsLst>
+            <a:gs pos="0">
+              <a:schemeClr val="phClr">
+                <a:tint val="50000"/>
+                <a:satMod val="300000"/>
+              </a:schemeClr>
+            </a:gs>
+            <a:gs pos="35000">
+              <a:schemeClr val="phClr">
+                <a:tint val="37000"/>
+                <a:satMod val="300000"/>
+              </a:schemeClr>
+            </a:gs>
+            <a:gs pos="100000">
+              <a:schemeClr val="phClr">
+                <a:tint val="15000"/>
+                <a:satMod val="350000"/>
+              </a:schemeClr>
+            </a:gs>
+          </a:gsLst>
+          <a:lin ang="16200000" scaled="1"/>
+        </a:gradFill>
+        <a:gradFill rotWithShape="1">
+          <a:gsLst>
+            <a:gs pos="0">
+              <a:schemeClr val="phClr">
+                <a:tint val="100000"/>
+                <a:shade val="100000"/>
+                <a:satMod val="130000"/>
+              </a:schemeClr>
+            </a:gs>
+            <a:gs pos="100000">
+              <a:schemeClr val="phClr">
+                <a:tint val="50000"/>
+                <a:shade val="100000"/>
+                <a:satMod val="350000"/>
+              </a:schemeClr>
+            </a:gs>
+          </a:gsLst>
+          <a:lin ang="16200000" scaled="0"/>
+        </a:gradFill>
+      </a:fillStyleLst>
+      <a:lnStyleLst>
+        <a:ln w="9525" cap="flat" cmpd="sng" algn="ctr">
+          <a:solidFill>
+            <a:schemeClr val="phClr">
+              <a:shade val="95000"/>
+              <a:satMod val="105000"/>
+            </a:schemeClr>
+          </a:solidFill>
+          <a:prstDash val="solid"/>
+        </a:ln>
+        <a:ln w="25400" cap="flat" cmpd="sng" algn="ctr">
+          <a:solidFill>
+            <a:schemeClr val="phClr"/>
+          </a:solidFill>
+          <a:prstDash val="solid"/>
+        </a:ln>
+        <a:ln w="38100" cap="flat" cmpd="sng" algn="ctr">
+          <a:solidFill>
+            <a:schemeClr val="phClr"/>
+          </a:solidFill>
+          <a:prstDash val="solid"/>
+        </a:ln>
+      </a:lnStyleLst>
+      <a:effectStyleLst>
+        <a:effectStyle>
+          <a:effectLst>
+            <a:outerShdw blurRad="40000" dist="20000" dir="5400000" rotWithShape="0">
+              <a:srgbClr val="000000">
+                <a:alpha val="38000"/>
+              </a:srgbClr>
+            </a:outerShdw>
+          </a:effectLst>
+        </a:effectStyle>
+        <a:effectStyle>
+          <a:effectLst>
+            <a:outerShdw blurRad="40000" dist="23000" dir="5400000" rotWithShape="0">
+              <a:srgbClr val="000000">
+                <a:alpha val="35000"/>
+              </a:srgbClr>
+            </a:outerShdw>
+          </a:effectLst>
+        </a:effectStyle>
+        <a:effectStyle>
+          <a:effectLst>
+            <a:outerShdw blurRad="40000" dist="23000" dir="5400000" rotWithShape="0">
+              <a:srgbClr val="000000">
+                <a:alpha val="35000"/>
+              </a:srgbClr>
+            </a:outerShdw>
+          </a:effectLst>
+          <a:scene3d>
+            <a:camera prst="orthographicFront">
+              <a:rot lat="0" lon="0" rev="0"/>
+            </a:camera>
+            <a:lightRig rig="threePt" dir="t">
+              <a:rot lat="0" lon="0" rev="1200000"/>
+            </a:lightRig>
+          </a:scene3d>
+          <a:sp3d>
+            <a:bevelT w="63500" h="25400"/>
+          </a:sp3d>
+        </a:effectStyle>
+      </a:effectStyleLst>
+      <a:bgFillStyleLst>
+        <a:solidFill>
+          <a:schemeClr val="phClr"/>
+        </a:solidFill>
+        <a:gradFill rotWithShape="1">
+          <a:gsLst>
+            <a:gs pos="0">
+              <a:schemeClr val="phClr">
+                <a:tint val="40000"/>
+                <a:satMod val="350000"/>
+              </a:schemeClr>
+            </a:gs>
+            <a:gs pos="40000">
+              <a:schemeClr val="phClr">
+                <a:tint val="45000"/>
+                <a:shade val="99000"/>
+                <a:satMod val="350000"/>
+              </a:schemeClr>
+            </a:gs>
+            <a:gs pos="100000">
+              <a:schemeClr val="phClr">
+                <a:shade val="20000"/>
+                <a:satMod val="255000"/>
+              </a:schemeClr>
+            </a:gs>
+          </a:gsLst>
+          <a:path path="circle">
+            <a:fillToRect l="50000" t="-80000" r="50000" b="180000"/>
+          </a:path>
+        </a:gradFill>
+        <a:gradFill rotWithShape="1">
+          <a:gsLst>
+            <a:gs pos="0">
+              <a:schemeClr val="phClr">
+                <a:tint val="80000"/>
+                <a:satMod val="300000"/>
+              </a:schemeClr>
+            </a:gs>
+            <a:gs pos="100000">
+              <a:schemeClr val="phClr">
+                <a:shade val="30000"/>
+                <a:satMod val="200000"/>
+              </a:schemeClr>
+            </a:gs>
+          </a:gsLst>
+          <a:path path="circle">
+            <a:fillToRect l="50000" t="50000" r="50000" b="50000"/>
+          </a:path>
+        </a:gradFill>
+      </a:bgFillStyleLst>
+    </a:fmtScheme>
+  </a:themeElements>
+  <a:objectDefaults/>
+  <a:extraClrSchemeLst/>
+</a:theme>
+</file>
+
+<file path=ppt/theme/theme2.xml><?xml version="1.0" encoding="utf-8"?>
+<a:theme xmlns:a="http://schemas.openxmlformats.org/drawingml/2006/main">
   <a:themeElements>
     <a:clrScheme name="Default">
       <a:dk1>
@@ -16491,284 +17045,7 @@
       </a:bgFillStyleLst>
     </a:fmtScheme>
   </a:themeElements>
-</a:theme>
-</file>
-
-<file path=ppt/theme/theme2.xml><?xml version="1.0" encoding="utf-8"?>
-<a:theme xmlns:a="http://schemas.openxmlformats.org/drawingml/2006/main" xmlns:r="http://schemas.openxmlformats.org/officeDocument/2006/relationships" name="Office Theme">
-  <a:themeElements>
-    <a:clrScheme name="Office">
-      <a:dk1>
-        <a:srgbClr val="000000"/>
-      </a:dk1>
-      <a:lt1>
-        <a:srgbClr val="FFFFFF"/>
-      </a:lt1>
-      <a:dk2>
-        <a:srgbClr val="1F497D"/>
-      </a:dk2>
-      <a:lt2>
-        <a:srgbClr val="EEECE1"/>
-      </a:lt2>
-      <a:accent1>
-        <a:srgbClr val="4F81BD"/>
-      </a:accent1>
-      <a:accent2>
-        <a:srgbClr val="C0504D"/>
-      </a:accent2>
-      <a:accent3>
-        <a:srgbClr val="9BBB59"/>
-      </a:accent3>
-      <a:accent4>
-        <a:srgbClr val="8064A2"/>
-      </a:accent4>
-      <a:accent5>
-        <a:srgbClr val="4BACC6"/>
-      </a:accent5>
-      <a:accent6>
-        <a:srgbClr val="F79646"/>
-      </a:accent6>
-      <a:hlink>
-        <a:srgbClr val="0000FF"/>
-      </a:hlink>
-      <a:folHlink>
-        <a:srgbClr val="800080"/>
-      </a:folHlink>
-    </a:clrScheme>
-    <a:fontScheme name="Office">
-      <a:majorFont>
-        <a:latin typeface="Arial"/>
-        <a:ea typeface=""/>
-        <a:cs typeface=""/>
-        <a:font script="Jpan" typeface="ＭＳ Ｐゴシック"/>
-        <a:font script="Hang" typeface="맑은 고딕"/>
-        <a:font script="Hans" typeface="宋体"/>
-        <a:font script="Hant" typeface="新細明體"/>
-        <a:font script="Arab" typeface="Times New Roman"/>
-        <a:font script="Hebr" typeface="Times New Roman"/>
-        <a:font script="Thai" typeface="Angsana New"/>
-        <a:font script="Ethi" typeface="Nyala"/>
-        <a:font script="Beng" typeface="Vrinda"/>
-        <a:font script="Gujr" typeface="Shruti"/>
-        <a:font script="Khmr" typeface="MoolBoran"/>
-        <a:font script="Knda" typeface="Tunga"/>
-        <a:font script="Guru" typeface="Raavi"/>
-        <a:font script="Cans" typeface="Euphemia"/>
-        <a:font script="Cher" typeface="Plantagenet Cherokee"/>
-        <a:font script="Yiii" typeface="Microsoft Yi Baiti"/>
-        <a:font script="Tibt" typeface="Microsoft Himalaya"/>
-        <a:font script="Thaa" typeface="MV Boli"/>
-        <a:font script="Deva" typeface="Mangal"/>
-        <a:font script="Telu" typeface="Gautami"/>
-        <a:font script="Taml" typeface="Latha"/>
-        <a:font script="Syrc" typeface="Estrangelo Edessa"/>
-        <a:font script="Orya" typeface="Kalinga"/>
-        <a:font script="Mlym" typeface="Kartika"/>
-        <a:font script="Laoo" typeface="DokChampa"/>
-        <a:font script="Sinh" typeface="Iskoola Pota"/>
-        <a:font script="Mong" typeface="Mongolian Baiti"/>
-        <a:font script="Viet" typeface="Times New Roman"/>
-        <a:font script="Uigh" typeface="Microsoft Uighur"/>
-        <a:font script="Geor" typeface="Sylfaen"/>
-      </a:majorFont>
-      <a:minorFont>
-        <a:latin typeface="Arial"/>
-        <a:ea typeface=""/>
-        <a:cs typeface=""/>
-        <a:font script="Jpan" typeface="ＭＳ Ｐゴシック"/>
-        <a:font script="Hang" typeface="맑은 고딕"/>
-        <a:font script="Hans" typeface="宋体"/>
-        <a:font script="Hant" typeface="新細明體"/>
-        <a:font script="Arab" typeface="Arial"/>
-        <a:font script="Hebr" typeface="Arial"/>
-        <a:font script="Thai" typeface="Cordia New"/>
-        <a:font script="Ethi" typeface="Nyala"/>
-        <a:font script="Beng" typeface="Vrinda"/>
-        <a:font script="Gujr" typeface="Shruti"/>
-        <a:font script="Khmr" typeface="DaunPenh"/>
-        <a:font script="Knda" typeface="Tunga"/>
-        <a:font script="Guru" typeface="Raavi"/>
-        <a:font script="Cans" typeface="Euphemia"/>
-        <a:font script="Cher" typeface="Plantagenet Cherokee"/>
-        <a:font script="Yiii" typeface="Microsoft Yi Baiti"/>
-        <a:font script="Tibt" typeface="Microsoft Himalaya"/>
-        <a:font script="Thaa" typeface="MV Boli"/>
-        <a:font script="Deva" typeface="Mangal"/>
-        <a:font script="Telu" typeface="Gautami"/>
-        <a:font script="Taml" typeface="Latha"/>
-        <a:font script="Syrc" typeface="Estrangelo Edessa"/>
-        <a:font script="Orya" typeface="Kalinga"/>
-        <a:font script="Mlym" typeface="Kartika"/>
-        <a:font script="Laoo" typeface="DokChampa"/>
-        <a:font script="Sinh" typeface="Iskoola Pota"/>
-        <a:font script="Mong" typeface="Mongolian Baiti"/>
-        <a:font script="Viet" typeface="Arial"/>
-        <a:font script="Uigh" typeface="Microsoft Uighur"/>
-        <a:font script="Geor" typeface="Sylfaen"/>
-      </a:minorFont>
-    </a:fontScheme>
-    <a:fmtScheme name="Office">
-      <a:fillStyleLst>
-        <a:solidFill>
-          <a:schemeClr val="phClr"/>
-        </a:solidFill>
-        <a:gradFill rotWithShape="1">
-          <a:gsLst>
-            <a:gs pos="0">
-              <a:schemeClr val="phClr">
-                <a:tint val="50000"/>
-                <a:satMod val="300000"/>
-              </a:schemeClr>
-            </a:gs>
-            <a:gs pos="35000">
-              <a:schemeClr val="phClr">
-                <a:tint val="37000"/>
-                <a:satMod val="300000"/>
-              </a:schemeClr>
-            </a:gs>
-            <a:gs pos="100000">
-              <a:schemeClr val="phClr">
-                <a:tint val="15000"/>
-                <a:satMod val="350000"/>
-              </a:schemeClr>
-            </a:gs>
-          </a:gsLst>
-          <a:lin ang="16200000" scaled="1"/>
-        </a:gradFill>
-        <a:gradFill rotWithShape="1">
-          <a:gsLst>
-            <a:gs pos="0">
-              <a:schemeClr val="phClr">
-                <a:tint val="100000"/>
-                <a:shade val="100000"/>
-                <a:satMod val="130000"/>
-              </a:schemeClr>
-            </a:gs>
-            <a:gs pos="100000">
-              <a:schemeClr val="phClr">
-                <a:tint val="50000"/>
-                <a:shade val="100000"/>
-                <a:satMod val="350000"/>
-              </a:schemeClr>
-            </a:gs>
-          </a:gsLst>
-          <a:lin ang="16200000" scaled="0"/>
-        </a:gradFill>
-      </a:fillStyleLst>
-      <a:lnStyleLst>
-        <a:ln w="9525" cap="flat" cmpd="sng" algn="ctr">
-          <a:solidFill>
-            <a:schemeClr val="phClr">
-              <a:shade val="95000"/>
-              <a:satMod val="105000"/>
-            </a:schemeClr>
-          </a:solidFill>
-          <a:prstDash val="solid"/>
-        </a:ln>
-        <a:ln w="25400" cap="flat" cmpd="sng" algn="ctr">
-          <a:solidFill>
-            <a:schemeClr val="phClr"/>
-          </a:solidFill>
-          <a:prstDash val="solid"/>
-        </a:ln>
-        <a:ln w="38100" cap="flat" cmpd="sng" algn="ctr">
-          <a:solidFill>
-            <a:schemeClr val="phClr"/>
-          </a:solidFill>
-          <a:prstDash val="solid"/>
-        </a:ln>
-      </a:lnStyleLst>
-      <a:effectStyleLst>
-        <a:effectStyle>
-          <a:effectLst>
-            <a:outerShdw blurRad="40000" dist="20000" dir="5400000" rotWithShape="0">
-              <a:srgbClr val="000000">
-                <a:alpha val="38000"/>
-              </a:srgbClr>
-            </a:outerShdw>
-          </a:effectLst>
-        </a:effectStyle>
-        <a:effectStyle>
-          <a:effectLst>
-            <a:outerShdw blurRad="40000" dist="23000" dir="5400000" rotWithShape="0">
-              <a:srgbClr val="000000">
-                <a:alpha val="35000"/>
-              </a:srgbClr>
-            </a:outerShdw>
-          </a:effectLst>
-        </a:effectStyle>
-        <a:effectStyle>
-          <a:effectLst>
-            <a:outerShdw blurRad="40000" dist="23000" dir="5400000" rotWithShape="0">
-              <a:srgbClr val="000000">
-                <a:alpha val="35000"/>
-              </a:srgbClr>
-            </a:outerShdw>
-          </a:effectLst>
-          <a:scene3d>
-            <a:camera prst="orthographicFront">
-              <a:rot lat="0" lon="0" rev="0"/>
-            </a:camera>
-            <a:lightRig rig="threePt" dir="t">
-              <a:rot lat="0" lon="0" rev="1200000"/>
-            </a:lightRig>
-          </a:scene3d>
-          <a:sp3d>
-            <a:bevelT w="63500" h="25400"/>
-          </a:sp3d>
-        </a:effectStyle>
-      </a:effectStyleLst>
-      <a:bgFillStyleLst>
-        <a:solidFill>
-          <a:schemeClr val="phClr"/>
-        </a:solidFill>
-        <a:gradFill rotWithShape="1">
-          <a:gsLst>
-            <a:gs pos="0">
-              <a:schemeClr val="phClr">
-                <a:tint val="40000"/>
-                <a:satMod val="350000"/>
-              </a:schemeClr>
-            </a:gs>
-            <a:gs pos="40000">
-              <a:schemeClr val="phClr">
-                <a:tint val="45000"/>
-                <a:shade val="99000"/>
-                <a:satMod val="350000"/>
-              </a:schemeClr>
-            </a:gs>
-            <a:gs pos="100000">
-              <a:schemeClr val="phClr">
-                <a:shade val="20000"/>
-                <a:satMod val="255000"/>
-              </a:schemeClr>
-            </a:gs>
-          </a:gsLst>
-          <a:path path="circle">
-            <a:fillToRect l="50000" t="-80000" r="50000" b="180000"/>
-          </a:path>
-        </a:gradFill>
-        <a:gradFill rotWithShape="1">
-          <a:gsLst>
-            <a:gs pos="0">
-              <a:schemeClr val="phClr">
-                <a:tint val="80000"/>
-                <a:satMod val="300000"/>
-              </a:schemeClr>
-            </a:gs>
-            <a:gs pos="100000">
-              <a:schemeClr val="phClr">
-                <a:shade val="30000"/>
-                <a:satMod val="200000"/>
-              </a:schemeClr>
-            </a:gs>
-          </a:gsLst>
-          <a:path path="circle">
-            <a:fillToRect l="50000" t="50000" r="50000" b="50000"/>
-          </a:path>
-        </a:gradFill>
-      </a:bgFillStyleLst>
-    </a:fmtScheme>
-  </a:themeElements>
+  <a:objectDefaults/>
+  <a:extraClrSchemeLst/>
 </a:theme>
 </file>